--- a/livrables/Presentation-RESILIENCE-ALPHA.pptx
+++ b/livrables/Presentation-RESILIENCE-ALPHA.pptx
@@ -15,9 +15,10 @@
     <p:sldId id="263" r:id="rId9"/>
     <p:sldId id="264" r:id="rId10"/>
     <p:sldId id="265" r:id="rId11"/>
+    <p:sldId id="266" r:id="rId12"/>
   </p:sldIdLst>
   <p:notesMasterIdLst>
-    <p:notesMasterId r:id="rId12"/>
+    <p:notesMasterId r:id="rId13"/>
   </p:notesMasterIdLst>
   <p:sldSz cx="12192000" cy="6858000"/>
   <p:notesSz cx="6858000" cy="12192000"/>
@@ -875,6 +876,94 @@
             <a:fld id="{F7021451-1387-4CA6-816F-3879F97B5CBC}" type="slidenum">
               <a:rPr lang="en-US"/>
               <a:t>10</a:t>
+            </a:fld>
+            <a:endParaRPr lang="en-US"/>
+          </a:p>
+        </p:txBody>
+      </p:sp>
+    </p:spTree>
+    <p:extLst>
+      <p:ext uri="{BB962C8B-B14F-4D97-AF65-F5344CB8AC3E}">
+        <p14:creationId xmlns:p14="http://schemas.microsoft.com/office/powerpoint/2010/main" val="1024086991"/>
+      </p:ext>
+    </p:extLst>
+  </p:cSld>
+  <p:clrMapOvr>
+    <a:masterClrMapping/>
+  </p:clrMapOvr>
+</p:notes>
+</file>
+
+<file path=ppt/notesSlides/notesSlide11.xml><?xml version="1.0" encoding="utf-8"?>
+<p:notes xmlns:a="http://schemas.openxmlformats.org/drawingml/2006/main" xmlns:r="http://schemas.openxmlformats.org/officeDocument/2006/relationships" xmlns:p="http://schemas.openxmlformats.org/presentationml/2006/main">
+  <p:cSld>
+    <p:spTree>
+      <p:nvGrpSpPr>
+        <p:cNvPr id="1" name=""/>
+        <p:cNvGrpSpPr/>
+        <p:nvPr/>
+      </p:nvGrpSpPr>
+      <p:grpSpPr>
+        <a:xfrm>
+          <a:off x="0" y="0"/>
+          <a:ext cx="0" cy="0"/>
+          <a:chOff x="0" y="0"/>
+          <a:chExt cx="0" cy="0"/>
+        </a:xfrm>
+      </p:grpSpPr>
+      <p:sp>
+        <p:nvSpPr>
+          <p:cNvPr id="2" name="Slide Image Placeholder 1"/>
+          <p:cNvSpPr>
+            <a:spLocks noGrp="1" noRot="1" noChangeAspect="1"/>
+          </p:cNvSpPr>
+          <p:nvPr>
+            <p:ph type="sldImg"/>
+          </p:nvPr>
+        </p:nvSpPr>
+        <p:spPr/>
+      </p:sp>
+      <p:sp>
+        <p:nvSpPr>
+          <p:cNvPr id="3" name="Notes Placeholder 2"/>
+          <p:cNvSpPr>
+            <a:spLocks noGrp="1"/>
+          </p:cNvSpPr>
+          <p:nvPr>
+            <p:ph type="body" idx="1"/>
+          </p:nvPr>
+        </p:nvSpPr>
+        <p:spPr/>
+        <p:txBody>
+          <a:bodyPr/>
+          <a:lstStyle/>
+          <a:p>
+            <a:r>
+              <a:rPr lang="en-US" dirty="0"/>
+              <a:t/>
+            </a:r>
+            <a:endParaRPr lang="en-US" dirty="0"/>
+          </a:p>
+        </p:txBody>
+      </p:sp>
+      <p:sp>
+        <p:nvSpPr>
+          <p:cNvPr id="4" name="Slide Number Placeholder 3"/>
+          <p:cNvSpPr>
+            <a:spLocks noGrp="1"/>
+          </p:cNvSpPr>
+          <p:nvPr>
+            <p:ph type="sldNum" sz="quarter" idx="10"/>
+          </p:nvPr>
+        </p:nvSpPr>
+        <p:spPr/>
+        <p:txBody>
+          <a:bodyPr/>
+          <a:lstStyle/>
+          <a:p>
+            <a:fld id="{F7021451-1387-4CA6-816F-3879F97B5CBC}" type="slidenum">
+              <a:rPr lang="en-US"/>
+              <a:t>11</a:t>
             </a:fld>
             <a:endParaRPr lang="en-US"/>
           </a:p>
@@ -2159,6 +2248,479 @@
     <p:bg>
       <p:bgPr>
         <a:solidFill>
+          <a:srgbClr val="FFFFFF"/>
+        </a:solidFill>
+      </p:bgPr>
+    </p:bg>
+    <p:spTree>
+      <p:nvGrpSpPr>
+        <p:cNvPr id="1" name=""/>
+        <p:cNvGrpSpPr/>
+        <p:nvPr/>
+      </p:nvGrpSpPr>
+      <p:grpSpPr>
+        <a:xfrm>
+          <a:off x="0" y="0"/>
+          <a:ext cx="0" cy="0"/>
+          <a:chOff x="0" y="0"/>
+          <a:chExt cx="0" cy="0"/>
+        </a:xfrm>
+      </p:grpSpPr>
+      <p:sp>
+        <p:nvSpPr>
+          <p:cNvPr id="2" name="Text 0"/>
+          <p:cNvSpPr txBox="1"/>
+          <p:nvPr/>
+        </p:nvSpPr>
+        <p:spPr>
+          <a:xfrm>
+            <a:off x="548640" y="411480"/>
+            <a:ext cx="10972800" cy="274320"/>
+          </a:xfrm>
+          <a:prstGeom prst="rect">
+            <a:avLst/>
+          </a:prstGeom>
+          <a:noFill/>
+          <a:ln/>
+        </p:spPr>
+        <p:txBody>
+          <a:bodyPr wrap="square" lIns="0" tIns="0" rIns="0" bIns="0" rtlCol="0" anchor="ctr"/>
+          <a:lstStyle/>
+          <a:p>
+            <a:pPr indent="0" marL="0">
+              <a:buNone/>
+            </a:pPr>
+            <a:r>
+              <a:rPr lang="en-US" sz="1200" b="1" spc="200" kern="0" dirty="0">
+                <a:solidFill>
+                  <a:srgbClr val="4B3FA6"/>
+                </a:solidFill>
+                <a:latin typeface="Calibri" pitchFamily="34" charset="0"/>
+                <a:ea typeface="Calibri" pitchFamily="34" charset="-122"/>
+                <a:cs typeface="Calibri" pitchFamily="34" charset="-120"/>
+              </a:rPr>
+              <a:t>TRANSFORMATION</a:t>
+            </a:r>
+            <a:endParaRPr lang="en-US" sz="1200" dirty="0"/>
+          </a:p>
+        </p:txBody>
+      </p:sp>
+      <p:sp>
+        <p:nvSpPr>
+          <p:cNvPr id="3" name="Text 1"/>
+          <p:cNvSpPr txBox="1"/>
+          <p:nvPr/>
+        </p:nvSpPr>
+        <p:spPr>
+          <a:xfrm>
+            <a:off x="548640" y="658368"/>
+            <a:ext cx="11064240" cy="640080"/>
+          </a:xfrm>
+          <a:prstGeom prst="rect">
+            <a:avLst/>
+          </a:prstGeom>
+          <a:noFill/>
+          <a:ln/>
+        </p:spPr>
+        <p:txBody>
+          <a:bodyPr wrap="square" lIns="0" tIns="0" rIns="0" bIns="0" rtlCol="0" anchor="ctr"/>
+          <a:lstStyle/>
+          <a:p>
+            <a:pPr indent="0" marL="0">
+              <a:buNone/>
+            </a:pPr>
+            <a:r>
+              <a:rPr lang="en-US" sz="3000" b="1" dirty="0">
+                <a:solidFill>
+                  <a:srgbClr val="261E48"/>
+                </a:solidFill>
+                <a:latin typeface="Calibri" pitchFamily="34" charset="0"/>
+                <a:ea typeface="Calibri" pitchFamily="34" charset="-122"/>
+                <a:cs typeface="Calibri" pitchFamily="34" charset="-120"/>
+              </a:rPr>
+              <a:t>Gouvernance &amp; conformité</a:t>
+            </a:r>
+            <a:endParaRPr lang="en-US" sz="3000" dirty="0"/>
+          </a:p>
+        </p:txBody>
+      </p:sp>
+      <p:sp>
+        <p:nvSpPr>
+          <p:cNvPr id="4" name="Shape 2"/>
+          <p:cNvSpPr/>
+          <p:nvPr/>
+        </p:nvSpPr>
+        <p:spPr>
+          <a:xfrm>
+            <a:off x="548640" y="1737360"/>
+            <a:ext cx="11064240" cy="1005840"/>
+          </a:xfrm>
+          <a:prstGeom prst="roundRect">
+            <a:avLst>
+              <a:gd name="adj" fmla="val 7273"/>
+            </a:avLst>
+          </a:prstGeom>
+          <a:solidFill>
+            <a:srgbClr val="EEF0F8"/>
+          </a:solidFill>
+          <a:ln/>
+          <a:effectLst>
+            <a:outerShdw sx="100000" sy="100000" kx="0" ky="0" algn="bl" rotWithShape="0" blurRad="76200" dist="25400" dir="5400000">
+              <a:srgbClr val="888888">
+                <a:alpha val="25000"/>
+              </a:srgbClr>
+            </a:outerShdw>
+          </a:effectLst>
+        </p:spPr>
+      </p:sp>
+      <p:sp>
+        <p:nvSpPr>
+          <p:cNvPr id="5" name="Text 3"/>
+          <p:cNvSpPr txBox="1"/>
+          <p:nvPr/>
+        </p:nvSpPr>
+        <p:spPr>
+          <a:xfrm>
+            <a:off x="777240" y="1901952"/>
+            <a:ext cx="2743200" cy="640080"/>
+          </a:xfrm>
+          <a:prstGeom prst="rect">
+            <a:avLst/>
+          </a:prstGeom>
+          <a:noFill/>
+          <a:ln/>
+        </p:spPr>
+        <p:txBody>
+          <a:bodyPr wrap="square" lIns="0" tIns="0" rIns="0" bIns="0" rtlCol="0" anchor="ctr"/>
+          <a:lstStyle/>
+          <a:p>
+            <a:pPr indent="0" marL="0">
+              <a:buNone/>
+            </a:pPr>
+            <a:r>
+              <a:rPr lang="en-US" sz="1600" b="1" dirty="0">
+                <a:solidFill>
+                  <a:srgbClr val="4B3FA6"/>
+                </a:solidFill>
+                <a:latin typeface="Calibri" pitchFamily="34" charset="0"/>
+                <a:ea typeface="Calibri" pitchFamily="34" charset="-122"/>
+                <a:cs typeface="Calibri" pitchFamily="34" charset="-120"/>
+              </a:rPr>
+              <a:t>EBIOS RM</a:t>
+            </a:r>
+            <a:endParaRPr lang="en-US" sz="1600" dirty="0"/>
+          </a:p>
+        </p:txBody>
+      </p:sp>
+      <p:sp>
+        <p:nvSpPr>
+          <p:cNvPr id="6" name="Text 4"/>
+          <p:cNvSpPr txBox="1"/>
+          <p:nvPr/>
+        </p:nvSpPr>
+        <p:spPr>
+          <a:xfrm>
+            <a:off x="3566160" y="1920240"/>
+            <a:ext cx="7863840" cy="685800"/>
+          </a:xfrm>
+          <a:prstGeom prst="rect">
+            <a:avLst/>
+          </a:prstGeom>
+          <a:noFill/>
+          <a:ln/>
+        </p:spPr>
+        <p:txBody>
+          <a:bodyPr wrap="square" lIns="0" tIns="0" rIns="0" bIns="0" rtlCol="0" anchor="ctr"/>
+          <a:lstStyle/>
+          <a:p>
+            <a:pPr indent="0" marL="0">
+              <a:buNone/>
+            </a:pPr>
+            <a:r>
+              <a:rPr lang="en-US" sz="1350" dirty="0">
+                <a:solidFill>
+                  <a:srgbClr val="261E48"/>
+                </a:solidFill>
+                <a:latin typeface="Calibri" pitchFamily="34" charset="0"/>
+                <a:ea typeface="Calibri" pitchFamily="34" charset="-122"/>
+                <a:cs typeface="Calibri" pitchFamily="34" charset="-120"/>
+              </a:rPr>
+              <a:t>Risques reliés à l'architecture et aux attaques réellement testées</a:t>
+            </a:r>
+            <a:endParaRPr lang="en-US" sz="1350" dirty="0"/>
+          </a:p>
+        </p:txBody>
+      </p:sp>
+      <p:sp>
+        <p:nvSpPr>
+          <p:cNvPr id="7" name="Shape 5"/>
+          <p:cNvSpPr/>
+          <p:nvPr/>
+        </p:nvSpPr>
+        <p:spPr>
+          <a:xfrm>
+            <a:off x="548640" y="2926080"/>
+            <a:ext cx="11064240" cy="1005840"/>
+          </a:xfrm>
+          <a:prstGeom prst="roundRect">
+            <a:avLst>
+              <a:gd name="adj" fmla="val 7273"/>
+            </a:avLst>
+          </a:prstGeom>
+          <a:solidFill>
+            <a:srgbClr val="EEF0F8"/>
+          </a:solidFill>
+          <a:ln/>
+          <a:effectLst>
+            <a:outerShdw sx="100000" sy="100000" kx="0" ky="0" algn="bl" rotWithShape="0" blurRad="76200" dist="25400" dir="5400000">
+              <a:srgbClr val="888888">
+                <a:alpha val="25000"/>
+              </a:srgbClr>
+            </a:outerShdw>
+          </a:effectLst>
+        </p:spPr>
+      </p:sp>
+      <p:sp>
+        <p:nvSpPr>
+          <p:cNvPr id="8" name="Text 6"/>
+          <p:cNvSpPr txBox="1"/>
+          <p:nvPr/>
+        </p:nvSpPr>
+        <p:spPr>
+          <a:xfrm>
+            <a:off x="777240" y="3090672"/>
+            <a:ext cx="2743200" cy="640080"/>
+          </a:xfrm>
+          <a:prstGeom prst="rect">
+            <a:avLst/>
+          </a:prstGeom>
+          <a:noFill/>
+          <a:ln/>
+        </p:spPr>
+        <p:txBody>
+          <a:bodyPr wrap="square" lIns="0" tIns="0" rIns="0" bIns="0" rtlCol="0" anchor="ctr"/>
+          <a:lstStyle/>
+          <a:p>
+            <a:pPr indent="0" marL="0">
+              <a:buNone/>
+            </a:pPr>
+            <a:r>
+              <a:rPr lang="en-US" sz="1600" b="1" dirty="0">
+                <a:solidFill>
+                  <a:srgbClr val="4B3FA6"/>
+                </a:solidFill>
+                <a:latin typeface="Calibri" pitchFamily="34" charset="0"/>
+                <a:ea typeface="Calibri" pitchFamily="34" charset="-122"/>
+                <a:cs typeface="Calibri" pitchFamily="34" charset="-120"/>
+              </a:rPr>
+              <a:t>PCA / PRA</a:t>
+            </a:r>
+            <a:endParaRPr lang="en-US" sz="1600" dirty="0"/>
+          </a:p>
+        </p:txBody>
+      </p:sp>
+      <p:sp>
+        <p:nvSpPr>
+          <p:cNvPr id="9" name="Text 7"/>
+          <p:cNvSpPr txBox="1"/>
+          <p:nvPr/>
+        </p:nvSpPr>
+        <p:spPr>
+          <a:xfrm>
+            <a:off x="3566160" y="3108960"/>
+            <a:ext cx="7863840" cy="685800"/>
+          </a:xfrm>
+          <a:prstGeom prst="rect">
+            <a:avLst/>
+          </a:prstGeom>
+          <a:noFill/>
+          <a:ln/>
+        </p:spPr>
+        <p:txBody>
+          <a:bodyPr wrap="square" lIns="0" tIns="0" rIns="0" bIns="0" rtlCol="0" anchor="ctr"/>
+          <a:lstStyle/>
+          <a:p>
+            <a:pPr indent="0" marL="0">
+              <a:buNone/>
+            </a:pPr>
+            <a:r>
+              <a:rPr lang="en-US" sz="1350" dirty="0">
+                <a:solidFill>
+                  <a:srgbClr val="261E48"/>
+                </a:solidFill>
+                <a:latin typeface="Calibri" pitchFamily="34" charset="0"/>
+                <a:ea typeface="Calibri" pitchFamily="34" charset="-122"/>
+                <a:cs typeface="Calibri" pitchFamily="34" charset="-120"/>
+              </a:rPr>
+              <a:t>Services vitaux, RTO ~15 s mesuré, 2 playbooks, responsabilités</a:t>
+            </a:r>
+            <a:endParaRPr lang="en-US" sz="1350" dirty="0"/>
+          </a:p>
+        </p:txBody>
+      </p:sp>
+      <p:sp>
+        <p:nvSpPr>
+          <p:cNvPr id="10" name="Shape 8"/>
+          <p:cNvSpPr/>
+          <p:nvPr/>
+        </p:nvSpPr>
+        <p:spPr>
+          <a:xfrm>
+            <a:off x="548640" y="4114800"/>
+            <a:ext cx="11064240" cy="1005840"/>
+          </a:xfrm>
+          <a:prstGeom prst="roundRect">
+            <a:avLst>
+              <a:gd name="adj" fmla="val 7273"/>
+            </a:avLst>
+          </a:prstGeom>
+          <a:solidFill>
+            <a:srgbClr val="EEF0F8"/>
+          </a:solidFill>
+          <a:ln/>
+          <a:effectLst>
+            <a:outerShdw sx="100000" sy="100000" kx="0" ky="0" algn="bl" rotWithShape="0" blurRad="76200" dist="25400" dir="5400000">
+              <a:srgbClr val="888888">
+                <a:alpha val="25000"/>
+              </a:srgbClr>
+            </a:outerShdw>
+          </a:effectLst>
+        </p:spPr>
+      </p:sp>
+      <p:sp>
+        <p:nvSpPr>
+          <p:cNvPr id="11" name="Text 9"/>
+          <p:cNvSpPr txBox="1"/>
+          <p:nvPr/>
+        </p:nvSpPr>
+        <p:spPr>
+          <a:xfrm>
+            <a:off x="777240" y="4279392"/>
+            <a:ext cx="2743200" cy="640080"/>
+          </a:xfrm>
+          <a:prstGeom prst="rect">
+            <a:avLst/>
+          </a:prstGeom>
+          <a:noFill/>
+          <a:ln/>
+        </p:spPr>
+        <p:txBody>
+          <a:bodyPr wrap="square" lIns="0" tIns="0" rIns="0" bIns="0" rtlCol="0" anchor="ctr"/>
+          <a:lstStyle/>
+          <a:p>
+            <a:pPr indent="0" marL="0">
+              <a:buNone/>
+            </a:pPr>
+            <a:r>
+              <a:rPr lang="en-US" sz="1600" b="1" dirty="0">
+                <a:solidFill>
+                  <a:srgbClr val="4B3FA6"/>
+                </a:solidFill>
+                <a:latin typeface="Calibri" pitchFamily="34" charset="0"/>
+                <a:ea typeface="Calibri" pitchFamily="34" charset="-122"/>
+                <a:cs typeface="Calibri" pitchFamily="34" charset="-120"/>
+              </a:rPr>
+              <a:t>NIS2 / DORA</a:t>
+            </a:r>
+            <a:endParaRPr lang="en-US" sz="1600" dirty="0"/>
+          </a:p>
+        </p:txBody>
+      </p:sp>
+      <p:sp>
+        <p:nvSpPr>
+          <p:cNvPr id="12" name="Text 10"/>
+          <p:cNvSpPr txBox="1"/>
+          <p:nvPr/>
+        </p:nvSpPr>
+        <p:spPr>
+          <a:xfrm>
+            <a:off x="3566160" y="4297680"/>
+            <a:ext cx="7863840" cy="685800"/>
+          </a:xfrm>
+          <a:prstGeom prst="rect">
+            <a:avLst/>
+          </a:prstGeom>
+          <a:noFill/>
+          <a:ln/>
+        </p:spPr>
+        <p:txBody>
+          <a:bodyPr wrap="square" lIns="0" tIns="0" rIns="0" bIns="0" rtlCol="0" anchor="ctr"/>
+          <a:lstStyle/>
+          <a:p>
+            <a:pPr indent="0" marL="0">
+              <a:buNone/>
+            </a:pPr>
+            <a:r>
+              <a:rPr lang="en-US" sz="1350" dirty="0">
+                <a:solidFill>
+                  <a:srgbClr val="261E48"/>
+                </a:solidFill>
+                <a:latin typeface="Calibri" pitchFamily="34" charset="0"/>
+                <a:ea typeface="Calibri" pitchFamily="34" charset="-122"/>
+                <a:cs typeface="Calibri" pitchFamily="34" charset="-120"/>
+              </a:rPr>
+              <a:t>Exigences pertinentes vs non démontrables en 4 jours</a:t>
+            </a:r>
+            <a:endParaRPr lang="en-US" sz="1350" dirty="0"/>
+          </a:p>
+        </p:txBody>
+      </p:sp>
+      <p:sp>
+        <p:nvSpPr>
+          <p:cNvPr id="13" name="Text 11"/>
+          <p:cNvSpPr txBox="1"/>
+          <p:nvPr/>
+        </p:nvSpPr>
+        <p:spPr>
+          <a:xfrm>
+            <a:off x="548640" y="5486400"/>
+            <a:ext cx="10972800" cy="822960"/>
+          </a:xfrm>
+          <a:prstGeom prst="rect">
+            <a:avLst/>
+          </a:prstGeom>
+          <a:noFill/>
+          <a:ln/>
+        </p:spPr>
+        <p:txBody>
+          <a:bodyPr wrap="square" lIns="0" tIns="0" rIns="0" bIns="0" rtlCol="0" anchor="ctr"/>
+          <a:lstStyle/>
+          <a:p>
+            <a:pPr indent="0" marL="0">
+              <a:lnSpc>
+                <a:spcPct val="120000"/>
+              </a:lnSpc>
+              <a:buNone/>
+            </a:pPr>
+            <a:r>
+              <a:rPr lang="en-US" sz="1350" b="1" dirty="0">
+                <a:solidFill>
+                  <a:srgbClr val="261E48"/>
+                </a:solidFill>
+                <a:latin typeface="Calibri" pitchFamily="34" charset="0"/>
+                <a:ea typeface="Calibri" pitchFamily="34" charset="-122"/>
+                <a:cs typeface="Calibri" pitchFamily="34" charset="-120"/>
+              </a:rPr>
+              <a:t>Recommandations : industrialiser la reprise (HA + WAF réseau) · formaliser la notification d'incident · tests de résilience réguliers.</a:t>
+            </a:r>
+            <a:endParaRPr lang="en-US" sz="1350" dirty="0"/>
+          </a:p>
+        </p:txBody>
+      </p:sp>
+    </p:spTree>
+  </p:cSld>
+  <p:clrMapOvr>
+    <a:masterClrMapping/>
+  </p:clrMapOvr>
+</p:sld>
+</file>
+
+<file path=ppt/slides/slide11.xml><?xml version="1.0" encoding="utf-8"?>
+<p:sld xmlns:a="http://schemas.openxmlformats.org/drawingml/2006/main" xmlns:r="http://schemas.openxmlformats.org/officeDocument/2006/relationships" xmlns:p="http://schemas.openxmlformats.org/presentationml/2006/main">
+  <p:cSld name="Slide 11">
+    <p:bg>
+      <p:bgPr>
+        <a:solidFill>
           <a:srgbClr val="261E48"/>
         </a:solidFill>
       </p:bgPr>
@@ -5567,7 +6129,7 @@
                 <a:ea typeface="Calibri" pitchFamily="34" charset="-122"/>
                 <a:cs typeface="Calibri" pitchFamily="34" charset="-120"/>
               </a:rPr>
-              <a:t>CYBERSÉCURITÉ</a:t>
+              <a:t>MONTAGE 5 PC</a:t>
             </a:r>
             <a:endParaRPr lang="en-US" sz="1200" dirty="0"/>
           </a:p>
@@ -5606,7 +6168,7 @@
                 <a:ea typeface="Calibri" pitchFamily="34" charset="-122"/>
                 <a:cs typeface="Calibri" pitchFamily="34" charset="-120"/>
               </a:rPr>
-              <a:t>Défense &amp; sécurité</a:t>
+              <a:t>Haute disponibilité : le service ne tombe pas</a:t>
             </a:r>
             <a:endParaRPr lang="en-US" sz="3000" dirty="0"/>
           </a:p>
@@ -5620,12 +6182,12 @@
         </p:nvSpPr>
         <p:spPr>
           <a:xfrm>
-            <a:off x="548640" y="1737360"/>
-            <a:ext cx="3566160" cy="1828800"/>
+            <a:off x="548640" y="1645920"/>
+            <a:ext cx="5486400" cy="4114800"/>
           </a:xfrm>
           <a:prstGeom prst="roundRect">
             <a:avLst>
-              <a:gd name="adj" fmla="val 4000"/>
+              <a:gd name="adj" fmla="val 1778"/>
             </a:avLst>
           </a:prstGeom>
           <a:solidFill>
@@ -5649,34 +6211,34 @@
         </p:nvSpPr>
         <p:spPr>
           <a:xfrm>
-            <a:off x="731520" y="1920240"/>
-            <a:ext cx="914400" cy="548640"/>
-          </a:xfrm>
-          <a:prstGeom prst="rect">
-            <a:avLst/>
-          </a:prstGeom>
-          <a:noFill/>
-          <a:ln/>
-        </p:spPr>
-        <p:txBody>
-          <a:bodyPr wrap="square" lIns="0" tIns="0" rIns="0" bIns="0" rtlCol="0" anchor="ctr"/>
-          <a:lstStyle/>
-          <a:p>
-            <a:pPr indent="0" marL="0">
-              <a:buNone/>
-            </a:pPr>
-            <a:r>
-              <a:rPr lang="en-US" sz="2600" dirty="0">
-                <a:solidFill>
-                  <a:srgbClr val="000000"/>
-                </a:solidFill>
-                <a:latin typeface="Calibri" pitchFamily="34" charset="0"/>
-                <a:ea typeface="Calibri" pitchFamily="34" charset="-122"/>
-                <a:cs typeface="Calibri" pitchFamily="34" charset="-120"/>
-              </a:rPr>
-              <a:t>🛡️</a:t>
-            </a:r>
-            <a:endParaRPr lang="en-US" sz="2600" dirty="0"/>
+            <a:off x="777240" y="1810512"/>
+            <a:ext cx="5029200" cy="411480"/>
+          </a:xfrm>
+          <a:prstGeom prst="rect">
+            <a:avLst/>
+          </a:prstGeom>
+          <a:noFill/>
+          <a:ln/>
+        </p:spPr>
+        <p:txBody>
+          <a:bodyPr wrap="square" lIns="0" tIns="0" rIns="0" bIns="0" rtlCol="0" anchor="ctr"/>
+          <a:lstStyle/>
+          <a:p>
+            <a:pPr indent="0" marL="0">
+              <a:buNone/>
+            </a:pPr>
+            <a:r>
+              <a:rPr lang="en-US" sz="1500" b="1" dirty="0">
+                <a:solidFill>
+                  <a:srgbClr val="261E48"/>
+                </a:solidFill>
+                <a:latin typeface="Calibri" pitchFamily="34" charset="0"/>
+                <a:ea typeface="Calibri" pitchFamily="34" charset="-122"/>
+                <a:cs typeface="Calibri" pitchFamily="34" charset="-120"/>
+              </a:rPr>
+              <a:t>🖥️ Topologie</a:t>
+            </a:r>
+            <a:endParaRPr lang="en-US" sz="1500" dirty="0"/>
           </a:p>
         </p:txBody>
       </p:sp>
@@ -5688,24 +6250,27 @@
         </p:nvSpPr>
         <p:spPr>
           <a:xfrm>
-            <a:off x="731520" y="2514600"/>
-            <a:ext cx="3200400" cy="365760"/>
-          </a:xfrm>
-          <a:prstGeom prst="rect">
-            <a:avLst/>
-          </a:prstGeom>
-          <a:noFill/>
-          <a:ln/>
-        </p:spPr>
-        <p:txBody>
-          <a:bodyPr wrap="square" lIns="0" tIns="0" rIns="0" bIns="0" rtlCol="0" anchor="ctr"/>
-          <a:lstStyle/>
-          <a:p>
-            <a:pPr indent="0" marL="0">
-              <a:buNone/>
-            </a:pPr>
-            <a:r>
-              <a:rPr lang="en-US" sz="1500" b="1" dirty="0">
+            <a:off x="777240" y="2286000"/>
+            <a:ext cx="5074920" cy="3291840"/>
+          </a:xfrm>
+          <a:prstGeom prst="rect">
+            <a:avLst/>
+          </a:prstGeom>
+          <a:noFill/>
+          <a:ln/>
+        </p:spPr>
+        <p:txBody>
+          <a:bodyPr wrap="square" lIns="0" tIns="0" rIns="0" bIns="0" rtlCol="0" anchor="ctr"/>
+          <a:lstStyle/>
+          <a:p>
+            <a:pPr indent="0" marL="0">
+              <a:lnSpc>
+                <a:spcPct val="125000"/>
+              </a:lnSpc>
+              <a:buNone/>
+            </a:pPr>
+            <a:r>
+              <a:rPr lang="en-US" sz="1350" dirty="0">
                 <a:solidFill>
                   <a:srgbClr val="261E48"/>
                 </a:solidFill>
@@ -5713,69 +6278,130 @@
                 <a:ea typeface="Calibri" pitchFamily="34" charset="-122"/>
                 <a:cs typeface="Calibri" pitchFamily="34" charset="-120"/>
               </a:rPr>
-              <a:t>WAF applicatif</a:t>
-            </a:r>
-            <a:endParaRPr lang="en-US" sz="1500" dirty="0"/>
-          </a:p>
-        </p:txBody>
-      </p:sp>
-      <p:sp>
-        <p:nvSpPr>
-          <p:cNvPr id="7" name="Text 5"/>
-          <p:cNvSpPr txBox="1"/>
-          <p:nvPr/>
-        </p:nvSpPr>
-        <p:spPr>
-          <a:xfrm>
-            <a:off x="731520" y="2880360"/>
-            <a:ext cx="3200400" cy="594360"/>
-          </a:xfrm>
-          <a:prstGeom prst="rect">
-            <a:avLst/>
-          </a:prstGeom>
-          <a:noFill/>
-          <a:ln/>
-        </p:spPr>
-        <p:txBody>
-          <a:bodyPr wrap="square" lIns="0" tIns="0" rIns="0" bIns="0" rtlCol="0" anchor="ctr"/>
-          <a:lstStyle/>
-          <a:p>
-            <a:pPr indent="0" marL="0">
-              <a:buNone/>
-            </a:pPr>
-            <a:r>
-              <a:rPr lang="en-US" sz="1200" dirty="0">
-                <a:solidFill>
-                  <a:srgbClr val="6A6594"/>
-                </a:solidFill>
-                <a:latin typeface="Calibri" pitchFamily="34" charset="0"/>
-                <a:ea typeface="Calibri" pitchFamily="34" charset="-122"/>
-                <a:cs typeface="Calibri" pitchFamily="34" charset="-120"/>
-              </a:rPr>
-              <a:t>SQLi/XSS bloqués (403) + métrique + log</a:t>
-            </a:r>
-            <a:endParaRPr lang="en-US" sz="1200" dirty="0"/>
-          </a:p>
-        </p:txBody>
-      </p:sp>
-      <p:sp>
-        <p:nvSpPr>
-          <p:cNvPr id="8" name="Shape 6"/>
+              <a:t>• HOST-PRINCIPAL : serveur + cockpit</a:t>
+            </a:r>
+            <a:endParaRPr lang="en-US" sz="1350" dirty="0"/>
+          </a:p>
+          <a:p>
+            <a:pPr indent="0" marL="0">
+              <a:lnSpc>
+                <a:spcPct val="125000"/>
+              </a:lnSpc>
+              <a:buNone/>
+            </a:pPr>
+            <a:r>
+              <a:rPr lang="en-US" sz="1350" dirty="0">
+                <a:solidFill>
+                  <a:srgbClr val="261E48"/>
+                </a:solidFill>
+                <a:latin typeface="Calibri" pitchFamily="34" charset="0"/>
+                <a:ea typeface="Calibri" pitchFamily="34" charset="-122"/>
+                <a:cs typeface="Calibri" pitchFamily="34" charset="-120"/>
+              </a:rPr>
+              <a:t>• HOST-BACKUP : réplique le principal</a:t>
+            </a:r>
+            <a:endParaRPr lang="en-US" sz="1350" dirty="0"/>
+          </a:p>
+          <a:p>
+            <a:pPr indent="0" marL="0">
+              <a:lnSpc>
+                <a:spcPct val="125000"/>
+              </a:lnSpc>
+              <a:buNone/>
+            </a:pPr>
+            <a:r>
+              <a:rPr lang="en-US" sz="1350" dirty="0">
+                <a:solidFill>
+                  <a:srgbClr val="261E48"/>
+                </a:solidFill>
+                <a:latin typeface="Calibri" pitchFamily="34" charset="0"/>
+                <a:ea typeface="Calibri" pitchFamily="34" charset="-122"/>
+                <a:cs typeface="Calibri" pitchFamily="34" charset="-120"/>
+              </a:rPr>
+              <a:t>  (comptes + clés d'idempotence)</a:t>
+            </a:r>
+            <a:endParaRPr lang="en-US" sz="1350" dirty="0"/>
+          </a:p>
+          <a:p>
+            <a:pPr indent="0" marL="0">
+              <a:lnSpc>
+                <a:spcPct val="125000"/>
+              </a:lnSpc>
+              <a:buNone/>
+            </a:pPr>
+            <a:r>
+              <a:rPr lang="en-US" sz="1350" dirty="0">
+                <a:solidFill>
+                  <a:srgbClr val="261E48"/>
+                </a:solidFill>
+                <a:latin typeface="Calibri" pitchFamily="34" charset="0"/>
+                <a:ea typeface="Calibri" pitchFamily="34" charset="-122"/>
+                <a:cs typeface="Calibri" pitchFamily="34" charset="-120"/>
+              </a:rPr>
+              <a:t>• CLIENT-A / CLIENT-B : app de paiement</a:t>
+            </a:r>
+            <a:endParaRPr lang="en-US" sz="1350" dirty="0"/>
+          </a:p>
+          <a:p>
+            <a:pPr indent="0" marL="0">
+              <a:lnSpc>
+                <a:spcPct val="125000"/>
+              </a:lnSpc>
+              <a:buNone/>
+            </a:pPr>
+            <a:r>
+              <a:rPr lang="en-US" sz="1350" dirty="0">
+                <a:solidFill>
+                  <a:srgbClr val="261E48"/>
+                </a:solidFill>
+                <a:latin typeface="Calibri" pitchFamily="34" charset="0"/>
+                <a:ea typeface="Calibri" pitchFamily="34" charset="-122"/>
+                <a:cs typeface="Calibri" pitchFamily="34" charset="-120"/>
+              </a:rPr>
+              <a:t>  (login + recherche + transfert)</a:t>
+            </a:r>
+            <a:endParaRPr lang="en-US" sz="1350" dirty="0"/>
+          </a:p>
+          <a:p>
+            <a:pPr indent="0" marL="0">
+              <a:lnSpc>
+                <a:spcPct val="125000"/>
+              </a:lnSpc>
+              <a:buNone/>
+            </a:pPr>
+            <a:r>
+              <a:rPr lang="en-US" sz="1350" dirty="0">
+                <a:solidFill>
+                  <a:srgbClr val="261E48"/>
+                </a:solidFill>
+                <a:latin typeface="Calibri" pitchFamily="34" charset="0"/>
+                <a:ea typeface="Calibri" pitchFamily="34" charset="-122"/>
+                <a:cs typeface="Calibri" pitchFamily="34" charset="-120"/>
+              </a:rPr>
+              <a:t>• ATTAQUANT : vise le principal</a:t>
+            </a:r>
+            <a:endParaRPr lang="en-US" sz="1350" dirty="0"/>
+          </a:p>
+        </p:txBody>
+      </p:sp>
+      <p:sp>
+        <p:nvSpPr>
+          <p:cNvPr id="7" name="Shape 5"/>
           <p:cNvSpPr/>
           <p:nvPr/>
         </p:nvSpPr>
         <p:spPr>
           <a:xfrm>
-            <a:off x="4297680" y="1737360"/>
-            <a:ext cx="3566160" cy="1828800"/>
+            <a:off x="6217920" y="1645920"/>
+            <a:ext cx="5394960" cy="4114800"/>
           </a:xfrm>
           <a:prstGeom prst="roundRect">
             <a:avLst>
-              <a:gd name="adj" fmla="val 4000"/>
+              <a:gd name="adj" fmla="val 1778"/>
             </a:avLst>
           </a:prstGeom>
           <a:solidFill>
-            <a:srgbClr val="EEF0F8"/>
+            <a:srgbClr val="E3F3EC"/>
           </a:solidFill>
           <a:ln/>
           <a:effectLst>
@@ -5789,40 +6415,162 @@
       </p:sp>
       <p:sp>
         <p:nvSpPr>
+          <p:cNvPr id="8" name="Text 6"/>
+          <p:cNvSpPr txBox="1"/>
+          <p:nvPr/>
+        </p:nvSpPr>
+        <p:spPr>
+          <a:xfrm>
+            <a:off x="6446520" y="1810512"/>
+            <a:ext cx="4937760" cy="411480"/>
+          </a:xfrm>
+          <a:prstGeom prst="rect">
+            <a:avLst/>
+          </a:prstGeom>
+          <a:noFill/>
+          <a:ln/>
+        </p:spPr>
+        <p:txBody>
+          <a:bodyPr wrap="square" lIns="0" tIns="0" rIns="0" bIns="0" rtlCol="0" anchor="ctr"/>
+          <a:lstStyle/>
+          <a:p>
+            <a:pPr indent="0" marL="0">
+              <a:buNone/>
+            </a:pPr>
+            <a:r>
+              <a:rPr lang="en-US" sz="1500" b="1" dirty="0">
+                <a:solidFill>
+                  <a:srgbClr val="1E8E6A"/>
+                </a:solidFill>
+                <a:latin typeface="Calibri" pitchFamily="34" charset="0"/>
+                <a:ea typeface="Calibri" pitchFamily="34" charset="-122"/>
+                <a:cs typeface="Calibri" pitchFamily="34" charset="-120"/>
+              </a:rPr>
+              <a:t>🔁 Bascule &amp; reprise</a:t>
+            </a:r>
+            <a:endParaRPr lang="en-US" sz="1500" dirty="0"/>
+          </a:p>
+        </p:txBody>
+      </p:sp>
+      <p:sp>
+        <p:nvSpPr>
           <p:cNvPr id="9" name="Text 7"/>
           <p:cNvSpPr txBox="1"/>
           <p:nvPr/>
         </p:nvSpPr>
         <p:spPr>
           <a:xfrm>
-            <a:off x="4480560" y="1920240"/>
-            <a:ext cx="914400" cy="548640"/>
-          </a:xfrm>
-          <a:prstGeom prst="rect">
-            <a:avLst/>
-          </a:prstGeom>
-          <a:noFill/>
-          <a:ln/>
-        </p:spPr>
-        <p:txBody>
-          <a:bodyPr wrap="square" lIns="0" tIns="0" rIns="0" bIns="0" rtlCol="0" anchor="ctr"/>
-          <a:lstStyle/>
-          <a:p>
-            <a:pPr indent="0" marL="0">
-              <a:buNone/>
-            </a:pPr>
-            <a:r>
-              <a:rPr lang="en-US" sz="2600" dirty="0">
-                <a:solidFill>
-                  <a:srgbClr val="000000"/>
-                </a:solidFill>
-                <a:latin typeface="Calibri" pitchFamily="34" charset="0"/>
-                <a:ea typeface="Calibri" pitchFamily="34" charset="-122"/>
-                <a:cs typeface="Calibri" pitchFamily="34" charset="-120"/>
-              </a:rPr>
-              <a:t>📊</a:t>
-            </a:r>
-            <a:endParaRPr lang="en-US" sz="2600" dirty="0"/>
+            <a:off x="6446520" y="2286000"/>
+            <a:ext cx="4983480" cy="2743200"/>
+          </a:xfrm>
+          <a:prstGeom prst="rect">
+            <a:avLst/>
+          </a:prstGeom>
+          <a:noFill/>
+          <a:ln/>
+        </p:spPr>
+        <p:txBody>
+          <a:bodyPr wrap="square" lIns="0" tIns="0" rIns="0" bIns="0" rtlCol="0" anchor="ctr"/>
+          <a:lstStyle/>
+          <a:p>
+            <a:pPr indent="0" marL="0">
+              <a:lnSpc>
+                <a:spcPct val="130000"/>
+              </a:lnSpc>
+              <a:buNone/>
+            </a:pPr>
+            <a:r>
+              <a:rPr lang="en-US" sz="1350" dirty="0">
+                <a:solidFill>
+                  <a:srgbClr val="261E48"/>
+                </a:solidFill>
+                <a:latin typeface="Calibri" pitchFamily="34" charset="0"/>
+                <a:ea typeface="Calibri" pitchFamily="34" charset="-122"/>
+                <a:cs typeface="Calibri" pitchFamily="34" charset="-120"/>
+              </a:rPr>
+              <a:t>1. Le serveur principal tombe</a:t>
+            </a:r>
+            <a:endParaRPr lang="en-US" sz="1350" dirty="0"/>
+          </a:p>
+          <a:p>
+            <a:pPr indent="0" marL="0">
+              <a:lnSpc>
+                <a:spcPct val="130000"/>
+              </a:lnSpc>
+              <a:buNone/>
+            </a:pPr>
+            <a:r>
+              <a:rPr lang="en-US" sz="1350" dirty="0">
+                <a:solidFill>
+                  <a:srgbClr val="261E48"/>
+                </a:solidFill>
+                <a:latin typeface="Calibri" pitchFamily="34" charset="0"/>
+                <a:ea typeface="Calibri" pitchFamily="34" charset="-122"/>
+                <a:cs typeface="Calibri" pitchFamily="34" charset="-120"/>
+              </a:rPr>
+              <a:t>2. Le client bascule AUTOMATIQUEMENT sur le backup</a:t>
+            </a:r>
+            <a:endParaRPr lang="en-US" sz="1350" dirty="0"/>
+          </a:p>
+          <a:p>
+            <a:pPr indent="0" marL="0">
+              <a:lnSpc>
+                <a:spcPct val="130000"/>
+              </a:lnSpc>
+              <a:buNone/>
+            </a:pPr>
+            <a:r>
+              <a:rPr lang="en-US" sz="1350" dirty="0">
+                <a:solidFill>
+                  <a:srgbClr val="261E48"/>
+                </a:solidFill>
+                <a:latin typeface="Calibri" pitchFamily="34" charset="0"/>
+                <a:ea typeface="Calibri" pitchFamily="34" charset="-122"/>
+                <a:cs typeface="Calibri" pitchFamily="34" charset="-120"/>
+              </a:rPr>
+              <a:t>3. La transaction en cours est REPRISE</a:t>
+            </a:r>
+            <a:endParaRPr lang="en-US" sz="1350" dirty="0"/>
+          </a:p>
+          <a:p>
+            <a:pPr indent="0" marL="0">
+              <a:lnSpc>
+                <a:spcPct val="130000"/>
+              </a:lnSpc>
+              <a:buNone/>
+            </a:pPr>
+            <a:r>
+              <a:rPr lang="en-US" sz="1350" dirty="0">
+                <a:solidFill>
+                  <a:srgbClr val="261E48"/>
+                </a:solidFill>
+                <a:latin typeface="Calibri" pitchFamily="34" charset="0"/>
+                <a:ea typeface="Calibri" pitchFamily="34" charset="-122"/>
+                <a:cs typeface="Calibri" pitchFamily="34" charset="-120"/>
+              </a:rPr>
+              <a:t>   (clé d'idempotence) — sans double débit</a:t>
+            </a:r>
+            <a:endParaRPr lang="en-US" sz="1350" dirty="0"/>
+          </a:p>
+          <a:p>
+            <a:pPr indent="0" marL="0">
+              <a:lnSpc>
+                <a:spcPct val="130000"/>
+              </a:lnSpc>
+              <a:buNone/>
+            </a:pPr>
+            <a:r>
+              <a:rPr lang="en-US" sz="1350" dirty="0">
+                <a:solidFill>
+                  <a:srgbClr val="261E48"/>
+                </a:solidFill>
+                <a:latin typeface="Calibri" pitchFamily="34" charset="0"/>
+                <a:ea typeface="Calibri" pitchFamily="34" charset="-122"/>
+                <a:cs typeface="Calibri" pitchFamily="34" charset="-120"/>
+              </a:rPr>
+              <a:t>4. Service maintenu, zéro intervention</a:t>
+            </a:r>
+            <a:endParaRPr lang="en-US" sz="1350" dirty="0"/>
           </a:p>
         </p:txBody>
       </p:sp>
@@ -5834,8 +6582,8 @@
         </p:nvSpPr>
         <p:spPr>
           <a:xfrm>
-            <a:off x="4480560" y="2514600"/>
-            <a:ext cx="3200400" cy="365760"/>
+            <a:off x="6446520" y="5212080"/>
+            <a:ext cx="4937760" cy="457200"/>
           </a:xfrm>
           <a:prstGeom prst="rect">
             <a:avLst/>
@@ -5853,638 +6601,15 @@
             <a:r>
               <a:rPr lang="en-US" sz="1500" b="1" dirty="0">
                 <a:solidFill>
-                  <a:srgbClr val="261E48"/>
-                </a:solidFill>
-                <a:latin typeface="Calibri" pitchFamily="34" charset="0"/>
-                <a:ea typeface="Calibri" pitchFamily="34" charset="-122"/>
-                <a:cs typeface="Calibri" pitchFamily="34" charset="-120"/>
-              </a:rPr>
-              <a:t>Fonction SOC</a:t>
+                  <a:srgbClr val="1E8E6A"/>
+                </a:solidFill>
+                <a:latin typeface="Calibri" pitchFamily="34" charset="0"/>
+                <a:ea typeface="Calibri" pitchFamily="34" charset="-122"/>
+                <a:cs typeface="Calibri" pitchFamily="34" charset="-120"/>
+              </a:rPr>
+              <a:t>Recette failover : 13 / 13 ✓</a:t>
             </a:r>
             <a:endParaRPr lang="en-US" sz="1500" dirty="0"/>
-          </a:p>
-        </p:txBody>
-      </p:sp>
-      <p:sp>
-        <p:nvSpPr>
-          <p:cNvPr id="11" name="Text 9"/>
-          <p:cNvSpPr txBox="1"/>
-          <p:nvPr/>
-        </p:nvSpPr>
-        <p:spPr>
-          <a:xfrm>
-            <a:off x="4480560" y="2880360"/>
-            <a:ext cx="3200400" cy="594360"/>
-          </a:xfrm>
-          <a:prstGeom prst="rect">
-            <a:avLst/>
-          </a:prstGeom>
-          <a:noFill/>
-          <a:ln/>
-        </p:spPr>
-        <p:txBody>
-          <a:bodyPr wrap="square" lIns="0" tIns="0" rIns="0" bIns="0" rtlCol="0" anchor="ctr"/>
-          <a:lstStyle/>
-          <a:p>
-            <a:pPr indent="0" marL="0">
-              <a:buNone/>
-            </a:pPr>
-            <a:r>
-              <a:rPr lang="en-US" sz="1200" dirty="0">
-                <a:solidFill>
-                  <a:srgbClr val="6A6594"/>
-                </a:solidFill>
-                <a:latin typeface="Calibri" pitchFamily="34" charset="0"/>
-                <a:ea typeface="Calibri" pitchFamily="34" charset="-122"/>
-                <a:cs typeface="Calibri" pitchFamily="34" charset="-120"/>
-              </a:rPr>
-              <a:t>Loki + Prometheus + vue SOC du cockpit</a:t>
-            </a:r>
-            <a:endParaRPr lang="en-US" sz="1200" dirty="0"/>
-          </a:p>
-        </p:txBody>
-      </p:sp>
-      <p:sp>
-        <p:nvSpPr>
-          <p:cNvPr id="12" name="Shape 10"/>
-          <p:cNvSpPr/>
-          <p:nvPr/>
-        </p:nvSpPr>
-        <p:spPr>
-          <a:xfrm>
-            <a:off x="8046720" y="1737360"/>
-            <a:ext cx="3566160" cy="1828800"/>
-          </a:xfrm>
-          <a:prstGeom prst="roundRect">
-            <a:avLst>
-              <a:gd name="adj" fmla="val 4000"/>
-            </a:avLst>
-          </a:prstGeom>
-          <a:solidFill>
-            <a:srgbClr val="EEF0F8"/>
-          </a:solidFill>
-          <a:ln/>
-          <a:effectLst>
-            <a:outerShdw sx="100000" sy="100000" kx="0" ky="0" algn="bl" rotWithShape="0" blurRad="76200" dist="25400" dir="5400000">
-              <a:srgbClr val="888888">
-                <a:alpha val="25000"/>
-              </a:srgbClr>
-            </a:outerShdw>
-          </a:effectLst>
-        </p:spPr>
-      </p:sp>
-      <p:sp>
-        <p:nvSpPr>
-          <p:cNvPr id="13" name="Text 11"/>
-          <p:cNvSpPr txBox="1"/>
-          <p:nvPr/>
-        </p:nvSpPr>
-        <p:spPr>
-          <a:xfrm>
-            <a:off x="8229600" y="1920240"/>
-            <a:ext cx="914400" cy="548640"/>
-          </a:xfrm>
-          <a:prstGeom prst="rect">
-            <a:avLst/>
-          </a:prstGeom>
-          <a:noFill/>
-          <a:ln/>
-        </p:spPr>
-        <p:txBody>
-          <a:bodyPr wrap="square" lIns="0" tIns="0" rIns="0" bIns="0" rtlCol="0" anchor="ctr"/>
-          <a:lstStyle/>
-          <a:p>
-            <a:pPr indent="0" marL="0">
-              <a:buNone/>
-            </a:pPr>
-            <a:r>
-              <a:rPr lang="en-US" sz="2600" dirty="0">
-                <a:solidFill>
-                  <a:srgbClr val="000000"/>
-                </a:solidFill>
-                <a:latin typeface="Calibri" pitchFamily="34" charset="0"/>
-                <a:ea typeface="Calibri" pitchFamily="34" charset="-122"/>
-                <a:cs typeface="Calibri" pitchFamily="34" charset="-120"/>
-              </a:rPr>
-              <a:t>🔑</a:t>
-            </a:r>
-            <a:endParaRPr lang="en-US" sz="2600" dirty="0"/>
-          </a:p>
-        </p:txBody>
-      </p:sp>
-      <p:sp>
-        <p:nvSpPr>
-          <p:cNvPr id="14" name="Text 12"/>
-          <p:cNvSpPr txBox="1"/>
-          <p:nvPr/>
-        </p:nvSpPr>
-        <p:spPr>
-          <a:xfrm>
-            <a:off x="8229600" y="2514600"/>
-            <a:ext cx="3200400" cy="365760"/>
-          </a:xfrm>
-          <a:prstGeom prst="rect">
-            <a:avLst/>
-          </a:prstGeom>
-          <a:noFill/>
-          <a:ln/>
-        </p:spPr>
-        <p:txBody>
-          <a:bodyPr wrap="square" lIns="0" tIns="0" rIns="0" bIns="0" rtlCol="0" anchor="ctr"/>
-          <a:lstStyle/>
-          <a:p>
-            <a:pPr indent="0" marL="0">
-              <a:buNone/>
-            </a:pPr>
-            <a:r>
-              <a:rPr lang="en-US" sz="1500" b="1" dirty="0">
-                <a:solidFill>
-                  <a:srgbClr val="261E48"/>
-                </a:solidFill>
-                <a:latin typeface="Calibri" pitchFamily="34" charset="0"/>
-                <a:ea typeface="Calibri" pitchFamily="34" charset="-122"/>
-                <a:cs typeface="Calibri" pitchFamily="34" charset="-120"/>
-              </a:rPr>
-              <a:t>Secrets</a:t>
-            </a:r>
-            <a:endParaRPr lang="en-US" sz="1500" dirty="0"/>
-          </a:p>
-        </p:txBody>
-      </p:sp>
-      <p:sp>
-        <p:nvSpPr>
-          <p:cNvPr id="15" name="Text 13"/>
-          <p:cNvSpPr txBox="1"/>
-          <p:nvPr/>
-        </p:nvSpPr>
-        <p:spPr>
-          <a:xfrm>
-            <a:off x="8229600" y="2880360"/>
-            <a:ext cx="3200400" cy="594360"/>
-          </a:xfrm>
-          <a:prstGeom prst="rect">
-            <a:avLst/>
-          </a:prstGeom>
-          <a:noFill/>
-          <a:ln/>
-        </p:spPr>
-        <p:txBody>
-          <a:bodyPr wrap="square" lIns="0" tIns="0" rIns="0" bIns="0" rtlCol="0" anchor="ctr"/>
-          <a:lstStyle/>
-          <a:p>
-            <a:pPr indent="0" marL="0">
-              <a:buNone/>
-            </a:pPr>
-            <a:r>
-              <a:rPr lang="en-US" sz="1200" dirty="0">
-                <a:solidFill>
-                  <a:srgbClr val="6A6594"/>
-                </a:solidFill>
-                <a:latin typeface="Calibri" pitchFamily="34" charset="0"/>
-                <a:ea typeface="Calibri" pitchFamily="34" charset="-122"/>
-                <a:cs typeface="Calibri" pitchFamily="34" charset="-120"/>
-              </a:rPr>
-              <a:t>chiffrés (SOPS + age), rien en clair</a:t>
-            </a:r>
-            <a:endParaRPr lang="en-US" sz="1200" dirty="0"/>
-          </a:p>
-        </p:txBody>
-      </p:sp>
-      <p:sp>
-        <p:nvSpPr>
-          <p:cNvPr id="16" name="Shape 14"/>
-          <p:cNvSpPr/>
-          <p:nvPr/>
-        </p:nvSpPr>
-        <p:spPr>
-          <a:xfrm>
-            <a:off x="548640" y="3840480"/>
-            <a:ext cx="3566160" cy="1828800"/>
-          </a:xfrm>
-          <a:prstGeom prst="roundRect">
-            <a:avLst>
-              <a:gd name="adj" fmla="val 4000"/>
-            </a:avLst>
-          </a:prstGeom>
-          <a:solidFill>
-            <a:srgbClr val="EEF0F8"/>
-          </a:solidFill>
-          <a:ln/>
-          <a:effectLst>
-            <a:outerShdw sx="100000" sy="100000" kx="0" ky="0" algn="bl" rotWithShape="0" blurRad="76200" dist="25400" dir="5400000">
-              <a:srgbClr val="888888">
-                <a:alpha val="25000"/>
-              </a:srgbClr>
-            </a:outerShdw>
-          </a:effectLst>
-        </p:spPr>
-      </p:sp>
-      <p:sp>
-        <p:nvSpPr>
-          <p:cNvPr id="17" name="Text 15"/>
-          <p:cNvSpPr txBox="1"/>
-          <p:nvPr/>
-        </p:nvSpPr>
-        <p:spPr>
-          <a:xfrm>
-            <a:off x="731520" y="4023360"/>
-            <a:ext cx="914400" cy="548640"/>
-          </a:xfrm>
-          <a:prstGeom prst="rect">
-            <a:avLst/>
-          </a:prstGeom>
-          <a:noFill/>
-          <a:ln/>
-        </p:spPr>
-        <p:txBody>
-          <a:bodyPr wrap="square" lIns="0" tIns="0" rIns="0" bIns="0" rtlCol="0" anchor="ctr"/>
-          <a:lstStyle/>
-          <a:p>
-            <a:pPr indent="0" marL="0">
-              <a:buNone/>
-            </a:pPr>
-            <a:r>
-              <a:rPr lang="en-US" sz="2600" dirty="0">
-                <a:solidFill>
-                  <a:srgbClr val="000000"/>
-                </a:solidFill>
-                <a:latin typeface="Calibri" pitchFamily="34" charset="0"/>
-                <a:ea typeface="Calibri" pitchFamily="34" charset="-122"/>
-                <a:cs typeface="Calibri" pitchFamily="34" charset="-120"/>
-              </a:rPr>
-              <a:t>🔒</a:t>
-            </a:r>
-            <a:endParaRPr lang="en-US" sz="2600" dirty="0"/>
-          </a:p>
-        </p:txBody>
-      </p:sp>
-      <p:sp>
-        <p:nvSpPr>
-          <p:cNvPr id="18" name="Text 16"/>
-          <p:cNvSpPr txBox="1"/>
-          <p:nvPr/>
-        </p:nvSpPr>
-        <p:spPr>
-          <a:xfrm>
-            <a:off x="731520" y="4617720"/>
-            <a:ext cx="3200400" cy="365760"/>
-          </a:xfrm>
-          <a:prstGeom prst="rect">
-            <a:avLst/>
-          </a:prstGeom>
-          <a:noFill/>
-          <a:ln/>
-        </p:spPr>
-        <p:txBody>
-          <a:bodyPr wrap="square" lIns="0" tIns="0" rIns="0" bIns="0" rtlCol="0" anchor="ctr"/>
-          <a:lstStyle/>
-          <a:p>
-            <a:pPr indent="0" marL="0">
-              <a:buNone/>
-            </a:pPr>
-            <a:r>
-              <a:rPr lang="en-US" sz="1500" b="1" dirty="0">
-                <a:solidFill>
-                  <a:srgbClr val="261E48"/>
-                </a:solidFill>
-                <a:latin typeface="Calibri" pitchFamily="34" charset="0"/>
-                <a:ea typeface="Calibri" pitchFamily="34" charset="-122"/>
-                <a:cs typeface="Calibri" pitchFamily="34" charset="-120"/>
-              </a:rPr>
-              <a:t>Durcissement</a:t>
-            </a:r>
-            <a:endParaRPr lang="en-US" sz="1500" dirty="0"/>
-          </a:p>
-        </p:txBody>
-      </p:sp>
-      <p:sp>
-        <p:nvSpPr>
-          <p:cNvPr id="19" name="Text 17"/>
-          <p:cNvSpPr txBox="1"/>
-          <p:nvPr/>
-        </p:nvSpPr>
-        <p:spPr>
-          <a:xfrm>
-            <a:off x="731520" y="4983480"/>
-            <a:ext cx="3200400" cy="594360"/>
-          </a:xfrm>
-          <a:prstGeom prst="rect">
-            <a:avLst/>
-          </a:prstGeom>
-          <a:noFill/>
-          <a:ln/>
-        </p:spPr>
-        <p:txBody>
-          <a:bodyPr wrap="square" lIns="0" tIns="0" rIns="0" bIns="0" rtlCol="0" anchor="ctr"/>
-          <a:lstStyle/>
-          <a:p>
-            <a:pPr indent="0" marL="0">
-              <a:buNone/>
-            </a:pPr>
-            <a:r>
-              <a:rPr lang="en-US" sz="1200" dirty="0">
-                <a:solidFill>
-                  <a:srgbClr val="6A6594"/>
-                </a:solidFill>
-                <a:latin typeface="Calibri" pitchFamily="34" charset="0"/>
-                <a:ea typeface="Calibri" pitchFamily="34" charset="-122"/>
-                <a:cs typeface="Calibri" pitchFamily="34" charset="-120"/>
-              </a:rPr>
-              <a:t>no-new-privileges, base non exposée</a:t>
-            </a:r>
-            <a:endParaRPr lang="en-US" sz="1200" dirty="0"/>
-          </a:p>
-        </p:txBody>
-      </p:sp>
-      <p:sp>
-        <p:nvSpPr>
-          <p:cNvPr id="20" name="Shape 18"/>
-          <p:cNvSpPr/>
-          <p:nvPr/>
-        </p:nvSpPr>
-        <p:spPr>
-          <a:xfrm>
-            <a:off x="4297680" y="3840480"/>
-            <a:ext cx="3566160" cy="1828800"/>
-          </a:xfrm>
-          <a:prstGeom prst="roundRect">
-            <a:avLst>
-              <a:gd name="adj" fmla="val 4000"/>
-            </a:avLst>
-          </a:prstGeom>
-          <a:solidFill>
-            <a:srgbClr val="EEF0F8"/>
-          </a:solidFill>
-          <a:ln/>
-          <a:effectLst>
-            <a:outerShdw sx="100000" sy="100000" kx="0" ky="0" algn="bl" rotWithShape="0" blurRad="76200" dist="25400" dir="5400000">
-              <a:srgbClr val="888888">
-                <a:alpha val="25000"/>
-              </a:srgbClr>
-            </a:outerShdw>
-          </a:effectLst>
-        </p:spPr>
-      </p:sp>
-      <p:sp>
-        <p:nvSpPr>
-          <p:cNvPr id="21" name="Text 19"/>
-          <p:cNvSpPr txBox="1"/>
-          <p:nvPr/>
-        </p:nvSpPr>
-        <p:spPr>
-          <a:xfrm>
-            <a:off x="4480560" y="4023360"/>
-            <a:ext cx="914400" cy="548640"/>
-          </a:xfrm>
-          <a:prstGeom prst="rect">
-            <a:avLst/>
-          </a:prstGeom>
-          <a:noFill/>
-          <a:ln/>
-        </p:spPr>
-        <p:txBody>
-          <a:bodyPr wrap="square" lIns="0" tIns="0" rIns="0" bIns="0" rtlCol="0" anchor="ctr"/>
-          <a:lstStyle/>
-          <a:p>
-            <a:pPr indent="0" marL="0">
-              <a:buNone/>
-            </a:pPr>
-            <a:r>
-              <a:rPr lang="en-US" sz="2600" dirty="0">
-                <a:solidFill>
-                  <a:srgbClr val="000000"/>
-                </a:solidFill>
-                <a:latin typeface="Calibri" pitchFamily="34" charset="0"/>
-                <a:ea typeface="Calibri" pitchFamily="34" charset="-122"/>
-                <a:cs typeface="Calibri" pitchFamily="34" charset="-120"/>
-              </a:rPr>
-              <a:t>🧩</a:t>
-            </a:r>
-            <a:endParaRPr lang="en-US" sz="2600" dirty="0"/>
-          </a:p>
-        </p:txBody>
-      </p:sp>
-      <p:sp>
-        <p:nvSpPr>
-          <p:cNvPr id="22" name="Text 20"/>
-          <p:cNvSpPr txBox="1"/>
-          <p:nvPr/>
-        </p:nvSpPr>
-        <p:spPr>
-          <a:xfrm>
-            <a:off x="4480560" y="4617720"/>
-            <a:ext cx="3200400" cy="365760"/>
-          </a:xfrm>
-          <a:prstGeom prst="rect">
-            <a:avLst/>
-          </a:prstGeom>
-          <a:noFill/>
-          <a:ln/>
-        </p:spPr>
-        <p:txBody>
-          <a:bodyPr wrap="square" lIns="0" tIns="0" rIns="0" bIns="0" rtlCol="0" anchor="ctr"/>
-          <a:lstStyle/>
-          <a:p>
-            <a:pPr indent="0" marL="0">
-              <a:buNone/>
-            </a:pPr>
-            <a:r>
-              <a:rPr lang="en-US" sz="1500" b="1" dirty="0">
-                <a:solidFill>
-                  <a:srgbClr val="261E48"/>
-                </a:solidFill>
-                <a:latin typeface="Calibri" pitchFamily="34" charset="0"/>
-                <a:ea typeface="Calibri" pitchFamily="34" charset="-122"/>
-                <a:cs typeface="Calibri" pitchFamily="34" charset="-120"/>
-              </a:rPr>
-              <a:t>Moindre privilège</a:t>
-            </a:r>
-            <a:endParaRPr lang="en-US" sz="1500" dirty="0"/>
-          </a:p>
-        </p:txBody>
-      </p:sp>
-      <p:sp>
-        <p:nvSpPr>
-          <p:cNvPr id="23" name="Text 21"/>
-          <p:cNvSpPr txBox="1"/>
-          <p:nvPr/>
-        </p:nvSpPr>
-        <p:spPr>
-          <a:xfrm>
-            <a:off x="4480560" y="4983480"/>
-            <a:ext cx="3200400" cy="594360"/>
-          </a:xfrm>
-          <a:prstGeom prst="rect">
-            <a:avLst/>
-          </a:prstGeom>
-          <a:noFill/>
-          <a:ln/>
-        </p:spPr>
-        <p:txBody>
-          <a:bodyPr wrap="square" lIns="0" tIns="0" rIns="0" bIns="0" rtlCol="0" anchor="ctr"/>
-          <a:lstStyle/>
-          <a:p>
-            <a:pPr indent="0" marL="0">
-              <a:buNone/>
-            </a:pPr>
-            <a:r>
-              <a:rPr lang="en-US" sz="1200" dirty="0">
-                <a:solidFill>
-                  <a:srgbClr val="6A6594"/>
-                </a:solidFill>
-                <a:latin typeface="Calibri" pitchFamily="34" charset="0"/>
-                <a:ea typeface="Calibri" pitchFamily="34" charset="-122"/>
-                <a:cs typeface="Calibri" pitchFamily="34" charset="-120"/>
-              </a:rPr>
-              <a:t>token d'admin dédié à l'orchestrateur</a:t>
-            </a:r>
-            <a:endParaRPr lang="en-US" sz="1200" dirty="0"/>
-          </a:p>
-        </p:txBody>
-      </p:sp>
-      <p:sp>
-        <p:nvSpPr>
-          <p:cNvPr id="24" name="Shape 22"/>
-          <p:cNvSpPr/>
-          <p:nvPr/>
-        </p:nvSpPr>
-        <p:spPr>
-          <a:xfrm>
-            <a:off x="8046720" y="3840480"/>
-            <a:ext cx="3566160" cy="1828800"/>
-          </a:xfrm>
-          <a:prstGeom prst="roundRect">
-            <a:avLst>
-              <a:gd name="adj" fmla="val 4000"/>
-            </a:avLst>
-          </a:prstGeom>
-          <a:solidFill>
-            <a:srgbClr val="EEF0F8"/>
-          </a:solidFill>
-          <a:ln/>
-          <a:effectLst>
-            <a:outerShdw sx="100000" sy="100000" kx="0" ky="0" algn="bl" rotWithShape="0" blurRad="76200" dist="25400" dir="5400000">
-              <a:srgbClr val="888888">
-                <a:alpha val="25000"/>
-              </a:srgbClr>
-            </a:outerShdw>
-          </a:effectLst>
-        </p:spPr>
-      </p:sp>
-      <p:sp>
-        <p:nvSpPr>
-          <p:cNvPr id="25" name="Text 23"/>
-          <p:cNvSpPr txBox="1"/>
-          <p:nvPr/>
-        </p:nvSpPr>
-        <p:spPr>
-          <a:xfrm>
-            <a:off x="8229600" y="4023360"/>
-            <a:ext cx="914400" cy="548640"/>
-          </a:xfrm>
-          <a:prstGeom prst="rect">
-            <a:avLst/>
-          </a:prstGeom>
-          <a:noFill/>
-          <a:ln/>
-        </p:spPr>
-        <p:txBody>
-          <a:bodyPr wrap="square" lIns="0" tIns="0" rIns="0" bIns="0" rtlCol="0" anchor="ctr"/>
-          <a:lstStyle/>
-          <a:p>
-            <a:pPr indent="0" marL="0">
-              <a:buNone/>
-            </a:pPr>
-            <a:r>
-              <a:rPr lang="en-US" sz="2600" dirty="0">
-                <a:solidFill>
-                  <a:srgbClr val="000000"/>
-                </a:solidFill>
-                <a:latin typeface="Calibri" pitchFamily="34" charset="0"/>
-                <a:ea typeface="Calibri" pitchFamily="34" charset="-122"/>
-                <a:cs typeface="Calibri" pitchFamily="34" charset="-120"/>
-              </a:rPr>
-              <a:t>📈</a:t>
-            </a:r>
-            <a:endParaRPr lang="en-US" sz="2600" dirty="0"/>
-          </a:p>
-        </p:txBody>
-      </p:sp>
-      <p:sp>
-        <p:nvSpPr>
-          <p:cNvPr id="26" name="Text 24"/>
-          <p:cNvSpPr txBox="1"/>
-          <p:nvPr/>
-        </p:nvSpPr>
-        <p:spPr>
-          <a:xfrm>
-            <a:off x="8229600" y="4617720"/>
-            <a:ext cx="3200400" cy="365760"/>
-          </a:xfrm>
-          <a:prstGeom prst="rect">
-            <a:avLst/>
-          </a:prstGeom>
-          <a:noFill/>
-          <a:ln/>
-        </p:spPr>
-        <p:txBody>
-          <a:bodyPr wrap="square" lIns="0" tIns="0" rIns="0" bIns="0" rtlCol="0" anchor="ctr"/>
-          <a:lstStyle/>
-          <a:p>
-            <a:pPr indent="0" marL="0">
-              <a:buNone/>
-            </a:pPr>
-            <a:r>
-              <a:rPr lang="en-US" sz="1500" b="1" dirty="0">
-                <a:solidFill>
-                  <a:srgbClr val="261E48"/>
-                </a:solidFill>
-                <a:latin typeface="Calibri" pitchFamily="34" charset="0"/>
-                <a:ea typeface="Calibri" pitchFamily="34" charset="-122"/>
-                <a:cs typeface="Calibri" pitchFamily="34" charset="-120"/>
-              </a:rPr>
-              <a:t>Observabilité</a:t>
-            </a:r>
-            <a:endParaRPr lang="en-US" sz="1500" dirty="0"/>
-          </a:p>
-        </p:txBody>
-      </p:sp>
-      <p:sp>
-        <p:nvSpPr>
-          <p:cNvPr id="27" name="Text 25"/>
-          <p:cNvSpPr txBox="1"/>
-          <p:nvPr/>
-        </p:nvSpPr>
-        <p:spPr>
-          <a:xfrm>
-            <a:off x="8229600" y="4983480"/>
-            <a:ext cx="3200400" cy="594360"/>
-          </a:xfrm>
-          <a:prstGeom prst="rect">
-            <a:avLst/>
-          </a:prstGeom>
-          <a:noFill/>
-          <a:ln/>
-        </p:spPr>
-        <p:txBody>
-          <a:bodyPr wrap="square" lIns="0" tIns="0" rIns="0" bIns="0" rtlCol="0" anchor="ctr"/>
-          <a:lstStyle/>
-          <a:p>
-            <a:pPr indent="0" marL="0">
-              <a:buNone/>
-            </a:pPr>
-            <a:r>
-              <a:rPr lang="en-US" sz="1200" dirty="0">
-                <a:solidFill>
-                  <a:srgbClr val="6A6594"/>
-                </a:solidFill>
-                <a:latin typeface="Calibri" pitchFamily="34" charset="0"/>
-                <a:ea typeface="Calibri" pitchFamily="34" charset="-122"/>
-                <a:cs typeface="Calibri" pitchFamily="34" charset="-120"/>
-              </a:rPr>
-              <a:t>métriques &amp; logs exploitables</a:t>
-            </a:r>
-            <a:endParaRPr lang="en-US" sz="1200" dirty="0"/>
           </a:p>
         </p:txBody>
       </p:sp>
@@ -6553,7 +6678,7 @@
                 <a:ea typeface="Calibri" pitchFamily="34" charset="-122"/>
                 <a:cs typeface="Calibri" pitchFamily="34" charset="-120"/>
               </a:rPr>
-              <a:t>RECETTE &amp; ESSAIS</a:t>
+              <a:t>CYBERSÉCURITÉ</a:t>
             </a:r>
             <a:endParaRPr lang="en-US" sz="1200" dirty="0"/>
           </a:p>
@@ -6592,7 +6717,7 @@
                 <a:ea typeface="Calibri" pitchFamily="34" charset="-122"/>
                 <a:cs typeface="Calibri" pitchFamily="34" charset="-120"/>
               </a:rPr>
-              <a:t>Preuves de fonctionnement</a:t>
+              <a:t>Défense &amp; sécurité</a:t>
             </a:r>
             <a:endParaRPr lang="en-US" sz="3000" dirty="0"/>
           </a:p>
@@ -6606,16 +6731,16 @@
         </p:nvSpPr>
         <p:spPr>
           <a:xfrm>
-            <a:off x="548640" y="1645920"/>
-            <a:ext cx="2651760" cy="1737360"/>
+            <a:off x="548640" y="1737360"/>
+            <a:ext cx="3566160" cy="1828800"/>
           </a:xfrm>
           <a:prstGeom prst="roundRect">
             <a:avLst>
-              <a:gd name="adj" fmla="val 4211"/>
+              <a:gd name="adj" fmla="val 4000"/>
             </a:avLst>
           </a:prstGeom>
           <a:solidFill>
-            <a:srgbClr val="261E48"/>
+            <a:srgbClr val="EEF0F8"/>
           </a:solidFill>
           <a:ln/>
           <a:effectLst>
@@ -6635,34 +6760,34 @@
         </p:nvSpPr>
         <p:spPr>
           <a:xfrm>
-            <a:off x="548640" y="1874520"/>
-            <a:ext cx="2651760" cy="822960"/>
-          </a:xfrm>
-          <a:prstGeom prst="rect">
-            <a:avLst/>
-          </a:prstGeom>
-          <a:noFill/>
-          <a:ln/>
-        </p:spPr>
-        <p:txBody>
-          <a:bodyPr wrap="square" lIns="0" tIns="0" rIns="0" bIns="0" rtlCol="0" anchor="ctr"/>
-          <a:lstStyle/>
-          <a:p>
-            <a:pPr algn="ctr" indent="0" marL="0">
-              <a:buNone/>
-            </a:pPr>
-            <a:r>
-              <a:rPr lang="en-US" sz="3600" b="1" dirty="0">
-                <a:solidFill>
-                  <a:srgbClr val="FFFFFF"/>
-                </a:solidFill>
-                <a:latin typeface="Calibri" pitchFamily="34" charset="0"/>
-                <a:ea typeface="Calibri" pitchFamily="34" charset="-122"/>
-                <a:cs typeface="Calibri" pitchFamily="34" charset="-120"/>
-              </a:rPr>
-              <a:t>15/15</a:t>
-            </a:r>
-            <a:endParaRPr lang="en-US" sz="3600" dirty="0"/>
+            <a:off x="731520" y="1920240"/>
+            <a:ext cx="914400" cy="548640"/>
+          </a:xfrm>
+          <a:prstGeom prst="rect">
+            <a:avLst/>
+          </a:prstGeom>
+          <a:noFill/>
+          <a:ln/>
+        </p:spPr>
+        <p:txBody>
+          <a:bodyPr wrap="square" lIns="0" tIns="0" rIns="0" bIns="0" rtlCol="0" anchor="ctr"/>
+          <a:lstStyle/>
+          <a:p>
+            <a:pPr indent="0" marL="0">
+              <a:buNone/>
+            </a:pPr>
+            <a:r>
+              <a:rPr lang="en-US" sz="2600" dirty="0">
+                <a:solidFill>
+                  <a:srgbClr val="000000"/>
+                </a:solidFill>
+                <a:latin typeface="Calibri" pitchFamily="34" charset="0"/>
+                <a:ea typeface="Calibri" pitchFamily="34" charset="-122"/>
+                <a:cs typeface="Calibri" pitchFamily="34" charset="-120"/>
+              </a:rPr>
+              <a:t>🛡️</a:t>
+            </a:r>
+            <a:endParaRPr lang="en-US" sz="2600" dirty="0"/>
           </a:p>
         </p:txBody>
       </p:sp>
@@ -6674,32 +6799,71 @@
         </p:nvSpPr>
         <p:spPr>
           <a:xfrm>
-            <a:off x="640080" y="2697480"/>
-            <a:ext cx="2468880" cy="548640"/>
-          </a:xfrm>
-          <a:prstGeom prst="rect">
-            <a:avLst/>
-          </a:prstGeom>
-          <a:noFill/>
-          <a:ln/>
-        </p:spPr>
-        <p:txBody>
-          <a:bodyPr wrap="square" lIns="0" tIns="0" rIns="0" bIns="0" rtlCol="0" anchor="ctr"/>
-          <a:lstStyle/>
-          <a:p>
-            <a:pPr algn="ctr" indent="0" marL="0">
+            <a:off x="731520" y="2514600"/>
+            <a:ext cx="3200400" cy="365760"/>
+          </a:xfrm>
+          <a:prstGeom prst="rect">
+            <a:avLst/>
+          </a:prstGeom>
+          <a:noFill/>
+          <a:ln/>
+        </p:spPr>
+        <p:txBody>
+          <a:bodyPr wrap="square" lIns="0" tIns="0" rIns="0" bIns="0" rtlCol="0" anchor="ctr"/>
+          <a:lstStyle/>
+          <a:p>
+            <a:pPr indent="0" marL="0">
+              <a:buNone/>
+            </a:pPr>
+            <a:r>
+              <a:rPr lang="en-US" sz="1500" b="1" dirty="0">
+                <a:solidFill>
+                  <a:srgbClr val="261E48"/>
+                </a:solidFill>
+                <a:latin typeface="Calibri" pitchFamily="34" charset="0"/>
+                <a:ea typeface="Calibri" pitchFamily="34" charset="-122"/>
+                <a:cs typeface="Calibri" pitchFamily="34" charset="-120"/>
+              </a:rPr>
+              <a:t>WAF applicatif</a:t>
+            </a:r>
+            <a:endParaRPr lang="en-US" sz="1500" dirty="0"/>
+          </a:p>
+        </p:txBody>
+      </p:sp>
+      <p:sp>
+        <p:nvSpPr>
+          <p:cNvPr id="7" name="Text 5"/>
+          <p:cNvSpPr txBox="1"/>
+          <p:nvPr/>
+        </p:nvSpPr>
+        <p:spPr>
+          <a:xfrm>
+            <a:off x="731520" y="2880360"/>
+            <a:ext cx="3200400" cy="594360"/>
+          </a:xfrm>
+          <a:prstGeom prst="rect">
+            <a:avLst/>
+          </a:prstGeom>
+          <a:noFill/>
+          <a:ln/>
+        </p:spPr>
+        <p:txBody>
+          <a:bodyPr wrap="square" lIns="0" tIns="0" rIns="0" bIns="0" rtlCol="0" anchor="ctr"/>
+          <a:lstStyle/>
+          <a:p>
+            <a:pPr indent="0" marL="0">
               <a:buNone/>
             </a:pPr>
             <a:r>
               <a:rPr lang="en-US" sz="1200" dirty="0">
                 <a:solidFill>
-                  <a:srgbClr val="A1A6D4"/>
-                </a:solidFill>
-                <a:latin typeface="Calibri" pitchFamily="34" charset="0"/>
-                <a:ea typeface="Calibri" pitchFamily="34" charset="-122"/>
-                <a:cs typeface="Calibri" pitchFamily="34" charset="-120"/>
-              </a:rPr>
-              <a:t>vérifications de recette</a:t>
+                  <a:srgbClr val="6A6594"/>
+                </a:solidFill>
+                <a:latin typeface="Calibri" pitchFamily="34" charset="0"/>
+                <a:ea typeface="Calibri" pitchFamily="34" charset="-122"/>
+                <a:cs typeface="Calibri" pitchFamily="34" charset="-120"/>
+              </a:rPr>
+              <a:t>SQLi/XSS bloqués (403) + métrique + log</a:t>
             </a:r>
             <a:endParaRPr lang="en-US" sz="1200" dirty="0"/>
           </a:p>
@@ -6707,22 +6871,22 @@
       </p:sp>
       <p:sp>
         <p:nvSpPr>
-          <p:cNvPr id="7" name="Shape 5"/>
+          <p:cNvPr id="8" name="Shape 6"/>
           <p:cNvSpPr/>
           <p:nvPr/>
         </p:nvSpPr>
         <p:spPr>
           <a:xfrm>
-            <a:off x="3383280" y="1645920"/>
-            <a:ext cx="2651760" cy="1737360"/>
+            <a:off x="4297680" y="1737360"/>
+            <a:ext cx="3566160" cy="1828800"/>
           </a:xfrm>
           <a:prstGeom prst="roundRect">
             <a:avLst>
-              <a:gd name="adj" fmla="val 4211"/>
+              <a:gd name="adj" fmla="val 4000"/>
             </a:avLst>
           </a:prstGeom>
           <a:solidFill>
-            <a:srgbClr val="261E48"/>
+            <a:srgbClr val="EEF0F8"/>
           </a:solidFill>
           <a:ln/>
           <a:effectLst>
@@ -6736,77 +6900,116 @@
       </p:sp>
       <p:sp>
         <p:nvSpPr>
-          <p:cNvPr id="8" name="Text 6"/>
-          <p:cNvSpPr txBox="1"/>
-          <p:nvPr/>
-        </p:nvSpPr>
-        <p:spPr>
-          <a:xfrm>
-            <a:off x="3383280" y="1874520"/>
-            <a:ext cx="2651760" cy="822960"/>
-          </a:xfrm>
-          <a:prstGeom prst="rect">
-            <a:avLst/>
-          </a:prstGeom>
-          <a:noFill/>
-          <a:ln/>
-        </p:spPr>
-        <p:txBody>
-          <a:bodyPr wrap="square" lIns="0" tIns="0" rIns="0" bIns="0" rtlCol="0" anchor="ctr"/>
-          <a:lstStyle/>
-          <a:p>
-            <a:pPr algn="ctr" indent="0" marL="0">
-              <a:buNone/>
-            </a:pPr>
-            <a:r>
-              <a:rPr lang="en-US" sz="3600" b="1" dirty="0">
-                <a:solidFill>
-                  <a:srgbClr val="FFFFFF"/>
-                </a:solidFill>
-                <a:latin typeface="Calibri" pitchFamily="34" charset="0"/>
-                <a:ea typeface="Calibri" pitchFamily="34" charset="-122"/>
-                <a:cs typeface="Calibri" pitchFamily="34" charset="-120"/>
-              </a:rPr>
-              <a:t>~15 s</a:t>
-            </a:r>
-            <a:endParaRPr lang="en-US" sz="3600" dirty="0"/>
-          </a:p>
-        </p:txBody>
-      </p:sp>
-      <p:sp>
-        <p:nvSpPr>
           <p:cNvPr id="9" name="Text 7"/>
           <p:cNvSpPr txBox="1"/>
           <p:nvPr/>
         </p:nvSpPr>
         <p:spPr>
           <a:xfrm>
-            <a:off x="3474720" y="2697480"/>
-            <a:ext cx="2468880" cy="548640"/>
-          </a:xfrm>
-          <a:prstGeom prst="rect">
-            <a:avLst/>
-          </a:prstGeom>
-          <a:noFill/>
-          <a:ln/>
-        </p:spPr>
-        <p:txBody>
-          <a:bodyPr wrap="square" lIns="0" tIns="0" rIns="0" bIns="0" rtlCol="0" anchor="ctr"/>
-          <a:lstStyle/>
-          <a:p>
-            <a:pPr algn="ctr" indent="0" marL="0">
+            <a:off x="4480560" y="1920240"/>
+            <a:ext cx="914400" cy="548640"/>
+          </a:xfrm>
+          <a:prstGeom prst="rect">
+            <a:avLst/>
+          </a:prstGeom>
+          <a:noFill/>
+          <a:ln/>
+        </p:spPr>
+        <p:txBody>
+          <a:bodyPr wrap="square" lIns="0" tIns="0" rIns="0" bIns="0" rtlCol="0" anchor="ctr"/>
+          <a:lstStyle/>
+          <a:p>
+            <a:pPr indent="0" marL="0">
+              <a:buNone/>
+            </a:pPr>
+            <a:r>
+              <a:rPr lang="en-US" sz="2600" dirty="0">
+                <a:solidFill>
+                  <a:srgbClr val="000000"/>
+                </a:solidFill>
+                <a:latin typeface="Calibri" pitchFamily="34" charset="0"/>
+                <a:ea typeface="Calibri" pitchFamily="34" charset="-122"/>
+                <a:cs typeface="Calibri" pitchFamily="34" charset="-120"/>
+              </a:rPr>
+              <a:t>📊</a:t>
+            </a:r>
+            <a:endParaRPr lang="en-US" sz="2600" dirty="0"/>
+          </a:p>
+        </p:txBody>
+      </p:sp>
+      <p:sp>
+        <p:nvSpPr>
+          <p:cNvPr id="10" name="Text 8"/>
+          <p:cNvSpPr txBox="1"/>
+          <p:nvPr/>
+        </p:nvSpPr>
+        <p:spPr>
+          <a:xfrm>
+            <a:off x="4480560" y="2514600"/>
+            <a:ext cx="3200400" cy="365760"/>
+          </a:xfrm>
+          <a:prstGeom prst="rect">
+            <a:avLst/>
+          </a:prstGeom>
+          <a:noFill/>
+          <a:ln/>
+        </p:spPr>
+        <p:txBody>
+          <a:bodyPr wrap="square" lIns="0" tIns="0" rIns="0" bIns="0" rtlCol="0" anchor="ctr"/>
+          <a:lstStyle/>
+          <a:p>
+            <a:pPr indent="0" marL="0">
+              <a:buNone/>
+            </a:pPr>
+            <a:r>
+              <a:rPr lang="en-US" sz="1500" b="1" dirty="0">
+                <a:solidFill>
+                  <a:srgbClr val="261E48"/>
+                </a:solidFill>
+                <a:latin typeface="Calibri" pitchFamily="34" charset="0"/>
+                <a:ea typeface="Calibri" pitchFamily="34" charset="-122"/>
+                <a:cs typeface="Calibri" pitchFamily="34" charset="-120"/>
+              </a:rPr>
+              <a:t>Fonction SOC</a:t>
+            </a:r>
+            <a:endParaRPr lang="en-US" sz="1500" dirty="0"/>
+          </a:p>
+        </p:txBody>
+      </p:sp>
+      <p:sp>
+        <p:nvSpPr>
+          <p:cNvPr id="11" name="Text 9"/>
+          <p:cNvSpPr txBox="1"/>
+          <p:nvPr/>
+        </p:nvSpPr>
+        <p:spPr>
+          <a:xfrm>
+            <a:off x="4480560" y="2880360"/>
+            <a:ext cx="3200400" cy="594360"/>
+          </a:xfrm>
+          <a:prstGeom prst="rect">
+            <a:avLst/>
+          </a:prstGeom>
+          <a:noFill/>
+          <a:ln/>
+        </p:spPr>
+        <p:txBody>
+          <a:bodyPr wrap="square" lIns="0" tIns="0" rIns="0" bIns="0" rtlCol="0" anchor="ctr"/>
+          <a:lstStyle/>
+          <a:p>
+            <a:pPr indent="0" marL="0">
               <a:buNone/>
             </a:pPr>
             <a:r>
               <a:rPr lang="en-US" sz="1200" dirty="0">
                 <a:solidFill>
-                  <a:srgbClr val="A1A6D4"/>
-                </a:solidFill>
-                <a:latin typeface="Calibri" pitchFamily="34" charset="0"/>
-                <a:ea typeface="Calibri" pitchFamily="34" charset="-122"/>
-                <a:cs typeface="Calibri" pitchFamily="34" charset="-120"/>
-              </a:rPr>
-              <a:t>RTO détection → reprise</a:t>
+                  <a:srgbClr val="6A6594"/>
+                </a:solidFill>
+                <a:latin typeface="Calibri" pitchFamily="34" charset="0"/>
+                <a:ea typeface="Calibri" pitchFamily="34" charset="-122"/>
+                <a:cs typeface="Calibri" pitchFamily="34" charset="-120"/>
+              </a:rPr>
+              <a:t>Loki + Prometheus + vue SOC du cockpit</a:t>
             </a:r>
             <a:endParaRPr lang="en-US" sz="1200" dirty="0"/>
           </a:p>
@@ -6814,22 +7017,22 @@
       </p:sp>
       <p:sp>
         <p:nvSpPr>
-          <p:cNvPr id="10" name="Shape 8"/>
+          <p:cNvPr id="12" name="Shape 10"/>
           <p:cNvSpPr/>
           <p:nvPr/>
         </p:nvSpPr>
         <p:spPr>
           <a:xfrm>
-            <a:off x="6217920" y="1645920"/>
-            <a:ext cx="2651760" cy="1737360"/>
+            <a:off x="8046720" y="1737360"/>
+            <a:ext cx="3566160" cy="1828800"/>
           </a:xfrm>
           <a:prstGeom prst="roundRect">
             <a:avLst>
-              <a:gd name="adj" fmla="val 4211"/>
+              <a:gd name="adj" fmla="val 4000"/>
             </a:avLst>
           </a:prstGeom>
           <a:solidFill>
-            <a:srgbClr val="261E48"/>
+            <a:srgbClr val="EEF0F8"/>
           </a:solidFill>
           <a:ln/>
           <a:effectLst>
@@ -6843,77 +7046,116 @@
       </p:sp>
       <p:sp>
         <p:nvSpPr>
-          <p:cNvPr id="11" name="Text 9"/>
-          <p:cNvSpPr txBox="1"/>
-          <p:nvPr/>
-        </p:nvSpPr>
-        <p:spPr>
-          <a:xfrm>
-            <a:off x="6217920" y="1874520"/>
-            <a:ext cx="2651760" cy="822960"/>
-          </a:xfrm>
-          <a:prstGeom prst="rect">
-            <a:avLst/>
-          </a:prstGeom>
-          <a:noFill/>
-          <a:ln/>
-        </p:spPr>
-        <p:txBody>
-          <a:bodyPr wrap="square" lIns="0" tIns="0" rIns="0" bIns="0" rtlCol="0" anchor="ctr"/>
-          <a:lstStyle/>
-          <a:p>
-            <a:pPr algn="ctr" indent="0" marL="0">
-              <a:buNone/>
-            </a:pPr>
-            <a:r>
-              <a:rPr lang="en-US" sz="3600" b="1" dirty="0">
-                <a:solidFill>
-                  <a:srgbClr val="FFFFFF"/>
-                </a:solidFill>
-                <a:latin typeface="Calibri" pitchFamily="34" charset="0"/>
-                <a:ea typeface="Calibri" pitchFamily="34" charset="-122"/>
-                <a:cs typeface="Calibri" pitchFamily="34" charset="-120"/>
-              </a:rPr>
-              <a:t>100 %</a:t>
-            </a:r>
-            <a:endParaRPr lang="en-US" sz="3600" dirty="0"/>
-          </a:p>
-        </p:txBody>
-      </p:sp>
-      <p:sp>
-        <p:nvSpPr>
-          <p:cNvPr id="12" name="Text 10"/>
-          <p:cNvSpPr txBox="1"/>
-          <p:nvPr/>
-        </p:nvSpPr>
-        <p:spPr>
-          <a:xfrm>
-            <a:off x="6309360" y="2697480"/>
-            <a:ext cx="2468880" cy="548640"/>
-          </a:xfrm>
-          <a:prstGeom prst="rect">
-            <a:avLst/>
-          </a:prstGeom>
-          <a:noFill/>
-          <a:ln/>
-        </p:spPr>
-        <p:txBody>
-          <a:bodyPr wrap="square" lIns="0" tIns="0" rIns="0" bIns="0" rtlCol="0" anchor="ctr"/>
-          <a:lstStyle/>
-          <a:p>
-            <a:pPr algn="ctr" indent="0" marL="0">
+          <p:cNvPr id="13" name="Text 11"/>
+          <p:cNvSpPr txBox="1"/>
+          <p:nvPr/>
+        </p:nvSpPr>
+        <p:spPr>
+          <a:xfrm>
+            <a:off x="8229600" y="1920240"/>
+            <a:ext cx="914400" cy="548640"/>
+          </a:xfrm>
+          <a:prstGeom prst="rect">
+            <a:avLst/>
+          </a:prstGeom>
+          <a:noFill/>
+          <a:ln/>
+        </p:spPr>
+        <p:txBody>
+          <a:bodyPr wrap="square" lIns="0" tIns="0" rIns="0" bIns="0" rtlCol="0" anchor="ctr"/>
+          <a:lstStyle/>
+          <a:p>
+            <a:pPr indent="0" marL="0">
+              <a:buNone/>
+            </a:pPr>
+            <a:r>
+              <a:rPr lang="en-US" sz="2600" dirty="0">
+                <a:solidFill>
+                  <a:srgbClr val="000000"/>
+                </a:solidFill>
+                <a:latin typeface="Calibri" pitchFamily="34" charset="0"/>
+                <a:ea typeface="Calibri" pitchFamily="34" charset="-122"/>
+                <a:cs typeface="Calibri" pitchFamily="34" charset="-120"/>
+              </a:rPr>
+              <a:t>🔑</a:t>
+            </a:r>
+            <a:endParaRPr lang="en-US" sz="2600" dirty="0"/>
+          </a:p>
+        </p:txBody>
+      </p:sp>
+      <p:sp>
+        <p:nvSpPr>
+          <p:cNvPr id="14" name="Text 12"/>
+          <p:cNvSpPr txBox="1"/>
+          <p:nvPr/>
+        </p:nvSpPr>
+        <p:spPr>
+          <a:xfrm>
+            <a:off x="8229600" y="2514600"/>
+            <a:ext cx="3200400" cy="365760"/>
+          </a:xfrm>
+          <a:prstGeom prst="rect">
+            <a:avLst/>
+          </a:prstGeom>
+          <a:noFill/>
+          <a:ln/>
+        </p:spPr>
+        <p:txBody>
+          <a:bodyPr wrap="square" lIns="0" tIns="0" rIns="0" bIns="0" rtlCol="0" anchor="ctr"/>
+          <a:lstStyle/>
+          <a:p>
+            <a:pPr indent="0" marL="0">
+              <a:buNone/>
+            </a:pPr>
+            <a:r>
+              <a:rPr lang="en-US" sz="1500" b="1" dirty="0">
+                <a:solidFill>
+                  <a:srgbClr val="261E48"/>
+                </a:solidFill>
+                <a:latin typeface="Calibri" pitchFamily="34" charset="0"/>
+                <a:ea typeface="Calibri" pitchFamily="34" charset="-122"/>
+                <a:cs typeface="Calibri" pitchFamily="34" charset="-120"/>
+              </a:rPr>
+              <a:t>Secrets</a:t>
+            </a:r>
+            <a:endParaRPr lang="en-US" sz="1500" dirty="0"/>
+          </a:p>
+        </p:txBody>
+      </p:sp>
+      <p:sp>
+        <p:nvSpPr>
+          <p:cNvPr id="15" name="Text 13"/>
+          <p:cNvSpPr txBox="1"/>
+          <p:nvPr/>
+        </p:nvSpPr>
+        <p:spPr>
+          <a:xfrm>
+            <a:off x="8229600" y="2880360"/>
+            <a:ext cx="3200400" cy="594360"/>
+          </a:xfrm>
+          <a:prstGeom prst="rect">
+            <a:avLst/>
+          </a:prstGeom>
+          <a:noFill/>
+          <a:ln/>
+        </p:spPr>
+        <p:txBody>
+          <a:bodyPr wrap="square" lIns="0" tIns="0" rIns="0" bIns="0" rtlCol="0" anchor="ctr"/>
+          <a:lstStyle/>
+          <a:p>
+            <a:pPr indent="0" marL="0">
               <a:buNone/>
             </a:pPr>
             <a:r>
               <a:rPr lang="en-US" sz="1200" dirty="0">
                 <a:solidFill>
-                  <a:srgbClr val="A1A6D4"/>
-                </a:solidFill>
-                <a:latin typeface="Calibri" pitchFamily="34" charset="0"/>
-                <a:ea typeface="Calibri" pitchFamily="34" charset="-122"/>
-                <a:cs typeface="Calibri" pitchFamily="34" charset="-120"/>
-              </a:rPr>
-              <a:t>reprise sans humain</a:t>
+                  <a:srgbClr val="6A6594"/>
+                </a:solidFill>
+                <a:latin typeface="Calibri" pitchFamily="34" charset="0"/>
+                <a:ea typeface="Calibri" pitchFamily="34" charset="-122"/>
+                <a:cs typeface="Calibri" pitchFamily="34" charset="-120"/>
+              </a:rPr>
+              <a:t>chiffrés (SOPS + age), rien en clair</a:t>
             </a:r>
             <a:endParaRPr lang="en-US" sz="1200" dirty="0"/>
           </a:p>
@@ -6921,22 +7163,22 @@
       </p:sp>
       <p:sp>
         <p:nvSpPr>
-          <p:cNvPr id="13" name="Shape 11"/>
+          <p:cNvPr id="16" name="Shape 14"/>
           <p:cNvSpPr/>
           <p:nvPr/>
         </p:nvSpPr>
         <p:spPr>
           <a:xfrm>
-            <a:off x="9052560" y="1645920"/>
-            <a:ext cx="2651760" cy="1737360"/>
+            <a:off x="548640" y="3840480"/>
+            <a:ext cx="3566160" cy="1828800"/>
           </a:xfrm>
           <a:prstGeom prst="roundRect">
             <a:avLst>
-              <a:gd name="adj" fmla="val 4211"/>
+              <a:gd name="adj" fmla="val 4000"/>
             </a:avLst>
           </a:prstGeom>
           <a:solidFill>
-            <a:srgbClr val="261E48"/>
+            <a:srgbClr val="EEF0F8"/>
           </a:solidFill>
           <a:ln/>
           <a:effectLst>
@@ -6950,77 +7192,116 @@
       </p:sp>
       <p:sp>
         <p:nvSpPr>
-          <p:cNvPr id="14" name="Text 12"/>
-          <p:cNvSpPr txBox="1"/>
-          <p:nvPr/>
-        </p:nvSpPr>
-        <p:spPr>
-          <a:xfrm>
-            <a:off x="9052560" y="1874520"/>
-            <a:ext cx="2651760" cy="822960"/>
-          </a:xfrm>
-          <a:prstGeom prst="rect">
-            <a:avLst/>
-          </a:prstGeom>
-          <a:noFill/>
-          <a:ln/>
-        </p:spPr>
-        <p:txBody>
-          <a:bodyPr wrap="square" lIns="0" tIns="0" rIns="0" bIns="0" rtlCol="0" anchor="ctr"/>
-          <a:lstStyle/>
-          <a:p>
-            <a:pPr algn="ctr" indent="0" marL="0">
-              <a:buNone/>
-            </a:pPr>
-            <a:r>
-              <a:rPr lang="en-US" sz="3600" b="1" dirty="0">
-                <a:solidFill>
-                  <a:srgbClr val="FFFFFF"/>
-                </a:solidFill>
-                <a:latin typeface="Calibri" pitchFamily="34" charset="0"/>
-                <a:ea typeface="Calibri" pitchFamily="34" charset="-122"/>
-                <a:cs typeface="Calibri" pitchFamily="34" charset="-120"/>
-              </a:rPr>
-              <a:t>748</a:t>
-            </a:r>
-            <a:endParaRPr lang="en-US" sz="3600" dirty="0"/>
-          </a:p>
-        </p:txBody>
-      </p:sp>
-      <p:sp>
-        <p:nvSpPr>
-          <p:cNvPr id="15" name="Text 13"/>
-          <p:cNvSpPr txBox="1"/>
-          <p:nvPr/>
-        </p:nvSpPr>
-        <p:spPr>
-          <a:xfrm>
-            <a:off x="9144000" y="2697480"/>
-            <a:ext cx="2468880" cy="548640"/>
-          </a:xfrm>
-          <a:prstGeom prst="rect">
-            <a:avLst/>
-          </a:prstGeom>
-          <a:noFill/>
-          <a:ln/>
-        </p:spPr>
-        <p:txBody>
-          <a:bodyPr wrap="square" lIns="0" tIns="0" rIns="0" bIns="0" rtlCol="0" anchor="ctr"/>
-          <a:lstStyle/>
-          <a:p>
-            <a:pPr algn="ctr" indent="0" marL="0">
+          <p:cNvPr id="17" name="Text 15"/>
+          <p:cNvSpPr txBox="1"/>
+          <p:nvPr/>
+        </p:nvSpPr>
+        <p:spPr>
+          <a:xfrm>
+            <a:off x="731520" y="4023360"/>
+            <a:ext cx="914400" cy="548640"/>
+          </a:xfrm>
+          <a:prstGeom prst="rect">
+            <a:avLst/>
+          </a:prstGeom>
+          <a:noFill/>
+          <a:ln/>
+        </p:spPr>
+        <p:txBody>
+          <a:bodyPr wrap="square" lIns="0" tIns="0" rIns="0" bIns="0" rtlCol="0" anchor="ctr"/>
+          <a:lstStyle/>
+          <a:p>
+            <a:pPr indent="0" marL="0">
+              <a:buNone/>
+            </a:pPr>
+            <a:r>
+              <a:rPr lang="en-US" sz="2600" dirty="0">
+                <a:solidFill>
+                  <a:srgbClr val="000000"/>
+                </a:solidFill>
+                <a:latin typeface="Calibri" pitchFamily="34" charset="0"/>
+                <a:ea typeface="Calibri" pitchFamily="34" charset="-122"/>
+                <a:cs typeface="Calibri" pitchFamily="34" charset="-120"/>
+              </a:rPr>
+              <a:t>🔒</a:t>
+            </a:r>
+            <a:endParaRPr lang="en-US" sz="2600" dirty="0"/>
+          </a:p>
+        </p:txBody>
+      </p:sp>
+      <p:sp>
+        <p:nvSpPr>
+          <p:cNvPr id="18" name="Text 16"/>
+          <p:cNvSpPr txBox="1"/>
+          <p:nvPr/>
+        </p:nvSpPr>
+        <p:spPr>
+          <a:xfrm>
+            <a:off x="731520" y="4617720"/>
+            <a:ext cx="3200400" cy="365760"/>
+          </a:xfrm>
+          <a:prstGeom prst="rect">
+            <a:avLst/>
+          </a:prstGeom>
+          <a:noFill/>
+          <a:ln/>
+        </p:spPr>
+        <p:txBody>
+          <a:bodyPr wrap="square" lIns="0" tIns="0" rIns="0" bIns="0" rtlCol="0" anchor="ctr"/>
+          <a:lstStyle/>
+          <a:p>
+            <a:pPr indent="0" marL="0">
+              <a:buNone/>
+            </a:pPr>
+            <a:r>
+              <a:rPr lang="en-US" sz="1500" b="1" dirty="0">
+                <a:solidFill>
+                  <a:srgbClr val="261E48"/>
+                </a:solidFill>
+                <a:latin typeface="Calibri" pitchFamily="34" charset="0"/>
+                <a:ea typeface="Calibri" pitchFamily="34" charset="-122"/>
+                <a:cs typeface="Calibri" pitchFamily="34" charset="-120"/>
+              </a:rPr>
+              <a:t>Durcissement</a:t>
+            </a:r>
+            <a:endParaRPr lang="en-US" sz="1500" dirty="0"/>
+          </a:p>
+        </p:txBody>
+      </p:sp>
+      <p:sp>
+        <p:nvSpPr>
+          <p:cNvPr id="19" name="Text 17"/>
+          <p:cNvSpPr txBox="1"/>
+          <p:nvPr/>
+        </p:nvSpPr>
+        <p:spPr>
+          <a:xfrm>
+            <a:off x="731520" y="4983480"/>
+            <a:ext cx="3200400" cy="594360"/>
+          </a:xfrm>
+          <a:prstGeom prst="rect">
+            <a:avLst/>
+          </a:prstGeom>
+          <a:noFill/>
+          <a:ln/>
+        </p:spPr>
+        <p:txBody>
+          <a:bodyPr wrap="square" lIns="0" tIns="0" rIns="0" bIns="0" rtlCol="0" anchor="ctr"/>
+          <a:lstStyle/>
+          <a:p>
+            <a:pPr indent="0" marL="0">
               <a:buNone/>
             </a:pPr>
             <a:r>
               <a:rPr lang="en-US" sz="1200" dirty="0">
                 <a:solidFill>
-                  <a:srgbClr val="A1A6D4"/>
-                </a:solidFill>
-                <a:latin typeface="Calibri" pitchFamily="34" charset="0"/>
-                <a:ea typeface="Calibri" pitchFamily="34" charset="-122"/>
-                <a:cs typeface="Calibri" pitchFamily="34" charset="-120"/>
-              </a:rPr>
-              <a:t>requêtes bloquées (WAF)</a:t>
+                  <a:srgbClr val="6A6594"/>
+                </a:solidFill>
+                <a:latin typeface="Calibri" pitchFamily="34" charset="0"/>
+                <a:ea typeface="Calibri" pitchFamily="34" charset="-122"/>
+                <a:cs typeface="Calibri" pitchFamily="34" charset="-120"/>
+              </a:rPr>
+              <a:t>no-new-privileges, base non exposée</a:t>
             </a:r>
             <a:endParaRPr lang="en-US" sz="1200" dirty="0"/>
           </a:p>
@@ -7028,44 +7309,98 @@
       </p:sp>
       <p:sp>
         <p:nvSpPr>
-          <p:cNvPr id="16" name="Text 14"/>
-          <p:cNvSpPr txBox="1"/>
-          <p:nvPr/>
-        </p:nvSpPr>
-        <p:spPr>
-          <a:xfrm>
-            <a:off x="731520" y="3749040"/>
-            <a:ext cx="10972800" cy="411480"/>
-          </a:xfrm>
-          <a:prstGeom prst="rect">
-            <a:avLst/>
-          </a:prstGeom>
-          <a:noFill/>
-          <a:ln/>
-        </p:spPr>
-        <p:txBody>
-          <a:bodyPr wrap="square" lIns="0" tIns="0" rIns="0" bIns="0" rtlCol="0" anchor="ctr"/>
-          <a:lstStyle/>
-          <a:p>
-            <a:pPr indent="0" marL="0">
-              <a:buNone/>
-            </a:pPr>
-            <a:r>
-              <a:rPr lang="en-US" sz="1400" b="1" dirty="0">
-                <a:solidFill>
-                  <a:srgbClr val="1E8E6A"/>
-                </a:solidFill>
-                <a:latin typeface="Calibri" pitchFamily="34" charset="0"/>
-                <a:ea typeface="Calibri" pitchFamily="34" charset="-122"/>
-                <a:cs typeface="Calibri" pitchFamily="34" charset="-120"/>
-              </a:rPr>
-              <a:t>✓  </a:t>
-            </a:r>
-            <a:pPr indent="0" marL="0">
-              <a:buNone/>
-            </a:pPr>
-            <a:r>
-              <a:rPr lang="en-US" sz="1400" dirty="0">
+          <p:cNvPr id="20" name="Shape 18"/>
+          <p:cNvSpPr/>
+          <p:nvPr/>
+        </p:nvSpPr>
+        <p:spPr>
+          <a:xfrm>
+            <a:off x="4297680" y="3840480"/>
+            <a:ext cx="3566160" cy="1828800"/>
+          </a:xfrm>
+          <a:prstGeom prst="roundRect">
+            <a:avLst>
+              <a:gd name="adj" fmla="val 4000"/>
+            </a:avLst>
+          </a:prstGeom>
+          <a:solidFill>
+            <a:srgbClr val="EEF0F8"/>
+          </a:solidFill>
+          <a:ln/>
+          <a:effectLst>
+            <a:outerShdw sx="100000" sy="100000" kx="0" ky="0" algn="bl" rotWithShape="0" blurRad="76200" dist="25400" dir="5400000">
+              <a:srgbClr val="888888">
+                <a:alpha val="25000"/>
+              </a:srgbClr>
+            </a:outerShdw>
+          </a:effectLst>
+        </p:spPr>
+      </p:sp>
+      <p:sp>
+        <p:nvSpPr>
+          <p:cNvPr id="21" name="Text 19"/>
+          <p:cNvSpPr txBox="1"/>
+          <p:nvPr/>
+        </p:nvSpPr>
+        <p:spPr>
+          <a:xfrm>
+            <a:off x="4480560" y="4023360"/>
+            <a:ext cx="914400" cy="548640"/>
+          </a:xfrm>
+          <a:prstGeom prst="rect">
+            <a:avLst/>
+          </a:prstGeom>
+          <a:noFill/>
+          <a:ln/>
+        </p:spPr>
+        <p:txBody>
+          <a:bodyPr wrap="square" lIns="0" tIns="0" rIns="0" bIns="0" rtlCol="0" anchor="ctr"/>
+          <a:lstStyle/>
+          <a:p>
+            <a:pPr indent="0" marL="0">
+              <a:buNone/>
+            </a:pPr>
+            <a:r>
+              <a:rPr lang="en-US" sz="2600" dirty="0">
+                <a:solidFill>
+                  <a:srgbClr val="000000"/>
+                </a:solidFill>
+                <a:latin typeface="Calibri" pitchFamily="34" charset="0"/>
+                <a:ea typeface="Calibri" pitchFamily="34" charset="-122"/>
+                <a:cs typeface="Calibri" pitchFamily="34" charset="-120"/>
+              </a:rPr>
+              <a:t>🧩</a:t>
+            </a:r>
+            <a:endParaRPr lang="en-US" sz="2600" dirty="0"/>
+          </a:p>
+        </p:txBody>
+      </p:sp>
+      <p:sp>
+        <p:nvSpPr>
+          <p:cNvPr id="22" name="Text 20"/>
+          <p:cNvSpPr txBox="1"/>
+          <p:nvPr/>
+        </p:nvSpPr>
+        <p:spPr>
+          <a:xfrm>
+            <a:off x="4480560" y="4617720"/>
+            <a:ext cx="3200400" cy="365760"/>
+          </a:xfrm>
+          <a:prstGeom prst="rect">
+            <a:avLst/>
+          </a:prstGeom>
+          <a:noFill/>
+          <a:ln/>
+        </p:spPr>
+        <p:txBody>
+          <a:bodyPr wrap="square" lIns="0" tIns="0" rIns="0" bIns="0" rtlCol="0" anchor="ctr"/>
+          <a:lstStyle/>
+          <a:p>
+            <a:pPr indent="0" marL="0">
+              <a:buNone/>
+            </a:pPr>
+            <a:r>
+              <a:rPr lang="en-US" sz="1500" b="1" dirty="0">
                 <a:solidFill>
                   <a:srgbClr val="261E48"/>
                 </a:solidFill>
@@ -7073,52 +7408,145 @@
                 <a:ea typeface="Calibri" pitchFamily="34" charset="-122"/>
                 <a:cs typeface="Calibri" pitchFamily="34" charset="-120"/>
               </a:rPr>
-              <a:t>Services opérationnels + modèle ML entraîné</a:t>
-            </a:r>
-            <a:endParaRPr lang="en-US" sz="1400" dirty="0"/>
-          </a:p>
-        </p:txBody>
-      </p:sp>
-      <p:sp>
-        <p:nvSpPr>
-          <p:cNvPr id="17" name="Text 15"/>
-          <p:cNvSpPr txBox="1"/>
-          <p:nvPr/>
-        </p:nvSpPr>
-        <p:spPr>
-          <a:xfrm>
-            <a:off x="731520" y="4224528"/>
-            <a:ext cx="10972800" cy="411480"/>
-          </a:xfrm>
-          <a:prstGeom prst="rect">
-            <a:avLst/>
-          </a:prstGeom>
-          <a:noFill/>
-          <a:ln/>
-        </p:spPr>
-        <p:txBody>
-          <a:bodyPr wrap="square" lIns="0" tIns="0" rIns="0" bIns="0" rtlCol="0" anchor="ctr"/>
-          <a:lstStyle/>
-          <a:p>
-            <a:pPr indent="0" marL="0">
-              <a:buNone/>
-            </a:pPr>
-            <a:r>
-              <a:rPr lang="en-US" sz="1400" b="1" dirty="0">
-                <a:solidFill>
-                  <a:srgbClr val="1E8E6A"/>
-                </a:solidFill>
-                <a:latin typeface="Calibri" pitchFamily="34" charset="0"/>
-                <a:ea typeface="Calibri" pitchFamily="34" charset="-122"/>
-                <a:cs typeface="Calibri" pitchFamily="34" charset="-120"/>
-              </a:rPr>
-              <a:t>✓  </a:t>
-            </a:r>
-            <a:pPr indent="0" marL="0">
-              <a:buNone/>
-            </a:pPr>
-            <a:r>
-              <a:rPr lang="en-US" sz="1400" dirty="0">
+              <a:t>Moindre privilège</a:t>
+            </a:r>
+            <a:endParaRPr lang="en-US" sz="1500" dirty="0"/>
+          </a:p>
+        </p:txBody>
+      </p:sp>
+      <p:sp>
+        <p:nvSpPr>
+          <p:cNvPr id="23" name="Text 21"/>
+          <p:cNvSpPr txBox="1"/>
+          <p:nvPr/>
+        </p:nvSpPr>
+        <p:spPr>
+          <a:xfrm>
+            <a:off x="4480560" y="4983480"/>
+            <a:ext cx="3200400" cy="594360"/>
+          </a:xfrm>
+          <a:prstGeom prst="rect">
+            <a:avLst/>
+          </a:prstGeom>
+          <a:noFill/>
+          <a:ln/>
+        </p:spPr>
+        <p:txBody>
+          <a:bodyPr wrap="square" lIns="0" tIns="0" rIns="0" bIns="0" rtlCol="0" anchor="ctr"/>
+          <a:lstStyle/>
+          <a:p>
+            <a:pPr indent="0" marL="0">
+              <a:buNone/>
+            </a:pPr>
+            <a:r>
+              <a:rPr lang="en-US" sz="1200" dirty="0">
+                <a:solidFill>
+                  <a:srgbClr val="6A6594"/>
+                </a:solidFill>
+                <a:latin typeface="Calibri" pitchFamily="34" charset="0"/>
+                <a:ea typeface="Calibri" pitchFamily="34" charset="-122"/>
+                <a:cs typeface="Calibri" pitchFamily="34" charset="-120"/>
+              </a:rPr>
+              <a:t>token d'admin dédié à l'orchestrateur</a:t>
+            </a:r>
+            <a:endParaRPr lang="en-US" sz="1200" dirty="0"/>
+          </a:p>
+        </p:txBody>
+      </p:sp>
+      <p:sp>
+        <p:nvSpPr>
+          <p:cNvPr id="24" name="Shape 22"/>
+          <p:cNvSpPr/>
+          <p:nvPr/>
+        </p:nvSpPr>
+        <p:spPr>
+          <a:xfrm>
+            <a:off x="8046720" y="3840480"/>
+            <a:ext cx="3566160" cy="1828800"/>
+          </a:xfrm>
+          <a:prstGeom prst="roundRect">
+            <a:avLst>
+              <a:gd name="adj" fmla="val 4000"/>
+            </a:avLst>
+          </a:prstGeom>
+          <a:solidFill>
+            <a:srgbClr val="EEF0F8"/>
+          </a:solidFill>
+          <a:ln/>
+          <a:effectLst>
+            <a:outerShdw sx="100000" sy="100000" kx="0" ky="0" algn="bl" rotWithShape="0" blurRad="76200" dist="25400" dir="5400000">
+              <a:srgbClr val="888888">
+                <a:alpha val="25000"/>
+              </a:srgbClr>
+            </a:outerShdw>
+          </a:effectLst>
+        </p:spPr>
+      </p:sp>
+      <p:sp>
+        <p:nvSpPr>
+          <p:cNvPr id="25" name="Text 23"/>
+          <p:cNvSpPr txBox="1"/>
+          <p:nvPr/>
+        </p:nvSpPr>
+        <p:spPr>
+          <a:xfrm>
+            <a:off x="8229600" y="4023360"/>
+            <a:ext cx="914400" cy="548640"/>
+          </a:xfrm>
+          <a:prstGeom prst="rect">
+            <a:avLst/>
+          </a:prstGeom>
+          <a:noFill/>
+          <a:ln/>
+        </p:spPr>
+        <p:txBody>
+          <a:bodyPr wrap="square" lIns="0" tIns="0" rIns="0" bIns="0" rtlCol="0" anchor="ctr"/>
+          <a:lstStyle/>
+          <a:p>
+            <a:pPr indent="0" marL="0">
+              <a:buNone/>
+            </a:pPr>
+            <a:r>
+              <a:rPr lang="en-US" sz="2600" dirty="0">
+                <a:solidFill>
+                  <a:srgbClr val="000000"/>
+                </a:solidFill>
+                <a:latin typeface="Calibri" pitchFamily="34" charset="0"/>
+                <a:ea typeface="Calibri" pitchFamily="34" charset="-122"/>
+                <a:cs typeface="Calibri" pitchFamily="34" charset="-120"/>
+              </a:rPr>
+              <a:t>📈</a:t>
+            </a:r>
+            <a:endParaRPr lang="en-US" sz="2600" dirty="0"/>
+          </a:p>
+        </p:txBody>
+      </p:sp>
+      <p:sp>
+        <p:nvSpPr>
+          <p:cNvPr id="26" name="Text 24"/>
+          <p:cNvSpPr txBox="1"/>
+          <p:nvPr/>
+        </p:nvSpPr>
+        <p:spPr>
+          <a:xfrm>
+            <a:off x="8229600" y="4617720"/>
+            <a:ext cx="3200400" cy="365760"/>
+          </a:xfrm>
+          <a:prstGeom prst="rect">
+            <a:avLst/>
+          </a:prstGeom>
+          <a:noFill/>
+          <a:ln/>
+        </p:spPr>
+        <p:txBody>
+          <a:bodyPr wrap="square" lIns="0" tIns="0" rIns="0" bIns="0" rtlCol="0" anchor="ctr"/>
+          <a:lstStyle/>
+          <a:p>
+            <a:pPr indent="0" marL="0">
+              <a:buNone/>
+            </a:pPr>
+            <a:r>
+              <a:rPr lang="en-US" sz="1500" b="1" dirty="0">
                 <a:solidFill>
                   <a:srgbClr val="261E48"/>
                 </a:solidFill>
@@ -7126,221 +7554,48 @@
                 <a:ea typeface="Calibri" pitchFamily="34" charset="-122"/>
                 <a:cs typeface="Calibri" pitchFamily="34" charset="-120"/>
               </a:rPr>
-              <a:t>DoS → reprise autonome + bouclier actif</a:t>
-            </a:r>
-            <a:endParaRPr lang="en-US" sz="1400" dirty="0"/>
-          </a:p>
-        </p:txBody>
-      </p:sp>
-      <p:sp>
-        <p:nvSpPr>
-          <p:cNvPr id="18" name="Text 16"/>
-          <p:cNvSpPr txBox="1"/>
-          <p:nvPr/>
-        </p:nvSpPr>
-        <p:spPr>
-          <a:xfrm>
-            <a:off x="731520" y="4700016"/>
-            <a:ext cx="10972800" cy="411480"/>
-          </a:xfrm>
-          <a:prstGeom prst="rect">
-            <a:avLst/>
-          </a:prstGeom>
-          <a:noFill/>
-          <a:ln/>
-        </p:spPr>
-        <p:txBody>
-          <a:bodyPr wrap="square" lIns="0" tIns="0" rIns="0" bIns="0" rtlCol="0" anchor="ctr"/>
-          <a:lstStyle/>
-          <a:p>
-            <a:pPr indent="0" marL="0">
-              <a:buNone/>
-            </a:pPr>
-            <a:r>
-              <a:rPr lang="en-US" sz="1400" b="1" dirty="0">
-                <a:solidFill>
-                  <a:srgbClr val="1E8E6A"/>
-                </a:solidFill>
-                <a:latin typeface="Calibri" pitchFamily="34" charset="0"/>
-                <a:ea typeface="Calibri" pitchFamily="34" charset="-122"/>
-                <a:cs typeface="Calibri" pitchFamily="34" charset="-120"/>
-              </a:rPr>
-              <a:t>✓  </a:t>
-            </a:r>
-            <a:pPr indent="0" marL="0">
-              <a:buNone/>
-            </a:pPr>
-            <a:r>
-              <a:rPr lang="en-US" sz="1400" dirty="0">
-                <a:solidFill>
-                  <a:srgbClr val="261E48"/>
-                </a:solidFill>
-                <a:latin typeface="Calibri" pitchFamily="34" charset="0"/>
-                <a:ea typeface="Calibri" pitchFamily="34" charset="-122"/>
-                <a:cs typeface="Calibri" pitchFamily="34" charset="-120"/>
-              </a:rPr>
-              <a:t>Transaction réussie PENDANT l'attaque</a:t>
-            </a:r>
-            <a:endParaRPr lang="en-US" sz="1400" dirty="0"/>
-          </a:p>
-        </p:txBody>
-      </p:sp>
-      <p:sp>
-        <p:nvSpPr>
-          <p:cNvPr id="19" name="Text 17"/>
-          <p:cNvSpPr txBox="1"/>
-          <p:nvPr/>
-        </p:nvSpPr>
-        <p:spPr>
-          <a:xfrm>
-            <a:off x="731520" y="5175504"/>
-            <a:ext cx="10972800" cy="411480"/>
-          </a:xfrm>
-          <a:prstGeom prst="rect">
-            <a:avLst/>
-          </a:prstGeom>
-          <a:noFill/>
-          <a:ln/>
-        </p:spPr>
-        <p:txBody>
-          <a:bodyPr wrap="square" lIns="0" tIns="0" rIns="0" bIns="0" rtlCol="0" anchor="ctr"/>
-          <a:lstStyle/>
-          <a:p>
-            <a:pPr indent="0" marL="0">
-              <a:buNone/>
-            </a:pPr>
-            <a:r>
-              <a:rPr lang="en-US" sz="1400" b="1" dirty="0">
-                <a:solidFill>
-                  <a:srgbClr val="1E8E6A"/>
-                </a:solidFill>
-                <a:latin typeface="Calibri" pitchFamily="34" charset="0"/>
-                <a:ea typeface="Calibri" pitchFamily="34" charset="-122"/>
-                <a:cs typeface="Calibri" pitchFamily="34" charset="-120"/>
-              </a:rPr>
-              <a:t>✓  </a:t>
-            </a:r>
-            <a:pPr indent="0" marL="0">
-              <a:buNone/>
-            </a:pPr>
-            <a:r>
-              <a:rPr lang="en-US" sz="1400" dirty="0">
-                <a:solidFill>
-                  <a:srgbClr val="261E48"/>
-                </a:solidFill>
-                <a:latin typeface="Calibri" pitchFamily="34" charset="0"/>
-                <a:ea typeface="Calibri" pitchFamily="34" charset="-122"/>
-                <a:cs typeface="Calibri" pitchFamily="34" charset="-120"/>
-              </a:rPr>
-              <a:t>Injection SQL contenue par le WAF</a:t>
-            </a:r>
-            <a:endParaRPr lang="en-US" sz="1400" dirty="0"/>
-          </a:p>
-        </p:txBody>
-      </p:sp>
-      <p:sp>
-        <p:nvSpPr>
-          <p:cNvPr id="20" name="Text 18"/>
-          <p:cNvSpPr txBox="1"/>
-          <p:nvPr/>
-        </p:nvSpPr>
-        <p:spPr>
-          <a:xfrm>
-            <a:off x="731520" y="5650992"/>
-            <a:ext cx="10972800" cy="411480"/>
-          </a:xfrm>
-          <a:prstGeom prst="rect">
-            <a:avLst/>
-          </a:prstGeom>
-          <a:noFill/>
-          <a:ln/>
-        </p:spPr>
-        <p:txBody>
-          <a:bodyPr wrap="square" lIns="0" tIns="0" rIns="0" bIns="0" rtlCol="0" anchor="ctr"/>
-          <a:lstStyle/>
-          <a:p>
-            <a:pPr indent="0" marL="0">
-              <a:buNone/>
-            </a:pPr>
-            <a:r>
-              <a:rPr lang="en-US" sz="1400" b="1" dirty="0">
-                <a:solidFill>
-                  <a:srgbClr val="1E8E6A"/>
-                </a:solidFill>
-                <a:latin typeface="Calibri" pitchFamily="34" charset="0"/>
-                <a:ea typeface="Calibri" pitchFamily="34" charset="-122"/>
-                <a:cs typeface="Calibri" pitchFamily="34" charset="-120"/>
-              </a:rPr>
-              <a:t>✓  </a:t>
-            </a:r>
-            <a:pPr indent="0" marL="0">
-              <a:buNone/>
-            </a:pPr>
-            <a:r>
-              <a:rPr lang="en-US" sz="1400" dirty="0">
-                <a:solidFill>
-                  <a:srgbClr val="261E48"/>
-                </a:solidFill>
-                <a:latin typeface="Calibri" pitchFamily="34" charset="0"/>
-                <a:ea typeface="Calibri" pitchFamily="34" charset="-122"/>
-                <a:cs typeface="Calibri" pitchFamily="34" charset="-120"/>
-              </a:rPr>
-              <a:t>Intégrité des données confirmée</a:t>
-            </a:r>
-            <a:endParaRPr lang="en-US" sz="1400" dirty="0"/>
-          </a:p>
-        </p:txBody>
-      </p:sp>
-      <p:sp>
-        <p:nvSpPr>
-          <p:cNvPr id="21" name="Text 19"/>
-          <p:cNvSpPr txBox="1"/>
-          <p:nvPr/>
-        </p:nvSpPr>
-        <p:spPr>
-          <a:xfrm>
-            <a:off x="731520" y="6126480"/>
-            <a:ext cx="10972800" cy="411480"/>
-          </a:xfrm>
-          <a:prstGeom prst="rect">
-            <a:avLst/>
-          </a:prstGeom>
-          <a:noFill/>
-          <a:ln/>
-        </p:spPr>
-        <p:txBody>
-          <a:bodyPr wrap="square" lIns="0" tIns="0" rIns="0" bIns="0" rtlCol="0" anchor="ctr"/>
-          <a:lstStyle/>
-          <a:p>
-            <a:pPr indent="0" marL="0">
-              <a:buNone/>
-            </a:pPr>
-            <a:r>
-              <a:rPr lang="en-US" sz="1400" b="1" dirty="0">
-                <a:solidFill>
-                  <a:srgbClr val="1E8E6A"/>
-                </a:solidFill>
-                <a:latin typeface="Calibri" pitchFamily="34" charset="0"/>
-                <a:ea typeface="Calibri" pitchFamily="34" charset="-122"/>
-                <a:cs typeface="Calibri" pitchFamily="34" charset="-120"/>
-              </a:rPr>
-              <a:t>✓  </a:t>
-            </a:r>
-            <a:pPr indent="0" marL="0">
-              <a:buNone/>
-            </a:pPr>
-            <a:r>
-              <a:rPr lang="en-US" sz="1400" dirty="0">
-                <a:solidFill>
-                  <a:srgbClr val="261E48"/>
-                </a:solidFill>
-                <a:latin typeface="Calibri" pitchFamily="34" charset="0"/>
-                <a:ea typeface="Calibri" pitchFamily="34" charset="-122"/>
-                <a:cs typeface="Calibri" pitchFamily="34" charset="-120"/>
-              </a:rPr>
-              <a:t>Transaction finale réussie après incidents</a:t>
-            </a:r>
-            <a:endParaRPr lang="en-US" sz="1400" dirty="0"/>
+              <a:t>Observabilité</a:t>
+            </a:r>
+            <a:endParaRPr lang="en-US" sz="1500" dirty="0"/>
+          </a:p>
+        </p:txBody>
+      </p:sp>
+      <p:sp>
+        <p:nvSpPr>
+          <p:cNvPr id="27" name="Text 25"/>
+          <p:cNvSpPr txBox="1"/>
+          <p:nvPr/>
+        </p:nvSpPr>
+        <p:spPr>
+          <a:xfrm>
+            <a:off x="8229600" y="4983480"/>
+            <a:ext cx="3200400" cy="594360"/>
+          </a:xfrm>
+          <a:prstGeom prst="rect">
+            <a:avLst/>
+          </a:prstGeom>
+          <a:noFill/>
+          <a:ln/>
+        </p:spPr>
+        <p:txBody>
+          <a:bodyPr wrap="square" lIns="0" tIns="0" rIns="0" bIns="0" rtlCol="0" anchor="ctr"/>
+          <a:lstStyle/>
+          <a:p>
+            <a:pPr indent="0" marL="0">
+              <a:buNone/>
+            </a:pPr>
+            <a:r>
+              <a:rPr lang="en-US" sz="1200" dirty="0">
+                <a:solidFill>
+                  <a:srgbClr val="6A6594"/>
+                </a:solidFill>
+                <a:latin typeface="Calibri" pitchFamily="34" charset="0"/>
+                <a:ea typeface="Calibri" pitchFamily="34" charset="-122"/>
+                <a:cs typeface="Calibri" pitchFamily="34" charset="-120"/>
+              </a:rPr>
+              <a:t>métriques &amp; logs exploitables</a:t>
+            </a:r>
+            <a:endParaRPr lang="en-US" sz="1200" dirty="0"/>
           </a:p>
         </p:txBody>
       </p:sp>
@@ -7409,7 +7664,7 @@
                 <a:ea typeface="Calibri" pitchFamily="34" charset="-122"/>
                 <a:cs typeface="Calibri" pitchFamily="34" charset="-120"/>
               </a:rPr>
-              <a:t>TRANSFORMATION</a:t>
+              <a:t>RECETTE &amp; ESSAIS</a:t>
             </a:r>
             <a:endParaRPr lang="en-US" sz="1200" dirty="0"/>
           </a:p>
@@ -7448,7 +7703,7 @@
                 <a:ea typeface="Calibri" pitchFamily="34" charset="-122"/>
                 <a:cs typeface="Calibri" pitchFamily="34" charset="-120"/>
               </a:rPr>
-              <a:t>Gouvernance &amp; conformité</a:t>
+              <a:t>Preuves de fonctionnement</a:t>
             </a:r>
             <a:endParaRPr lang="en-US" sz="3000" dirty="0"/>
           </a:p>
@@ -7462,16 +7717,16 @@
         </p:nvSpPr>
         <p:spPr>
           <a:xfrm>
-            <a:off x="548640" y="1737360"/>
-            <a:ext cx="11064240" cy="1005840"/>
+            <a:off x="548640" y="1645920"/>
+            <a:ext cx="2651760" cy="1737360"/>
           </a:xfrm>
           <a:prstGeom prst="roundRect">
             <a:avLst>
-              <a:gd name="adj" fmla="val 7273"/>
+              <a:gd name="adj" fmla="val 4211"/>
             </a:avLst>
           </a:prstGeom>
           <a:solidFill>
-            <a:srgbClr val="EEF0F8"/>
+            <a:srgbClr val="261E48"/>
           </a:solidFill>
           <a:ln/>
           <a:effectLst>
@@ -7491,34 +7746,34 @@
         </p:nvSpPr>
         <p:spPr>
           <a:xfrm>
-            <a:off x="777240" y="1901952"/>
-            <a:ext cx="2743200" cy="640080"/>
-          </a:xfrm>
-          <a:prstGeom prst="rect">
-            <a:avLst/>
-          </a:prstGeom>
-          <a:noFill/>
-          <a:ln/>
-        </p:spPr>
-        <p:txBody>
-          <a:bodyPr wrap="square" lIns="0" tIns="0" rIns="0" bIns="0" rtlCol="0" anchor="ctr"/>
-          <a:lstStyle/>
-          <a:p>
-            <a:pPr indent="0" marL="0">
-              <a:buNone/>
-            </a:pPr>
-            <a:r>
-              <a:rPr lang="en-US" sz="1600" b="1" dirty="0">
-                <a:solidFill>
-                  <a:srgbClr val="4B3FA6"/>
-                </a:solidFill>
-                <a:latin typeface="Calibri" pitchFamily="34" charset="0"/>
-                <a:ea typeface="Calibri" pitchFamily="34" charset="-122"/>
-                <a:cs typeface="Calibri" pitchFamily="34" charset="-120"/>
-              </a:rPr>
-              <a:t>EBIOS RM</a:t>
-            </a:r>
-            <a:endParaRPr lang="en-US" sz="1600" dirty="0"/>
+            <a:off x="548640" y="1874520"/>
+            <a:ext cx="2651760" cy="822960"/>
+          </a:xfrm>
+          <a:prstGeom prst="rect">
+            <a:avLst/>
+          </a:prstGeom>
+          <a:noFill/>
+          <a:ln/>
+        </p:spPr>
+        <p:txBody>
+          <a:bodyPr wrap="square" lIns="0" tIns="0" rIns="0" bIns="0" rtlCol="0" anchor="ctr"/>
+          <a:lstStyle/>
+          <a:p>
+            <a:pPr algn="ctr" indent="0" marL="0">
+              <a:buNone/>
+            </a:pPr>
+            <a:r>
+              <a:rPr lang="en-US" sz="3600" b="1" dirty="0">
+                <a:solidFill>
+                  <a:srgbClr val="FFFFFF"/>
+                </a:solidFill>
+                <a:latin typeface="Calibri" pitchFamily="34" charset="0"/>
+                <a:ea typeface="Calibri" pitchFamily="34" charset="-122"/>
+                <a:cs typeface="Calibri" pitchFamily="34" charset="-120"/>
+              </a:rPr>
+              <a:t>15/15</a:t>
+            </a:r>
+            <a:endParaRPr lang="en-US" sz="3600" dirty="0"/>
           </a:p>
         </p:txBody>
       </p:sp>
@@ -7530,34 +7785,34 @@
         </p:nvSpPr>
         <p:spPr>
           <a:xfrm>
-            <a:off x="3566160" y="1920240"/>
-            <a:ext cx="7863840" cy="685800"/>
-          </a:xfrm>
-          <a:prstGeom prst="rect">
-            <a:avLst/>
-          </a:prstGeom>
-          <a:noFill/>
-          <a:ln/>
-        </p:spPr>
-        <p:txBody>
-          <a:bodyPr wrap="square" lIns="0" tIns="0" rIns="0" bIns="0" rtlCol="0" anchor="ctr"/>
-          <a:lstStyle/>
-          <a:p>
-            <a:pPr indent="0" marL="0">
-              <a:buNone/>
-            </a:pPr>
-            <a:r>
-              <a:rPr lang="en-US" sz="1350" dirty="0">
-                <a:solidFill>
-                  <a:srgbClr val="261E48"/>
-                </a:solidFill>
-                <a:latin typeface="Calibri" pitchFamily="34" charset="0"/>
-                <a:ea typeface="Calibri" pitchFamily="34" charset="-122"/>
-                <a:cs typeface="Calibri" pitchFamily="34" charset="-120"/>
-              </a:rPr>
-              <a:t>Risques reliés à l'architecture et aux attaques réellement testées</a:t>
-            </a:r>
-            <a:endParaRPr lang="en-US" sz="1350" dirty="0"/>
+            <a:off x="640080" y="2697480"/>
+            <a:ext cx="2468880" cy="548640"/>
+          </a:xfrm>
+          <a:prstGeom prst="rect">
+            <a:avLst/>
+          </a:prstGeom>
+          <a:noFill/>
+          <a:ln/>
+        </p:spPr>
+        <p:txBody>
+          <a:bodyPr wrap="square" lIns="0" tIns="0" rIns="0" bIns="0" rtlCol="0" anchor="ctr"/>
+          <a:lstStyle/>
+          <a:p>
+            <a:pPr algn="ctr" indent="0" marL="0">
+              <a:buNone/>
+            </a:pPr>
+            <a:r>
+              <a:rPr lang="en-US" sz="1200" dirty="0">
+                <a:solidFill>
+                  <a:srgbClr val="A1A6D4"/>
+                </a:solidFill>
+                <a:latin typeface="Calibri" pitchFamily="34" charset="0"/>
+                <a:ea typeface="Calibri" pitchFamily="34" charset="-122"/>
+                <a:cs typeface="Calibri" pitchFamily="34" charset="-120"/>
+              </a:rPr>
+              <a:t>vérifications de recette</a:t>
+            </a:r>
+            <a:endParaRPr lang="en-US" sz="1200" dirty="0"/>
           </a:p>
         </p:txBody>
       </p:sp>
@@ -7569,16 +7824,16 @@
         </p:nvSpPr>
         <p:spPr>
           <a:xfrm>
-            <a:off x="548640" y="2926080"/>
-            <a:ext cx="11064240" cy="1005840"/>
+            <a:off x="3383280" y="1645920"/>
+            <a:ext cx="2651760" cy="1737360"/>
           </a:xfrm>
           <a:prstGeom prst="roundRect">
             <a:avLst>
-              <a:gd name="adj" fmla="val 7273"/>
+              <a:gd name="adj" fmla="val 4211"/>
             </a:avLst>
           </a:prstGeom>
           <a:solidFill>
-            <a:srgbClr val="EEF0F8"/>
+            <a:srgbClr val="261E48"/>
           </a:solidFill>
           <a:ln/>
           <a:effectLst>
@@ -7598,34 +7853,34 @@
         </p:nvSpPr>
         <p:spPr>
           <a:xfrm>
-            <a:off x="777240" y="3090672"/>
-            <a:ext cx="2743200" cy="640080"/>
-          </a:xfrm>
-          <a:prstGeom prst="rect">
-            <a:avLst/>
-          </a:prstGeom>
-          <a:noFill/>
-          <a:ln/>
-        </p:spPr>
-        <p:txBody>
-          <a:bodyPr wrap="square" lIns="0" tIns="0" rIns="0" bIns="0" rtlCol="0" anchor="ctr"/>
-          <a:lstStyle/>
-          <a:p>
-            <a:pPr indent="0" marL="0">
-              <a:buNone/>
-            </a:pPr>
-            <a:r>
-              <a:rPr lang="en-US" sz="1600" b="1" dirty="0">
-                <a:solidFill>
-                  <a:srgbClr val="4B3FA6"/>
-                </a:solidFill>
-                <a:latin typeface="Calibri" pitchFamily="34" charset="0"/>
-                <a:ea typeface="Calibri" pitchFamily="34" charset="-122"/>
-                <a:cs typeface="Calibri" pitchFamily="34" charset="-120"/>
-              </a:rPr>
-              <a:t>PCA / PRA</a:t>
-            </a:r>
-            <a:endParaRPr lang="en-US" sz="1600" dirty="0"/>
+            <a:off x="3383280" y="1874520"/>
+            <a:ext cx="2651760" cy="822960"/>
+          </a:xfrm>
+          <a:prstGeom prst="rect">
+            <a:avLst/>
+          </a:prstGeom>
+          <a:noFill/>
+          <a:ln/>
+        </p:spPr>
+        <p:txBody>
+          <a:bodyPr wrap="square" lIns="0" tIns="0" rIns="0" bIns="0" rtlCol="0" anchor="ctr"/>
+          <a:lstStyle/>
+          <a:p>
+            <a:pPr algn="ctr" indent="0" marL="0">
+              <a:buNone/>
+            </a:pPr>
+            <a:r>
+              <a:rPr lang="en-US" sz="3600" b="1" dirty="0">
+                <a:solidFill>
+                  <a:srgbClr val="FFFFFF"/>
+                </a:solidFill>
+                <a:latin typeface="Calibri" pitchFamily="34" charset="0"/>
+                <a:ea typeface="Calibri" pitchFamily="34" charset="-122"/>
+                <a:cs typeface="Calibri" pitchFamily="34" charset="-120"/>
+              </a:rPr>
+              <a:t>~15 s</a:t>
+            </a:r>
+            <a:endParaRPr lang="en-US" sz="3600" dirty="0"/>
           </a:p>
         </p:txBody>
       </p:sp>
@@ -7637,34 +7892,34 @@
         </p:nvSpPr>
         <p:spPr>
           <a:xfrm>
-            <a:off x="3566160" y="3108960"/>
-            <a:ext cx="7863840" cy="685800"/>
-          </a:xfrm>
-          <a:prstGeom prst="rect">
-            <a:avLst/>
-          </a:prstGeom>
-          <a:noFill/>
-          <a:ln/>
-        </p:spPr>
-        <p:txBody>
-          <a:bodyPr wrap="square" lIns="0" tIns="0" rIns="0" bIns="0" rtlCol="0" anchor="ctr"/>
-          <a:lstStyle/>
-          <a:p>
-            <a:pPr indent="0" marL="0">
-              <a:buNone/>
-            </a:pPr>
-            <a:r>
-              <a:rPr lang="en-US" sz="1350" dirty="0">
-                <a:solidFill>
-                  <a:srgbClr val="261E48"/>
-                </a:solidFill>
-                <a:latin typeface="Calibri" pitchFamily="34" charset="0"/>
-                <a:ea typeface="Calibri" pitchFamily="34" charset="-122"/>
-                <a:cs typeface="Calibri" pitchFamily="34" charset="-120"/>
-              </a:rPr>
-              <a:t>Services vitaux, RTO ~15 s mesuré, 2 playbooks, responsabilités</a:t>
-            </a:r>
-            <a:endParaRPr lang="en-US" sz="1350" dirty="0"/>
+            <a:off x="3474720" y="2697480"/>
+            <a:ext cx="2468880" cy="548640"/>
+          </a:xfrm>
+          <a:prstGeom prst="rect">
+            <a:avLst/>
+          </a:prstGeom>
+          <a:noFill/>
+          <a:ln/>
+        </p:spPr>
+        <p:txBody>
+          <a:bodyPr wrap="square" lIns="0" tIns="0" rIns="0" bIns="0" rtlCol="0" anchor="ctr"/>
+          <a:lstStyle/>
+          <a:p>
+            <a:pPr algn="ctr" indent="0" marL="0">
+              <a:buNone/>
+            </a:pPr>
+            <a:r>
+              <a:rPr lang="en-US" sz="1200" dirty="0">
+                <a:solidFill>
+                  <a:srgbClr val="A1A6D4"/>
+                </a:solidFill>
+                <a:latin typeface="Calibri" pitchFamily="34" charset="0"/>
+                <a:ea typeface="Calibri" pitchFamily="34" charset="-122"/>
+                <a:cs typeface="Calibri" pitchFamily="34" charset="-120"/>
+              </a:rPr>
+              <a:t>RTO détection → reprise</a:t>
+            </a:r>
+            <a:endParaRPr lang="en-US" sz="1200" dirty="0"/>
           </a:p>
         </p:txBody>
       </p:sp>
@@ -7676,16 +7931,16 @@
         </p:nvSpPr>
         <p:spPr>
           <a:xfrm>
-            <a:off x="548640" y="4114800"/>
-            <a:ext cx="11064240" cy="1005840"/>
+            <a:off x="6217920" y="1645920"/>
+            <a:ext cx="2651760" cy="1737360"/>
           </a:xfrm>
           <a:prstGeom prst="roundRect">
             <a:avLst>
-              <a:gd name="adj" fmla="val 7273"/>
+              <a:gd name="adj" fmla="val 4211"/>
             </a:avLst>
           </a:prstGeom>
           <a:solidFill>
-            <a:srgbClr val="EEF0F8"/>
+            <a:srgbClr val="261E48"/>
           </a:solidFill>
           <a:ln/>
           <a:effectLst>
@@ -7705,34 +7960,34 @@
         </p:nvSpPr>
         <p:spPr>
           <a:xfrm>
-            <a:off x="777240" y="4279392"/>
-            <a:ext cx="2743200" cy="640080"/>
-          </a:xfrm>
-          <a:prstGeom prst="rect">
-            <a:avLst/>
-          </a:prstGeom>
-          <a:noFill/>
-          <a:ln/>
-        </p:spPr>
-        <p:txBody>
-          <a:bodyPr wrap="square" lIns="0" tIns="0" rIns="0" bIns="0" rtlCol="0" anchor="ctr"/>
-          <a:lstStyle/>
-          <a:p>
-            <a:pPr indent="0" marL="0">
-              <a:buNone/>
-            </a:pPr>
-            <a:r>
-              <a:rPr lang="en-US" sz="1600" b="1" dirty="0">
-                <a:solidFill>
-                  <a:srgbClr val="4B3FA6"/>
-                </a:solidFill>
-                <a:latin typeface="Calibri" pitchFamily="34" charset="0"/>
-                <a:ea typeface="Calibri" pitchFamily="34" charset="-122"/>
-                <a:cs typeface="Calibri" pitchFamily="34" charset="-120"/>
-              </a:rPr>
-              <a:t>NIS2 / DORA</a:t>
-            </a:r>
-            <a:endParaRPr lang="en-US" sz="1600" dirty="0"/>
+            <a:off x="6217920" y="1874520"/>
+            <a:ext cx="2651760" cy="822960"/>
+          </a:xfrm>
+          <a:prstGeom prst="rect">
+            <a:avLst/>
+          </a:prstGeom>
+          <a:noFill/>
+          <a:ln/>
+        </p:spPr>
+        <p:txBody>
+          <a:bodyPr wrap="square" lIns="0" tIns="0" rIns="0" bIns="0" rtlCol="0" anchor="ctr"/>
+          <a:lstStyle/>
+          <a:p>
+            <a:pPr algn="ctr" indent="0" marL="0">
+              <a:buNone/>
+            </a:pPr>
+            <a:r>
+              <a:rPr lang="en-US" sz="3600" b="1" dirty="0">
+                <a:solidFill>
+                  <a:srgbClr val="FFFFFF"/>
+                </a:solidFill>
+                <a:latin typeface="Calibri" pitchFamily="34" charset="0"/>
+                <a:ea typeface="Calibri" pitchFamily="34" charset="-122"/>
+                <a:cs typeface="Calibri" pitchFamily="34" charset="-120"/>
+              </a:rPr>
+              <a:t>100 %</a:t>
+            </a:r>
+            <a:endParaRPr lang="en-US" sz="3600" dirty="0"/>
           </a:p>
         </p:txBody>
       </p:sp>
@@ -7744,24 +7999,184 @@
         </p:nvSpPr>
         <p:spPr>
           <a:xfrm>
-            <a:off x="3566160" y="4297680"/>
-            <a:ext cx="7863840" cy="685800"/>
-          </a:xfrm>
-          <a:prstGeom prst="rect">
-            <a:avLst/>
-          </a:prstGeom>
-          <a:noFill/>
-          <a:ln/>
-        </p:spPr>
-        <p:txBody>
-          <a:bodyPr wrap="square" lIns="0" tIns="0" rIns="0" bIns="0" rtlCol="0" anchor="ctr"/>
-          <a:lstStyle/>
-          <a:p>
-            <a:pPr indent="0" marL="0">
-              <a:buNone/>
-            </a:pPr>
-            <a:r>
-              <a:rPr lang="en-US" sz="1350" dirty="0">
+            <a:off x="6309360" y="2697480"/>
+            <a:ext cx="2468880" cy="548640"/>
+          </a:xfrm>
+          <a:prstGeom prst="rect">
+            <a:avLst/>
+          </a:prstGeom>
+          <a:noFill/>
+          <a:ln/>
+        </p:spPr>
+        <p:txBody>
+          <a:bodyPr wrap="square" lIns="0" tIns="0" rIns="0" bIns="0" rtlCol="0" anchor="ctr"/>
+          <a:lstStyle/>
+          <a:p>
+            <a:pPr algn="ctr" indent="0" marL="0">
+              <a:buNone/>
+            </a:pPr>
+            <a:r>
+              <a:rPr lang="en-US" sz="1200" dirty="0">
+                <a:solidFill>
+                  <a:srgbClr val="A1A6D4"/>
+                </a:solidFill>
+                <a:latin typeface="Calibri" pitchFamily="34" charset="0"/>
+                <a:ea typeface="Calibri" pitchFamily="34" charset="-122"/>
+                <a:cs typeface="Calibri" pitchFamily="34" charset="-120"/>
+              </a:rPr>
+              <a:t>reprise sans humain</a:t>
+            </a:r>
+            <a:endParaRPr lang="en-US" sz="1200" dirty="0"/>
+          </a:p>
+        </p:txBody>
+      </p:sp>
+      <p:sp>
+        <p:nvSpPr>
+          <p:cNvPr id="13" name="Shape 11"/>
+          <p:cNvSpPr/>
+          <p:nvPr/>
+        </p:nvSpPr>
+        <p:spPr>
+          <a:xfrm>
+            <a:off x="9052560" y="1645920"/>
+            <a:ext cx="2651760" cy="1737360"/>
+          </a:xfrm>
+          <a:prstGeom prst="roundRect">
+            <a:avLst>
+              <a:gd name="adj" fmla="val 4211"/>
+            </a:avLst>
+          </a:prstGeom>
+          <a:solidFill>
+            <a:srgbClr val="261E48"/>
+          </a:solidFill>
+          <a:ln/>
+          <a:effectLst>
+            <a:outerShdw sx="100000" sy="100000" kx="0" ky="0" algn="bl" rotWithShape="0" blurRad="76200" dist="25400" dir="5400000">
+              <a:srgbClr val="888888">
+                <a:alpha val="25000"/>
+              </a:srgbClr>
+            </a:outerShdw>
+          </a:effectLst>
+        </p:spPr>
+      </p:sp>
+      <p:sp>
+        <p:nvSpPr>
+          <p:cNvPr id="14" name="Text 12"/>
+          <p:cNvSpPr txBox="1"/>
+          <p:nvPr/>
+        </p:nvSpPr>
+        <p:spPr>
+          <a:xfrm>
+            <a:off x="9052560" y="1874520"/>
+            <a:ext cx="2651760" cy="822960"/>
+          </a:xfrm>
+          <a:prstGeom prst="rect">
+            <a:avLst/>
+          </a:prstGeom>
+          <a:noFill/>
+          <a:ln/>
+        </p:spPr>
+        <p:txBody>
+          <a:bodyPr wrap="square" lIns="0" tIns="0" rIns="0" bIns="0" rtlCol="0" anchor="ctr"/>
+          <a:lstStyle/>
+          <a:p>
+            <a:pPr algn="ctr" indent="0" marL="0">
+              <a:buNone/>
+            </a:pPr>
+            <a:r>
+              <a:rPr lang="en-US" sz="3600" b="1" dirty="0">
+                <a:solidFill>
+                  <a:srgbClr val="FFFFFF"/>
+                </a:solidFill>
+                <a:latin typeface="Calibri" pitchFamily="34" charset="0"/>
+                <a:ea typeface="Calibri" pitchFamily="34" charset="-122"/>
+                <a:cs typeface="Calibri" pitchFamily="34" charset="-120"/>
+              </a:rPr>
+              <a:t>748</a:t>
+            </a:r>
+            <a:endParaRPr lang="en-US" sz="3600" dirty="0"/>
+          </a:p>
+        </p:txBody>
+      </p:sp>
+      <p:sp>
+        <p:nvSpPr>
+          <p:cNvPr id="15" name="Text 13"/>
+          <p:cNvSpPr txBox="1"/>
+          <p:nvPr/>
+        </p:nvSpPr>
+        <p:spPr>
+          <a:xfrm>
+            <a:off x="9144000" y="2697480"/>
+            <a:ext cx="2468880" cy="548640"/>
+          </a:xfrm>
+          <a:prstGeom prst="rect">
+            <a:avLst/>
+          </a:prstGeom>
+          <a:noFill/>
+          <a:ln/>
+        </p:spPr>
+        <p:txBody>
+          <a:bodyPr wrap="square" lIns="0" tIns="0" rIns="0" bIns="0" rtlCol="0" anchor="ctr"/>
+          <a:lstStyle/>
+          <a:p>
+            <a:pPr algn="ctr" indent="0" marL="0">
+              <a:buNone/>
+            </a:pPr>
+            <a:r>
+              <a:rPr lang="en-US" sz="1200" dirty="0">
+                <a:solidFill>
+                  <a:srgbClr val="A1A6D4"/>
+                </a:solidFill>
+                <a:latin typeface="Calibri" pitchFamily="34" charset="0"/>
+                <a:ea typeface="Calibri" pitchFamily="34" charset="-122"/>
+                <a:cs typeface="Calibri" pitchFamily="34" charset="-120"/>
+              </a:rPr>
+              <a:t>requêtes bloquées (WAF)</a:t>
+            </a:r>
+            <a:endParaRPr lang="en-US" sz="1200" dirty="0"/>
+          </a:p>
+        </p:txBody>
+      </p:sp>
+      <p:sp>
+        <p:nvSpPr>
+          <p:cNvPr id="16" name="Text 14"/>
+          <p:cNvSpPr txBox="1"/>
+          <p:nvPr/>
+        </p:nvSpPr>
+        <p:spPr>
+          <a:xfrm>
+            <a:off x="731520" y="3749040"/>
+            <a:ext cx="10972800" cy="411480"/>
+          </a:xfrm>
+          <a:prstGeom prst="rect">
+            <a:avLst/>
+          </a:prstGeom>
+          <a:noFill/>
+          <a:ln/>
+        </p:spPr>
+        <p:txBody>
+          <a:bodyPr wrap="square" lIns="0" tIns="0" rIns="0" bIns="0" rtlCol="0" anchor="ctr"/>
+          <a:lstStyle/>
+          <a:p>
+            <a:pPr indent="0" marL="0">
+              <a:buNone/>
+            </a:pPr>
+            <a:r>
+              <a:rPr lang="en-US" sz="1400" b="1" dirty="0">
+                <a:solidFill>
+                  <a:srgbClr val="1E8E6A"/>
+                </a:solidFill>
+                <a:latin typeface="Calibri" pitchFamily="34" charset="0"/>
+                <a:ea typeface="Calibri" pitchFamily="34" charset="-122"/>
+                <a:cs typeface="Calibri" pitchFamily="34" charset="-120"/>
+              </a:rPr>
+              <a:t>✓  </a:t>
+            </a:r>
+            <a:pPr indent="0" marL="0">
+              <a:buNone/>
+            </a:pPr>
+            <a:r>
+              <a:rPr lang="en-US" sz="1400" dirty="0">
                 <a:solidFill>
                   <a:srgbClr val="261E48"/>
                 </a:solidFill>
@@ -7769,41 +8184,52 @@
                 <a:ea typeface="Calibri" pitchFamily="34" charset="-122"/>
                 <a:cs typeface="Calibri" pitchFamily="34" charset="-120"/>
               </a:rPr>
-              <a:t>Exigences pertinentes vs non démontrables en 4 jours</a:t>
-            </a:r>
-            <a:endParaRPr lang="en-US" sz="1350" dirty="0"/>
-          </a:p>
-        </p:txBody>
-      </p:sp>
-      <p:sp>
-        <p:nvSpPr>
-          <p:cNvPr id="13" name="Text 11"/>
-          <p:cNvSpPr txBox="1"/>
-          <p:nvPr/>
-        </p:nvSpPr>
-        <p:spPr>
-          <a:xfrm>
-            <a:off x="548640" y="5486400"/>
-            <a:ext cx="10972800" cy="822960"/>
-          </a:xfrm>
-          <a:prstGeom prst="rect">
-            <a:avLst/>
-          </a:prstGeom>
-          <a:noFill/>
-          <a:ln/>
-        </p:spPr>
-        <p:txBody>
-          <a:bodyPr wrap="square" lIns="0" tIns="0" rIns="0" bIns="0" rtlCol="0" anchor="ctr"/>
-          <a:lstStyle/>
-          <a:p>
-            <a:pPr indent="0" marL="0">
-              <a:lnSpc>
-                <a:spcPct val="120000"/>
-              </a:lnSpc>
-              <a:buNone/>
-            </a:pPr>
-            <a:r>
-              <a:rPr lang="en-US" sz="1350" b="1" dirty="0">
+              <a:t>Services opérationnels + modèle ML entraîné</a:t>
+            </a:r>
+            <a:endParaRPr lang="en-US" sz="1400" dirty="0"/>
+          </a:p>
+        </p:txBody>
+      </p:sp>
+      <p:sp>
+        <p:nvSpPr>
+          <p:cNvPr id="17" name="Text 15"/>
+          <p:cNvSpPr txBox="1"/>
+          <p:nvPr/>
+        </p:nvSpPr>
+        <p:spPr>
+          <a:xfrm>
+            <a:off x="731520" y="4224528"/>
+            <a:ext cx="10972800" cy="411480"/>
+          </a:xfrm>
+          <a:prstGeom prst="rect">
+            <a:avLst/>
+          </a:prstGeom>
+          <a:noFill/>
+          <a:ln/>
+        </p:spPr>
+        <p:txBody>
+          <a:bodyPr wrap="square" lIns="0" tIns="0" rIns="0" bIns="0" rtlCol="0" anchor="ctr"/>
+          <a:lstStyle/>
+          <a:p>
+            <a:pPr indent="0" marL="0">
+              <a:buNone/>
+            </a:pPr>
+            <a:r>
+              <a:rPr lang="en-US" sz="1400" b="1" dirty="0">
+                <a:solidFill>
+                  <a:srgbClr val="1E8E6A"/>
+                </a:solidFill>
+                <a:latin typeface="Calibri" pitchFamily="34" charset="0"/>
+                <a:ea typeface="Calibri" pitchFamily="34" charset="-122"/>
+                <a:cs typeface="Calibri" pitchFamily="34" charset="-120"/>
+              </a:rPr>
+              <a:t>✓  </a:t>
+            </a:r>
+            <a:pPr indent="0" marL="0">
+              <a:buNone/>
+            </a:pPr>
+            <a:r>
+              <a:rPr lang="en-US" sz="1400" dirty="0">
                 <a:solidFill>
                   <a:srgbClr val="261E48"/>
                 </a:solidFill>
@@ -7811,9 +8237,221 @@
                 <a:ea typeface="Calibri" pitchFamily="34" charset="-122"/>
                 <a:cs typeface="Calibri" pitchFamily="34" charset="-120"/>
               </a:rPr>
-              <a:t>Recommandations : industrialiser la reprise (HA + WAF réseau) · formaliser la notification d'incident · tests de résilience réguliers.</a:t>
-            </a:r>
-            <a:endParaRPr lang="en-US" sz="1350" dirty="0"/>
+              <a:t>DoS → reprise autonome + bouclier actif</a:t>
+            </a:r>
+            <a:endParaRPr lang="en-US" sz="1400" dirty="0"/>
+          </a:p>
+        </p:txBody>
+      </p:sp>
+      <p:sp>
+        <p:nvSpPr>
+          <p:cNvPr id="18" name="Text 16"/>
+          <p:cNvSpPr txBox="1"/>
+          <p:nvPr/>
+        </p:nvSpPr>
+        <p:spPr>
+          <a:xfrm>
+            <a:off x="731520" y="4700016"/>
+            <a:ext cx="10972800" cy="411480"/>
+          </a:xfrm>
+          <a:prstGeom prst="rect">
+            <a:avLst/>
+          </a:prstGeom>
+          <a:noFill/>
+          <a:ln/>
+        </p:spPr>
+        <p:txBody>
+          <a:bodyPr wrap="square" lIns="0" tIns="0" rIns="0" bIns="0" rtlCol="0" anchor="ctr"/>
+          <a:lstStyle/>
+          <a:p>
+            <a:pPr indent="0" marL="0">
+              <a:buNone/>
+            </a:pPr>
+            <a:r>
+              <a:rPr lang="en-US" sz="1400" b="1" dirty="0">
+                <a:solidFill>
+                  <a:srgbClr val="1E8E6A"/>
+                </a:solidFill>
+                <a:latin typeface="Calibri" pitchFamily="34" charset="0"/>
+                <a:ea typeface="Calibri" pitchFamily="34" charset="-122"/>
+                <a:cs typeface="Calibri" pitchFamily="34" charset="-120"/>
+              </a:rPr>
+              <a:t>✓  </a:t>
+            </a:r>
+            <a:pPr indent="0" marL="0">
+              <a:buNone/>
+            </a:pPr>
+            <a:r>
+              <a:rPr lang="en-US" sz="1400" dirty="0">
+                <a:solidFill>
+                  <a:srgbClr val="261E48"/>
+                </a:solidFill>
+                <a:latin typeface="Calibri" pitchFamily="34" charset="0"/>
+                <a:ea typeface="Calibri" pitchFamily="34" charset="-122"/>
+                <a:cs typeface="Calibri" pitchFamily="34" charset="-120"/>
+              </a:rPr>
+              <a:t>Transaction réussie PENDANT l'attaque</a:t>
+            </a:r>
+            <a:endParaRPr lang="en-US" sz="1400" dirty="0"/>
+          </a:p>
+        </p:txBody>
+      </p:sp>
+      <p:sp>
+        <p:nvSpPr>
+          <p:cNvPr id="19" name="Text 17"/>
+          <p:cNvSpPr txBox="1"/>
+          <p:nvPr/>
+        </p:nvSpPr>
+        <p:spPr>
+          <a:xfrm>
+            <a:off x="731520" y="5175504"/>
+            <a:ext cx="10972800" cy="411480"/>
+          </a:xfrm>
+          <a:prstGeom prst="rect">
+            <a:avLst/>
+          </a:prstGeom>
+          <a:noFill/>
+          <a:ln/>
+        </p:spPr>
+        <p:txBody>
+          <a:bodyPr wrap="square" lIns="0" tIns="0" rIns="0" bIns="0" rtlCol="0" anchor="ctr"/>
+          <a:lstStyle/>
+          <a:p>
+            <a:pPr indent="0" marL="0">
+              <a:buNone/>
+            </a:pPr>
+            <a:r>
+              <a:rPr lang="en-US" sz="1400" b="1" dirty="0">
+                <a:solidFill>
+                  <a:srgbClr val="1E8E6A"/>
+                </a:solidFill>
+                <a:latin typeface="Calibri" pitchFamily="34" charset="0"/>
+                <a:ea typeface="Calibri" pitchFamily="34" charset="-122"/>
+                <a:cs typeface="Calibri" pitchFamily="34" charset="-120"/>
+              </a:rPr>
+              <a:t>✓  </a:t>
+            </a:r>
+            <a:pPr indent="0" marL="0">
+              <a:buNone/>
+            </a:pPr>
+            <a:r>
+              <a:rPr lang="en-US" sz="1400" dirty="0">
+                <a:solidFill>
+                  <a:srgbClr val="261E48"/>
+                </a:solidFill>
+                <a:latin typeface="Calibri" pitchFamily="34" charset="0"/>
+                <a:ea typeface="Calibri" pitchFamily="34" charset="-122"/>
+                <a:cs typeface="Calibri" pitchFamily="34" charset="-120"/>
+              </a:rPr>
+              <a:t>Injection SQL contenue par le WAF</a:t>
+            </a:r>
+            <a:endParaRPr lang="en-US" sz="1400" dirty="0"/>
+          </a:p>
+        </p:txBody>
+      </p:sp>
+      <p:sp>
+        <p:nvSpPr>
+          <p:cNvPr id="20" name="Text 18"/>
+          <p:cNvSpPr txBox="1"/>
+          <p:nvPr/>
+        </p:nvSpPr>
+        <p:spPr>
+          <a:xfrm>
+            <a:off x="731520" y="5650992"/>
+            <a:ext cx="10972800" cy="411480"/>
+          </a:xfrm>
+          <a:prstGeom prst="rect">
+            <a:avLst/>
+          </a:prstGeom>
+          <a:noFill/>
+          <a:ln/>
+        </p:spPr>
+        <p:txBody>
+          <a:bodyPr wrap="square" lIns="0" tIns="0" rIns="0" bIns="0" rtlCol="0" anchor="ctr"/>
+          <a:lstStyle/>
+          <a:p>
+            <a:pPr indent="0" marL="0">
+              <a:buNone/>
+            </a:pPr>
+            <a:r>
+              <a:rPr lang="en-US" sz="1400" b="1" dirty="0">
+                <a:solidFill>
+                  <a:srgbClr val="1E8E6A"/>
+                </a:solidFill>
+                <a:latin typeface="Calibri" pitchFamily="34" charset="0"/>
+                <a:ea typeface="Calibri" pitchFamily="34" charset="-122"/>
+                <a:cs typeface="Calibri" pitchFamily="34" charset="-120"/>
+              </a:rPr>
+              <a:t>✓  </a:t>
+            </a:r>
+            <a:pPr indent="0" marL="0">
+              <a:buNone/>
+            </a:pPr>
+            <a:r>
+              <a:rPr lang="en-US" sz="1400" dirty="0">
+                <a:solidFill>
+                  <a:srgbClr val="261E48"/>
+                </a:solidFill>
+                <a:latin typeface="Calibri" pitchFamily="34" charset="0"/>
+                <a:ea typeface="Calibri" pitchFamily="34" charset="-122"/>
+                <a:cs typeface="Calibri" pitchFamily="34" charset="-120"/>
+              </a:rPr>
+              <a:t>Intégrité des données confirmée</a:t>
+            </a:r>
+            <a:endParaRPr lang="en-US" sz="1400" dirty="0"/>
+          </a:p>
+        </p:txBody>
+      </p:sp>
+      <p:sp>
+        <p:nvSpPr>
+          <p:cNvPr id="21" name="Text 19"/>
+          <p:cNvSpPr txBox="1"/>
+          <p:nvPr/>
+        </p:nvSpPr>
+        <p:spPr>
+          <a:xfrm>
+            <a:off x="731520" y="6126480"/>
+            <a:ext cx="10972800" cy="411480"/>
+          </a:xfrm>
+          <a:prstGeom prst="rect">
+            <a:avLst/>
+          </a:prstGeom>
+          <a:noFill/>
+          <a:ln/>
+        </p:spPr>
+        <p:txBody>
+          <a:bodyPr wrap="square" lIns="0" tIns="0" rIns="0" bIns="0" rtlCol="0" anchor="ctr"/>
+          <a:lstStyle/>
+          <a:p>
+            <a:pPr indent="0" marL="0">
+              <a:buNone/>
+            </a:pPr>
+            <a:r>
+              <a:rPr lang="en-US" sz="1400" b="1" dirty="0">
+                <a:solidFill>
+                  <a:srgbClr val="1E8E6A"/>
+                </a:solidFill>
+                <a:latin typeface="Calibri" pitchFamily="34" charset="0"/>
+                <a:ea typeface="Calibri" pitchFamily="34" charset="-122"/>
+                <a:cs typeface="Calibri" pitchFamily="34" charset="-120"/>
+              </a:rPr>
+              <a:t>✓  </a:t>
+            </a:r>
+            <a:pPr indent="0" marL="0">
+              <a:buNone/>
+            </a:pPr>
+            <a:r>
+              <a:rPr lang="en-US" sz="1400" dirty="0">
+                <a:solidFill>
+                  <a:srgbClr val="261E48"/>
+                </a:solidFill>
+                <a:latin typeface="Calibri" pitchFamily="34" charset="0"/>
+                <a:ea typeface="Calibri" pitchFamily="34" charset="-122"/>
+                <a:cs typeface="Calibri" pitchFamily="34" charset="-120"/>
+              </a:rPr>
+              <a:t>Transaction finale réussie après incidents</a:t>
+            </a:r>
+            <a:endParaRPr lang="en-US" sz="1400" dirty="0"/>
           </a:p>
         </p:txBody>
       </p:sp>

--- a/livrables/Presentation-RESILIENCE-ALPHA.pptx
+++ b/livrables/Presentation-RESILIENCE-ALPHA.pptx
@@ -2203,6 +2203,45 @@
         </p:nvSpPr>
         <p:spPr>
           <a:xfrm>
+            <a:off x="731520" y="4754880"/>
+            <a:ext cx="10698480" cy="365760"/>
+          </a:xfrm>
+          <a:prstGeom prst="rect">
+            <a:avLst/>
+          </a:prstGeom>
+          <a:noFill/>
+          <a:ln/>
+        </p:spPr>
+        <p:txBody>
+          <a:bodyPr wrap="square" lIns="0" tIns="0" rIns="0" bIns="0" rtlCol="0" anchor="ctr"/>
+          <a:lstStyle/>
+          <a:p>
+            <a:pPr indent="0" marL="0">
+              <a:buNone/>
+            </a:pPr>
+            <a:r>
+              <a:rPr lang="en-US" sz="1300" dirty="0">
+                <a:solidFill>
+                  <a:srgbClr val="FFFFFF"/>
+                </a:solidFill>
+                <a:latin typeface="Calibri" pitchFamily="34" charset="0"/>
+                <a:ea typeface="Calibri" pitchFamily="34" charset="-122"/>
+                <a:cs typeface="Calibri" pitchFamily="34" charset="-120"/>
+              </a:rPr>
+              <a:t>Équipe : Téo Debay · Timéo Quehen · Hodari Bigwi · Théo Vambre · Adrien Planquelle</a:t>
+            </a:r>
+            <a:endParaRPr lang="en-US" sz="1300" dirty="0"/>
+          </a:p>
+        </p:txBody>
+      </p:sp>
+      <p:sp>
+        <p:nvSpPr>
+          <p:cNvPr id="8" name="Text 6"/>
+          <p:cNvSpPr txBox="1"/>
+          <p:nvPr/>
+        </p:nvSpPr>
+        <p:spPr>
+          <a:xfrm>
             <a:off x="731520" y="6126480"/>
             <a:ext cx="10698480" cy="365760"/>
           </a:xfrm>

--- a/livrables/Presentation-RESILIENCE-ALPHA.pptx
+++ b/livrables/Presentation-RESILIENCE-ALPHA.pptx
@@ -16,9 +16,12 @@
     <p:sldId id="264" r:id="rId10"/>
     <p:sldId id="265" r:id="rId11"/>
     <p:sldId id="266" r:id="rId12"/>
+    <p:sldId id="267" r:id="rId13"/>
+    <p:sldId id="268" r:id="rId14"/>
+    <p:sldId id="269" r:id="rId15"/>
   </p:sldIdLst>
   <p:notesMasterIdLst>
-    <p:notesMasterId r:id="rId13"/>
+    <p:notesMasterId r:id="rId16"/>
   </p:notesMasterIdLst>
   <p:sldSz cx="12192000" cy="6858000"/>
   <p:notesSz cx="6858000" cy="12192000"/>
@@ -964,6 +967,270 @@
             <a:fld id="{F7021451-1387-4CA6-816F-3879F97B5CBC}" type="slidenum">
               <a:rPr lang="en-US"/>
               <a:t>11</a:t>
+            </a:fld>
+            <a:endParaRPr lang="en-US"/>
+          </a:p>
+        </p:txBody>
+      </p:sp>
+    </p:spTree>
+    <p:extLst>
+      <p:ext uri="{BB962C8B-B14F-4D97-AF65-F5344CB8AC3E}">
+        <p14:creationId xmlns:p14="http://schemas.microsoft.com/office/powerpoint/2010/main" val="1024086991"/>
+      </p:ext>
+    </p:extLst>
+  </p:cSld>
+  <p:clrMapOvr>
+    <a:masterClrMapping/>
+  </p:clrMapOvr>
+</p:notes>
+</file>
+
+<file path=ppt/notesSlides/notesSlide12.xml><?xml version="1.0" encoding="utf-8"?>
+<p:notes xmlns:a="http://schemas.openxmlformats.org/drawingml/2006/main" xmlns:r="http://schemas.openxmlformats.org/officeDocument/2006/relationships" xmlns:p="http://schemas.openxmlformats.org/presentationml/2006/main">
+  <p:cSld>
+    <p:spTree>
+      <p:nvGrpSpPr>
+        <p:cNvPr id="1" name=""/>
+        <p:cNvGrpSpPr/>
+        <p:nvPr/>
+      </p:nvGrpSpPr>
+      <p:grpSpPr>
+        <a:xfrm>
+          <a:off x="0" y="0"/>
+          <a:ext cx="0" cy="0"/>
+          <a:chOff x="0" y="0"/>
+          <a:chExt cx="0" cy="0"/>
+        </a:xfrm>
+      </p:grpSpPr>
+      <p:sp>
+        <p:nvSpPr>
+          <p:cNvPr id="2" name="Slide Image Placeholder 1"/>
+          <p:cNvSpPr>
+            <a:spLocks noGrp="1" noRot="1" noChangeAspect="1"/>
+          </p:cNvSpPr>
+          <p:nvPr>
+            <p:ph type="sldImg"/>
+          </p:nvPr>
+        </p:nvSpPr>
+        <p:spPr/>
+      </p:sp>
+      <p:sp>
+        <p:nvSpPr>
+          <p:cNvPr id="3" name="Notes Placeholder 2"/>
+          <p:cNvSpPr>
+            <a:spLocks noGrp="1"/>
+          </p:cNvSpPr>
+          <p:nvPr>
+            <p:ph type="body" idx="1"/>
+          </p:nvPr>
+        </p:nvSpPr>
+        <p:spPr/>
+        <p:txBody>
+          <a:bodyPr/>
+          <a:lstStyle/>
+          <a:p>
+            <a:r>
+              <a:rPr lang="en-US" dirty="0"/>
+              <a:t/>
+            </a:r>
+            <a:endParaRPr lang="en-US" dirty="0"/>
+          </a:p>
+        </p:txBody>
+      </p:sp>
+      <p:sp>
+        <p:nvSpPr>
+          <p:cNvPr id="4" name="Slide Number Placeholder 3"/>
+          <p:cNvSpPr>
+            <a:spLocks noGrp="1"/>
+          </p:cNvSpPr>
+          <p:nvPr>
+            <p:ph type="sldNum" sz="quarter" idx="10"/>
+          </p:nvPr>
+        </p:nvSpPr>
+        <p:spPr/>
+        <p:txBody>
+          <a:bodyPr/>
+          <a:lstStyle/>
+          <a:p>
+            <a:fld id="{F7021451-1387-4CA6-816F-3879F97B5CBC}" type="slidenum">
+              <a:rPr lang="en-US"/>
+              <a:t>12</a:t>
+            </a:fld>
+            <a:endParaRPr lang="en-US"/>
+          </a:p>
+        </p:txBody>
+      </p:sp>
+    </p:spTree>
+    <p:extLst>
+      <p:ext uri="{BB962C8B-B14F-4D97-AF65-F5344CB8AC3E}">
+        <p14:creationId xmlns:p14="http://schemas.microsoft.com/office/powerpoint/2010/main" val="1024086991"/>
+      </p:ext>
+    </p:extLst>
+  </p:cSld>
+  <p:clrMapOvr>
+    <a:masterClrMapping/>
+  </p:clrMapOvr>
+</p:notes>
+</file>
+
+<file path=ppt/notesSlides/notesSlide13.xml><?xml version="1.0" encoding="utf-8"?>
+<p:notes xmlns:a="http://schemas.openxmlformats.org/drawingml/2006/main" xmlns:r="http://schemas.openxmlformats.org/officeDocument/2006/relationships" xmlns:p="http://schemas.openxmlformats.org/presentationml/2006/main">
+  <p:cSld>
+    <p:spTree>
+      <p:nvGrpSpPr>
+        <p:cNvPr id="1" name=""/>
+        <p:cNvGrpSpPr/>
+        <p:nvPr/>
+      </p:nvGrpSpPr>
+      <p:grpSpPr>
+        <a:xfrm>
+          <a:off x="0" y="0"/>
+          <a:ext cx="0" cy="0"/>
+          <a:chOff x="0" y="0"/>
+          <a:chExt cx="0" cy="0"/>
+        </a:xfrm>
+      </p:grpSpPr>
+      <p:sp>
+        <p:nvSpPr>
+          <p:cNvPr id="2" name="Slide Image Placeholder 1"/>
+          <p:cNvSpPr>
+            <a:spLocks noGrp="1" noRot="1" noChangeAspect="1"/>
+          </p:cNvSpPr>
+          <p:nvPr>
+            <p:ph type="sldImg"/>
+          </p:nvPr>
+        </p:nvSpPr>
+        <p:spPr/>
+      </p:sp>
+      <p:sp>
+        <p:nvSpPr>
+          <p:cNvPr id="3" name="Notes Placeholder 2"/>
+          <p:cNvSpPr>
+            <a:spLocks noGrp="1"/>
+          </p:cNvSpPr>
+          <p:nvPr>
+            <p:ph type="body" idx="1"/>
+          </p:nvPr>
+        </p:nvSpPr>
+        <p:spPr/>
+        <p:txBody>
+          <a:bodyPr/>
+          <a:lstStyle/>
+          <a:p>
+            <a:r>
+              <a:rPr lang="en-US" dirty="0"/>
+              <a:t/>
+            </a:r>
+            <a:endParaRPr lang="en-US" dirty="0"/>
+          </a:p>
+        </p:txBody>
+      </p:sp>
+      <p:sp>
+        <p:nvSpPr>
+          <p:cNvPr id="4" name="Slide Number Placeholder 3"/>
+          <p:cNvSpPr>
+            <a:spLocks noGrp="1"/>
+          </p:cNvSpPr>
+          <p:nvPr>
+            <p:ph type="sldNum" sz="quarter" idx="10"/>
+          </p:nvPr>
+        </p:nvSpPr>
+        <p:spPr/>
+        <p:txBody>
+          <a:bodyPr/>
+          <a:lstStyle/>
+          <a:p>
+            <a:fld id="{F7021451-1387-4CA6-816F-3879F97B5CBC}" type="slidenum">
+              <a:rPr lang="en-US"/>
+              <a:t>13</a:t>
+            </a:fld>
+            <a:endParaRPr lang="en-US"/>
+          </a:p>
+        </p:txBody>
+      </p:sp>
+    </p:spTree>
+    <p:extLst>
+      <p:ext uri="{BB962C8B-B14F-4D97-AF65-F5344CB8AC3E}">
+        <p14:creationId xmlns:p14="http://schemas.microsoft.com/office/powerpoint/2010/main" val="1024086991"/>
+      </p:ext>
+    </p:extLst>
+  </p:cSld>
+  <p:clrMapOvr>
+    <a:masterClrMapping/>
+  </p:clrMapOvr>
+</p:notes>
+</file>
+
+<file path=ppt/notesSlides/notesSlide14.xml><?xml version="1.0" encoding="utf-8"?>
+<p:notes xmlns:a="http://schemas.openxmlformats.org/drawingml/2006/main" xmlns:r="http://schemas.openxmlformats.org/officeDocument/2006/relationships" xmlns:p="http://schemas.openxmlformats.org/presentationml/2006/main">
+  <p:cSld>
+    <p:spTree>
+      <p:nvGrpSpPr>
+        <p:cNvPr id="1" name=""/>
+        <p:cNvGrpSpPr/>
+        <p:nvPr/>
+      </p:nvGrpSpPr>
+      <p:grpSpPr>
+        <a:xfrm>
+          <a:off x="0" y="0"/>
+          <a:ext cx="0" cy="0"/>
+          <a:chOff x="0" y="0"/>
+          <a:chExt cx="0" cy="0"/>
+        </a:xfrm>
+      </p:grpSpPr>
+      <p:sp>
+        <p:nvSpPr>
+          <p:cNvPr id="2" name="Slide Image Placeholder 1"/>
+          <p:cNvSpPr>
+            <a:spLocks noGrp="1" noRot="1" noChangeAspect="1"/>
+          </p:cNvSpPr>
+          <p:nvPr>
+            <p:ph type="sldImg"/>
+          </p:nvPr>
+        </p:nvSpPr>
+        <p:spPr/>
+      </p:sp>
+      <p:sp>
+        <p:nvSpPr>
+          <p:cNvPr id="3" name="Notes Placeholder 2"/>
+          <p:cNvSpPr>
+            <a:spLocks noGrp="1"/>
+          </p:cNvSpPr>
+          <p:nvPr>
+            <p:ph type="body" idx="1"/>
+          </p:nvPr>
+        </p:nvSpPr>
+        <p:spPr/>
+        <p:txBody>
+          <a:bodyPr/>
+          <a:lstStyle/>
+          <a:p>
+            <a:r>
+              <a:rPr lang="en-US" dirty="0"/>
+              <a:t/>
+            </a:r>
+            <a:endParaRPr lang="en-US" dirty="0"/>
+          </a:p>
+        </p:txBody>
+      </p:sp>
+      <p:sp>
+        <p:nvSpPr>
+          <p:cNvPr id="4" name="Slide Number Placeholder 3"/>
+          <p:cNvSpPr>
+            <a:spLocks noGrp="1"/>
+          </p:cNvSpPr>
+          <p:nvPr>
+            <p:ph type="sldNum" sz="quarter" idx="10"/>
+          </p:nvPr>
+        </p:nvSpPr>
+        <p:spPr/>
+        <p:txBody>
+          <a:bodyPr/>
+          <a:lstStyle/>
+          <a:p>
+            <a:fld id="{F7021451-1387-4CA6-816F-3879F97B5CBC}" type="slidenum">
+              <a:rPr lang="en-US"/>
+              <a:t>14</a:t>
             </a:fld>
             <a:endParaRPr lang="en-US"/>
           </a:p>
@@ -2338,7 +2605,7 @@
                 <a:ea typeface="Calibri" pitchFamily="34" charset="-122"/>
                 <a:cs typeface="Calibri" pitchFamily="34" charset="-120"/>
               </a:rPr>
-              <a:t>TRANSFORMATION</a:t>
+              <a:t>HAUTE DISPO · ESSAI VÉRIFIÉ</a:t>
             </a:r>
             <a:endParaRPr lang="en-US" sz="1200" dirty="0"/>
           </a:p>
@@ -2377,7 +2644,7 @@
                 <a:ea typeface="Calibri" pitchFamily="34" charset="-122"/>
                 <a:cs typeface="Calibri" pitchFamily="34" charset="-120"/>
               </a:rPr>
-              <a:t>Gouvernance &amp; conformité</a:t>
+              <a:t>Continuité prouvée : failover → failback</a:t>
             </a:r>
             <a:endParaRPr lang="en-US" sz="3000" dirty="0"/>
           </a:p>
@@ -2391,16 +2658,16 @@
         </p:nvSpPr>
         <p:spPr>
           <a:xfrm>
-            <a:off x="548640" y="1737360"/>
-            <a:ext cx="11064240" cy="1005840"/>
+            <a:off x="548640" y="1600200"/>
+            <a:ext cx="5486400" cy="2926080"/>
           </a:xfrm>
           <a:prstGeom prst="roundRect">
             <a:avLst>
-              <a:gd name="adj" fmla="val 7273"/>
+              <a:gd name="adj" fmla="val 2500"/>
             </a:avLst>
           </a:prstGeom>
           <a:solidFill>
-            <a:srgbClr val="EEF0F8"/>
+            <a:srgbClr val="FBE8E6"/>
           </a:solidFill>
           <a:ln/>
           <a:effectLst>
@@ -2420,34 +2687,34 @@
         </p:nvSpPr>
         <p:spPr>
           <a:xfrm>
-            <a:off x="777240" y="1901952"/>
-            <a:ext cx="2743200" cy="640080"/>
-          </a:xfrm>
-          <a:prstGeom prst="rect">
-            <a:avLst/>
-          </a:prstGeom>
-          <a:noFill/>
-          <a:ln/>
-        </p:spPr>
-        <p:txBody>
-          <a:bodyPr wrap="square" lIns="0" tIns="0" rIns="0" bIns="0" rtlCol="0" anchor="ctr"/>
-          <a:lstStyle/>
-          <a:p>
-            <a:pPr indent="0" marL="0">
-              <a:buNone/>
-            </a:pPr>
-            <a:r>
-              <a:rPr lang="en-US" sz="1600" b="1" dirty="0">
-                <a:solidFill>
-                  <a:srgbClr val="4B3FA6"/>
-                </a:solidFill>
-                <a:latin typeface="Calibri" pitchFamily="34" charset="0"/>
-                <a:ea typeface="Calibri" pitchFamily="34" charset="-122"/>
-                <a:cs typeface="Calibri" pitchFamily="34" charset="-120"/>
-              </a:rPr>
-              <a:t>EBIOS RM</a:t>
-            </a:r>
-            <a:endParaRPr lang="en-US" sz="1600" dirty="0"/>
+            <a:off x="777240" y="1755648"/>
+            <a:ext cx="5029200" cy="411480"/>
+          </a:xfrm>
+          <a:prstGeom prst="rect">
+            <a:avLst/>
+          </a:prstGeom>
+          <a:noFill/>
+          <a:ln/>
+        </p:spPr>
+        <p:txBody>
+          <a:bodyPr wrap="square" lIns="0" tIns="0" rIns="0" bIns="0" rtlCol="0" anchor="ctr"/>
+          <a:lstStyle/>
+          <a:p>
+            <a:pPr indent="0" marL="0">
+              <a:buNone/>
+            </a:pPr>
+            <a:r>
+              <a:rPr lang="en-US" sz="1500" b="1" dirty="0">
+                <a:solidFill>
+                  <a:srgbClr val="C2413C"/>
+                </a:solidFill>
+                <a:latin typeface="Calibri" pitchFamily="34" charset="0"/>
+                <a:ea typeface="Calibri" pitchFamily="34" charset="-122"/>
+                <a:cs typeface="Calibri" pitchFamily="34" charset="-120"/>
+              </a:rPr>
+              <a:t>⬇️ Bascule (failover)</a:t>
+            </a:r>
+            <a:endParaRPr lang="en-US" sz="1500" dirty="0"/>
           </a:p>
         </p:txBody>
       </p:sp>
@@ -2459,24 +2726,27 @@
         </p:nvSpPr>
         <p:spPr>
           <a:xfrm>
-            <a:off x="3566160" y="1920240"/>
-            <a:ext cx="7863840" cy="685800"/>
-          </a:xfrm>
-          <a:prstGeom prst="rect">
-            <a:avLst/>
-          </a:prstGeom>
-          <a:noFill/>
-          <a:ln/>
-        </p:spPr>
-        <p:txBody>
-          <a:bodyPr wrap="square" lIns="0" tIns="0" rIns="0" bIns="0" rtlCol="0" anchor="ctr"/>
-          <a:lstStyle/>
-          <a:p>
-            <a:pPr indent="0" marL="0">
-              <a:buNone/>
-            </a:pPr>
-            <a:r>
-              <a:rPr lang="en-US" sz="1350" dirty="0">
+            <a:off x="777240" y="2212848"/>
+            <a:ext cx="5074920" cy="2286000"/>
+          </a:xfrm>
+          <a:prstGeom prst="rect">
+            <a:avLst/>
+          </a:prstGeom>
+          <a:noFill/>
+          <a:ln/>
+        </p:spPr>
+        <p:txBody>
+          <a:bodyPr wrap="square" lIns="0" tIns="0" rIns="0" bIns="0" rtlCol="0" anchor="ctr"/>
+          <a:lstStyle/>
+          <a:p>
+            <a:pPr indent="0" marL="0">
+              <a:lnSpc>
+                <a:spcPct val="125000"/>
+              </a:lnSpc>
+              <a:buNone/>
+            </a:pPr>
+            <a:r>
+              <a:rPr lang="en-US" sz="1250" dirty="0">
                 <a:solidFill>
                   <a:srgbClr val="261E48"/>
                 </a:solidFill>
@@ -2484,9 +2754,129 @@
                 <a:ea typeface="Calibri" pitchFamily="34" charset="-122"/>
                 <a:cs typeface="Calibri" pitchFamily="34" charset="-120"/>
               </a:rPr>
-              <a:t>Risques reliés à l'architecture et aux attaques réellement testées</a:t>
-            </a:r>
-            <a:endParaRPr lang="en-US" sz="1350" dirty="0"/>
+              <a:t>• 3 échecs de réplication consécutifs (2 s)</a:t>
+            </a:r>
+            <a:endParaRPr lang="en-US" sz="1250" dirty="0"/>
+          </a:p>
+          <a:p>
+            <a:pPr indent="0" marL="0">
+              <a:lnSpc>
+                <a:spcPct val="125000"/>
+              </a:lnSpc>
+              <a:buNone/>
+            </a:pPr>
+            <a:r>
+              <a:rPr lang="en-US" sz="1250" dirty="0">
+                <a:solidFill>
+                  <a:srgbClr val="261E48"/>
+                </a:solidFill>
+                <a:latin typeface="Calibri" pitchFamily="34" charset="0"/>
+                <a:ea typeface="Calibri" pitchFamily="34" charset="-122"/>
+                <a:cs typeface="Calibri" pitchFamily="34" charset="-120"/>
+              </a:rPr>
+              <a:t>• Le SECOURS est promu automatiquement</a:t>
+            </a:r>
+            <a:endParaRPr lang="en-US" sz="1250" dirty="0"/>
+          </a:p>
+          <a:p>
+            <a:pPr indent="0" marL="0">
+              <a:lnSpc>
+                <a:spcPct val="125000"/>
+              </a:lnSpc>
+              <a:buNone/>
+            </a:pPr>
+            <a:r>
+              <a:rPr lang="en-US" sz="1250" dirty="0">
+                <a:solidFill>
+                  <a:srgbClr val="261E48"/>
+                </a:solidFill>
+                <a:latin typeface="Calibri" pitchFamily="34" charset="0"/>
+                <a:ea typeface="Calibri" pitchFamily="34" charset="-122"/>
+                <a:cs typeface="Calibri" pitchFamily="34" charset="-120"/>
+              </a:rPr>
+              <a:t>• Les clients basculent via nginx (upstream)</a:t>
+            </a:r>
+            <a:endParaRPr lang="en-US" sz="1250" dirty="0"/>
+          </a:p>
+          <a:p>
+            <a:pPr indent="0" marL="0">
+              <a:lnSpc>
+                <a:spcPct val="125000"/>
+              </a:lnSpc>
+              <a:buNone/>
+            </a:pPr>
+            <a:r>
+              <a:rPr lang="en-US" sz="1250" dirty="0">
+                <a:solidFill>
+                  <a:srgbClr val="261E48"/>
+                </a:solidFill>
+                <a:latin typeface="Calibri" pitchFamily="34" charset="0"/>
+                <a:ea typeface="Calibri" pitchFamily="34" charset="-122"/>
+                <a:cs typeface="Calibri" pitchFamily="34" charset="-120"/>
+              </a:rPr>
+              <a:t>• Clés d'idempotence → reprise exactly-once</a:t>
+            </a:r>
+            <a:endParaRPr lang="en-US" sz="1250" dirty="0"/>
+          </a:p>
+          <a:p>
+            <a:pPr indent="0" marL="0">
+              <a:lnSpc>
+                <a:spcPct val="125000"/>
+              </a:lnSpc>
+              <a:buNone/>
+            </a:pPr>
+            <a:r>
+              <a:rPr lang="en-US" sz="1250" dirty="0">
+                <a:solidFill>
+                  <a:srgbClr val="261E48"/>
+                </a:solidFill>
+                <a:latin typeface="Calibri" pitchFamily="34" charset="0"/>
+                <a:ea typeface="Calibri" pitchFamily="34" charset="-122"/>
+                <a:cs typeface="Calibri" pitchFamily="34" charset="-120"/>
+              </a:rPr>
+              <a:t>  (pas de double débit)</a:t>
+            </a:r>
+            <a:endParaRPr lang="en-US" sz="1250" dirty="0"/>
+          </a:p>
+          <a:p>
+            <a:pPr indent="0" marL="0">
+              <a:lnSpc>
+                <a:spcPct val="125000"/>
+              </a:lnSpc>
+              <a:buNone/>
+            </a:pPr>
+            <a:r>
+              <a:rPr lang="en-US" sz="1250" dirty="0">
+                <a:solidFill>
+                  <a:srgbClr val="261E48"/>
+                </a:solidFill>
+                <a:latin typeface="Calibri" pitchFamily="34" charset="0"/>
+                <a:ea typeface="Calibri" pitchFamily="34" charset="-122"/>
+                <a:cs typeface="Calibri" pitchFamily="34" charset="-120"/>
+              </a:rPr>
+              <a:t>• Le cockpit hôte reste vivant (son nginx</a:t>
+            </a:r>
+            <a:endParaRPr lang="en-US" sz="1250" dirty="0"/>
+          </a:p>
+          <a:p>
+            <a:pPr indent="0" marL="0">
+              <a:lnSpc>
+                <a:spcPct val="125000"/>
+              </a:lnSpc>
+              <a:buNone/>
+            </a:pPr>
+            <a:r>
+              <a:rPr lang="en-US" sz="1250" dirty="0">
+                <a:solidFill>
+                  <a:srgbClr val="261E48"/>
+                </a:solidFill>
+                <a:latin typeface="Calibri" pitchFamily="34" charset="0"/>
+                <a:ea typeface="Calibri" pitchFamily="34" charset="-122"/>
+                <a:cs typeface="Calibri" pitchFamily="34" charset="-120"/>
+              </a:rPr>
+              <a:t>  bascule aussi)</a:t>
+            </a:r>
+            <a:endParaRPr lang="en-US" sz="1250" dirty="0"/>
           </a:p>
         </p:txBody>
       </p:sp>
@@ -2498,16 +2888,16 @@
         </p:nvSpPr>
         <p:spPr>
           <a:xfrm>
-            <a:off x="548640" y="2926080"/>
-            <a:ext cx="11064240" cy="1005840"/>
+            <a:off x="6217920" y="1600200"/>
+            <a:ext cx="5394960" cy="2926080"/>
           </a:xfrm>
           <a:prstGeom prst="roundRect">
             <a:avLst>
-              <a:gd name="adj" fmla="val 7273"/>
+              <a:gd name="adj" fmla="val 2500"/>
             </a:avLst>
           </a:prstGeom>
           <a:solidFill>
-            <a:srgbClr val="EEF0F8"/>
+            <a:srgbClr val="E3F3EC"/>
           </a:solidFill>
           <a:ln/>
           <a:effectLst>
@@ -2527,34 +2917,34 @@
         </p:nvSpPr>
         <p:spPr>
           <a:xfrm>
-            <a:off x="777240" y="3090672"/>
-            <a:ext cx="2743200" cy="640080"/>
-          </a:xfrm>
-          <a:prstGeom prst="rect">
-            <a:avLst/>
-          </a:prstGeom>
-          <a:noFill/>
-          <a:ln/>
-        </p:spPr>
-        <p:txBody>
-          <a:bodyPr wrap="square" lIns="0" tIns="0" rIns="0" bIns="0" rtlCol="0" anchor="ctr"/>
-          <a:lstStyle/>
-          <a:p>
-            <a:pPr indent="0" marL="0">
-              <a:buNone/>
-            </a:pPr>
-            <a:r>
-              <a:rPr lang="en-US" sz="1600" b="1" dirty="0">
-                <a:solidFill>
-                  <a:srgbClr val="4B3FA6"/>
-                </a:solidFill>
-                <a:latin typeface="Calibri" pitchFamily="34" charset="0"/>
-                <a:ea typeface="Calibri" pitchFamily="34" charset="-122"/>
-                <a:cs typeface="Calibri" pitchFamily="34" charset="-120"/>
-              </a:rPr>
-              <a:t>PCA / PRA</a:t>
-            </a:r>
-            <a:endParaRPr lang="en-US" sz="1600" dirty="0"/>
+            <a:off x="6446520" y="1755648"/>
+            <a:ext cx="4937760" cy="411480"/>
+          </a:xfrm>
+          <a:prstGeom prst="rect">
+            <a:avLst/>
+          </a:prstGeom>
+          <a:noFill/>
+          <a:ln/>
+        </p:spPr>
+        <p:txBody>
+          <a:bodyPr wrap="square" lIns="0" tIns="0" rIns="0" bIns="0" rtlCol="0" anchor="ctr"/>
+          <a:lstStyle/>
+          <a:p>
+            <a:pPr indent="0" marL="0">
+              <a:buNone/>
+            </a:pPr>
+            <a:r>
+              <a:rPr lang="en-US" sz="1500" b="1" dirty="0">
+                <a:solidFill>
+                  <a:srgbClr val="1E8E6A"/>
+                </a:solidFill>
+                <a:latin typeface="Calibri" pitchFamily="34" charset="0"/>
+                <a:ea typeface="Calibri" pitchFamily="34" charset="-122"/>
+                <a:cs typeface="Calibri" pitchFamily="34" charset="-120"/>
+              </a:rPr>
+              <a:t>⬆️ Retour (failback)</a:t>
+            </a:r>
+            <a:endParaRPr lang="en-US" sz="1500" dirty="0"/>
           </a:p>
         </p:txBody>
       </p:sp>
@@ -2566,24 +2956,27 @@
         </p:nvSpPr>
         <p:spPr>
           <a:xfrm>
-            <a:off x="3566160" y="3108960"/>
-            <a:ext cx="7863840" cy="685800"/>
-          </a:xfrm>
-          <a:prstGeom prst="rect">
-            <a:avLst/>
-          </a:prstGeom>
-          <a:noFill/>
-          <a:ln/>
-        </p:spPr>
-        <p:txBody>
-          <a:bodyPr wrap="square" lIns="0" tIns="0" rIns="0" bIns="0" rtlCol="0" anchor="ctr"/>
-          <a:lstStyle/>
-          <a:p>
-            <a:pPr indent="0" marL="0">
-              <a:buNone/>
-            </a:pPr>
-            <a:r>
-              <a:rPr lang="en-US" sz="1350" dirty="0">
+            <a:off x="6446520" y="2212848"/>
+            <a:ext cx="4983480" cy="2286000"/>
+          </a:xfrm>
+          <a:prstGeom prst="rect">
+            <a:avLst/>
+          </a:prstGeom>
+          <a:noFill/>
+          <a:ln/>
+        </p:spPr>
+        <p:txBody>
+          <a:bodyPr wrap="square" lIns="0" tIns="0" rIns="0" bIns="0" rtlCol="0" anchor="ctr"/>
+          <a:lstStyle/>
+          <a:p>
+            <a:pPr indent="0" marL="0">
+              <a:lnSpc>
+                <a:spcPct val="125000"/>
+              </a:lnSpc>
+              <a:buNone/>
+            </a:pPr>
+            <a:r>
+              <a:rPr lang="en-US" sz="1250" dirty="0">
                 <a:solidFill>
                   <a:srgbClr val="261E48"/>
                 </a:solidFill>
@@ -2591,9 +2984,89 @@
                 <a:ea typeface="Calibri" pitchFamily="34" charset="-122"/>
                 <a:cs typeface="Calibri" pitchFamily="34" charset="-120"/>
               </a:rPr>
-              <a:t>Services vitaux, RTO ~15 s mesuré, 2 playbooks, responsabilités</a:t>
-            </a:r>
-            <a:endParaRPr lang="en-US" sz="1350" dirty="0"/>
+              <a:t>• Le principal se répare</a:t>
+            </a:r>
+            <a:endParaRPr lang="en-US" sz="1250" dirty="0"/>
+          </a:p>
+          <a:p>
+            <a:pPr indent="0" marL="0">
+              <a:lnSpc>
+                <a:spcPct val="125000"/>
+              </a:lnSpc>
+              <a:buNone/>
+            </a:pPr>
+            <a:r>
+              <a:rPr lang="en-US" sz="1250" dirty="0">
+                <a:solidFill>
+                  <a:srgbClr val="261E48"/>
+                </a:solidFill>
+                <a:latin typeface="Calibri" pitchFamily="34" charset="0"/>
+                <a:ea typeface="Calibri" pitchFamily="34" charset="-122"/>
+                <a:cs typeface="Calibri" pitchFamily="34" charset="-120"/>
+              </a:rPr>
+              <a:t>• Le secours lui REJOUE son état</a:t>
+            </a:r>
+            <a:endParaRPr lang="en-US" sz="1250" dirty="0"/>
+          </a:p>
+          <a:p>
+            <a:pPr indent="0" marL="0">
+              <a:lnSpc>
+                <a:spcPct val="125000"/>
+              </a:lnSpc>
+              <a:buNone/>
+            </a:pPr>
+            <a:r>
+              <a:rPr lang="en-US" sz="1250" dirty="0">
+                <a:solidFill>
+                  <a:srgbClr val="261E48"/>
+                </a:solidFill>
+                <a:latin typeface="Calibri" pitchFamily="34" charset="0"/>
+                <a:ea typeface="Calibri" pitchFamily="34" charset="-122"/>
+                <a:cs typeface="Calibri" pitchFamily="34" charset="-120"/>
+              </a:rPr>
+              <a:t>  (réconciliation — rien de perdu)</a:t>
+            </a:r>
+            <a:endParaRPr lang="en-US" sz="1250" dirty="0"/>
+          </a:p>
+          <a:p>
+            <a:pPr indent="0" marL="0">
+              <a:lnSpc>
+                <a:spcPct val="125000"/>
+              </a:lnSpc>
+              <a:buNone/>
+            </a:pPr>
+            <a:r>
+              <a:rPr lang="en-US" sz="1250" dirty="0">
+                <a:solidFill>
+                  <a:srgbClr val="261E48"/>
+                </a:solidFill>
+                <a:latin typeface="Calibri" pitchFamily="34" charset="0"/>
+                <a:ea typeface="Calibri" pitchFamily="34" charset="-122"/>
+                <a:cs typeface="Calibri" pitchFamily="34" charset="-120"/>
+              </a:rPr>
+              <a:t>• Puis repasse en mode réplication</a:t>
+            </a:r>
+            <a:endParaRPr lang="en-US" sz="1250" dirty="0"/>
+          </a:p>
+          <a:p>
+            <a:pPr indent="0" marL="0">
+              <a:lnSpc>
+                <a:spcPct val="125000"/>
+              </a:lnSpc>
+              <a:buNone/>
+            </a:pPr>
+            <a:r>
+              <a:rPr lang="en-US" sz="1250" dirty="0">
+                <a:solidFill>
+                  <a:srgbClr val="261E48"/>
+                </a:solidFill>
+                <a:latin typeface="Calibri" pitchFamily="34" charset="0"/>
+                <a:ea typeface="Calibri" pitchFamily="34" charset="-122"/>
+                <a:cs typeface="Calibri" pitchFamily="34" charset="-120"/>
+              </a:rPr>
+              <a:t>• Le principal reprend la main</a:t>
+            </a:r>
+            <a:endParaRPr lang="en-US" sz="1250" dirty="0"/>
           </a:p>
         </p:txBody>
       </p:sp>
@@ -2605,16 +3078,16 @@
         </p:nvSpPr>
         <p:spPr>
           <a:xfrm>
-            <a:off x="548640" y="4114800"/>
-            <a:ext cx="11064240" cy="1005840"/>
+            <a:off x="548640" y="4709160"/>
+            <a:ext cx="11064240" cy="1600200"/>
           </a:xfrm>
           <a:prstGeom prst="roundRect">
             <a:avLst>
-              <a:gd name="adj" fmla="val 7273"/>
+              <a:gd name="adj" fmla="val 4571"/>
             </a:avLst>
           </a:prstGeom>
           <a:solidFill>
-            <a:srgbClr val="EEF0F8"/>
+            <a:srgbClr val="261E48"/>
           </a:solidFill>
           <a:ln/>
           <a:effectLst>
@@ -2634,34 +3107,34 @@
         </p:nvSpPr>
         <p:spPr>
           <a:xfrm>
-            <a:off x="777240" y="4279392"/>
-            <a:ext cx="2743200" cy="640080"/>
-          </a:xfrm>
-          <a:prstGeom prst="rect">
-            <a:avLst/>
-          </a:prstGeom>
-          <a:noFill/>
-          <a:ln/>
-        </p:spPr>
-        <p:txBody>
-          <a:bodyPr wrap="square" lIns="0" tIns="0" rIns="0" bIns="0" rtlCol="0" anchor="ctr"/>
-          <a:lstStyle/>
-          <a:p>
-            <a:pPr indent="0" marL="0">
-              <a:buNone/>
-            </a:pPr>
-            <a:r>
-              <a:rPr lang="en-US" sz="1600" b="1" dirty="0">
-                <a:solidFill>
-                  <a:srgbClr val="4B3FA6"/>
-                </a:solidFill>
-                <a:latin typeface="Calibri" pitchFamily="34" charset="0"/>
-                <a:ea typeface="Calibri" pitchFamily="34" charset="-122"/>
-                <a:cs typeface="Calibri" pitchFamily="34" charset="-120"/>
-              </a:rPr>
-              <a:t>NIS2 / DORA</a:t>
-            </a:r>
-            <a:endParaRPr lang="en-US" sz="1600" dirty="0"/>
+            <a:off x="822960" y="4846320"/>
+            <a:ext cx="10515600" cy="365760"/>
+          </a:xfrm>
+          <a:prstGeom prst="rect">
+            <a:avLst/>
+          </a:prstGeom>
+          <a:noFill/>
+          <a:ln/>
+        </p:spPr>
+        <p:txBody>
+          <a:bodyPr wrap="square" lIns="0" tIns="0" rIns="0" bIns="0" rtlCol="0" anchor="ctr"/>
+          <a:lstStyle/>
+          <a:p>
+            <a:pPr indent="0" marL="0">
+              <a:buNone/>
+            </a:pPr>
+            <a:r>
+              <a:rPr lang="en-US" sz="1400" b="1" dirty="0">
+                <a:solidFill>
+                  <a:srgbClr val="FFFFFF"/>
+                </a:solidFill>
+                <a:latin typeface="Calibri" pitchFamily="34" charset="0"/>
+                <a:ea typeface="Calibri" pitchFamily="34" charset="-122"/>
+                <a:cs typeface="Calibri" pitchFamily="34" charset="-120"/>
+              </a:rPr>
+              <a:t>Essai bout en bout — la preuve</a:t>
+            </a:r>
+            <a:endParaRPr lang="en-US" sz="1400" dirty="0"/>
           </a:p>
         </p:txBody>
       </p:sp>
@@ -2673,47 +3146,8 @@
         </p:nvSpPr>
         <p:spPr>
           <a:xfrm>
-            <a:off x="3566160" y="4297680"/>
-            <a:ext cx="7863840" cy="685800"/>
-          </a:xfrm>
-          <a:prstGeom prst="rect">
-            <a:avLst/>
-          </a:prstGeom>
-          <a:noFill/>
-          <a:ln/>
-        </p:spPr>
-        <p:txBody>
-          <a:bodyPr wrap="square" lIns="0" tIns="0" rIns="0" bIns="0" rtlCol="0" anchor="ctr"/>
-          <a:lstStyle/>
-          <a:p>
-            <a:pPr indent="0" marL="0">
-              <a:buNone/>
-            </a:pPr>
-            <a:r>
-              <a:rPr lang="en-US" sz="1350" dirty="0">
-                <a:solidFill>
-                  <a:srgbClr val="261E48"/>
-                </a:solidFill>
-                <a:latin typeface="Calibri" pitchFamily="34" charset="0"/>
-                <a:ea typeface="Calibri" pitchFamily="34" charset="-122"/>
-                <a:cs typeface="Calibri" pitchFamily="34" charset="-120"/>
-              </a:rPr>
-              <a:t>Exigences pertinentes vs non démontrables en 4 jours</a:t>
-            </a:r>
-            <a:endParaRPr lang="en-US" sz="1350" dirty="0"/>
-          </a:p>
-        </p:txBody>
-      </p:sp>
-      <p:sp>
-        <p:nvSpPr>
-          <p:cNvPr id="13" name="Text 11"/>
-          <p:cNvSpPr txBox="1"/>
-          <p:nvPr/>
-        </p:nvSpPr>
-        <p:spPr>
-          <a:xfrm>
-            <a:off x="548640" y="5486400"/>
-            <a:ext cx="10972800" cy="822960"/>
+            <a:off x="822960" y="5257800"/>
+            <a:ext cx="10515600" cy="914400"/>
           </a:xfrm>
           <a:prstGeom prst="rect">
             <a:avLst/>
@@ -2732,17 +3166,85 @@
               <a:buNone/>
             </a:pPr>
             <a:r>
-              <a:rPr lang="en-US" sz="1350" b="1" dirty="0">
-                <a:solidFill>
-                  <a:srgbClr val="261E48"/>
-                </a:solidFill>
-                <a:latin typeface="Calibri" pitchFamily="34" charset="0"/>
-                <a:ea typeface="Calibri" pitchFamily="34" charset="-122"/>
-                <a:cs typeface="Calibri" pitchFamily="34" charset="-120"/>
-              </a:rPr>
-              <a:t>Recommandations : industrialiser la reprise (HA + WAF réseau) · formaliser la notification d'incident · tests de résilience réguliers.</a:t>
-            </a:r>
-            <a:endParaRPr lang="en-US" sz="1350" dirty="0"/>
+              <a:rPr lang="en-US" sz="1400" dirty="0">
+                <a:solidFill>
+                  <a:srgbClr val="E4E6F3"/>
+                </a:solidFill>
+                <a:latin typeface="Calibri" pitchFamily="34" charset="0"/>
+                <a:ea typeface="Calibri" pitchFamily="34" charset="-122"/>
+                <a:cs typeface="Calibri" pitchFamily="34" charset="-120"/>
+              </a:rPr>
+              <a:t>PRINCIPAL sert → arrêt → ~6–11 s : SECOURS promu → crédit de 50 € PENDANT la panne (</a:t>
+            </a:r>
+            <a:pPr indent="0" marL="0">
+              <a:lnSpc>
+                <a:spcPct val="120000"/>
+              </a:lnSpc>
+              <a:buNone/>
+            </a:pPr>
+            <a:r>
+              <a:rPr lang="en-US" sz="1400" b="1" dirty="0">
+                <a:solidFill>
+                  <a:srgbClr val="FFFFFF"/>
+                </a:solidFill>
+                <a:latin typeface="Calibri" pitchFamily="34" charset="0"/>
+                <a:ea typeface="Calibri" pitchFamily="34" charset="-122"/>
+                <a:cs typeface="Calibri" pitchFamily="34" charset="-120"/>
+              </a:rPr>
+              <a:t>787 € → 837 €</a:t>
+            </a:r>
+            <a:pPr indent="0" marL="0">
+              <a:lnSpc>
+                <a:spcPct val="120000"/>
+              </a:lnSpc>
+              <a:buNone/>
+            </a:pPr>
+            <a:r>
+              <a:rPr lang="en-US" sz="1400" dirty="0">
+                <a:solidFill>
+                  <a:srgbClr val="E4E6F3"/>
+                </a:solidFill>
+                <a:latin typeface="Calibri" pitchFamily="34" charset="0"/>
+                <a:ea typeface="Calibri" pitchFamily="34" charset="-122"/>
+                <a:cs typeface="Calibri" pitchFamily="34" charset="-120"/>
+              </a:rPr>
+              <a:t>) → redémarrage → ~15 s : retour au PRINCIPAL, solde lu = </a:t>
+            </a:r>
+            <a:pPr indent="0" marL="0">
+              <a:lnSpc>
+                <a:spcPct val="120000"/>
+              </a:lnSpc>
+              <a:buNone/>
+            </a:pPr>
+            <a:r>
+              <a:rPr lang="en-US" sz="1400" b="1" dirty="0">
+                <a:solidFill>
+                  <a:srgbClr val="FFFFFF"/>
+                </a:solidFill>
+                <a:latin typeface="Calibri" pitchFamily="34" charset="0"/>
+                <a:ea typeface="Calibri" pitchFamily="34" charset="-122"/>
+                <a:cs typeface="Calibri" pitchFamily="34" charset="-120"/>
+              </a:rPr>
+              <a:t>837 €</a:t>
+            </a:r>
+            <a:pPr indent="0" marL="0">
+              <a:lnSpc>
+                <a:spcPct val="120000"/>
+              </a:lnSpc>
+              <a:buNone/>
+            </a:pPr>
+            <a:r>
+              <a:rPr lang="en-US" sz="1400" dirty="0">
+                <a:solidFill>
+                  <a:srgbClr val="E4E6F3"/>
+                </a:solidFill>
+                <a:latin typeface="Calibri" pitchFamily="34" charset="0"/>
+                <a:ea typeface="Calibri" pitchFamily="34" charset="-122"/>
+                <a:cs typeface="Calibri" pitchFamily="34" charset="-120"/>
+              </a:rPr>
+              <a:t>  ·  aucune transaction perdue</a:t>
+            </a:r>
+            <a:endParaRPr lang="en-US" sz="1400" dirty="0"/>
           </a:p>
         </p:txBody>
       </p:sp>
@@ -2757,6 +3259,2321 @@
 <file path=ppt/slides/slide11.xml><?xml version="1.0" encoding="utf-8"?>
 <p:sld xmlns:a="http://schemas.openxmlformats.org/drawingml/2006/main" xmlns:r="http://schemas.openxmlformats.org/officeDocument/2006/relationships" xmlns:p="http://schemas.openxmlformats.org/presentationml/2006/main">
   <p:cSld name="Slide 11">
+    <p:bg>
+      <p:bgPr>
+        <a:solidFill>
+          <a:srgbClr val="FFFFFF"/>
+        </a:solidFill>
+      </p:bgPr>
+    </p:bg>
+    <p:spTree>
+      <p:nvGrpSpPr>
+        <p:cNvPr id="1" name=""/>
+        <p:cNvGrpSpPr/>
+        <p:nvPr/>
+      </p:nvGrpSpPr>
+      <p:grpSpPr>
+        <a:xfrm>
+          <a:off x="0" y="0"/>
+          <a:ext cx="0" cy="0"/>
+          <a:chOff x="0" y="0"/>
+          <a:chExt cx="0" cy="0"/>
+        </a:xfrm>
+      </p:grpSpPr>
+      <p:sp>
+        <p:nvSpPr>
+          <p:cNvPr id="2" name="Text 0"/>
+          <p:cNvSpPr txBox="1"/>
+          <p:nvPr/>
+        </p:nvSpPr>
+        <p:spPr>
+          <a:xfrm>
+            <a:off x="548640" y="411480"/>
+            <a:ext cx="10972800" cy="274320"/>
+          </a:xfrm>
+          <a:prstGeom prst="rect">
+            <a:avLst/>
+          </a:prstGeom>
+          <a:noFill/>
+          <a:ln/>
+        </p:spPr>
+        <p:txBody>
+          <a:bodyPr wrap="square" lIns="0" tIns="0" rIns="0" bIns="0" rtlCol="0" anchor="ctr"/>
+          <a:lstStyle/>
+          <a:p>
+            <a:pPr indent="0" marL="0">
+              <a:buNone/>
+            </a:pPr>
+            <a:r>
+              <a:rPr lang="en-US" sz="1200" b="1" spc="200" kern="0" dirty="0">
+                <a:solidFill>
+                  <a:srgbClr val="4B3FA6"/>
+                </a:solidFill>
+                <a:latin typeface="Calibri" pitchFamily="34" charset="0"/>
+                <a:ea typeface="Calibri" pitchFamily="34" charset="-122"/>
+                <a:cs typeface="Calibri" pitchFamily="34" charset="-120"/>
+              </a:rPr>
+              <a:t>CYBERSÉCURITÉ</a:t>
+            </a:r>
+            <a:endParaRPr lang="en-US" sz="1200" dirty="0"/>
+          </a:p>
+        </p:txBody>
+      </p:sp>
+      <p:sp>
+        <p:nvSpPr>
+          <p:cNvPr id="3" name="Text 1"/>
+          <p:cNvSpPr txBox="1"/>
+          <p:nvPr/>
+        </p:nvSpPr>
+        <p:spPr>
+          <a:xfrm>
+            <a:off x="548640" y="658368"/>
+            <a:ext cx="11064240" cy="640080"/>
+          </a:xfrm>
+          <a:prstGeom prst="rect">
+            <a:avLst/>
+          </a:prstGeom>
+          <a:noFill/>
+          <a:ln/>
+        </p:spPr>
+        <p:txBody>
+          <a:bodyPr wrap="square" lIns="0" tIns="0" rIns="0" bIns="0" rtlCol="0" anchor="ctr"/>
+          <a:lstStyle/>
+          <a:p>
+            <a:pPr indent="0" marL="0">
+              <a:buNone/>
+            </a:pPr>
+            <a:r>
+              <a:rPr lang="en-US" sz="3000" b="1" dirty="0">
+                <a:solidFill>
+                  <a:srgbClr val="261E48"/>
+                </a:solidFill>
+                <a:latin typeface="Calibri" pitchFamily="34" charset="0"/>
+                <a:ea typeface="Calibri" pitchFamily="34" charset="-122"/>
+                <a:cs typeface="Calibri" pitchFamily="34" charset="-120"/>
+              </a:rPr>
+              <a:t>Défense &amp; sécurité</a:t>
+            </a:r>
+            <a:endParaRPr lang="en-US" sz="3000" dirty="0"/>
+          </a:p>
+        </p:txBody>
+      </p:sp>
+      <p:sp>
+        <p:nvSpPr>
+          <p:cNvPr id="4" name="Shape 2"/>
+          <p:cNvSpPr/>
+          <p:nvPr/>
+        </p:nvSpPr>
+        <p:spPr>
+          <a:xfrm>
+            <a:off x="548640" y="1737360"/>
+            <a:ext cx="3566160" cy="1828800"/>
+          </a:xfrm>
+          <a:prstGeom prst="roundRect">
+            <a:avLst>
+              <a:gd name="adj" fmla="val 4000"/>
+            </a:avLst>
+          </a:prstGeom>
+          <a:solidFill>
+            <a:srgbClr val="EEF0F8"/>
+          </a:solidFill>
+          <a:ln/>
+          <a:effectLst>
+            <a:outerShdw sx="100000" sy="100000" kx="0" ky="0" algn="bl" rotWithShape="0" blurRad="76200" dist="25400" dir="5400000">
+              <a:srgbClr val="888888">
+                <a:alpha val="25000"/>
+              </a:srgbClr>
+            </a:outerShdw>
+          </a:effectLst>
+        </p:spPr>
+      </p:sp>
+      <p:sp>
+        <p:nvSpPr>
+          <p:cNvPr id="5" name="Text 3"/>
+          <p:cNvSpPr txBox="1"/>
+          <p:nvPr/>
+        </p:nvSpPr>
+        <p:spPr>
+          <a:xfrm>
+            <a:off x="731520" y="1920240"/>
+            <a:ext cx="914400" cy="548640"/>
+          </a:xfrm>
+          <a:prstGeom prst="rect">
+            <a:avLst/>
+          </a:prstGeom>
+          <a:noFill/>
+          <a:ln/>
+        </p:spPr>
+        <p:txBody>
+          <a:bodyPr wrap="square" lIns="0" tIns="0" rIns="0" bIns="0" rtlCol="0" anchor="ctr"/>
+          <a:lstStyle/>
+          <a:p>
+            <a:pPr indent="0" marL="0">
+              <a:buNone/>
+            </a:pPr>
+            <a:r>
+              <a:rPr lang="en-US" sz="2600" dirty="0">
+                <a:solidFill>
+                  <a:srgbClr val="000000"/>
+                </a:solidFill>
+                <a:latin typeface="Calibri" pitchFamily="34" charset="0"/>
+                <a:ea typeface="Calibri" pitchFamily="34" charset="-122"/>
+                <a:cs typeface="Calibri" pitchFamily="34" charset="-120"/>
+              </a:rPr>
+              <a:t>🛡️</a:t>
+            </a:r>
+            <a:endParaRPr lang="en-US" sz="2600" dirty="0"/>
+          </a:p>
+        </p:txBody>
+      </p:sp>
+      <p:sp>
+        <p:nvSpPr>
+          <p:cNvPr id="6" name="Text 4"/>
+          <p:cNvSpPr txBox="1"/>
+          <p:nvPr/>
+        </p:nvSpPr>
+        <p:spPr>
+          <a:xfrm>
+            <a:off x="731520" y="2514600"/>
+            <a:ext cx="3200400" cy="365760"/>
+          </a:xfrm>
+          <a:prstGeom prst="rect">
+            <a:avLst/>
+          </a:prstGeom>
+          <a:noFill/>
+          <a:ln/>
+        </p:spPr>
+        <p:txBody>
+          <a:bodyPr wrap="square" lIns="0" tIns="0" rIns="0" bIns="0" rtlCol="0" anchor="ctr"/>
+          <a:lstStyle/>
+          <a:p>
+            <a:pPr indent="0" marL="0">
+              <a:buNone/>
+            </a:pPr>
+            <a:r>
+              <a:rPr lang="en-US" sz="1500" b="1" dirty="0">
+                <a:solidFill>
+                  <a:srgbClr val="261E48"/>
+                </a:solidFill>
+                <a:latin typeface="Calibri" pitchFamily="34" charset="0"/>
+                <a:ea typeface="Calibri" pitchFamily="34" charset="-122"/>
+                <a:cs typeface="Calibri" pitchFamily="34" charset="-120"/>
+              </a:rPr>
+              <a:t>WAF applicatif</a:t>
+            </a:r>
+            <a:endParaRPr lang="en-US" sz="1500" dirty="0"/>
+          </a:p>
+        </p:txBody>
+      </p:sp>
+      <p:sp>
+        <p:nvSpPr>
+          <p:cNvPr id="7" name="Text 5"/>
+          <p:cNvSpPr txBox="1"/>
+          <p:nvPr/>
+        </p:nvSpPr>
+        <p:spPr>
+          <a:xfrm>
+            <a:off x="731520" y="2880360"/>
+            <a:ext cx="3200400" cy="594360"/>
+          </a:xfrm>
+          <a:prstGeom prst="rect">
+            <a:avLst/>
+          </a:prstGeom>
+          <a:noFill/>
+          <a:ln/>
+        </p:spPr>
+        <p:txBody>
+          <a:bodyPr wrap="square" lIns="0" tIns="0" rIns="0" bIns="0" rtlCol="0" anchor="ctr"/>
+          <a:lstStyle/>
+          <a:p>
+            <a:pPr indent="0" marL="0">
+              <a:buNone/>
+            </a:pPr>
+            <a:r>
+              <a:rPr lang="en-US" sz="1200" dirty="0">
+                <a:solidFill>
+                  <a:srgbClr val="6A6594"/>
+                </a:solidFill>
+                <a:latin typeface="Calibri" pitchFamily="34" charset="0"/>
+                <a:ea typeface="Calibri" pitchFamily="34" charset="-122"/>
+                <a:cs typeface="Calibri" pitchFamily="34" charset="-120"/>
+              </a:rPr>
+              <a:t>SQLi/XSS bloqués (403) + métrique + log</a:t>
+            </a:r>
+            <a:endParaRPr lang="en-US" sz="1200" dirty="0"/>
+          </a:p>
+        </p:txBody>
+      </p:sp>
+      <p:sp>
+        <p:nvSpPr>
+          <p:cNvPr id="8" name="Shape 6"/>
+          <p:cNvSpPr/>
+          <p:nvPr/>
+        </p:nvSpPr>
+        <p:spPr>
+          <a:xfrm>
+            <a:off x="4297680" y="1737360"/>
+            <a:ext cx="3566160" cy="1828800"/>
+          </a:xfrm>
+          <a:prstGeom prst="roundRect">
+            <a:avLst>
+              <a:gd name="adj" fmla="val 4000"/>
+            </a:avLst>
+          </a:prstGeom>
+          <a:solidFill>
+            <a:srgbClr val="EEF0F8"/>
+          </a:solidFill>
+          <a:ln/>
+          <a:effectLst>
+            <a:outerShdw sx="100000" sy="100000" kx="0" ky="0" algn="bl" rotWithShape="0" blurRad="76200" dist="25400" dir="5400000">
+              <a:srgbClr val="888888">
+                <a:alpha val="25000"/>
+              </a:srgbClr>
+            </a:outerShdw>
+          </a:effectLst>
+        </p:spPr>
+      </p:sp>
+      <p:sp>
+        <p:nvSpPr>
+          <p:cNvPr id="9" name="Text 7"/>
+          <p:cNvSpPr txBox="1"/>
+          <p:nvPr/>
+        </p:nvSpPr>
+        <p:spPr>
+          <a:xfrm>
+            <a:off x="4480560" y="1920240"/>
+            <a:ext cx="914400" cy="548640"/>
+          </a:xfrm>
+          <a:prstGeom prst="rect">
+            <a:avLst/>
+          </a:prstGeom>
+          <a:noFill/>
+          <a:ln/>
+        </p:spPr>
+        <p:txBody>
+          <a:bodyPr wrap="square" lIns="0" tIns="0" rIns="0" bIns="0" rtlCol="0" anchor="ctr"/>
+          <a:lstStyle/>
+          <a:p>
+            <a:pPr indent="0" marL="0">
+              <a:buNone/>
+            </a:pPr>
+            <a:r>
+              <a:rPr lang="en-US" sz="2600" dirty="0">
+                <a:solidFill>
+                  <a:srgbClr val="000000"/>
+                </a:solidFill>
+                <a:latin typeface="Calibri" pitchFamily="34" charset="0"/>
+                <a:ea typeface="Calibri" pitchFamily="34" charset="-122"/>
+                <a:cs typeface="Calibri" pitchFamily="34" charset="-120"/>
+              </a:rPr>
+              <a:t>📊</a:t>
+            </a:r>
+            <a:endParaRPr lang="en-US" sz="2600" dirty="0"/>
+          </a:p>
+        </p:txBody>
+      </p:sp>
+      <p:sp>
+        <p:nvSpPr>
+          <p:cNvPr id="10" name="Text 8"/>
+          <p:cNvSpPr txBox="1"/>
+          <p:nvPr/>
+        </p:nvSpPr>
+        <p:spPr>
+          <a:xfrm>
+            <a:off x="4480560" y="2514600"/>
+            <a:ext cx="3200400" cy="365760"/>
+          </a:xfrm>
+          <a:prstGeom prst="rect">
+            <a:avLst/>
+          </a:prstGeom>
+          <a:noFill/>
+          <a:ln/>
+        </p:spPr>
+        <p:txBody>
+          <a:bodyPr wrap="square" lIns="0" tIns="0" rIns="0" bIns="0" rtlCol="0" anchor="ctr"/>
+          <a:lstStyle/>
+          <a:p>
+            <a:pPr indent="0" marL="0">
+              <a:buNone/>
+            </a:pPr>
+            <a:r>
+              <a:rPr lang="en-US" sz="1500" b="1" dirty="0">
+                <a:solidFill>
+                  <a:srgbClr val="261E48"/>
+                </a:solidFill>
+                <a:latin typeface="Calibri" pitchFamily="34" charset="0"/>
+                <a:ea typeface="Calibri" pitchFamily="34" charset="-122"/>
+                <a:cs typeface="Calibri" pitchFamily="34" charset="-120"/>
+              </a:rPr>
+              <a:t>Fonction SOC</a:t>
+            </a:r>
+            <a:endParaRPr lang="en-US" sz="1500" dirty="0"/>
+          </a:p>
+        </p:txBody>
+      </p:sp>
+      <p:sp>
+        <p:nvSpPr>
+          <p:cNvPr id="11" name="Text 9"/>
+          <p:cNvSpPr txBox="1"/>
+          <p:nvPr/>
+        </p:nvSpPr>
+        <p:spPr>
+          <a:xfrm>
+            <a:off x="4480560" y="2880360"/>
+            <a:ext cx="3200400" cy="594360"/>
+          </a:xfrm>
+          <a:prstGeom prst="rect">
+            <a:avLst/>
+          </a:prstGeom>
+          <a:noFill/>
+          <a:ln/>
+        </p:spPr>
+        <p:txBody>
+          <a:bodyPr wrap="square" lIns="0" tIns="0" rIns="0" bIns="0" rtlCol="0" anchor="ctr"/>
+          <a:lstStyle/>
+          <a:p>
+            <a:pPr indent="0" marL="0">
+              <a:buNone/>
+            </a:pPr>
+            <a:r>
+              <a:rPr lang="en-US" sz="1200" dirty="0">
+                <a:solidFill>
+                  <a:srgbClr val="6A6594"/>
+                </a:solidFill>
+                <a:latin typeface="Calibri" pitchFamily="34" charset="0"/>
+                <a:ea typeface="Calibri" pitchFamily="34" charset="-122"/>
+                <a:cs typeface="Calibri" pitchFamily="34" charset="-120"/>
+              </a:rPr>
+              <a:t>Loki + Prometheus + vue SOC du cockpit</a:t>
+            </a:r>
+            <a:endParaRPr lang="en-US" sz="1200" dirty="0"/>
+          </a:p>
+        </p:txBody>
+      </p:sp>
+      <p:sp>
+        <p:nvSpPr>
+          <p:cNvPr id="12" name="Shape 10"/>
+          <p:cNvSpPr/>
+          <p:nvPr/>
+        </p:nvSpPr>
+        <p:spPr>
+          <a:xfrm>
+            <a:off x="8046720" y="1737360"/>
+            <a:ext cx="3566160" cy="1828800"/>
+          </a:xfrm>
+          <a:prstGeom prst="roundRect">
+            <a:avLst>
+              <a:gd name="adj" fmla="val 4000"/>
+            </a:avLst>
+          </a:prstGeom>
+          <a:solidFill>
+            <a:srgbClr val="EEF0F8"/>
+          </a:solidFill>
+          <a:ln/>
+          <a:effectLst>
+            <a:outerShdw sx="100000" sy="100000" kx="0" ky="0" algn="bl" rotWithShape="0" blurRad="76200" dist="25400" dir="5400000">
+              <a:srgbClr val="888888">
+                <a:alpha val="25000"/>
+              </a:srgbClr>
+            </a:outerShdw>
+          </a:effectLst>
+        </p:spPr>
+      </p:sp>
+      <p:sp>
+        <p:nvSpPr>
+          <p:cNvPr id="13" name="Text 11"/>
+          <p:cNvSpPr txBox="1"/>
+          <p:nvPr/>
+        </p:nvSpPr>
+        <p:spPr>
+          <a:xfrm>
+            <a:off x="8229600" y="1920240"/>
+            <a:ext cx="914400" cy="548640"/>
+          </a:xfrm>
+          <a:prstGeom prst="rect">
+            <a:avLst/>
+          </a:prstGeom>
+          <a:noFill/>
+          <a:ln/>
+        </p:spPr>
+        <p:txBody>
+          <a:bodyPr wrap="square" lIns="0" tIns="0" rIns="0" bIns="0" rtlCol="0" anchor="ctr"/>
+          <a:lstStyle/>
+          <a:p>
+            <a:pPr indent="0" marL="0">
+              <a:buNone/>
+            </a:pPr>
+            <a:r>
+              <a:rPr lang="en-US" sz="2600" dirty="0">
+                <a:solidFill>
+                  <a:srgbClr val="000000"/>
+                </a:solidFill>
+                <a:latin typeface="Calibri" pitchFamily="34" charset="0"/>
+                <a:ea typeface="Calibri" pitchFamily="34" charset="-122"/>
+                <a:cs typeface="Calibri" pitchFamily="34" charset="-120"/>
+              </a:rPr>
+              <a:t>🔑</a:t>
+            </a:r>
+            <a:endParaRPr lang="en-US" sz="2600" dirty="0"/>
+          </a:p>
+        </p:txBody>
+      </p:sp>
+      <p:sp>
+        <p:nvSpPr>
+          <p:cNvPr id="14" name="Text 12"/>
+          <p:cNvSpPr txBox="1"/>
+          <p:nvPr/>
+        </p:nvSpPr>
+        <p:spPr>
+          <a:xfrm>
+            <a:off x="8229600" y="2514600"/>
+            <a:ext cx="3200400" cy="365760"/>
+          </a:xfrm>
+          <a:prstGeom prst="rect">
+            <a:avLst/>
+          </a:prstGeom>
+          <a:noFill/>
+          <a:ln/>
+        </p:spPr>
+        <p:txBody>
+          <a:bodyPr wrap="square" lIns="0" tIns="0" rIns="0" bIns="0" rtlCol="0" anchor="ctr"/>
+          <a:lstStyle/>
+          <a:p>
+            <a:pPr indent="0" marL="0">
+              <a:buNone/>
+            </a:pPr>
+            <a:r>
+              <a:rPr lang="en-US" sz="1500" b="1" dirty="0">
+                <a:solidFill>
+                  <a:srgbClr val="261E48"/>
+                </a:solidFill>
+                <a:latin typeface="Calibri" pitchFamily="34" charset="0"/>
+                <a:ea typeface="Calibri" pitchFamily="34" charset="-122"/>
+                <a:cs typeface="Calibri" pitchFamily="34" charset="-120"/>
+              </a:rPr>
+              <a:t>Secrets</a:t>
+            </a:r>
+            <a:endParaRPr lang="en-US" sz="1500" dirty="0"/>
+          </a:p>
+        </p:txBody>
+      </p:sp>
+      <p:sp>
+        <p:nvSpPr>
+          <p:cNvPr id="15" name="Text 13"/>
+          <p:cNvSpPr txBox="1"/>
+          <p:nvPr/>
+        </p:nvSpPr>
+        <p:spPr>
+          <a:xfrm>
+            <a:off x="8229600" y="2880360"/>
+            <a:ext cx="3200400" cy="594360"/>
+          </a:xfrm>
+          <a:prstGeom prst="rect">
+            <a:avLst/>
+          </a:prstGeom>
+          <a:noFill/>
+          <a:ln/>
+        </p:spPr>
+        <p:txBody>
+          <a:bodyPr wrap="square" lIns="0" tIns="0" rIns="0" bIns="0" rtlCol="0" anchor="ctr"/>
+          <a:lstStyle/>
+          <a:p>
+            <a:pPr indent="0" marL="0">
+              <a:buNone/>
+            </a:pPr>
+            <a:r>
+              <a:rPr lang="en-US" sz="1200" dirty="0">
+                <a:solidFill>
+                  <a:srgbClr val="6A6594"/>
+                </a:solidFill>
+                <a:latin typeface="Calibri" pitchFamily="34" charset="0"/>
+                <a:ea typeface="Calibri" pitchFamily="34" charset="-122"/>
+                <a:cs typeface="Calibri" pitchFamily="34" charset="-120"/>
+              </a:rPr>
+              <a:t>chiffrés (SOPS + age), rien en clair</a:t>
+            </a:r>
+            <a:endParaRPr lang="en-US" sz="1200" dirty="0"/>
+          </a:p>
+        </p:txBody>
+      </p:sp>
+      <p:sp>
+        <p:nvSpPr>
+          <p:cNvPr id="16" name="Shape 14"/>
+          <p:cNvSpPr/>
+          <p:nvPr/>
+        </p:nvSpPr>
+        <p:spPr>
+          <a:xfrm>
+            <a:off x="548640" y="3840480"/>
+            <a:ext cx="3566160" cy="1828800"/>
+          </a:xfrm>
+          <a:prstGeom prst="roundRect">
+            <a:avLst>
+              <a:gd name="adj" fmla="val 4000"/>
+            </a:avLst>
+          </a:prstGeom>
+          <a:solidFill>
+            <a:srgbClr val="EEF0F8"/>
+          </a:solidFill>
+          <a:ln/>
+          <a:effectLst>
+            <a:outerShdw sx="100000" sy="100000" kx="0" ky="0" algn="bl" rotWithShape="0" blurRad="76200" dist="25400" dir="5400000">
+              <a:srgbClr val="888888">
+                <a:alpha val="25000"/>
+              </a:srgbClr>
+            </a:outerShdw>
+          </a:effectLst>
+        </p:spPr>
+      </p:sp>
+      <p:sp>
+        <p:nvSpPr>
+          <p:cNvPr id="17" name="Text 15"/>
+          <p:cNvSpPr txBox="1"/>
+          <p:nvPr/>
+        </p:nvSpPr>
+        <p:spPr>
+          <a:xfrm>
+            <a:off x="731520" y="4023360"/>
+            <a:ext cx="914400" cy="548640"/>
+          </a:xfrm>
+          <a:prstGeom prst="rect">
+            <a:avLst/>
+          </a:prstGeom>
+          <a:noFill/>
+          <a:ln/>
+        </p:spPr>
+        <p:txBody>
+          <a:bodyPr wrap="square" lIns="0" tIns="0" rIns="0" bIns="0" rtlCol="0" anchor="ctr"/>
+          <a:lstStyle/>
+          <a:p>
+            <a:pPr indent="0" marL="0">
+              <a:buNone/>
+            </a:pPr>
+            <a:r>
+              <a:rPr lang="en-US" sz="2600" dirty="0">
+                <a:solidFill>
+                  <a:srgbClr val="000000"/>
+                </a:solidFill>
+                <a:latin typeface="Calibri" pitchFamily="34" charset="0"/>
+                <a:ea typeface="Calibri" pitchFamily="34" charset="-122"/>
+                <a:cs typeface="Calibri" pitchFamily="34" charset="-120"/>
+              </a:rPr>
+              <a:t>🔒</a:t>
+            </a:r>
+            <a:endParaRPr lang="en-US" sz="2600" dirty="0"/>
+          </a:p>
+        </p:txBody>
+      </p:sp>
+      <p:sp>
+        <p:nvSpPr>
+          <p:cNvPr id="18" name="Text 16"/>
+          <p:cNvSpPr txBox="1"/>
+          <p:nvPr/>
+        </p:nvSpPr>
+        <p:spPr>
+          <a:xfrm>
+            <a:off x="731520" y="4617720"/>
+            <a:ext cx="3200400" cy="365760"/>
+          </a:xfrm>
+          <a:prstGeom prst="rect">
+            <a:avLst/>
+          </a:prstGeom>
+          <a:noFill/>
+          <a:ln/>
+        </p:spPr>
+        <p:txBody>
+          <a:bodyPr wrap="square" lIns="0" tIns="0" rIns="0" bIns="0" rtlCol="0" anchor="ctr"/>
+          <a:lstStyle/>
+          <a:p>
+            <a:pPr indent="0" marL="0">
+              <a:buNone/>
+            </a:pPr>
+            <a:r>
+              <a:rPr lang="en-US" sz="1500" b="1" dirty="0">
+                <a:solidFill>
+                  <a:srgbClr val="261E48"/>
+                </a:solidFill>
+                <a:latin typeface="Calibri" pitchFamily="34" charset="0"/>
+                <a:ea typeface="Calibri" pitchFamily="34" charset="-122"/>
+                <a:cs typeface="Calibri" pitchFamily="34" charset="-120"/>
+              </a:rPr>
+              <a:t>Durcissement</a:t>
+            </a:r>
+            <a:endParaRPr lang="en-US" sz="1500" dirty="0"/>
+          </a:p>
+        </p:txBody>
+      </p:sp>
+      <p:sp>
+        <p:nvSpPr>
+          <p:cNvPr id="19" name="Text 17"/>
+          <p:cNvSpPr txBox="1"/>
+          <p:nvPr/>
+        </p:nvSpPr>
+        <p:spPr>
+          <a:xfrm>
+            <a:off x="731520" y="4983480"/>
+            <a:ext cx="3200400" cy="594360"/>
+          </a:xfrm>
+          <a:prstGeom prst="rect">
+            <a:avLst/>
+          </a:prstGeom>
+          <a:noFill/>
+          <a:ln/>
+        </p:spPr>
+        <p:txBody>
+          <a:bodyPr wrap="square" lIns="0" tIns="0" rIns="0" bIns="0" rtlCol="0" anchor="ctr"/>
+          <a:lstStyle/>
+          <a:p>
+            <a:pPr indent="0" marL="0">
+              <a:buNone/>
+            </a:pPr>
+            <a:r>
+              <a:rPr lang="en-US" sz="1200" dirty="0">
+                <a:solidFill>
+                  <a:srgbClr val="6A6594"/>
+                </a:solidFill>
+                <a:latin typeface="Calibri" pitchFamily="34" charset="0"/>
+                <a:ea typeface="Calibri" pitchFamily="34" charset="-122"/>
+                <a:cs typeface="Calibri" pitchFamily="34" charset="-120"/>
+              </a:rPr>
+              <a:t>no-new-privileges, base non exposée</a:t>
+            </a:r>
+            <a:endParaRPr lang="en-US" sz="1200" dirty="0"/>
+          </a:p>
+        </p:txBody>
+      </p:sp>
+      <p:sp>
+        <p:nvSpPr>
+          <p:cNvPr id="20" name="Shape 18"/>
+          <p:cNvSpPr/>
+          <p:nvPr/>
+        </p:nvSpPr>
+        <p:spPr>
+          <a:xfrm>
+            <a:off x="4297680" y="3840480"/>
+            <a:ext cx="3566160" cy="1828800"/>
+          </a:xfrm>
+          <a:prstGeom prst="roundRect">
+            <a:avLst>
+              <a:gd name="adj" fmla="val 4000"/>
+            </a:avLst>
+          </a:prstGeom>
+          <a:solidFill>
+            <a:srgbClr val="EEF0F8"/>
+          </a:solidFill>
+          <a:ln/>
+          <a:effectLst>
+            <a:outerShdw sx="100000" sy="100000" kx="0" ky="0" algn="bl" rotWithShape="0" blurRad="76200" dist="25400" dir="5400000">
+              <a:srgbClr val="888888">
+                <a:alpha val="25000"/>
+              </a:srgbClr>
+            </a:outerShdw>
+          </a:effectLst>
+        </p:spPr>
+      </p:sp>
+      <p:sp>
+        <p:nvSpPr>
+          <p:cNvPr id="21" name="Text 19"/>
+          <p:cNvSpPr txBox="1"/>
+          <p:nvPr/>
+        </p:nvSpPr>
+        <p:spPr>
+          <a:xfrm>
+            <a:off x="4480560" y="4023360"/>
+            <a:ext cx="914400" cy="548640"/>
+          </a:xfrm>
+          <a:prstGeom prst="rect">
+            <a:avLst/>
+          </a:prstGeom>
+          <a:noFill/>
+          <a:ln/>
+        </p:spPr>
+        <p:txBody>
+          <a:bodyPr wrap="square" lIns="0" tIns="0" rIns="0" bIns="0" rtlCol="0" anchor="ctr"/>
+          <a:lstStyle/>
+          <a:p>
+            <a:pPr indent="0" marL="0">
+              <a:buNone/>
+            </a:pPr>
+            <a:r>
+              <a:rPr lang="en-US" sz="2600" dirty="0">
+                <a:solidFill>
+                  <a:srgbClr val="000000"/>
+                </a:solidFill>
+                <a:latin typeface="Calibri" pitchFamily="34" charset="0"/>
+                <a:ea typeface="Calibri" pitchFamily="34" charset="-122"/>
+                <a:cs typeface="Calibri" pitchFamily="34" charset="-120"/>
+              </a:rPr>
+              <a:t>🧩</a:t>
+            </a:r>
+            <a:endParaRPr lang="en-US" sz="2600" dirty="0"/>
+          </a:p>
+        </p:txBody>
+      </p:sp>
+      <p:sp>
+        <p:nvSpPr>
+          <p:cNvPr id="22" name="Text 20"/>
+          <p:cNvSpPr txBox="1"/>
+          <p:nvPr/>
+        </p:nvSpPr>
+        <p:spPr>
+          <a:xfrm>
+            <a:off x="4480560" y="4617720"/>
+            <a:ext cx="3200400" cy="365760"/>
+          </a:xfrm>
+          <a:prstGeom prst="rect">
+            <a:avLst/>
+          </a:prstGeom>
+          <a:noFill/>
+          <a:ln/>
+        </p:spPr>
+        <p:txBody>
+          <a:bodyPr wrap="square" lIns="0" tIns="0" rIns="0" bIns="0" rtlCol="0" anchor="ctr"/>
+          <a:lstStyle/>
+          <a:p>
+            <a:pPr indent="0" marL="0">
+              <a:buNone/>
+            </a:pPr>
+            <a:r>
+              <a:rPr lang="en-US" sz="1500" b="1" dirty="0">
+                <a:solidFill>
+                  <a:srgbClr val="261E48"/>
+                </a:solidFill>
+                <a:latin typeface="Calibri" pitchFamily="34" charset="0"/>
+                <a:ea typeface="Calibri" pitchFamily="34" charset="-122"/>
+                <a:cs typeface="Calibri" pitchFamily="34" charset="-120"/>
+              </a:rPr>
+              <a:t>Moindre privilège</a:t>
+            </a:r>
+            <a:endParaRPr lang="en-US" sz="1500" dirty="0"/>
+          </a:p>
+        </p:txBody>
+      </p:sp>
+      <p:sp>
+        <p:nvSpPr>
+          <p:cNvPr id="23" name="Text 21"/>
+          <p:cNvSpPr txBox="1"/>
+          <p:nvPr/>
+        </p:nvSpPr>
+        <p:spPr>
+          <a:xfrm>
+            <a:off x="4480560" y="4983480"/>
+            <a:ext cx="3200400" cy="594360"/>
+          </a:xfrm>
+          <a:prstGeom prst="rect">
+            <a:avLst/>
+          </a:prstGeom>
+          <a:noFill/>
+          <a:ln/>
+        </p:spPr>
+        <p:txBody>
+          <a:bodyPr wrap="square" lIns="0" tIns="0" rIns="0" bIns="0" rtlCol="0" anchor="ctr"/>
+          <a:lstStyle/>
+          <a:p>
+            <a:pPr indent="0" marL="0">
+              <a:buNone/>
+            </a:pPr>
+            <a:r>
+              <a:rPr lang="en-US" sz="1200" dirty="0">
+                <a:solidFill>
+                  <a:srgbClr val="6A6594"/>
+                </a:solidFill>
+                <a:latin typeface="Calibri" pitchFamily="34" charset="0"/>
+                <a:ea typeface="Calibri" pitchFamily="34" charset="-122"/>
+                <a:cs typeface="Calibri" pitchFamily="34" charset="-120"/>
+              </a:rPr>
+              <a:t>token d'admin dédié à l'orchestrateur</a:t>
+            </a:r>
+            <a:endParaRPr lang="en-US" sz="1200" dirty="0"/>
+          </a:p>
+        </p:txBody>
+      </p:sp>
+      <p:sp>
+        <p:nvSpPr>
+          <p:cNvPr id="24" name="Shape 22"/>
+          <p:cNvSpPr/>
+          <p:nvPr/>
+        </p:nvSpPr>
+        <p:spPr>
+          <a:xfrm>
+            <a:off x="8046720" y="3840480"/>
+            <a:ext cx="3566160" cy="1828800"/>
+          </a:xfrm>
+          <a:prstGeom prst="roundRect">
+            <a:avLst>
+              <a:gd name="adj" fmla="val 4000"/>
+            </a:avLst>
+          </a:prstGeom>
+          <a:solidFill>
+            <a:srgbClr val="EEF0F8"/>
+          </a:solidFill>
+          <a:ln/>
+          <a:effectLst>
+            <a:outerShdw sx="100000" sy="100000" kx="0" ky="0" algn="bl" rotWithShape="0" blurRad="76200" dist="25400" dir="5400000">
+              <a:srgbClr val="888888">
+                <a:alpha val="25000"/>
+              </a:srgbClr>
+            </a:outerShdw>
+          </a:effectLst>
+        </p:spPr>
+      </p:sp>
+      <p:sp>
+        <p:nvSpPr>
+          <p:cNvPr id="25" name="Text 23"/>
+          <p:cNvSpPr txBox="1"/>
+          <p:nvPr/>
+        </p:nvSpPr>
+        <p:spPr>
+          <a:xfrm>
+            <a:off x="8229600" y="4023360"/>
+            <a:ext cx="914400" cy="548640"/>
+          </a:xfrm>
+          <a:prstGeom prst="rect">
+            <a:avLst/>
+          </a:prstGeom>
+          <a:noFill/>
+          <a:ln/>
+        </p:spPr>
+        <p:txBody>
+          <a:bodyPr wrap="square" lIns="0" tIns="0" rIns="0" bIns="0" rtlCol="0" anchor="ctr"/>
+          <a:lstStyle/>
+          <a:p>
+            <a:pPr indent="0" marL="0">
+              <a:buNone/>
+            </a:pPr>
+            <a:r>
+              <a:rPr lang="en-US" sz="2600" dirty="0">
+                <a:solidFill>
+                  <a:srgbClr val="000000"/>
+                </a:solidFill>
+                <a:latin typeface="Calibri" pitchFamily="34" charset="0"/>
+                <a:ea typeface="Calibri" pitchFamily="34" charset="-122"/>
+                <a:cs typeface="Calibri" pitchFamily="34" charset="-120"/>
+              </a:rPr>
+              <a:t>📈</a:t>
+            </a:r>
+            <a:endParaRPr lang="en-US" sz="2600" dirty="0"/>
+          </a:p>
+        </p:txBody>
+      </p:sp>
+      <p:sp>
+        <p:nvSpPr>
+          <p:cNvPr id="26" name="Text 24"/>
+          <p:cNvSpPr txBox="1"/>
+          <p:nvPr/>
+        </p:nvSpPr>
+        <p:spPr>
+          <a:xfrm>
+            <a:off x="8229600" y="4617720"/>
+            <a:ext cx="3200400" cy="365760"/>
+          </a:xfrm>
+          <a:prstGeom prst="rect">
+            <a:avLst/>
+          </a:prstGeom>
+          <a:noFill/>
+          <a:ln/>
+        </p:spPr>
+        <p:txBody>
+          <a:bodyPr wrap="square" lIns="0" tIns="0" rIns="0" bIns="0" rtlCol="0" anchor="ctr"/>
+          <a:lstStyle/>
+          <a:p>
+            <a:pPr indent="0" marL="0">
+              <a:buNone/>
+            </a:pPr>
+            <a:r>
+              <a:rPr lang="en-US" sz="1500" b="1" dirty="0">
+                <a:solidFill>
+                  <a:srgbClr val="261E48"/>
+                </a:solidFill>
+                <a:latin typeface="Calibri" pitchFamily="34" charset="0"/>
+                <a:ea typeface="Calibri" pitchFamily="34" charset="-122"/>
+                <a:cs typeface="Calibri" pitchFamily="34" charset="-120"/>
+              </a:rPr>
+              <a:t>Observabilité</a:t>
+            </a:r>
+            <a:endParaRPr lang="en-US" sz="1500" dirty="0"/>
+          </a:p>
+        </p:txBody>
+      </p:sp>
+      <p:sp>
+        <p:nvSpPr>
+          <p:cNvPr id="27" name="Text 25"/>
+          <p:cNvSpPr txBox="1"/>
+          <p:nvPr/>
+        </p:nvSpPr>
+        <p:spPr>
+          <a:xfrm>
+            <a:off x="8229600" y="4983480"/>
+            <a:ext cx="3200400" cy="594360"/>
+          </a:xfrm>
+          <a:prstGeom prst="rect">
+            <a:avLst/>
+          </a:prstGeom>
+          <a:noFill/>
+          <a:ln/>
+        </p:spPr>
+        <p:txBody>
+          <a:bodyPr wrap="square" lIns="0" tIns="0" rIns="0" bIns="0" rtlCol="0" anchor="ctr"/>
+          <a:lstStyle/>
+          <a:p>
+            <a:pPr indent="0" marL="0">
+              <a:buNone/>
+            </a:pPr>
+            <a:r>
+              <a:rPr lang="en-US" sz="1200" dirty="0">
+                <a:solidFill>
+                  <a:srgbClr val="6A6594"/>
+                </a:solidFill>
+                <a:latin typeface="Calibri" pitchFamily="34" charset="0"/>
+                <a:ea typeface="Calibri" pitchFamily="34" charset="-122"/>
+                <a:cs typeface="Calibri" pitchFamily="34" charset="-120"/>
+              </a:rPr>
+              <a:t>métriques &amp; logs exploitables</a:t>
+            </a:r>
+            <a:endParaRPr lang="en-US" sz="1200" dirty="0"/>
+          </a:p>
+        </p:txBody>
+      </p:sp>
+    </p:spTree>
+  </p:cSld>
+  <p:clrMapOvr>
+    <a:masterClrMapping/>
+  </p:clrMapOvr>
+</p:sld>
+</file>
+
+<file path=ppt/slides/slide12.xml><?xml version="1.0" encoding="utf-8"?>
+<p:sld xmlns:a="http://schemas.openxmlformats.org/drawingml/2006/main" xmlns:r="http://schemas.openxmlformats.org/officeDocument/2006/relationships" xmlns:p="http://schemas.openxmlformats.org/presentationml/2006/main">
+  <p:cSld name="Slide 12">
+    <p:bg>
+      <p:bgPr>
+        <a:solidFill>
+          <a:srgbClr val="FFFFFF"/>
+        </a:solidFill>
+      </p:bgPr>
+    </p:bg>
+    <p:spTree>
+      <p:nvGrpSpPr>
+        <p:cNvPr id="1" name=""/>
+        <p:cNvGrpSpPr/>
+        <p:nvPr/>
+      </p:nvGrpSpPr>
+      <p:grpSpPr>
+        <a:xfrm>
+          <a:off x="0" y="0"/>
+          <a:ext cx="0" cy="0"/>
+          <a:chOff x="0" y="0"/>
+          <a:chExt cx="0" cy="0"/>
+        </a:xfrm>
+      </p:grpSpPr>
+      <p:sp>
+        <p:nvSpPr>
+          <p:cNvPr id="2" name="Text 0"/>
+          <p:cNvSpPr txBox="1"/>
+          <p:nvPr/>
+        </p:nvSpPr>
+        <p:spPr>
+          <a:xfrm>
+            <a:off x="548640" y="411480"/>
+            <a:ext cx="10972800" cy="274320"/>
+          </a:xfrm>
+          <a:prstGeom prst="rect">
+            <a:avLst/>
+          </a:prstGeom>
+          <a:noFill/>
+          <a:ln/>
+        </p:spPr>
+        <p:txBody>
+          <a:bodyPr wrap="square" lIns="0" tIns="0" rIns="0" bIns="0" rtlCol="0" anchor="ctr"/>
+          <a:lstStyle/>
+          <a:p>
+            <a:pPr indent="0" marL="0">
+              <a:buNone/>
+            </a:pPr>
+            <a:r>
+              <a:rPr lang="en-US" sz="1200" b="1" spc="200" kern="0" dirty="0">
+                <a:solidFill>
+                  <a:srgbClr val="4B3FA6"/>
+                </a:solidFill>
+                <a:latin typeface="Calibri" pitchFamily="34" charset="0"/>
+                <a:ea typeface="Calibri" pitchFamily="34" charset="-122"/>
+                <a:cs typeface="Calibri" pitchFamily="34" charset="-120"/>
+              </a:rPr>
+              <a:t>RECETTE &amp; ESSAIS</a:t>
+            </a:r>
+            <a:endParaRPr lang="en-US" sz="1200" dirty="0"/>
+          </a:p>
+        </p:txBody>
+      </p:sp>
+      <p:sp>
+        <p:nvSpPr>
+          <p:cNvPr id="3" name="Text 1"/>
+          <p:cNvSpPr txBox="1"/>
+          <p:nvPr/>
+        </p:nvSpPr>
+        <p:spPr>
+          <a:xfrm>
+            <a:off x="548640" y="658368"/>
+            <a:ext cx="11064240" cy="640080"/>
+          </a:xfrm>
+          <a:prstGeom prst="rect">
+            <a:avLst/>
+          </a:prstGeom>
+          <a:noFill/>
+          <a:ln/>
+        </p:spPr>
+        <p:txBody>
+          <a:bodyPr wrap="square" lIns="0" tIns="0" rIns="0" bIns="0" rtlCol="0" anchor="ctr"/>
+          <a:lstStyle/>
+          <a:p>
+            <a:pPr indent="0" marL="0">
+              <a:buNone/>
+            </a:pPr>
+            <a:r>
+              <a:rPr lang="en-US" sz="3000" b="1" dirty="0">
+                <a:solidFill>
+                  <a:srgbClr val="261E48"/>
+                </a:solidFill>
+                <a:latin typeface="Calibri" pitchFamily="34" charset="0"/>
+                <a:ea typeface="Calibri" pitchFamily="34" charset="-122"/>
+                <a:cs typeface="Calibri" pitchFamily="34" charset="-120"/>
+              </a:rPr>
+              <a:t>Preuves de fonctionnement</a:t>
+            </a:r>
+            <a:endParaRPr lang="en-US" sz="3000" dirty="0"/>
+          </a:p>
+        </p:txBody>
+      </p:sp>
+      <p:sp>
+        <p:nvSpPr>
+          <p:cNvPr id="4" name="Shape 2"/>
+          <p:cNvSpPr/>
+          <p:nvPr/>
+        </p:nvSpPr>
+        <p:spPr>
+          <a:xfrm>
+            <a:off x="548640" y="1645920"/>
+            <a:ext cx="2651760" cy="1737360"/>
+          </a:xfrm>
+          <a:prstGeom prst="roundRect">
+            <a:avLst>
+              <a:gd name="adj" fmla="val 4211"/>
+            </a:avLst>
+          </a:prstGeom>
+          <a:solidFill>
+            <a:srgbClr val="261E48"/>
+          </a:solidFill>
+          <a:ln/>
+          <a:effectLst>
+            <a:outerShdw sx="100000" sy="100000" kx="0" ky="0" algn="bl" rotWithShape="0" blurRad="76200" dist="25400" dir="5400000">
+              <a:srgbClr val="888888">
+                <a:alpha val="25000"/>
+              </a:srgbClr>
+            </a:outerShdw>
+          </a:effectLst>
+        </p:spPr>
+      </p:sp>
+      <p:sp>
+        <p:nvSpPr>
+          <p:cNvPr id="5" name="Text 3"/>
+          <p:cNvSpPr txBox="1"/>
+          <p:nvPr/>
+        </p:nvSpPr>
+        <p:spPr>
+          <a:xfrm>
+            <a:off x="548640" y="1874520"/>
+            <a:ext cx="2651760" cy="822960"/>
+          </a:xfrm>
+          <a:prstGeom prst="rect">
+            <a:avLst/>
+          </a:prstGeom>
+          <a:noFill/>
+          <a:ln/>
+        </p:spPr>
+        <p:txBody>
+          <a:bodyPr wrap="square" lIns="0" tIns="0" rIns="0" bIns="0" rtlCol="0" anchor="ctr"/>
+          <a:lstStyle/>
+          <a:p>
+            <a:pPr algn="ctr" indent="0" marL="0">
+              <a:buNone/>
+            </a:pPr>
+            <a:r>
+              <a:rPr lang="en-US" sz="3600" b="1" dirty="0">
+                <a:solidFill>
+                  <a:srgbClr val="FFFFFF"/>
+                </a:solidFill>
+                <a:latin typeface="Calibri" pitchFamily="34" charset="0"/>
+                <a:ea typeface="Calibri" pitchFamily="34" charset="-122"/>
+                <a:cs typeface="Calibri" pitchFamily="34" charset="-120"/>
+              </a:rPr>
+              <a:t>15/15</a:t>
+            </a:r>
+            <a:endParaRPr lang="en-US" sz="3600" dirty="0"/>
+          </a:p>
+        </p:txBody>
+      </p:sp>
+      <p:sp>
+        <p:nvSpPr>
+          <p:cNvPr id="6" name="Text 4"/>
+          <p:cNvSpPr txBox="1"/>
+          <p:nvPr/>
+        </p:nvSpPr>
+        <p:spPr>
+          <a:xfrm>
+            <a:off x="640080" y="2697480"/>
+            <a:ext cx="2468880" cy="548640"/>
+          </a:xfrm>
+          <a:prstGeom prst="rect">
+            <a:avLst/>
+          </a:prstGeom>
+          <a:noFill/>
+          <a:ln/>
+        </p:spPr>
+        <p:txBody>
+          <a:bodyPr wrap="square" lIns="0" tIns="0" rIns="0" bIns="0" rtlCol="0" anchor="ctr"/>
+          <a:lstStyle/>
+          <a:p>
+            <a:pPr algn="ctr" indent="0" marL="0">
+              <a:buNone/>
+            </a:pPr>
+            <a:r>
+              <a:rPr lang="en-US" sz="1200" dirty="0">
+                <a:solidFill>
+                  <a:srgbClr val="A1A6D4"/>
+                </a:solidFill>
+                <a:latin typeface="Calibri" pitchFamily="34" charset="0"/>
+                <a:ea typeface="Calibri" pitchFamily="34" charset="-122"/>
+                <a:cs typeface="Calibri" pitchFamily="34" charset="-120"/>
+              </a:rPr>
+              <a:t>vérifications de recette</a:t>
+            </a:r>
+            <a:endParaRPr lang="en-US" sz="1200" dirty="0"/>
+          </a:p>
+        </p:txBody>
+      </p:sp>
+      <p:sp>
+        <p:nvSpPr>
+          <p:cNvPr id="7" name="Shape 5"/>
+          <p:cNvSpPr/>
+          <p:nvPr/>
+        </p:nvSpPr>
+        <p:spPr>
+          <a:xfrm>
+            <a:off x="3383280" y="1645920"/>
+            <a:ext cx="2651760" cy="1737360"/>
+          </a:xfrm>
+          <a:prstGeom prst="roundRect">
+            <a:avLst>
+              <a:gd name="adj" fmla="val 4211"/>
+            </a:avLst>
+          </a:prstGeom>
+          <a:solidFill>
+            <a:srgbClr val="261E48"/>
+          </a:solidFill>
+          <a:ln/>
+          <a:effectLst>
+            <a:outerShdw sx="100000" sy="100000" kx="0" ky="0" algn="bl" rotWithShape="0" blurRad="76200" dist="25400" dir="5400000">
+              <a:srgbClr val="888888">
+                <a:alpha val="25000"/>
+              </a:srgbClr>
+            </a:outerShdw>
+          </a:effectLst>
+        </p:spPr>
+      </p:sp>
+      <p:sp>
+        <p:nvSpPr>
+          <p:cNvPr id="8" name="Text 6"/>
+          <p:cNvSpPr txBox="1"/>
+          <p:nvPr/>
+        </p:nvSpPr>
+        <p:spPr>
+          <a:xfrm>
+            <a:off x="3383280" y="1874520"/>
+            <a:ext cx="2651760" cy="822960"/>
+          </a:xfrm>
+          <a:prstGeom prst="rect">
+            <a:avLst/>
+          </a:prstGeom>
+          <a:noFill/>
+          <a:ln/>
+        </p:spPr>
+        <p:txBody>
+          <a:bodyPr wrap="square" lIns="0" tIns="0" rIns="0" bIns="0" rtlCol="0" anchor="ctr"/>
+          <a:lstStyle/>
+          <a:p>
+            <a:pPr algn="ctr" indent="0" marL="0">
+              <a:buNone/>
+            </a:pPr>
+            <a:r>
+              <a:rPr lang="en-US" sz="3600" b="1" dirty="0">
+                <a:solidFill>
+                  <a:srgbClr val="FFFFFF"/>
+                </a:solidFill>
+                <a:latin typeface="Calibri" pitchFamily="34" charset="0"/>
+                <a:ea typeface="Calibri" pitchFamily="34" charset="-122"/>
+                <a:cs typeface="Calibri" pitchFamily="34" charset="-120"/>
+              </a:rPr>
+              <a:t>~15 s</a:t>
+            </a:r>
+            <a:endParaRPr lang="en-US" sz="3600" dirty="0"/>
+          </a:p>
+        </p:txBody>
+      </p:sp>
+      <p:sp>
+        <p:nvSpPr>
+          <p:cNvPr id="9" name="Text 7"/>
+          <p:cNvSpPr txBox="1"/>
+          <p:nvPr/>
+        </p:nvSpPr>
+        <p:spPr>
+          <a:xfrm>
+            <a:off x="3474720" y="2697480"/>
+            <a:ext cx="2468880" cy="548640"/>
+          </a:xfrm>
+          <a:prstGeom prst="rect">
+            <a:avLst/>
+          </a:prstGeom>
+          <a:noFill/>
+          <a:ln/>
+        </p:spPr>
+        <p:txBody>
+          <a:bodyPr wrap="square" lIns="0" tIns="0" rIns="0" bIns="0" rtlCol="0" anchor="ctr"/>
+          <a:lstStyle/>
+          <a:p>
+            <a:pPr algn="ctr" indent="0" marL="0">
+              <a:buNone/>
+            </a:pPr>
+            <a:r>
+              <a:rPr lang="en-US" sz="1200" dirty="0">
+                <a:solidFill>
+                  <a:srgbClr val="A1A6D4"/>
+                </a:solidFill>
+                <a:latin typeface="Calibri" pitchFamily="34" charset="0"/>
+                <a:ea typeface="Calibri" pitchFamily="34" charset="-122"/>
+                <a:cs typeface="Calibri" pitchFamily="34" charset="-120"/>
+              </a:rPr>
+              <a:t>RTO détection → reprise</a:t>
+            </a:r>
+            <a:endParaRPr lang="en-US" sz="1200" dirty="0"/>
+          </a:p>
+        </p:txBody>
+      </p:sp>
+      <p:sp>
+        <p:nvSpPr>
+          <p:cNvPr id="10" name="Shape 8"/>
+          <p:cNvSpPr/>
+          <p:nvPr/>
+        </p:nvSpPr>
+        <p:spPr>
+          <a:xfrm>
+            <a:off x="6217920" y="1645920"/>
+            <a:ext cx="2651760" cy="1737360"/>
+          </a:xfrm>
+          <a:prstGeom prst="roundRect">
+            <a:avLst>
+              <a:gd name="adj" fmla="val 4211"/>
+            </a:avLst>
+          </a:prstGeom>
+          <a:solidFill>
+            <a:srgbClr val="261E48"/>
+          </a:solidFill>
+          <a:ln/>
+          <a:effectLst>
+            <a:outerShdw sx="100000" sy="100000" kx="0" ky="0" algn="bl" rotWithShape="0" blurRad="76200" dist="25400" dir="5400000">
+              <a:srgbClr val="888888">
+                <a:alpha val="25000"/>
+              </a:srgbClr>
+            </a:outerShdw>
+          </a:effectLst>
+        </p:spPr>
+      </p:sp>
+      <p:sp>
+        <p:nvSpPr>
+          <p:cNvPr id="11" name="Text 9"/>
+          <p:cNvSpPr txBox="1"/>
+          <p:nvPr/>
+        </p:nvSpPr>
+        <p:spPr>
+          <a:xfrm>
+            <a:off x="6217920" y="1874520"/>
+            <a:ext cx="2651760" cy="822960"/>
+          </a:xfrm>
+          <a:prstGeom prst="rect">
+            <a:avLst/>
+          </a:prstGeom>
+          <a:noFill/>
+          <a:ln/>
+        </p:spPr>
+        <p:txBody>
+          <a:bodyPr wrap="square" lIns="0" tIns="0" rIns="0" bIns="0" rtlCol="0" anchor="ctr"/>
+          <a:lstStyle/>
+          <a:p>
+            <a:pPr algn="ctr" indent="0" marL="0">
+              <a:buNone/>
+            </a:pPr>
+            <a:r>
+              <a:rPr lang="en-US" sz="3600" b="1" dirty="0">
+                <a:solidFill>
+                  <a:srgbClr val="FFFFFF"/>
+                </a:solidFill>
+                <a:latin typeface="Calibri" pitchFamily="34" charset="0"/>
+                <a:ea typeface="Calibri" pitchFamily="34" charset="-122"/>
+                <a:cs typeface="Calibri" pitchFamily="34" charset="-120"/>
+              </a:rPr>
+              <a:t>100 %</a:t>
+            </a:r>
+            <a:endParaRPr lang="en-US" sz="3600" dirty="0"/>
+          </a:p>
+        </p:txBody>
+      </p:sp>
+      <p:sp>
+        <p:nvSpPr>
+          <p:cNvPr id="12" name="Text 10"/>
+          <p:cNvSpPr txBox="1"/>
+          <p:nvPr/>
+        </p:nvSpPr>
+        <p:spPr>
+          <a:xfrm>
+            <a:off x="6309360" y="2697480"/>
+            <a:ext cx="2468880" cy="548640"/>
+          </a:xfrm>
+          <a:prstGeom prst="rect">
+            <a:avLst/>
+          </a:prstGeom>
+          <a:noFill/>
+          <a:ln/>
+        </p:spPr>
+        <p:txBody>
+          <a:bodyPr wrap="square" lIns="0" tIns="0" rIns="0" bIns="0" rtlCol="0" anchor="ctr"/>
+          <a:lstStyle/>
+          <a:p>
+            <a:pPr algn="ctr" indent="0" marL="0">
+              <a:buNone/>
+            </a:pPr>
+            <a:r>
+              <a:rPr lang="en-US" sz="1200" dirty="0">
+                <a:solidFill>
+                  <a:srgbClr val="A1A6D4"/>
+                </a:solidFill>
+                <a:latin typeface="Calibri" pitchFamily="34" charset="0"/>
+                <a:ea typeface="Calibri" pitchFamily="34" charset="-122"/>
+                <a:cs typeface="Calibri" pitchFamily="34" charset="-120"/>
+              </a:rPr>
+              <a:t>reprise sans humain</a:t>
+            </a:r>
+            <a:endParaRPr lang="en-US" sz="1200" dirty="0"/>
+          </a:p>
+        </p:txBody>
+      </p:sp>
+      <p:sp>
+        <p:nvSpPr>
+          <p:cNvPr id="13" name="Shape 11"/>
+          <p:cNvSpPr/>
+          <p:nvPr/>
+        </p:nvSpPr>
+        <p:spPr>
+          <a:xfrm>
+            <a:off x="9052560" y="1645920"/>
+            <a:ext cx="2651760" cy="1737360"/>
+          </a:xfrm>
+          <a:prstGeom prst="roundRect">
+            <a:avLst>
+              <a:gd name="adj" fmla="val 4211"/>
+            </a:avLst>
+          </a:prstGeom>
+          <a:solidFill>
+            <a:srgbClr val="261E48"/>
+          </a:solidFill>
+          <a:ln/>
+          <a:effectLst>
+            <a:outerShdw sx="100000" sy="100000" kx="0" ky="0" algn="bl" rotWithShape="0" blurRad="76200" dist="25400" dir="5400000">
+              <a:srgbClr val="888888">
+                <a:alpha val="25000"/>
+              </a:srgbClr>
+            </a:outerShdw>
+          </a:effectLst>
+        </p:spPr>
+      </p:sp>
+      <p:sp>
+        <p:nvSpPr>
+          <p:cNvPr id="14" name="Text 12"/>
+          <p:cNvSpPr txBox="1"/>
+          <p:nvPr/>
+        </p:nvSpPr>
+        <p:spPr>
+          <a:xfrm>
+            <a:off x="9052560" y="1874520"/>
+            <a:ext cx="2651760" cy="822960"/>
+          </a:xfrm>
+          <a:prstGeom prst="rect">
+            <a:avLst/>
+          </a:prstGeom>
+          <a:noFill/>
+          <a:ln/>
+        </p:spPr>
+        <p:txBody>
+          <a:bodyPr wrap="square" lIns="0" tIns="0" rIns="0" bIns="0" rtlCol="0" anchor="ctr"/>
+          <a:lstStyle/>
+          <a:p>
+            <a:pPr algn="ctr" indent="0" marL="0">
+              <a:buNone/>
+            </a:pPr>
+            <a:r>
+              <a:rPr lang="en-US" sz="3600" b="1" dirty="0">
+                <a:solidFill>
+                  <a:srgbClr val="FFFFFF"/>
+                </a:solidFill>
+                <a:latin typeface="Calibri" pitchFamily="34" charset="0"/>
+                <a:ea typeface="Calibri" pitchFamily="34" charset="-122"/>
+                <a:cs typeface="Calibri" pitchFamily="34" charset="-120"/>
+              </a:rPr>
+              <a:t>748</a:t>
+            </a:r>
+            <a:endParaRPr lang="en-US" sz="3600" dirty="0"/>
+          </a:p>
+        </p:txBody>
+      </p:sp>
+      <p:sp>
+        <p:nvSpPr>
+          <p:cNvPr id="15" name="Text 13"/>
+          <p:cNvSpPr txBox="1"/>
+          <p:nvPr/>
+        </p:nvSpPr>
+        <p:spPr>
+          <a:xfrm>
+            <a:off x="9144000" y="2697480"/>
+            <a:ext cx="2468880" cy="548640"/>
+          </a:xfrm>
+          <a:prstGeom prst="rect">
+            <a:avLst/>
+          </a:prstGeom>
+          <a:noFill/>
+          <a:ln/>
+        </p:spPr>
+        <p:txBody>
+          <a:bodyPr wrap="square" lIns="0" tIns="0" rIns="0" bIns="0" rtlCol="0" anchor="ctr"/>
+          <a:lstStyle/>
+          <a:p>
+            <a:pPr algn="ctr" indent="0" marL="0">
+              <a:buNone/>
+            </a:pPr>
+            <a:r>
+              <a:rPr lang="en-US" sz="1200" dirty="0">
+                <a:solidFill>
+                  <a:srgbClr val="A1A6D4"/>
+                </a:solidFill>
+                <a:latin typeface="Calibri" pitchFamily="34" charset="0"/>
+                <a:ea typeface="Calibri" pitchFamily="34" charset="-122"/>
+                <a:cs typeface="Calibri" pitchFamily="34" charset="-120"/>
+              </a:rPr>
+              <a:t>requêtes bloquées (WAF)</a:t>
+            </a:r>
+            <a:endParaRPr lang="en-US" sz="1200" dirty="0"/>
+          </a:p>
+        </p:txBody>
+      </p:sp>
+      <p:sp>
+        <p:nvSpPr>
+          <p:cNvPr id="16" name="Text 14"/>
+          <p:cNvSpPr txBox="1"/>
+          <p:nvPr/>
+        </p:nvSpPr>
+        <p:spPr>
+          <a:xfrm>
+            <a:off x="731520" y="3749040"/>
+            <a:ext cx="10972800" cy="411480"/>
+          </a:xfrm>
+          <a:prstGeom prst="rect">
+            <a:avLst/>
+          </a:prstGeom>
+          <a:noFill/>
+          <a:ln/>
+        </p:spPr>
+        <p:txBody>
+          <a:bodyPr wrap="square" lIns="0" tIns="0" rIns="0" bIns="0" rtlCol="0" anchor="ctr"/>
+          <a:lstStyle/>
+          <a:p>
+            <a:pPr indent="0" marL="0">
+              <a:buNone/>
+            </a:pPr>
+            <a:r>
+              <a:rPr lang="en-US" sz="1400" b="1" dirty="0">
+                <a:solidFill>
+                  <a:srgbClr val="1E8E6A"/>
+                </a:solidFill>
+                <a:latin typeface="Calibri" pitchFamily="34" charset="0"/>
+                <a:ea typeface="Calibri" pitchFamily="34" charset="-122"/>
+                <a:cs typeface="Calibri" pitchFamily="34" charset="-120"/>
+              </a:rPr>
+              <a:t>✓  </a:t>
+            </a:r>
+            <a:pPr indent="0" marL="0">
+              <a:buNone/>
+            </a:pPr>
+            <a:r>
+              <a:rPr lang="en-US" sz="1400" dirty="0">
+                <a:solidFill>
+                  <a:srgbClr val="261E48"/>
+                </a:solidFill>
+                <a:latin typeface="Calibri" pitchFamily="34" charset="0"/>
+                <a:ea typeface="Calibri" pitchFamily="34" charset="-122"/>
+                <a:cs typeface="Calibri" pitchFamily="34" charset="-120"/>
+              </a:rPr>
+              <a:t>Services opérationnels + modèle ML entraîné</a:t>
+            </a:r>
+            <a:endParaRPr lang="en-US" sz="1400" dirty="0"/>
+          </a:p>
+        </p:txBody>
+      </p:sp>
+      <p:sp>
+        <p:nvSpPr>
+          <p:cNvPr id="17" name="Text 15"/>
+          <p:cNvSpPr txBox="1"/>
+          <p:nvPr/>
+        </p:nvSpPr>
+        <p:spPr>
+          <a:xfrm>
+            <a:off x="731520" y="4224528"/>
+            <a:ext cx="10972800" cy="411480"/>
+          </a:xfrm>
+          <a:prstGeom prst="rect">
+            <a:avLst/>
+          </a:prstGeom>
+          <a:noFill/>
+          <a:ln/>
+        </p:spPr>
+        <p:txBody>
+          <a:bodyPr wrap="square" lIns="0" tIns="0" rIns="0" bIns="0" rtlCol="0" anchor="ctr"/>
+          <a:lstStyle/>
+          <a:p>
+            <a:pPr indent="0" marL="0">
+              <a:buNone/>
+            </a:pPr>
+            <a:r>
+              <a:rPr lang="en-US" sz="1400" b="1" dirty="0">
+                <a:solidFill>
+                  <a:srgbClr val="1E8E6A"/>
+                </a:solidFill>
+                <a:latin typeface="Calibri" pitchFamily="34" charset="0"/>
+                <a:ea typeface="Calibri" pitchFamily="34" charset="-122"/>
+                <a:cs typeface="Calibri" pitchFamily="34" charset="-120"/>
+              </a:rPr>
+              <a:t>✓  </a:t>
+            </a:r>
+            <a:pPr indent="0" marL="0">
+              <a:buNone/>
+            </a:pPr>
+            <a:r>
+              <a:rPr lang="en-US" sz="1400" dirty="0">
+                <a:solidFill>
+                  <a:srgbClr val="261E48"/>
+                </a:solidFill>
+                <a:latin typeface="Calibri" pitchFamily="34" charset="0"/>
+                <a:ea typeface="Calibri" pitchFamily="34" charset="-122"/>
+                <a:cs typeface="Calibri" pitchFamily="34" charset="-120"/>
+              </a:rPr>
+              <a:t>DoS → reprise autonome + bouclier actif</a:t>
+            </a:r>
+            <a:endParaRPr lang="en-US" sz="1400" dirty="0"/>
+          </a:p>
+        </p:txBody>
+      </p:sp>
+      <p:sp>
+        <p:nvSpPr>
+          <p:cNvPr id="18" name="Text 16"/>
+          <p:cNvSpPr txBox="1"/>
+          <p:nvPr/>
+        </p:nvSpPr>
+        <p:spPr>
+          <a:xfrm>
+            <a:off x="731520" y="4700016"/>
+            <a:ext cx="10972800" cy="411480"/>
+          </a:xfrm>
+          <a:prstGeom prst="rect">
+            <a:avLst/>
+          </a:prstGeom>
+          <a:noFill/>
+          <a:ln/>
+        </p:spPr>
+        <p:txBody>
+          <a:bodyPr wrap="square" lIns="0" tIns="0" rIns="0" bIns="0" rtlCol="0" anchor="ctr"/>
+          <a:lstStyle/>
+          <a:p>
+            <a:pPr indent="0" marL="0">
+              <a:buNone/>
+            </a:pPr>
+            <a:r>
+              <a:rPr lang="en-US" sz="1400" b="1" dirty="0">
+                <a:solidFill>
+                  <a:srgbClr val="1E8E6A"/>
+                </a:solidFill>
+                <a:latin typeface="Calibri" pitchFamily="34" charset="0"/>
+                <a:ea typeface="Calibri" pitchFamily="34" charset="-122"/>
+                <a:cs typeface="Calibri" pitchFamily="34" charset="-120"/>
+              </a:rPr>
+              <a:t>✓  </a:t>
+            </a:r>
+            <a:pPr indent="0" marL="0">
+              <a:buNone/>
+            </a:pPr>
+            <a:r>
+              <a:rPr lang="en-US" sz="1400" dirty="0">
+                <a:solidFill>
+                  <a:srgbClr val="261E48"/>
+                </a:solidFill>
+                <a:latin typeface="Calibri" pitchFamily="34" charset="0"/>
+                <a:ea typeface="Calibri" pitchFamily="34" charset="-122"/>
+                <a:cs typeface="Calibri" pitchFamily="34" charset="-120"/>
+              </a:rPr>
+              <a:t>Transaction réussie PENDANT l'attaque</a:t>
+            </a:r>
+            <a:endParaRPr lang="en-US" sz="1400" dirty="0"/>
+          </a:p>
+        </p:txBody>
+      </p:sp>
+      <p:sp>
+        <p:nvSpPr>
+          <p:cNvPr id="19" name="Text 17"/>
+          <p:cNvSpPr txBox="1"/>
+          <p:nvPr/>
+        </p:nvSpPr>
+        <p:spPr>
+          <a:xfrm>
+            <a:off x="731520" y="5175504"/>
+            <a:ext cx="10972800" cy="411480"/>
+          </a:xfrm>
+          <a:prstGeom prst="rect">
+            <a:avLst/>
+          </a:prstGeom>
+          <a:noFill/>
+          <a:ln/>
+        </p:spPr>
+        <p:txBody>
+          <a:bodyPr wrap="square" lIns="0" tIns="0" rIns="0" bIns="0" rtlCol="0" anchor="ctr"/>
+          <a:lstStyle/>
+          <a:p>
+            <a:pPr indent="0" marL="0">
+              <a:buNone/>
+            </a:pPr>
+            <a:r>
+              <a:rPr lang="en-US" sz="1400" b="1" dirty="0">
+                <a:solidFill>
+                  <a:srgbClr val="1E8E6A"/>
+                </a:solidFill>
+                <a:latin typeface="Calibri" pitchFamily="34" charset="0"/>
+                <a:ea typeface="Calibri" pitchFamily="34" charset="-122"/>
+                <a:cs typeface="Calibri" pitchFamily="34" charset="-120"/>
+              </a:rPr>
+              <a:t>✓  </a:t>
+            </a:r>
+            <a:pPr indent="0" marL="0">
+              <a:buNone/>
+            </a:pPr>
+            <a:r>
+              <a:rPr lang="en-US" sz="1400" dirty="0">
+                <a:solidFill>
+                  <a:srgbClr val="261E48"/>
+                </a:solidFill>
+                <a:latin typeface="Calibri" pitchFamily="34" charset="0"/>
+                <a:ea typeface="Calibri" pitchFamily="34" charset="-122"/>
+                <a:cs typeface="Calibri" pitchFamily="34" charset="-120"/>
+              </a:rPr>
+              <a:t>Injection SQL contenue par le WAF</a:t>
+            </a:r>
+            <a:endParaRPr lang="en-US" sz="1400" dirty="0"/>
+          </a:p>
+        </p:txBody>
+      </p:sp>
+      <p:sp>
+        <p:nvSpPr>
+          <p:cNvPr id="20" name="Text 18"/>
+          <p:cNvSpPr txBox="1"/>
+          <p:nvPr/>
+        </p:nvSpPr>
+        <p:spPr>
+          <a:xfrm>
+            <a:off x="731520" y="5650992"/>
+            <a:ext cx="10972800" cy="411480"/>
+          </a:xfrm>
+          <a:prstGeom prst="rect">
+            <a:avLst/>
+          </a:prstGeom>
+          <a:noFill/>
+          <a:ln/>
+        </p:spPr>
+        <p:txBody>
+          <a:bodyPr wrap="square" lIns="0" tIns="0" rIns="0" bIns="0" rtlCol="0" anchor="ctr"/>
+          <a:lstStyle/>
+          <a:p>
+            <a:pPr indent="0" marL="0">
+              <a:buNone/>
+            </a:pPr>
+            <a:r>
+              <a:rPr lang="en-US" sz="1400" b="1" dirty="0">
+                <a:solidFill>
+                  <a:srgbClr val="1E8E6A"/>
+                </a:solidFill>
+                <a:latin typeface="Calibri" pitchFamily="34" charset="0"/>
+                <a:ea typeface="Calibri" pitchFamily="34" charset="-122"/>
+                <a:cs typeface="Calibri" pitchFamily="34" charset="-120"/>
+              </a:rPr>
+              <a:t>✓  </a:t>
+            </a:r>
+            <a:pPr indent="0" marL="0">
+              <a:buNone/>
+            </a:pPr>
+            <a:r>
+              <a:rPr lang="en-US" sz="1400" dirty="0">
+                <a:solidFill>
+                  <a:srgbClr val="261E48"/>
+                </a:solidFill>
+                <a:latin typeface="Calibri" pitchFamily="34" charset="0"/>
+                <a:ea typeface="Calibri" pitchFamily="34" charset="-122"/>
+                <a:cs typeface="Calibri" pitchFamily="34" charset="-120"/>
+              </a:rPr>
+              <a:t>Intégrité des données confirmée</a:t>
+            </a:r>
+            <a:endParaRPr lang="en-US" sz="1400" dirty="0"/>
+          </a:p>
+        </p:txBody>
+      </p:sp>
+      <p:sp>
+        <p:nvSpPr>
+          <p:cNvPr id="21" name="Text 19"/>
+          <p:cNvSpPr txBox="1"/>
+          <p:nvPr/>
+        </p:nvSpPr>
+        <p:spPr>
+          <a:xfrm>
+            <a:off x="731520" y="6126480"/>
+            <a:ext cx="10972800" cy="411480"/>
+          </a:xfrm>
+          <a:prstGeom prst="rect">
+            <a:avLst/>
+          </a:prstGeom>
+          <a:noFill/>
+          <a:ln/>
+        </p:spPr>
+        <p:txBody>
+          <a:bodyPr wrap="square" lIns="0" tIns="0" rIns="0" bIns="0" rtlCol="0" anchor="ctr"/>
+          <a:lstStyle/>
+          <a:p>
+            <a:pPr indent="0" marL="0">
+              <a:buNone/>
+            </a:pPr>
+            <a:r>
+              <a:rPr lang="en-US" sz="1400" b="1" dirty="0">
+                <a:solidFill>
+                  <a:srgbClr val="1E8E6A"/>
+                </a:solidFill>
+                <a:latin typeface="Calibri" pitchFamily="34" charset="0"/>
+                <a:ea typeface="Calibri" pitchFamily="34" charset="-122"/>
+                <a:cs typeface="Calibri" pitchFamily="34" charset="-120"/>
+              </a:rPr>
+              <a:t>✓  </a:t>
+            </a:r>
+            <a:pPr indent="0" marL="0">
+              <a:buNone/>
+            </a:pPr>
+            <a:r>
+              <a:rPr lang="en-US" sz="1400" dirty="0">
+                <a:solidFill>
+                  <a:srgbClr val="261E48"/>
+                </a:solidFill>
+                <a:latin typeface="Calibri" pitchFamily="34" charset="0"/>
+                <a:ea typeface="Calibri" pitchFamily="34" charset="-122"/>
+                <a:cs typeface="Calibri" pitchFamily="34" charset="-120"/>
+              </a:rPr>
+              <a:t>Transaction finale réussie après incidents</a:t>
+            </a:r>
+            <a:endParaRPr lang="en-US" sz="1400" dirty="0"/>
+          </a:p>
+        </p:txBody>
+      </p:sp>
+    </p:spTree>
+  </p:cSld>
+  <p:clrMapOvr>
+    <a:masterClrMapping/>
+  </p:clrMapOvr>
+</p:sld>
+</file>
+
+<file path=ppt/slides/slide13.xml><?xml version="1.0" encoding="utf-8"?>
+<p:sld xmlns:a="http://schemas.openxmlformats.org/drawingml/2006/main" xmlns:r="http://schemas.openxmlformats.org/officeDocument/2006/relationships" xmlns:p="http://schemas.openxmlformats.org/presentationml/2006/main">
+  <p:cSld name="Slide 13">
+    <p:bg>
+      <p:bgPr>
+        <a:solidFill>
+          <a:srgbClr val="FFFFFF"/>
+        </a:solidFill>
+      </p:bgPr>
+    </p:bg>
+    <p:spTree>
+      <p:nvGrpSpPr>
+        <p:cNvPr id="1" name=""/>
+        <p:cNvGrpSpPr/>
+        <p:nvPr/>
+      </p:nvGrpSpPr>
+      <p:grpSpPr>
+        <a:xfrm>
+          <a:off x="0" y="0"/>
+          <a:ext cx="0" cy="0"/>
+          <a:chOff x="0" y="0"/>
+          <a:chExt cx="0" cy="0"/>
+        </a:xfrm>
+      </p:grpSpPr>
+      <p:sp>
+        <p:nvSpPr>
+          <p:cNvPr id="2" name="Text 0"/>
+          <p:cNvSpPr txBox="1"/>
+          <p:nvPr/>
+        </p:nvSpPr>
+        <p:spPr>
+          <a:xfrm>
+            <a:off x="548640" y="411480"/>
+            <a:ext cx="10972800" cy="274320"/>
+          </a:xfrm>
+          <a:prstGeom prst="rect">
+            <a:avLst/>
+          </a:prstGeom>
+          <a:noFill/>
+          <a:ln/>
+        </p:spPr>
+        <p:txBody>
+          <a:bodyPr wrap="square" lIns="0" tIns="0" rIns="0" bIns="0" rtlCol="0" anchor="ctr"/>
+          <a:lstStyle/>
+          <a:p>
+            <a:pPr indent="0" marL="0">
+              <a:buNone/>
+            </a:pPr>
+            <a:r>
+              <a:rPr lang="en-US" sz="1200" b="1" spc="200" kern="0" dirty="0">
+                <a:solidFill>
+                  <a:srgbClr val="4B3FA6"/>
+                </a:solidFill>
+                <a:latin typeface="Calibri" pitchFamily="34" charset="0"/>
+                <a:ea typeface="Calibri" pitchFamily="34" charset="-122"/>
+                <a:cs typeface="Calibri" pitchFamily="34" charset="-120"/>
+              </a:rPr>
+              <a:t>TRANSFORMATION</a:t>
+            </a:r>
+            <a:endParaRPr lang="en-US" sz="1200" dirty="0"/>
+          </a:p>
+        </p:txBody>
+      </p:sp>
+      <p:sp>
+        <p:nvSpPr>
+          <p:cNvPr id="3" name="Text 1"/>
+          <p:cNvSpPr txBox="1"/>
+          <p:nvPr/>
+        </p:nvSpPr>
+        <p:spPr>
+          <a:xfrm>
+            <a:off x="548640" y="658368"/>
+            <a:ext cx="11064240" cy="640080"/>
+          </a:xfrm>
+          <a:prstGeom prst="rect">
+            <a:avLst/>
+          </a:prstGeom>
+          <a:noFill/>
+          <a:ln/>
+        </p:spPr>
+        <p:txBody>
+          <a:bodyPr wrap="square" lIns="0" tIns="0" rIns="0" bIns="0" rtlCol="0" anchor="ctr"/>
+          <a:lstStyle/>
+          <a:p>
+            <a:pPr indent="0" marL="0">
+              <a:buNone/>
+            </a:pPr>
+            <a:r>
+              <a:rPr lang="en-US" sz="3000" b="1" dirty="0">
+                <a:solidFill>
+                  <a:srgbClr val="261E48"/>
+                </a:solidFill>
+                <a:latin typeface="Calibri" pitchFamily="34" charset="0"/>
+                <a:ea typeface="Calibri" pitchFamily="34" charset="-122"/>
+                <a:cs typeface="Calibri" pitchFamily="34" charset="-120"/>
+              </a:rPr>
+              <a:t>Gouvernance &amp; conformité</a:t>
+            </a:r>
+            <a:endParaRPr lang="en-US" sz="3000" dirty="0"/>
+          </a:p>
+        </p:txBody>
+      </p:sp>
+      <p:sp>
+        <p:nvSpPr>
+          <p:cNvPr id="4" name="Shape 2"/>
+          <p:cNvSpPr/>
+          <p:nvPr/>
+        </p:nvSpPr>
+        <p:spPr>
+          <a:xfrm>
+            <a:off x="548640" y="1737360"/>
+            <a:ext cx="11064240" cy="1005840"/>
+          </a:xfrm>
+          <a:prstGeom prst="roundRect">
+            <a:avLst>
+              <a:gd name="adj" fmla="val 7273"/>
+            </a:avLst>
+          </a:prstGeom>
+          <a:solidFill>
+            <a:srgbClr val="EEF0F8"/>
+          </a:solidFill>
+          <a:ln/>
+          <a:effectLst>
+            <a:outerShdw sx="100000" sy="100000" kx="0" ky="0" algn="bl" rotWithShape="0" blurRad="76200" dist="25400" dir="5400000">
+              <a:srgbClr val="888888">
+                <a:alpha val="25000"/>
+              </a:srgbClr>
+            </a:outerShdw>
+          </a:effectLst>
+        </p:spPr>
+      </p:sp>
+      <p:sp>
+        <p:nvSpPr>
+          <p:cNvPr id="5" name="Text 3"/>
+          <p:cNvSpPr txBox="1"/>
+          <p:nvPr/>
+        </p:nvSpPr>
+        <p:spPr>
+          <a:xfrm>
+            <a:off x="777240" y="1901952"/>
+            <a:ext cx="2743200" cy="640080"/>
+          </a:xfrm>
+          <a:prstGeom prst="rect">
+            <a:avLst/>
+          </a:prstGeom>
+          <a:noFill/>
+          <a:ln/>
+        </p:spPr>
+        <p:txBody>
+          <a:bodyPr wrap="square" lIns="0" tIns="0" rIns="0" bIns="0" rtlCol="0" anchor="ctr"/>
+          <a:lstStyle/>
+          <a:p>
+            <a:pPr indent="0" marL="0">
+              <a:buNone/>
+            </a:pPr>
+            <a:r>
+              <a:rPr lang="en-US" sz="1600" b="1" dirty="0">
+                <a:solidFill>
+                  <a:srgbClr val="4B3FA6"/>
+                </a:solidFill>
+                <a:latin typeface="Calibri" pitchFamily="34" charset="0"/>
+                <a:ea typeface="Calibri" pitchFamily="34" charset="-122"/>
+                <a:cs typeface="Calibri" pitchFamily="34" charset="-120"/>
+              </a:rPr>
+              <a:t>EBIOS RM</a:t>
+            </a:r>
+            <a:endParaRPr lang="en-US" sz="1600" dirty="0"/>
+          </a:p>
+        </p:txBody>
+      </p:sp>
+      <p:sp>
+        <p:nvSpPr>
+          <p:cNvPr id="6" name="Text 4"/>
+          <p:cNvSpPr txBox="1"/>
+          <p:nvPr/>
+        </p:nvSpPr>
+        <p:spPr>
+          <a:xfrm>
+            <a:off x="3566160" y="1920240"/>
+            <a:ext cx="7863840" cy="685800"/>
+          </a:xfrm>
+          <a:prstGeom prst="rect">
+            <a:avLst/>
+          </a:prstGeom>
+          <a:noFill/>
+          <a:ln/>
+        </p:spPr>
+        <p:txBody>
+          <a:bodyPr wrap="square" lIns="0" tIns="0" rIns="0" bIns="0" rtlCol="0" anchor="ctr"/>
+          <a:lstStyle/>
+          <a:p>
+            <a:pPr indent="0" marL="0">
+              <a:buNone/>
+            </a:pPr>
+            <a:r>
+              <a:rPr lang="en-US" sz="1350" dirty="0">
+                <a:solidFill>
+                  <a:srgbClr val="261E48"/>
+                </a:solidFill>
+                <a:latin typeface="Calibri" pitchFamily="34" charset="0"/>
+                <a:ea typeface="Calibri" pitchFamily="34" charset="-122"/>
+                <a:cs typeface="Calibri" pitchFamily="34" charset="-120"/>
+              </a:rPr>
+              <a:t>Risques reliés à l'architecture et aux attaques réellement testées</a:t>
+            </a:r>
+            <a:endParaRPr lang="en-US" sz="1350" dirty="0"/>
+          </a:p>
+        </p:txBody>
+      </p:sp>
+      <p:sp>
+        <p:nvSpPr>
+          <p:cNvPr id="7" name="Shape 5"/>
+          <p:cNvSpPr/>
+          <p:nvPr/>
+        </p:nvSpPr>
+        <p:spPr>
+          <a:xfrm>
+            <a:off x="548640" y="2926080"/>
+            <a:ext cx="11064240" cy="1005840"/>
+          </a:xfrm>
+          <a:prstGeom prst="roundRect">
+            <a:avLst>
+              <a:gd name="adj" fmla="val 7273"/>
+            </a:avLst>
+          </a:prstGeom>
+          <a:solidFill>
+            <a:srgbClr val="EEF0F8"/>
+          </a:solidFill>
+          <a:ln/>
+          <a:effectLst>
+            <a:outerShdw sx="100000" sy="100000" kx="0" ky="0" algn="bl" rotWithShape="0" blurRad="76200" dist="25400" dir="5400000">
+              <a:srgbClr val="888888">
+                <a:alpha val="25000"/>
+              </a:srgbClr>
+            </a:outerShdw>
+          </a:effectLst>
+        </p:spPr>
+      </p:sp>
+      <p:sp>
+        <p:nvSpPr>
+          <p:cNvPr id="8" name="Text 6"/>
+          <p:cNvSpPr txBox="1"/>
+          <p:nvPr/>
+        </p:nvSpPr>
+        <p:spPr>
+          <a:xfrm>
+            <a:off x="777240" y="3090672"/>
+            <a:ext cx="2743200" cy="640080"/>
+          </a:xfrm>
+          <a:prstGeom prst="rect">
+            <a:avLst/>
+          </a:prstGeom>
+          <a:noFill/>
+          <a:ln/>
+        </p:spPr>
+        <p:txBody>
+          <a:bodyPr wrap="square" lIns="0" tIns="0" rIns="0" bIns="0" rtlCol="0" anchor="ctr"/>
+          <a:lstStyle/>
+          <a:p>
+            <a:pPr indent="0" marL="0">
+              <a:buNone/>
+            </a:pPr>
+            <a:r>
+              <a:rPr lang="en-US" sz="1600" b="1" dirty="0">
+                <a:solidFill>
+                  <a:srgbClr val="4B3FA6"/>
+                </a:solidFill>
+                <a:latin typeface="Calibri" pitchFamily="34" charset="0"/>
+                <a:ea typeface="Calibri" pitchFamily="34" charset="-122"/>
+                <a:cs typeface="Calibri" pitchFamily="34" charset="-120"/>
+              </a:rPr>
+              <a:t>PCA / PRA</a:t>
+            </a:r>
+            <a:endParaRPr lang="en-US" sz="1600" dirty="0"/>
+          </a:p>
+        </p:txBody>
+      </p:sp>
+      <p:sp>
+        <p:nvSpPr>
+          <p:cNvPr id="9" name="Text 7"/>
+          <p:cNvSpPr txBox="1"/>
+          <p:nvPr/>
+        </p:nvSpPr>
+        <p:spPr>
+          <a:xfrm>
+            <a:off x="3566160" y="3108960"/>
+            <a:ext cx="7863840" cy="685800"/>
+          </a:xfrm>
+          <a:prstGeom prst="rect">
+            <a:avLst/>
+          </a:prstGeom>
+          <a:noFill/>
+          <a:ln/>
+        </p:spPr>
+        <p:txBody>
+          <a:bodyPr wrap="square" lIns="0" tIns="0" rIns="0" bIns="0" rtlCol="0" anchor="ctr"/>
+          <a:lstStyle/>
+          <a:p>
+            <a:pPr indent="0" marL="0">
+              <a:buNone/>
+            </a:pPr>
+            <a:r>
+              <a:rPr lang="en-US" sz="1350" dirty="0">
+                <a:solidFill>
+                  <a:srgbClr val="261E48"/>
+                </a:solidFill>
+                <a:latin typeface="Calibri" pitchFamily="34" charset="0"/>
+                <a:ea typeface="Calibri" pitchFamily="34" charset="-122"/>
+                <a:cs typeface="Calibri" pitchFamily="34" charset="-120"/>
+              </a:rPr>
+              <a:t>Services vitaux, RTO ~15 s mesuré, 2 playbooks, responsabilités</a:t>
+            </a:r>
+            <a:endParaRPr lang="en-US" sz="1350" dirty="0"/>
+          </a:p>
+        </p:txBody>
+      </p:sp>
+      <p:sp>
+        <p:nvSpPr>
+          <p:cNvPr id="10" name="Shape 8"/>
+          <p:cNvSpPr/>
+          <p:nvPr/>
+        </p:nvSpPr>
+        <p:spPr>
+          <a:xfrm>
+            <a:off x="548640" y="4114800"/>
+            <a:ext cx="11064240" cy="1005840"/>
+          </a:xfrm>
+          <a:prstGeom prst="roundRect">
+            <a:avLst>
+              <a:gd name="adj" fmla="val 7273"/>
+            </a:avLst>
+          </a:prstGeom>
+          <a:solidFill>
+            <a:srgbClr val="EEF0F8"/>
+          </a:solidFill>
+          <a:ln/>
+          <a:effectLst>
+            <a:outerShdw sx="100000" sy="100000" kx="0" ky="0" algn="bl" rotWithShape="0" blurRad="76200" dist="25400" dir="5400000">
+              <a:srgbClr val="888888">
+                <a:alpha val="25000"/>
+              </a:srgbClr>
+            </a:outerShdw>
+          </a:effectLst>
+        </p:spPr>
+      </p:sp>
+      <p:sp>
+        <p:nvSpPr>
+          <p:cNvPr id="11" name="Text 9"/>
+          <p:cNvSpPr txBox="1"/>
+          <p:nvPr/>
+        </p:nvSpPr>
+        <p:spPr>
+          <a:xfrm>
+            <a:off x="777240" y="4279392"/>
+            <a:ext cx="2743200" cy="640080"/>
+          </a:xfrm>
+          <a:prstGeom prst="rect">
+            <a:avLst/>
+          </a:prstGeom>
+          <a:noFill/>
+          <a:ln/>
+        </p:spPr>
+        <p:txBody>
+          <a:bodyPr wrap="square" lIns="0" tIns="0" rIns="0" bIns="0" rtlCol="0" anchor="ctr"/>
+          <a:lstStyle/>
+          <a:p>
+            <a:pPr indent="0" marL="0">
+              <a:buNone/>
+            </a:pPr>
+            <a:r>
+              <a:rPr lang="en-US" sz="1600" b="1" dirty="0">
+                <a:solidFill>
+                  <a:srgbClr val="4B3FA6"/>
+                </a:solidFill>
+                <a:latin typeface="Calibri" pitchFamily="34" charset="0"/>
+                <a:ea typeface="Calibri" pitchFamily="34" charset="-122"/>
+                <a:cs typeface="Calibri" pitchFamily="34" charset="-120"/>
+              </a:rPr>
+              <a:t>NIS2 / DORA</a:t>
+            </a:r>
+            <a:endParaRPr lang="en-US" sz="1600" dirty="0"/>
+          </a:p>
+        </p:txBody>
+      </p:sp>
+      <p:sp>
+        <p:nvSpPr>
+          <p:cNvPr id="12" name="Text 10"/>
+          <p:cNvSpPr txBox="1"/>
+          <p:nvPr/>
+        </p:nvSpPr>
+        <p:spPr>
+          <a:xfrm>
+            <a:off x="3566160" y="4297680"/>
+            <a:ext cx="7863840" cy="685800"/>
+          </a:xfrm>
+          <a:prstGeom prst="rect">
+            <a:avLst/>
+          </a:prstGeom>
+          <a:noFill/>
+          <a:ln/>
+        </p:spPr>
+        <p:txBody>
+          <a:bodyPr wrap="square" lIns="0" tIns="0" rIns="0" bIns="0" rtlCol="0" anchor="ctr"/>
+          <a:lstStyle/>
+          <a:p>
+            <a:pPr indent="0" marL="0">
+              <a:buNone/>
+            </a:pPr>
+            <a:r>
+              <a:rPr lang="en-US" sz="1350" dirty="0">
+                <a:solidFill>
+                  <a:srgbClr val="261E48"/>
+                </a:solidFill>
+                <a:latin typeface="Calibri" pitchFamily="34" charset="0"/>
+                <a:ea typeface="Calibri" pitchFamily="34" charset="-122"/>
+                <a:cs typeface="Calibri" pitchFamily="34" charset="-120"/>
+              </a:rPr>
+              <a:t>Exigences pertinentes vs non démontrables en 4 jours</a:t>
+            </a:r>
+            <a:endParaRPr lang="en-US" sz="1350" dirty="0"/>
+          </a:p>
+        </p:txBody>
+      </p:sp>
+      <p:sp>
+        <p:nvSpPr>
+          <p:cNvPr id="13" name="Text 11"/>
+          <p:cNvSpPr txBox="1"/>
+          <p:nvPr/>
+        </p:nvSpPr>
+        <p:spPr>
+          <a:xfrm>
+            <a:off x="548640" y="5486400"/>
+            <a:ext cx="10972800" cy="822960"/>
+          </a:xfrm>
+          <a:prstGeom prst="rect">
+            <a:avLst/>
+          </a:prstGeom>
+          <a:noFill/>
+          <a:ln/>
+        </p:spPr>
+        <p:txBody>
+          <a:bodyPr wrap="square" lIns="0" tIns="0" rIns="0" bIns="0" rtlCol="0" anchor="ctr"/>
+          <a:lstStyle/>
+          <a:p>
+            <a:pPr indent="0" marL="0">
+              <a:lnSpc>
+                <a:spcPct val="120000"/>
+              </a:lnSpc>
+              <a:buNone/>
+            </a:pPr>
+            <a:r>
+              <a:rPr lang="en-US" sz="1350" b="1" dirty="0">
+                <a:solidFill>
+                  <a:srgbClr val="261E48"/>
+                </a:solidFill>
+                <a:latin typeface="Calibri" pitchFamily="34" charset="0"/>
+                <a:ea typeface="Calibri" pitchFamily="34" charset="-122"/>
+                <a:cs typeface="Calibri" pitchFamily="34" charset="-120"/>
+              </a:rPr>
+              <a:t>Recommandations : industrialiser la reprise (HA + WAF réseau) · formaliser la notification d'incident · tests de résilience réguliers.</a:t>
+            </a:r>
+            <a:endParaRPr lang="en-US" sz="1350" dirty="0"/>
+          </a:p>
+        </p:txBody>
+      </p:sp>
+    </p:spTree>
+  </p:cSld>
+  <p:clrMapOvr>
+    <a:masterClrMapping/>
+  </p:clrMapOvr>
+</p:sld>
+</file>
+
+<file path=ppt/slides/slide14.xml><?xml version="1.0" encoding="utf-8"?>
+<p:sld xmlns:a="http://schemas.openxmlformats.org/drawingml/2006/main" xmlns:r="http://schemas.openxmlformats.org/officeDocument/2006/relationships" xmlns:p="http://schemas.openxmlformats.org/presentationml/2006/main">
+  <p:cSld name="Slide 14">
     <p:bg>
       <p:bgPr>
         <a:solidFill>
@@ -4251,7 +7068,7 @@
                 <a:ea typeface="Calibri" pitchFamily="34" charset="-122"/>
                 <a:cs typeface="Calibri" pitchFamily="34" charset="-120"/>
               </a:rPr>
-              <a:t>LE CŒUR DU SUJET</a:t>
+              <a:t>APP HÔTE · RÔLE BANQUIER</a:t>
             </a:r>
             <a:endParaRPr lang="en-US" sz="1200" dirty="0"/>
           </a:p>
@@ -4290,7 +7107,7 @@
                 <a:ea typeface="Calibri" pitchFamily="34" charset="-122"/>
                 <a:cs typeface="Calibri" pitchFamily="34" charset="-120"/>
               </a:rPr>
-              <a:t>La boucle autonome (zéro intervention)</a:t>
+              <a:t>Interface banquier : les comptes en temps réel</a:t>
             </a:r>
             <a:endParaRPr lang="en-US" sz="3000" dirty="0"/>
           </a:p>
@@ -4304,12 +7121,12 @@
         </p:nvSpPr>
         <p:spPr>
           <a:xfrm>
-            <a:off x="548640" y="2103120"/>
-            <a:ext cx="2011680" cy="2011680"/>
+            <a:off x="548640" y="1645920"/>
+            <a:ext cx="5486400" cy="4206240"/>
           </a:xfrm>
           <a:prstGeom prst="roundRect">
             <a:avLst>
-              <a:gd name="adj" fmla="val 3636"/>
+              <a:gd name="adj" fmla="val 1739"/>
             </a:avLst>
           </a:prstGeom>
           <a:solidFill>
@@ -4327,159 +7144,203 @@
       </p:sp>
       <p:sp>
         <p:nvSpPr>
-          <p:cNvPr id="5" name="Shape 3"/>
+          <p:cNvPr id="5" name="Text 3"/>
+          <p:cNvSpPr txBox="1"/>
+          <p:nvPr/>
+        </p:nvSpPr>
+        <p:spPr>
+          <a:xfrm>
+            <a:off x="777240" y="1828800"/>
+            <a:ext cx="5029200" cy="457200"/>
+          </a:xfrm>
+          <a:prstGeom prst="rect">
+            <a:avLst/>
+          </a:prstGeom>
+          <a:noFill/>
+          <a:ln/>
+        </p:spPr>
+        <p:txBody>
+          <a:bodyPr wrap="square" lIns="0" tIns="0" rIns="0" bIns="0" rtlCol="0" anchor="ctr"/>
+          <a:lstStyle/>
+          <a:p>
+            <a:pPr indent="0" marL="0">
+              <a:buNone/>
+            </a:pPr>
+            <a:r>
+              <a:rPr lang="en-US" sz="1500" b="1" dirty="0">
+                <a:solidFill>
+                  <a:srgbClr val="261E48"/>
+                </a:solidFill>
+                <a:latin typeface="Calibri" pitchFamily="34" charset="0"/>
+                <a:ea typeface="Calibri" pitchFamily="34" charset="-122"/>
+                <a:cs typeface="Calibri" pitchFamily="34" charset="-120"/>
+              </a:rPr>
+              <a:t>🏦 Ce que voit le banquier</a:t>
+            </a:r>
+            <a:endParaRPr lang="en-US" sz="1500" dirty="0"/>
+          </a:p>
+        </p:txBody>
+      </p:sp>
+      <p:sp>
+        <p:nvSpPr>
+          <p:cNvPr id="6" name="Text 4"/>
+          <p:cNvSpPr txBox="1"/>
+          <p:nvPr/>
+        </p:nvSpPr>
+        <p:spPr>
+          <a:xfrm>
+            <a:off x="777240" y="2377440"/>
+            <a:ext cx="5029200" cy="3291840"/>
+          </a:xfrm>
+          <a:prstGeom prst="rect">
+            <a:avLst/>
+          </a:prstGeom>
+          <a:noFill/>
+          <a:ln/>
+        </p:spPr>
+        <p:txBody>
+          <a:bodyPr wrap="square" lIns="0" tIns="0" rIns="0" bIns="0" rtlCol="0" anchor="ctr"/>
+          <a:lstStyle/>
+          <a:p>
+            <a:pPr indent="0" marL="0">
+              <a:lnSpc>
+                <a:spcPct val="130000"/>
+              </a:lnSpc>
+              <a:buNone/>
+            </a:pPr>
+            <a:r>
+              <a:rPr lang="en-US" sz="1350" dirty="0">
+                <a:solidFill>
+                  <a:srgbClr val="261E48"/>
+                </a:solidFill>
+                <a:latin typeface="Calibri" pitchFamily="34" charset="0"/>
+                <a:ea typeface="Calibri" pitchFamily="34" charset="-122"/>
+                <a:cs typeface="Calibri" pitchFamily="34" charset="-120"/>
+              </a:rPr>
+              <a:t>• Tous les comptes clients + leurs soldes</a:t>
+            </a:r>
+            <a:endParaRPr lang="en-US" sz="1350" dirty="0"/>
+          </a:p>
+          <a:p>
+            <a:pPr indent="0" marL="0">
+              <a:lnSpc>
+                <a:spcPct val="130000"/>
+              </a:lnSpc>
+              <a:buNone/>
+            </a:pPr>
+            <a:r>
+              <a:rPr lang="en-US" sz="1350" dirty="0">
+                <a:solidFill>
+                  <a:srgbClr val="261E48"/>
+                </a:solidFill>
+                <a:latin typeface="Calibri" pitchFamily="34" charset="0"/>
+                <a:ea typeface="Calibri" pitchFamily="34" charset="-122"/>
+                <a:cs typeface="Calibri" pitchFamily="34" charset="-120"/>
+              </a:rPr>
+              <a:t>• Masse monétaire totale</a:t>
+            </a:r>
+            <a:endParaRPr lang="en-US" sz="1350" dirty="0"/>
+          </a:p>
+          <a:p>
+            <a:pPr indent="0" marL="0">
+              <a:lnSpc>
+                <a:spcPct val="130000"/>
+              </a:lnSpc>
+              <a:buNone/>
+            </a:pPr>
+            <a:r>
+              <a:rPr lang="en-US" sz="1350" dirty="0">
+                <a:solidFill>
+                  <a:srgbClr val="261E48"/>
+                </a:solidFill>
+                <a:latin typeface="Calibri" pitchFamily="34" charset="0"/>
+                <a:ea typeface="Calibri" pitchFamily="34" charset="-122"/>
+                <a:cs typeface="Calibri" pitchFamily="34" charset="-120"/>
+              </a:rPr>
+              <a:t>• Créditer / débiter n'importe quel compte</a:t>
+            </a:r>
+            <a:endParaRPr lang="en-US" sz="1350" dirty="0"/>
+          </a:p>
+          <a:p>
+            <a:pPr indent="0" marL="0">
+              <a:lnSpc>
+                <a:spcPct val="130000"/>
+              </a:lnSpc>
+              <a:buNone/>
+            </a:pPr>
+            <a:r>
+              <a:rPr lang="en-US" sz="1350" dirty="0">
+                <a:solidFill>
+                  <a:srgbClr val="261E48"/>
+                </a:solidFill>
+                <a:latin typeface="Calibri" pitchFamily="34" charset="0"/>
+                <a:ea typeface="Calibri" pitchFamily="34" charset="-122"/>
+                <a:cs typeface="Calibri" pitchFamily="34" charset="-120"/>
+              </a:rPr>
+              <a:t>• Historique des mouvements par client</a:t>
+            </a:r>
+            <a:endParaRPr lang="en-US" sz="1350" dirty="0"/>
+          </a:p>
+          <a:p>
+            <a:pPr indent="0" marL="0">
+              <a:lnSpc>
+                <a:spcPct val="130000"/>
+              </a:lnSpc>
+              <a:buNone/>
+            </a:pPr>
+            <a:r>
+              <a:rPr lang="en-US" sz="1350" dirty="0">
+                <a:solidFill>
+                  <a:srgbClr val="261E48"/>
+                </a:solidFill>
+                <a:latin typeface="Calibri" pitchFamily="34" charset="0"/>
+                <a:ea typeface="Calibri" pitchFamily="34" charset="-122"/>
+                <a:cs typeface="Calibri" pitchFamily="34" charset="-120"/>
+              </a:rPr>
+              <a:t>• Mise à jour EN TEMPS RÉEL (WebSocket)</a:t>
+            </a:r>
+            <a:endParaRPr lang="en-US" sz="1350" dirty="0"/>
+          </a:p>
+          <a:p>
+            <a:pPr indent="0" marL="0">
+              <a:lnSpc>
+                <a:spcPct val="130000"/>
+              </a:lnSpc>
+              <a:buNone/>
+            </a:pPr>
+            <a:r>
+              <a:rPr lang="en-US" sz="1350" dirty="0">
+                <a:solidFill>
+                  <a:srgbClr val="261E48"/>
+                </a:solidFill>
+                <a:latin typeface="Calibri" pitchFamily="34" charset="0"/>
+                <a:ea typeface="Calibri" pitchFamily="34" charset="-122"/>
+                <a:cs typeface="Calibri" pitchFamily="34" charset="-120"/>
+              </a:rPr>
+              <a:t>  — aucun rafraîchissement manuel</a:t>
+            </a:r>
+            <a:endParaRPr lang="en-US" sz="1350" dirty="0"/>
+          </a:p>
+        </p:txBody>
+      </p:sp>
+      <p:sp>
+        <p:nvSpPr>
+          <p:cNvPr id="7" name="Shape 5"/>
           <p:cNvSpPr/>
           <p:nvPr/>
         </p:nvSpPr>
         <p:spPr>
           <a:xfrm>
-            <a:off x="1280160" y="2286000"/>
-            <a:ext cx="548640" cy="548640"/>
-          </a:xfrm>
-          <a:prstGeom prst="ellipse">
-            <a:avLst/>
-          </a:prstGeom>
-          <a:solidFill>
-            <a:srgbClr val="4B3FA6"/>
-          </a:solidFill>
-          <a:ln/>
-        </p:spPr>
-      </p:sp>
-      <p:sp>
-        <p:nvSpPr>
-          <p:cNvPr id="6" name="Text 4"/>
-          <p:cNvSpPr txBox="1"/>
-          <p:nvPr/>
-        </p:nvSpPr>
-        <p:spPr>
-          <a:xfrm>
-            <a:off x="1280160" y="2304288"/>
-            <a:ext cx="548640" cy="512064"/>
-          </a:xfrm>
-          <a:prstGeom prst="rect">
-            <a:avLst/>
-          </a:prstGeom>
-          <a:noFill/>
-          <a:ln/>
-        </p:spPr>
-        <p:txBody>
-          <a:bodyPr wrap="square" lIns="0" tIns="0" rIns="0" bIns="0" rtlCol="0" anchor="ctr"/>
-          <a:lstStyle/>
-          <a:p>
-            <a:pPr algn="ctr" indent="0" marL="0">
-              <a:buNone/>
-            </a:pPr>
-            <a:r>
-              <a:rPr lang="en-US" sz="2000" b="1" dirty="0">
-                <a:solidFill>
-                  <a:srgbClr val="FFFFFF"/>
-                </a:solidFill>
-                <a:latin typeface="Calibri" pitchFamily="34" charset="0"/>
-                <a:ea typeface="Calibri" pitchFamily="34" charset="-122"/>
-                <a:cs typeface="Calibri" pitchFamily="34" charset="-120"/>
-              </a:rPr>
-              <a:t>1</a:t>
-            </a:r>
-            <a:endParaRPr lang="en-US" sz="2000" dirty="0"/>
-          </a:p>
-        </p:txBody>
-      </p:sp>
-      <p:sp>
-        <p:nvSpPr>
-          <p:cNvPr id="7" name="Text 5"/>
-          <p:cNvSpPr txBox="1"/>
-          <p:nvPr/>
-        </p:nvSpPr>
-        <p:spPr>
-          <a:xfrm>
-            <a:off x="640080" y="2971800"/>
-            <a:ext cx="1828800" cy="365760"/>
-          </a:xfrm>
-          <a:prstGeom prst="rect">
-            <a:avLst/>
-          </a:prstGeom>
-          <a:noFill/>
-          <a:ln/>
-        </p:spPr>
-        <p:txBody>
-          <a:bodyPr wrap="square" lIns="0" tIns="0" rIns="0" bIns="0" rtlCol="0" anchor="ctr"/>
-          <a:lstStyle/>
-          <a:p>
-            <a:pPr algn="ctr" indent="0" marL="0">
-              <a:buNone/>
-            </a:pPr>
-            <a:r>
-              <a:rPr lang="en-US" sz="1500" b="1" dirty="0">
-                <a:solidFill>
-                  <a:srgbClr val="261E48"/>
-                </a:solidFill>
-                <a:latin typeface="Calibri" pitchFamily="34" charset="0"/>
-                <a:ea typeface="Calibri" pitchFamily="34" charset="-122"/>
-                <a:cs typeface="Calibri" pitchFamily="34" charset="-120"/>
-              </a:rPr>
-              <a:t>Attaque</a:t>
-            </a:r>
-            <a:endParaRPr lang="en-US" sz="1500" dirty="0"/>
-          </a:p>
-        </p:txBody>
-      </p:sp>
-      <p:sp>
-        <p:nvSpPr>
-          <p:cNvPr id="8" name="Text 6"/>
-          <p:cNvSpPr txBox="1"/>
-          <p:nvPr/>
-        </p:nvSpPr>
-        <p:spPr>
-          <a:xfrm>
-            <a:off x="640080" y="3383280"/>
-            <a:ext cx="1828800" cy="548640"/>
-          </a:xfrm>
-          <a:prstGeom prst="rect">
-            <a:avLst/>
-          </a:prstGeom>
-          <a:noFill/>
-          <a:ln/>
-        </p:spPr>
-        <p:txBody>
-          <a:bodyPr wrap="square" lIns="0" tIns="0" rIns="0" bIns="0" rtlCol="0" anchor="ctr"/>
-          <a:lstStyle/>
-          <a:p>
-            <a:pPr algn="ctr" indent="0" marL="0">
-              <a:buNone/>
-            </a:pPr>
-            <a:r>
-              <a:rPr lang="en-US" sz="1150" dirty="0">
-                <a:solidFill>
-                  <a:srgbClr val="6A6594"/>
-                </a:solidFill>
-                <a:latin typeface="Calibri" pitchFamily="34" charset="0"/>
-                <a:ea typeface="Calibri" pitchFamily="34" charset="-122"/>
-                <a:cs typeface="Calibri" pitchFamily="34" charset="-120"/>
-              </a:rPr>
-              <a:t>depuis le PC attaquant</a:t>
-            </a:r>
-            <a:endParaRPr lang="en-US" sz="1150" dirty="0"/>
-          </a:p>
-        </p:txBody>
-      </p:sp>
-      <p:sp>
-        <p:nvSpPr>
-          <p:cNvPr id="9" name="Shape 7"/>
-          <p:cNvSpPr/>
-          <p:nvPr/>
-        </p:nvSpPr>
-        <p:spPr>
-          <a:xfrm>
-            <a:off x="2834640" y="2103120"/>
-            <a:ext cx="2011680" cy="2011680"/>
+            <a:off x="6217920" y="1645920"/>
+            <a:ext cx="5394960" cy="4206240"/>
           </a:xfrm>
           <a:prstGeom prst="roundRect">
             <a:avLst>
-              <a:gd name="adj" fmla="val 3636"/>
+              <a:gd name="adj" fmla="val 1739"/>
             </a:avLst>
           </a:prstGeom>
           <a:solidFill>
-            <a:srgbClr val="EEF0F8"/>
+            <a:srgbClr val="E3F3EC"/>
           </a:solidFill>
           <a:ln/>
           <a:effectLst>
@@ -4493,255 +7354,92 @@
       </p:sp>
       <p:sp>
         <p:nvSpPr>
-          <p:cNvPr id="10" name="Shape 8"/>
-          <p:cNvSpPr/>
-          <p:nvPr/>
-        </p:nvSpPr>
-        <p:spPr>
-          <a:xfrm>
-            <a:off x="3566160" y="2286000"/>
-            <a:ext cx="548640" cy="548640"/>
-          </a:xfrm>
-          <a:prstGeom prst="ellipse">
-            <a:avLst/>
-          </a:prstGeom>
-          <a:solidFill>
-            <a:srgbClr val="4B3FA6"/>
-          </a:solidFill>
-          <a:ln/>
-        </p:spPr>
-      </p:sp>
-      <p:sp>
-        <p:nvSpPr>
-          <p:cNvPr id="11" name="Text 9"/>
-          <p:cNvSpPr txBox="1"/>
-          <p:nvPr/>
-        </p:nvSpPr>
-        <p:spPr>
-          <a:xfrm>
-            <a:off x="3566160" y="2304288"/>
-            <a:ext cx="548640" cy="512064"/>
-          </a:xfrm>
-          <a:prstGeom prst="rect">
-            <a:avLst/>
-          </a:prstGeom>
-          <a:noFill/>
-          <a:ln/>
-        </p:spPr>
-        <p:txBody>
-          <a:bodyPr wrap="square" lIns="0" tIns="0" rIns="0" bIns="0" rtlCol="0" anchor="ctr"/>
-          <a:lstStyle/>
-          <a:p>
-            <a:pPr algn="ctr" indent="0" marL="0">
-              <a:buNone/>
-            </a:pPr>
-            <a:r>
-              <a:rPr lang="en-US" sz="2000" b="1" dirty="0">
-                <a:solidFill>
-                  <a:srgbClr val="FFFFFF"/>
-                </a:solidFill>
-                <a:latin typeface="Calibri" pitchFamily="34" charset="0"/>
-                <a:ea typeface="Calibri" pitchFamily="34" charset="-122"/>
-                <a:cs typeface="Calibri" pitchFamily="34" charset="-120"/>
-              </a:rPr>
-              <a:t>2</a:t>
-            </a:r>
-            <a:endParaRPr lang="en-US" sz="2000" dirty="0"/>
-          </a:p>
-        </p:txBody>
-      </p:sp>
-      <p:sp>
-        <p:nvSpPr>
-          <p:cNvPr id="12" name="Text 10"/>
-          <p:cNvSpPr txBox="1"/>
-          <p:nvPr/>
-        </p:nvSpPr>
-        <p:spPr>
-          <a:xfrm>
-            <a:off x="2926080" y="2971800"/>
-            <a:ext cx="1828800" cy="365760"/>
-          </a:xfrm>
-          <a:prstGeom prst="rect">
-            <a:avLst/>
-          </a:prstGeom>
-          <a:noFill/>
-          <a:ln/>
-        </p:spPr>
-        <p:txBody>
-          <a:bodyPr wrap="square" lIns="0" tIns="0" rIns="0" bIns="0" rtlCol="0" anchor="ctr"/>
-          <a:lstStyle/>
-          <a:p>
-            <a:pPr algn="ctr" indent="0" marL="0">
+          <p:cNvPr id="8" name="Text 6"/>
+          <p:cNvSpPr txBox="1"/>
+          <p:nvPr/>
+        </p:nvSpPr>
+        <p:spPr>
+          <a:xfrm>
+            <a:off x="6446520" y="1828800"/>
+            <a:ext cx="4937760" cy="457200"/>
+          </a:xfrm>
+          <a:prstGeom prst="rect">
+            <a:avLst/>
+          </a:prstGeom>
+          <a:noFill/>
+          <a:ln/>
+        </p:spPr>
+        <p:txBody>
+          <a:bodyPr wrap="square" lIns="0" tIns="0" rIns="0" bIns="0" rtlCol="0" anchor="ctr"/>
+          <a:lstStyle/>
+          <a:p>
+            <a:pPr indent="0" marL="0">
               <a:buNone/>
             </a:pPr>
             <a:r>
               <a:rPr lang="en-US" sz="1500" b="1" dirty="0">
                 <a:solidFill>
+                  <a:srgbClr val="1E8E6A"/>
+                </a:solidFill>
+                <a:latin typeface="Calibri" pitchFamily="34" charset="0"/>
+                <a:ea typeface="Calibri" pitchFamily="34" charset="-122"/>
+                <a:cs typeface="Calibri" pitchFamily="34" charset="-120"/>
+              </a:rPr>
+              <a:t>🔐 Accès strictement réservé</a:t>
+            </a:r>
+            <a:endParaRPr lang="en-US" sz="1500" dirty="0"/>
+          </a:p>
+        </p:txBody>
+      </p:sp>
+      <p:sp>
+        <p:nvSpPr>
+          <p:cNvPr id="9" name="Text 7"/>
+          <p:cNvSpPr txBox="1"/>
+          <p:nvPr/>
+        </p:nvSpPr>
+        <p:spPr>
+          <a:xfrm>
+            <a:off x="6446520" y="2377440"/>
+            <a:ext cx="4983480" cy="2743200"/>
+          </a:xfrm>
+          <a:prstGeom prst="rect">
+            <a:avLst/>
+          </a:prstGeom>
+          <a:noFill/>
+          <a:ln/>
+        </p:spPr>
+        <p:txBody>
+          <a:bodyPr wrap="square" lIns="0" tIns="0" rIns="0" bIns="0" rtlCol="0" anchor="ctr"/>
+          <a:lstStyle/>
+          <a:p>
+            <a:pPr indent="0" marL="0">
+              <a:lnSpc>
+                <a:spcPct val="130000"/>
+              </a:lnSpc>
+              <a:buNone/>
+            </a:pPr>
+            <a:r>
+              <a:rPr lang="en-US" sz="1350" dirty="0">
+                <a:solidFill>
                   <a:srgbClr val="261E48"/>
                 </a:solidFill>
                 <a:latin typeface="Calibri" pitchFamily="34" charset="0"/>
                 <a:ea typeface="Calibri" pitchFamily="34" charset="-122"/>
                 <a:cs typeface="Calibri" pitchFamily="34" charset="-120"/>
               </a:rPr>
-              <a:t>Détection</a:t>
-            </a:r>
-            <a:endParaRPr lang="en-US" sz="1500" dirty="0"/>
-          </a:p>
-        </p:txBody>
-      </p:sp>
-      <p:sp>
-        <p:nvSpPr>
-          <p:cNvPr id="13" name="Text 11"/>
-          <p:cNvSpPr txBox="1"/>
-          <p:nvPr/>
-        </p:nvSpPr>
-        <p:spPr>
-          <a:xfrm>
-            <a:off x="2926080" y="3383280"/>
-            <a:ext cx="1828800" cy="548640"/>
-          </a:xfrm>
-          <a:prstGeom prst="rect">
-            <a:avLst/>
-          </a:prstGeom>
-          <a:noFill/>
-          <a:ln/>
-        </p:spPr>
-        <p:txBody>
-          <a:bodyPr wrap="square" lIns="0" tIns="0" rIns="0" bIns="0" rtlCol="0" anchor="ctr"/>
-          <a:lstStyle/>
-          <a:p>
-            <a:pPr algn="ctr" indent="0" marL="0">
-              <a:buNone/>
-            </a:pPr>
-            <a:r>
-              <a:rPr lang="en-US" sz="1150" dirty="0">
-                <a:solidFill>
-                  <a:srgbClr val="6A6594"/>
-                </a:solidFill>
-                <a:latin typeface="Calibri" pitchFamily="34" charset="0"/>
-                <a:ea typeface="Calibri" pitchFamily="34" charset="-122"/>
-                <a:cs typeface="Calibri" pitchFamily="34" charset="-120"/>
-              </a:rPr>
-              <a:t>machine learning</a:t>
-            </a:r>
-            <a:endParaRPr lang="en-US" sz="1150" dirty="0"/>
-          </a:p>
-        </p:txBody>
-      </p:sp>
-      <p:sp>
-        <p:nvSpPr>
-          <p:cNvPr id="14" name="Shape 12"/>
-          <p:cNvSpPr/>
-          <p:nvPr/>
-        </p:nvSpPr>
-        <p:spPr>
-          <a:xfrm>
-            <a:off x="5120640" y="2103120"/>
-            <a:ext cx="2011680" cy="2011680"/>
-          </a:xfrm>
-          <a:prstGeom prst="roundRect">
-            <a:avLst>
-              <a:gd name="adj" fmla="val 3636"/>
-            </a:avLst>
-          </a:prstGeom>
-          <a:solidFill>
-            <a:srgbClr val="EEF0F8"/>
-          </a:solidFill>
-          <a:ln/>
-          <a:effectLst>
-            <a:outerShdw sx="100000" sy="100000" kx="0" ky="0" algn="bl" rotWithShape="0" blurRad="76200" dist="25400" dir="5400000">
-              <a:srgbClr val="888888">
-                <a:alpha val="25000"/>
-              </a:srgbClr>
-            </a:outerShdw>
-          </a:effectLst>
-        </p:spPr>
-      </p:sp>
-      <p:sp>
-        <p:nvSpPr>
-          <p:cNvPr id="15" name="Shape 13"/>
-          <p:cNvSpPr/>
-          <p:nvPr/>
-        </p:nvSpPr>
-        <p:spPr>
-          <a:xfrm>
-            <a:off x="5852160" y="2286000"/>
-            <a:ext cx="548640" cy="548640"/>
-          </a:xfrm>
-          <a:prstGeom prst="ellipse">
-            <a:avLst/>
-          </a:prstGeom>
-          <a:solidFill>
-            <a:srgbClr val="4B3FA6"/>
-          </a:solidFill>
-          <a:ln/>
-        </p:spPr>
-      </p:sp>
-      <p:sp>
-        <p:nvSpPr>
-          <p:cNvPr id="16" name="Text 14"/>
-          <p:cNvSpPr txBox="1"/>
-          <p:nvPr/>
-        </p:nvSpPr>
-        <p:spPr>
-          <a:xfrm>
-            <a:off x="5852160" y="2304288"/>
-            <a:ext cx="548640" cy="512064"/>
-          </a:xfrm>
-          <a:prstGeom prst="rect">
-            <a:avLst/>
-          </a:prstGeom>
-          <a:noFill/>
-          <a:ln/>
-        </p:spPr>
-        <p:txBody>
-          <a:bodyPr wrap="square" lIns="0" tIns="0" rIns="0" bIns="0" rtlCol="0" anchor="ctr"/>
-          <a:lstStyle/>
-          <a:p>
-            <a:pPr algn="ctr" indent="0" marL="0">
-              <a:buNone/>
-            </a:pPr>
-            <a:r>
-              <a:rPr lang="en-US" sz="2000" b="1" dirty="0">
-                <a:solidFill>
-                  <a:srgbClr val="FFFFFF"/>
-                </a:solidFill>
-                <a:latin typeface="Calibri" pitchFamily="34" charset="0"/>
-                <a:ea typeface="Calibri" pitchFamily="34" charset="-122"/>
-                <a:cs typeface="Calibri" pitchFamily="34" charset="-120"/>
-              </a:rPr>
-              <a:t>3</a:t>
-            </a:r>
-            <a:endParaRPr lang="en-US" sz="2000" dirty="0"/>
-          </a:p>
-        </p:txBody>
-      </p:sp>
-      <p:sp>
-        <p:nvSpPr>
-          <p:cNvPr id="17" name="Text 15"/>
-          <p:cNvSpPr txBox="1"/>
-          <p:nvPr/>
-        </p:nvSpPr>
-        <p:spPr>
-          <a:xfrm>
-            <a:off x="5212080" y="2971800"/>
-            <a:ext cx="1828800" cy="365760"/>
-          </a:xfrm>
-          <a:prstGeom prst="rect">
-            <a:avLst/>
-          </a:prstGeom>
-          <a:noFill/>
-          <a:ln/>
-        </p:spPr>
-        <p:txBody>
-          <a:bodyPr wrap="square" lIns="0" tIns="0" rIns="0" bIns="0" rtlCol="0" anchor="ctr"/>
-          <a:lstStyle/>
-          <a:p>
-            <a:pPr algn="ctr" indent="0" marL="0">
-              <a:buNone/>
-            </a:pPr>
-            <a:r>
-              <a:rPr lang="en-US" sz="1500" b="1" dirty="0">
+              <a:t>• Rôle « banker » porté par le JWT</a:t>
+            </a:r>
+            <a:endParaRPr lang="en-US" sz="1350" dirty="0"/>
+          </a:p>
+          <a:p>
+            <a:pPr indent="0" marL="0">
+              <a:lnSpc>
+                <a:spcPct val="130000"/>
+              </a:lnSpc>
+              <a:buNone/>
+            </a:pPr>
+            <a:r>
+              <a:rPr lang="en-US" sz="1350" dirty="0">
                 <a:solidFill>
                   <a:srgbClr val="261E48"/>
                 </a:solidFill>
@@ -4749,165 +7447,19 @@
                 <a:ea typeface="Calibri" pitchFamily="34" charset="-122"/>
                 <a:cs typeface="Calibri" pitchFamily="34" charset="-120"/>
               </a:rPr>
-              <a:t>Décision</a:t>
-            </a:r>
-            <a:endParaRPr lang="en-US" sz="1500" dirty="0"/>
-          </a:p>
-        </p:txBody>
-      </p:sp>
-      <p:sp>
-        <p:nvSpPr>
-          <p:cNvPr id="18" name="Text 16"/>
-          <p:cNvSpPr txBox="1"/>
-          <p:nvPr/>
-        </p:nvSpPr>
-        <p:spPr>
-          <a:xfrm>
-            <a:off x="5212080" y="3383280"/>
-            <a:ext cx="1828800" cy="548640"/>
-          </a:xfrm>
-          <a:prstGeom prst="rect">
-            <a:avLst/>
-          </a:prstGeom>
-          <a:noFill/>
-          <a:ln/>
-        </p:spPr>
-        <p:txBody>
-          <a:bodyPr wrap="square" lIns="0" tIns="0" rIns="0" bIns="0" rtlCol="0" anchor="ctr"/>
-          <a:lstStyle/>
-          <a:p>
-            <a:pPr algn="ctr" indent="0" marL="0">
-              <a:buNone/>
-            </a:pPr>
-            <a:r>
-              <a:rPr lang="en-US" sz="1150" dirty="0">
-                <a:solidFill>
-                  <a:srgbClr val="6A6594"/>
-                </a:solidFill>
-                <a:latin typeface="Calibri" pitchFamily="34" charset="0"/>
-                <a:ea typeface="Calibri" pitchFamily="34" charset="-122"/>
-                <a:cs typeface="Calibri" pitchFamily="34" charset="-120"/>
-              </a:rPr>
-              <a:t>le bon playbook</a:t>
-            </a:r>
-            <a:endParaRPr lang="en-US" sz="1150" dirty="0"/>
-          </a:p>
-        </p:txBody>
-      </p:sp>
-      <p:sp>
-        <p:nvSpPr>
-          <p:cNvPr id="19" name="Shape 17"/>
-          <p:cNvSpPr/>
-          <p:nvPr/>
-        </p:nvSpPr>
-        <p:spPr>
-          <a:xfrm>
-            <a:off x="7406640" y="2103120"/>
-            <a:ext cx="2011680" cy="2011680"/>
-          </a:xfrm>
-          <a:prstGeom prst="roundRect">
-            <a:avLst>
-              <a:gd name="adj" fmla="val 3636"/>
-            </a:avLst>
-          </a:prstGeom>
-          <a:solidFill>
-            <a:srgbClr val="EEF0F8"/>
-          </a:solidFill>
-          <a:ln/>
-          <a:effectLst>
-            <a:outerShdw sx="100000" sy="100000" kx="0" ky="0" algn="bl" rotWithShape="0" blurRad="76200" dist="25400" dir="5400000">
-              <a:srgbClr val="888888">
-                <a:alpha val="25000"/>
-              </a:srgbClr>
-            </a:outerShdw>
-          </a:effectLst>
-        </p:spPr>
-      </p:sp>
-      <p:sp>
-        <p:nvSpPr>
-          <p:cNvPr id="20" name="Shape 18"/>
-          <p:cNvSpPr/>
-          <p:nvPr/>
-        </p:nvSpPr>
-        <p:spPr>
-          <a:xfrm>
-            <a:off x="8138160" y="2286000"/>
-            <a:ext cx="548640" cy="548640"/>
-          </a:xfrm>
-          <a:prstGeom prst="ellipse">
-            <a:avLst/>
-          </a:prstGeom>
-          <a:solidFill>
-            <a:srgbClr val="4B3FA6"/>
-          </a:solidFill>
-          <a:ln/>
-        </p:spPr>
-      </p:sp>
-      <p:sp>
-        <p:nvSpPr>
-          <p:cNvPr id="21" name="Text 19"/>
-          <p:cNvSpPr txBox="1"/>
-          <p:nvPr/>
-        </p:nvSpPr>
-        <p:spPr>
-          <a:xfrm>
-            <a:off x="8138160" y="2304288"/>
-            <a:ext cx="548640" cy="512064"/>
-          </a:xfrm>
-          <a:prstGeom prst="rect">
-            <a:avLst/>
-          </a:prstGeom>
-          <a:noFill/>
-          <a:ln/>
-        </p:spPr>
-        <p:txBody>
-          <a:bodyPr wrap="square" lIns="0" tIns="0" rIns="0" bIns="0" rtlCol="0" anchor="ctr"/>
-          <a:lstStyle/>
-          <a:p>
-            <a:pPr algn="ctr" indent="0" marL="0">
-              <a:buNone/>
-            </a:pPr>
-            <a:r>
-              <a:rPr lang="en-US" sz="2000" b="1" dirty="0">
-                <a:solidFill>
-                  <a:srgbClr val="FFFFFF"/>
-                </a:solidFill>
-                <a:latin typeface="Calibri" pitchFamily="34" charset="0"/>
-                <a:ea typeface="Calibri" pitchFamily="34" charset="-122"/>
-                <a:cs typeface="Calibri" pitchFamily="34" charset="-120"/>
-              </a:rPr>
-              <a:t>4</a:t>
-            </a:r>
-            <a:endParaRPr lang="en-US" sz="2000" dirty="0"/>
-          </a:p>
-        </p:txBody>
-      </p:sp>
-      <p:sp>
-        <p:nvSpPr>
-          <p:cNvPr id="22" name="Text 20"/>
-          <p:cNvSpPr txBox="1"/>
-          <p:nvPr/>
-        </p:nvSpPr>
-        <p:spPr>
-          <a:xfrm>
-            <a:off x="7498080" y="2971800"/>
-            <a:ext cx="1828800" cy="365760"/>
-          </a:xfrm>
-          <a:prstGeom prst="rect">
-            <a:avLst/>
-          </a:prstGeom>
-          <a:noFill/>
-          <a:ln/>
-        </p:spPr>
-        <p:txBody>
-          <a:bodyPr wrap="square" lIns="0" tIns="0" rIns="0" bIns="0" rtlCol="0" anchor="ctr"/>
-          <a:lstStyle/>
-          <a:p>
-            <a:pPr algn="ctr" indent="0" marL="0">
-              <a:buNone/>
-            </a:pPr>
-            <a:r>
-              <a:rPr lang="en-US" sz="1500" b="1" dirty="0">
+              <a:t>• Endpoints /bank/* protégés</a:t>
+            </a:r>
+            <a:endParaRPr lang="en-US" sz="1350" dirty="0"/>
+          </a:p>
+          <a:p>
+            <a:pPr indent="0" marL="0">
+              <a:lnSpc>
+                <a:spcPct val="130000"/>
+              </a:lnSpc>
+              <a:buNone/>
+            </a:pPr>
+            <a:r>
+              <a:rPr lang="en-US" sz="1350" dirty="0">
                 <a:solidFill>
                   <a:srgbClr val="261E48"/>
                 </a:solidFill>
@@ -4915,165 +7467,19 @@
                 <a:ea typeface="Calibri" pitchFamily="34" charset="-122"/>
                 <a:cs typeface="Calibri" pitchFamily="34" charset="-120"/>
               </a:rPr>
-              <a:t>Action</a:t>
-            </a:r>
-            <a:endParaRPr lang="en-US" sz="1500" dirty="0"/>
-          </a:p>
-        </p:txBody>
-      </p:sp>
-      <p:sp>
-        <p:nvSpPr>
-          <p:cNvPr id="23" name="Text 21"/>
-          <p:cNvSpPr txBox="1"/>
-          <p:nvPr/>
-        </p:nvSpPr>
-        <p:spPr>
-          <a:xfrm>
-            <a:off x="7498080" y="3383280"/>
-            <a:ext cx="1828800" cy="548640"/>
-          </a:xfrm>
-          <a:prstGeom prst="rect">
-            <a:avLst/>
-          </a:prstGeom>
-          <a:noFill/>
-          <a:ln/>
-        </p:spPr>
-        <p:txBody>
-          <a:bodyPr wrap="square" lIns="0" tIns="0" rIns="0" bIns="0" rtlCol="0" anchor="ctr"/>
-          <a:lstStyle/>
-          <a:p>
-            <a:pPr algn="ctr" indent="0" marL="0">
-              <a:buNone/>
-            </a:pPr>
-            <a:r>
-              <a:rPr lang="en-US" sz="1150" dirty="0">
-                <a:solidFill>
-                  <a:srgbClr val="6A6594"/>
-                </a:solidFill>
-                <a:latin typeface="Calibri" pitchFamily="34" charset="0"/>
-                <a:ea typeface="Calibri" pitchFamily="34" charset="-122"/>
-                <a:cs typeface="Calibri" pitchFamily="34" charset="-120"/>
-              </a:rPr>
-              <a:t>bouclier / WAF</a:t>
-            </a:r>
-            <a:endParaRPr lang="en-US" sz="1150" dirty="0"/>
-          </a:p>
-        </p:txBody>
-      </p:sp>
-      <p:sp>
-        <p:nvSpPr>
-          <p:cNvPr id="24" name="Shape 22"/>
-          <p:cNvSpPr/>
-          <p:nvPr/>
-        </p:nvSpPr>
-        <p:spPr>
-          <a:xfrm>
-            <a:off x="9692640" y="2103120"/>
-            <a:ext cx="2011680" cy="2011680"/>
-          </a:xfrm>
-          <a:prstGeom prst="roundRect">
-            <a:avLst>
-              <a:gd name="adj" fmla="val 3636"/>
-            </a:avLst>
-          </a:prstGeom>
-          <a:solidFill>
-            <a:srgbClr val="E3F3EC"/>
-          </a:solidFill>
-          <a:ln/>
-          <a:effectLst>
-            <a:outerShdw sx="100000" sy="100000" kx="0" ky="0" algn="bl" rotWithShape="0" blurRad="76200" dist="25400" dir="5400000">
-              <a:srgbClr val="888888">
-                <a:alpha val="25000"/>
-              </a:srgbClr>
-            </a:outerShdw>
-          </a:effectLst>
-        </p:spPr>
-      </p:sp>
-      <p:sp>
-        <p:nvSpPr>
-          <p:cNvPr id="25" name="Shape 23"/>
-          <p:cNvSpPr/>
-          <p:nvPr/>
-        </p:nvSpPr>
-        <p:spPr>
-          <a:xfrm>
-            <a:off x="10424160" y="2286000"/>
-            <a:ext cx="548640" cy="548640"/>
-          </a:xfrm>
-          <a:prstGeom prst="ellipse">
-            <a:avLst/>
-          </a:prstGeom>
-          <a:solidFill>
-            <a:srgbClr val="4B3FA6"/>
-          </a:solidFill>
-          <a:ln/>
-        </p:spPr>
-      </p:sp>
-      <p:sp>
-        <p:nvSpPr>
-          <p:cNvPr id="26" name="Text 24"/>
-          <p:cNvSpPr txBox="1"/>
-          <p:nvPr/>
-        </p:nvSpPr>
-        <p:spPr>
-          <a:xfrm>
-            <a:off x="10424160" y="2304288"/>
-            <a:ext cx="548640" cy="512064"/>
-          </a:xfrm>
-          <a:prstGeom prst="rect">
-            <a:avLst/>
-          </a:prstGeom>
-          <a:noFill/>
-          <a:ln/>
-        </p:spPr>
-        <p:txBody>
-          <a:bodyPr wrap="square" lIns="0" tIns="0" rIns="0" bIns="0" rtlCol="0" anchor="ctr"/>
-          <a:lstStyle/>
-          <a:p>
-            <a:pPr algn="ctr" indent="0" marL="0">
-              <a:buNone/>
-            </a:pPr>
-            <a:r>
-              <a:rPr lang="en-US" sz="2000" b="1" dirty="0">
-                <a:solidFill>
-                  <a:srgbClr val="FFFFFF"/>
-                </a:solidFill>
-                <a:latin typeface="Calibri" pitchFamily="34" charset="0"/>
-                <a:ea typeface="Calibri" pitchFamily="34" charset="-122"/>
-                <a:cs typeface="Calibri" pitchFamily="34" charset="-120"/>
-              </a:rPr>
-              <a:t>5</a:t>
-            </a:r>
-            <a:endParaRPr lang="en-US" sz="2000" dirty="0"/>
-          </a:p>
-        </p:txBody>
-      </p:sp>
-      <p:sp>
-        <p:nvSpPr>
-          <p:cNvPr id="27" name="Text 25"/>
-          <p:cNvSpPr txBox="1"/>
-          <p:nvPr/>
-        </p:nvSpPr>
-        <p:spPr>
-          <a:xfrm>
-            <a:off x="9784080" y="2971800"/>
-            <a:ext cx="1828800" cy="365760"/>
-          </a:xfrm>
-          <a:prstGeom prst="rect">
-            <a:avLst/>
-          </a:prstGeom>
-          <a:noFill/>
-          <a:ln/>
-        </p:spPr>
-        <p:txBody>
-          <a:bodyPr wrap="square" lIns="0" tIns="0" rIns="0" bIns="0" rtlCol="0" anchor="ctr"/>
-          <a:lstStyle/>
-          <a:p>
-            <a:pPr algn="ctr" indent="0" marL="0">
-              <a:buNone/>
-            </a:pPr>
-            <a:r>
-              <a:rPr lang="en-US" sz="1500" b="1" dirty="0">
+              <a:t>• Un client normal reçoit 403 (vérifié)</a:t>
+            </a:r>
+            <a:endParaRPr lang="en-US" sz="1350" dirty="0"/>
+          </a:p>
+          <a:p>
+            <a:pPr indent="0" marL="0">
+              <a:lnSpc>
+                <a:spcPct val="130000"/>
+              </a:lnSpc>
+              <a:buNone/>
+            </a:pPr>
+            <a:r>
+              <a:rPr lang="en-US" sz="1350" dirty="0">
                 <a:solidFill>
                   <a:srgbClr val="261E48"/>
                 </a:solidFill>
@@ -5081,87 +7487,68 @@
                 <a:ea typeface="Calibri" pitchFamily="34" charset="-122"/>
                 <a:cs typeface="Calibri" pitchFamily="34" charset="-120"/>
               </a:rPr>
-              <a:t>Vérification</a:t>
-            </a:r>
-            <a:endParaRPr lang="en-US" sz="1500" dirty="0"/>
-          </a:p>
-        </p:txBody>
-      </p:sp>
-      <p:sp>
-        <p:nvSpPr>
-          <p:cNvPr id="28" name="Text 26"/>
-          <p:cNvSpPr txBox="1"/>
-          <p:nvPr/>
-        </p:nvSpPr>
-        <p:spPr>
-          <a:xfrm>
-            <a:off x="9784080" y="3383280"/>
-            <a:ext cx="1828800" cy="548640"/>
-          </a:xfrm>
-          <a:prstGeom prst="rect">
-            <a:avLst/>
-          </a:prstGeom>
-          <a:noFill/>
-          <a:ln/>
-        </p:spPr>
-        <p:txBody>
-          <a:bodyPr wrap="square" lIns="0" tIns="0" rIns="0" bIns="0" rtlCol="0" anchor="ctr"/>
-          <a:lstStyle/>
-          <a:p>
-            <a:pPr algn="ctr" indent="0" marL="0">
-              <a:buNone/>
-            </a:pPr>
-            <a:r>
-              <a:rPr lang="en-US" sz="1150" dirty="0">
-                <a:solidFill>
-                  <a:srgbClr val="6A6594"/>
-                </a:solidFill>
-                <a:latin typeface="Calibri" pitchFamily="34" charset="0"/>
-                <a:ea typeface="Calibri" pitchFamily="34" charset="-122"/>
-                <a:cs typeface="Calibri" pitchFamily="34" charset="-120"/>
-              </a:rPr>
-              <a:t>transaction canari</a:t>
-            </a:r>
-            <a:endParaRPr lang="en-US" sz="1150" dirty="0"/>
-          </a:p>
-        </p:txBody>
-      </p:sp>
-      <p:sp>
-        <p:nvSpPr>
-          <p:cNvPr id="29" name="Text 27"/>
-          <p:cNvSpPr txBox="1"/>
-          <p:nvPr/>
-        </p:nvSpPr>
-        <p:spPr>
-          <a:xfrm>
-            <a:off x="548640" y="4754880"/>
-            <a:ext cx="10972800" cy="457200"/>
-          </a:xfrm>
-          <a:prstGeom prst="rect">
-            <a:avLst/>
-          </a:prstGeom>
-          <a:noFill/>
-          <a:ln/>
-        </p:spPr>
-        <p:txBody>
-          <a:bodyPr wrap="square" lIns="0" tIns="0" rIns="0" bIns="0" rtlCol="0" anchor="ctr"/>
-          <a:lstStyle/>
-          <a:p>
-            <a:pPr algn="ctr" indent="0" marL="0">
-              <a:buNone/>
-            </a:pPr>
-            <a:r>
-              <a:rPr lang="en-US" sz="1600" b="1" dirty="0">
-                <a:solidFill>
-                  <a:srgbClr val="1E8E6A"/>
-                </a:solidFill>
-                <a:latin typeface="Calibri" pitchFamily="34" charset="0"/>
-                <a:ea typeface="Calibri" pitchFamily="34" charset="-122"/>
-                <a:cs typeface="Calibri" pitchFamily="34" charset="-120"/>
-              </a:rPr>
-              <a:t>RTO mesuré : ~15 s entre la détection et le service rétabli.</a:t>
-            </a:r>
-            <a:endParaRPr lang="en-US" sz="1600" dirty="0"/>
+              <a:t>• Le banquier est exclu de l'annuaire</a:t>
+            </a:r>
+            <a:endParaRPr lang="en-US" sz="1350" dirty="0"/>
+          </a:p>
+          <a:p>
+            <a:pPr indent="0" marL="0">
+              <a:lnSpc>
+                <a:spcPct val="130000"/>
+              </a:lnSpc>
+              <a:buNone/>
+            </a:pPr>
+            <a:r>
+              <a:rPr lang="en-US" sz="1350" dirty="0">
+                <a:solidFill>
+                  <a:srgbClr val="261E48"/>
+                </a:solidFill>
+                <a:latin typeface="Calibri" pitchFamily="34" charset="0"/>
+                <a:ea typeface="Calibri" pitchFamily="34" charset="-122"/>
+                <a:cs typeface="Calibri" pitchFamily="34" charset="-120"/>
+              </a:rPr>
+              <a:t>  des clients</a:t>
+            </a:r>
+            <a:endParaRPr lang="en-US" sz="1350" dirty="0"/>
+          </a:p>
+        </p:txBody>
+      </p:sp>
+      <p:sp>
+        <p:nvSpPr>
+          <p:cNvPr id="10" name="Text 8"/>
+          <p:cNvSpPr txBox="1"/>
+          <p:nvPr/>
+        </p:nvSpPr>
+        <p:spPr>
+          <a:xfrm>
+            <a:off x="6446520" y="5212080"/>
+            <a:ext cx="4937760" cy="457200"/>
+          </a:xfrm>
+          <a:prstGeom prst="rect">
+            <a:avLst/>
+          </a:prstGeom>
+          <a:noFill/>
+          <a:ln/>
+        </p:spPr>
+        <p:txBody>
+          <a:bodyPr wrap="square" lIns="0" tIns="0" rIns="0" bIns="0" rtlCol="0" anchor="ctr"/>
+          <a:lstStyle/>
+          <a:p>
+            <a:pPr indent="0" marL="0">
+              <a:buNone/>
+            </a:pPr>
+            <a:r>
+              <a:rPr lang="en-US" sz="1400" b="1" dirty="0">
+                <a:solidFill>
+                  <a:srgbClr val="4B3FA6"/>
+                </a:solidFill>
+                <a:latin typeface="Calibri" pitchFamily="34" charset="0"/>
+                <a:ea typeface="Calibri" pitchFamily="34" charset="-122"/>
+                <a:cs typeface="Calibri" pitchFamily="34" charset="-120"/>
+              </a:rPr>
+              <a:t>Compte de démo : banquier / password123</a:t>
+            </a:r>
+            <a:endParaRPr lang="en-US" sz="1400" dirty="0"/>
           </a:p>
         </p:txBody>
       </p:sp>
@@ -5230,7 +7617,7 @@
                 <a:ea typeface="Calibri" pitchFamily="34" charset="-122"/>
                 <a:cs typeface="Calibri" pitchFamily="34" charset="-120"/>
               </a:rPr>
-              <a:t>IA / DATA</a:t>
+              <a:t>PC ATTAQUANT · 7 VECTEURS</a:t>
             </a:r>
             <a:endParaRPr lang="en-US" sz="1200" dirty="0"/>
           </a:p>
@@ -5269,7 +7656,7 @@
                 <a:ea typeface="Calibri" pitchFamily="34" charset="-122"/>
                 <a:cs typeface="Calibri" pitchFamily="34" charset="-120"/>
               </a:rPr>
-              <a:t>Détection par machine learning</a:t>
+              <a:t>Attaquant : attaques multiples simultanées</a:t>
             </a:r>
             <a:endParaRPr lang="en-US" sz="3000" dirty="0"/>
           </a:p>
@@ -5284,19 +7671,22 @@
         <p:spPr>
           <a:xfrm>
             <a:off x="548640" y="1508760"/>
-            <a:ext cx="10972800" cy="640080"/>
-          </a:xfrm>
-          <a:prstGeom prst="rect">
-            <a:avLst/>
-          </a:prstGeom>
-          <a:noFill/>
-          <a:ln/>
-        </p:spPr>
-        <p:txBody>
-          <a:bodyPr wrap="square" lIns="0" tIns="0" rIns="0" bIns="0" rtlCol="0" anchor="ctr"/>
-          <a:lstStyle/>
-          <a:p>
-            <a:pPr indent="0" marL="0">
+            <a:ext cx="11064240" cy="731520"/>
+          </a:xfrm>
+          <a:prstGeom prst="rect">
+            <a:avLst/>
+          </a:prstGeom>
+          <a:noFill/>
+          <a:ln/>
+        </p:spPr>
+        <p:txBody>
+          <a:bodyPr wrap="square" lIns="0" tIns="0" rIns="0" bIns="0" rtlCol="0" anchor="ctr"/>
+          <a:lstStyle/>
+          <a:p>
+            <a:pPr indent="0" marL="0">
+              <a:lnSpc>
+                <a:spcPct val="115000"/>
+              </a:lnSpc>
               <a:buNone/>
             </a:pPr>
             <a:r>
@@ -5308,42 +7698,26 @@
                 <a:ea typeface="Calibri" pitchFamily="34" charset="-122"/>
                 <a:cs typeface="Calibri" pitchFamily="34" charset="-120"/>
               </a:rPr>
-              <a:t>Un Isolation Forest apprend la « vie normale » (débit, erreurs) ; une distance standardisée à la normale déclenche l'alerte. Aucun seuil codé en dur.</a:t>
+              <a:t>7 vecteurs lançables un par un, à plusieurs, ou TOUS d'un coup (« tout lancer ») pour saturer et faire tomber le serveur principal — ce qui déclenche justement la bascule vers le secours.</a:t>
             </a:r>
             <a:endParaRPr lang="en-US" sz="1400" dirty="0"/>
           </a:p>
         </p:txBody>
       </p:sp>
-      <p:graphicFrame>
-        <p:nvGraphicFramePr>
-          <p:cNvPr id="5" name="Chart 0" descr=""/>
-          <p:cNvGraphicFramePr/>
-          <p:nvPr/>
-        </p:nvGraphicFramePr>
-        <p:xfrm>
-          <a:off x="548640" y="2377440"/>
-          <a:ext cx="5669280" cy="3657600"/>
-        </p:xfrm>
-        <a:graphic xmlns:a="http://schemas.openxmlformats.org/drawingml/2006/main">
-          <a:graphicData uri="http://schemas.openxmlformats.org/drawingml/2006/chart">
-            <c:chart xmlns:c="http://schemas.openxmlformats.org/drawingml/2006/chart" r:id="rId1"/>
-          </a:graphicData>
-        </a:graphic>
-      </p:graphicFrame>
-      <p:sp>
-        <p:nvSpPr>
-          <p:cNvPr id="6" name="Shape 3"/>
+      <p:sp>
+        <p:nvSpPr>
+          <p:cNvPr id="5" name="Shape 3"/>
           <p:cNvSpPr/>
           <p:nvPr/>
         </p:nvSpPr>
         <p:spPr>
           <a:xfrm>
-            <a:off x="6492240" y="2377440"/>
-            <a:ext cx="5120640" cy="1691640"/>
+            <a:off x="548640" y="2331720"/>
+            <a:ext cx="2651760" cy="1463040"/>
           </a:xfrm>
           <a:prstGeom prst="roundRect">
             <a:avLst>
-              <a:gd name="adj" fmla="val 4324"/>
+              <a:gd name="adj" fmla="val 5000"/>
             </a:avLst>
           </a:prstGeom>
           <a:solidFill>
@@ -5361,14 +7735,53 @@
       </p:sp>
       <p:sp>
         <p:nvSpPr>
-          <p:cNvPr id="7" name="Text 4"/>
-          <p:cNvSpPr txBox="1"/>
-          <p:nvPr/>
-        </p:nvSpPr>
-        <p:spPr>
-          <a:xfrm>
-            <a:off x="6675120" y="2514600"/>
-            <a:ext cx="4754880" cy="365760"/>
+          <p:cNvPr id="6" name="Text 4"/>
+          <p:cNvSpPr txBox="1"/>
+          <p:nvPr/>
+        </p:nvSpPr>
+        <p:spPr>
+          <a:xfrm>
+            <a:off x="685800" y="2441448"/>
+            <a:ext cx="914400" cy="457200"/>
+          </a:xfrm>
+          <a:prstGeom prst="rect">
+            <a:avLst/>
+          </a:prstGeom>
+          <a:noFill/>
+          <a:ln/>
+        </p:spPr>
+        <p:txBody>
+          <a:bodyPr wrap="square" lIns="0" tIns="0" rIns="0" bIns="0" rtlCol="0" anchor="ctr"/>
+          <a:lstStyle/>
+          <a:p>
+            <a:pPr indent="0" marL="0">
+              <a:buNone/>
+            </a:pPr>
+            <a:r>
+              <a:rPr lang="en-US" sz="2200" dirty="0">
+                <a:solidFill>
+                  <a:srgbClr val="000000"/>
+                </a:solidFill>
+                <a:latin typeface="Calibri" pitchFamily="34" charset="0"/>
+                <a:ea typeface="Calibri" pitchFamily="34" charset="-122"/>
+                <a:cs typeface="Calibri" pitchFamily="34" charset="-120"/>
+              </a:rPr>
+              <a:t>🔑</a:t>
+            </a:r>
+            <a:endParaRPr lang="en-US" sz="2200" dirty="0"/>
+          </a:p>
+        </p:txBody>
+      </p:sp>
+      <p:sp>
+        <p:nvSpPr>
+          <p:cNvPr id="7" name="Text 5"/>
+          <p:cNvSpPr txBox="1"/>
+          <p:nvPr/>
+        </p:nvSpPr>
+        <p:spPr>
+          <a:xfrm>
+            <a:off x="685800" y="2935224"/>
+            <a:ext cx="2377440" cy="320040"/>
           </a:xfrm>
           <a:prstGeom prst="rect">
             <a:avLst/>
@@ -5392,7 +7805,7 @@
                 <a:ea typeface="Calibri" pitchFamily="34" charset="-122"/>
                 <a:cs typeface="Calibri" pitchFamily="34" charset="-120"/>
               </a:rPr>
-              <a:t>Score d'anomalie</a:t>
+              <a:t>dos_auth</a:t>
             </a:r>
             <a:endParaRPr lang="en-US" sz="1300" dirty="0"/>
           </a:p>
@@ -5400,44 +7813,33 @@
       </p:sp>
       <p:sp>
         <p:nvSpPr>
-          <p:cNvPr id="8" name="Text 5"/>
-          <p:cNvSpPr txBox="1"/>
-          <p:nvPr/>
-        </p:nvSpPr>
-        <p:spPr>
-          <a:xfrm>
-            <a:off x="6675120" y="2926080"/>
-            <a:ext cx="4754880" cy="822960"/>
-          </a:xfrm>
-          <a:prstGeom prst="rect">
-            <a:avLst/>
-          </a:prstGeom>
-          <a:noFill/>
-          <a:ln/>
-        </p:spPr>
-        <p:txBody>
-          <a:bodyPr wrap="square" lIns="0" tIns="0" rIns="0" bIns="0" rtlCol="0" anchor="ctr"/>
-          <a:lstStyle/>
-          <a:p>
-            <a:pPr algn="ctr" indent="0" marL="0">
-              <a:buNone/>
-            </a:pPr>
-            <a:r>
-              <a:rPr lang="en-US" sz="4400" b="1" dirty="0">
-                <a:solidFill>
-                  <a:srgbClr val="1E8E6A"/>
-                </a:solidFill>
-                <a:latin typeface="Calibri" pitchFamily="34" charset="0"/>
-                <a:ea typeface="Calibri" pitchFamily="34" charset="-122"/>
-                <a:cs typeface="Calibri" pitchFamily="34" charset="-120"/>
-              </a:rPr>
-              <a:t>0</a:t>
-            </a:r>
-            <a:pPr algn="ctr" indent="0" marL="0">
-              <a:buNone/>
-            </a:pPr>
-            <a:r>
-              <a:rPr lang="en-US" sz="4400" dirty="0">
+          <p:cNvPr id="8" name="Text 6"/>
+          <p:cNvSpPr txBox="1"/>
+          <p:nvPr/>
+        </p:nvSpPr>
+        <p:spPr>
+          <a:xfrm>
+            <a:off x="685800" y="3246120"/>
+            <a:ext cx="2377440" cy="502920"/>
+          </a:xfrm>
+          <a:prstGeom prst="rect">
+            <a:avLst/>
+          </a:prstGeom>
+          <a:noFill/>
+          <a:ln/>
+        </p:spPr>
+        <p:txBody>
+          <a:bodyPr wrap="square" lIns="0" tIns="0" rIns="0" bIns="0" rtlCol="0" anchor="ctr"/>
+          <a:lstStyle/>
+          <a:p>
+            <a:pPr indent="0" marL="0">
+              <a:lnSpc>
+                <a:spcPct val="100000"/>
+              </a:lnSpc>
+              <a:buNone/>
+            </a:pPr>
+            <a:r>
+              <a:rPr lang="en-US" sz="1050" dirty="0">
                 <a:solidFill>
                   <a:srgbClr val="6A6594"/>
                 </a:solidFill>
@@ -5445,79 +7847,26 @@
                 <a:ea typeface="Calibri" pitchFamily="34" charset="-122"/>
                 <a:cs typeface="Calibri" pitchFamily="34" charset="-120"/>
               </a:rPr>
-              <a:t>  →  </a:t>
-            </a:r>
-            <a:pPr algn="ctr" indent="0" marL="0">
-              <a:buNone/>
-            </a:pPr>
-            <a:r>
-              <a:rPr lang="en-US" sz="4400" b="1" dirty="0">
-                <a:solidFill>
-                  <a:srgbClr val="C2413C"/>
-                </a:solidFill>
-                <a:latin typeface="Calibri" pitchFamily="34" charset="0"/>
-                <a:ea typeface="Calibri" pitchFamily="34" charset="-122"/>
-                <a:cs typeface="Calibri" pitchFamily="34" charset="-120"/>
-              </a:rPr>
-              <a:t>100</a:t>
-            </a:r>
-            <a:endParaRPr lang="en-US" sz="4400" dirty="0"/>
-          </a:p>
-        </p:txBody>
-      </p:sp>
-      <p:sp>
-        <p:nvSpPr>
-          <p:cNvPr id="9" name="Text 6"/>
-          <p:cNvSpPr txBox="1"/>
-          <p:nvPr/>
-        </p:nvSpPr>
-        <p:spPr>
-          <a:xfrm>
-            <a:off x="6675120" y="3703320"/>
-            <a:ext cx="4754880" cy="274320"/>
-          </a:xfrm>
-          <a:prstGeom prst="rect">
-            <a:avLst/>
-          </a:prstGeom>
-          <a:noFill/>
-          <a:ln/>
-        </p:spPr>
-        <p:txBody>
-          <a:bodyPr wrap="square" lIns="0" tIns="0" rIns="0" bIns="0" rtlCol="0" anchor="ctr"/>
-          <a:lstStyle/>
-          <a:p>
-            <a:pPr algn="ctr" indent="0" marL="0">
-              <a:buNone/>
-            </a:pPr>
-            <a:r>
-              <a:rPr lang="en-US" sz="1200" dirty="0">
-                <a:solidFill>
-                  <a:srgbClr val="6A6594"/>
-                </a:solidFill>
-                <a:latin typeface="Calibri" pitchFamily="34" charset="0"/>
-                <a:ea typeface="Calibri" pitchFamily="34" charset="-122"/>
-                <a:cs typeface="Calibri" pitchFamily="34" charset="-120"/>
-              </a:rPr>
-              <a:t>normal → anomalie détectée</a:t>
-            </a:r>
-            <a:endParaRPr lang="en-US" sz="1200" dirty="0"/>
-          </a:p>
-        </p:txBody>
-      </p:sp>
-      <p:sp>
-        <p:nvSpPr>
-          <p:cNvPr id="10" name="Shape 7"/>
+              <a:t>flood de /auth/login (bcrypt coûteux)</a:t>
+            </a:r>
+            <a:endParaRPr lang="en-US" sz="1050" dirty="0"/>
+          </a:p>
+        </p:txBody>
+      </p:sp>
+      <p:sp>
+        <p:nvSpPr>
+          <p:cNvPr id="9" name="Shape 7"/>
           <p:cNvSpPr/>
           <p:nvPr/>
         </p:nvSpPr>
         <p:spPr>
           <a:xfrm>
-            <a:off x="6492240" y="4297680"/>
-            <a:ext cx="5120640" cy="1737360"/>
+            <a:off x="3337560" y="2331720"/>
+            <a:ext cx="2651760" cy="1463040"/>
           </a:xfrm>
           <a:prstGeom prst="roundRect">
             <a:avLst>
-              <a:gd name="adj" fmla="val 4211"/>
+              <a:gd name="adj" fmla="val 5000"/>
             </a:avLst>
           </a:prstGeom>
           <a:solidFill>
@@ -5535,30 +7884,69 @@
       </p:sp>
       <p:sp>
         <p:nvSpPr>
-          <p:cNvPr id="11" name="Text 8"/>
-          <p:cNvSpPr txBox="1"/>
-          <p:nvPr/>
-        </p:nvSpPr>
-        <p:spPr>
-          <a:xfrm>
-            <a:off x="6675120" y="4480560"/>
-            <a:ext cx="4754880" cy="457200"/>
-          </a:xfrm>
-          <a:prstGeom prst="rect">
-            <a:avLst/>
-          </a:prstGeom>
-          <a:noFill/>
-          <a:ln/>
-        </p:spPr>
-        <p:txBody>
-          <a:bodyPr wrap="square" lIns="0" tIns="0" rIns="0" bIns="0" rtlCol="0" anchor="ctr"/>
-          <a:lstStyle/>
-          <a:p>
-            <a:pPr indent="0" marL="0">
-              <a:buNone/>
-            </a:pPr>
-            <a:r>
-              <a:rPr lang="en-US" sz="1400" b="1" dirty="0">
+          <p:cNvPr id="10" name="Text 8"/>
+          <p:cNvSpPr txBox="1"/>
+          <p:nvPr/>
+        </p:nvSpPr>
+        <p:spPr>
+          <a:xfrm>
+            <a:off x="3474720" y="2441448"/>
+            <a:ext cx="914400" cy="457200"/>
+          </a:xfrm>
+          <a:prstGeom prst="rect">
+            <a:avLst/>
+          </a:prstGeom>
+          <a:noFill/>
+          <a:ln/>
+        </p:spPr>
+        <p:txBody>
+          <a:bodyPr wrap="square" lIns="0" tIns="0" rIns="0" bIns="0" rtlCol="0" anchor="ctr"/>
+          <a:lstStyle/>
+          <a:p>
+            <a:pPr indent="0" marL="0">
+              <a:buNone/>
+            </a:pPr>
+            <a:r>
+              <a:rPr lang="en-US" sz="2200" dirty="0">
+                <a:solidFill>
+                  <a:srgbClr val="000000"/>
+                </a:solidFill>
+                <a:latin typeface="Calibri" pitchFamily="34" charset="0"/>
+                <a:ea typeface="Calibri" pitchFamily="34" charset="-122"/>
+                <a:cs typeface="Calibri" pitchFamily="34" charset="-120"/>
+              </a:rPr>
+              <a:t>💉</a:t>
+            </a:r>
+            <a:endParaRPr lang="en-US" sz="2200" dirty="0"/>
+          </a:p>
+        </p:txBody>
+      </p:sp>
+      <p:sp>
+        <p:nvSpPr>
+          <p:cNvPr id="11" name="Text 9"/>
+          <p:cNvSpPr txBox="1"/>
+          <p:nvPr/>
+        </p:nvSpPr>
+        <p:spPr>
+          <a:xfrm>
+            <a:off x="3474720" y="2935224"/>
+            <a:ext cx="2377440" cy="320040"/>
+          </a:xfrm>
+          <a:prstGeom prst="rect">
+            <a:avLst/>
+          </a:prstGeom>
+          <a:noFill/>
+          <a:ln/>
+        </p:spPr>
+        <p:txBody>
+          <a:bodyPr wrap="square" lIns="0" tIns="0" rIns="0" bIns="0" rtlCol="0" anchor="ctr"/>
+          <a:lstStyle/>
+          <a:p>
+            <a:pPr indent="0" marL="0">
+              <a:buNone/>
+            </a:pPr>
+            <a:r>
+              <a:rPr lang="en-US" sz="1300" b="1" dirty="0">
                 <a:solidFill>
                   <a:srgbClr val="261E48"/>
                 </a:solidFill>
@@ -5566,22 +7954,22 @@
                 <a:ea typeface="Calibri" pitchFamily="34" charset="-122"/>
                 <a:cs typeface="Calibri" pitchFamily="34" charset="-120"/>
               </a:rPr>
-              <a:t>Débit auth sous attaque : ×30   ·   Latence : ×5</a:t>
-            </a:r>
-            <a:endParaRPr lang="en-US" sz="1400" dirty="0"/>
-          </a:p>
-        </p:txBody>
-      </p:sp>
-      <p:sp>
-        <p:nvSpPr>
-          <p:cNvPr id="12" name="Text 9"/>
-          <p:cNvSpPr txBox="1"/>
-          <p:nvPr/>
-        </p:nvSpPr>
-        <p:spPr>
-          <a:xfrm>
-            <a:off x="6675120" y="4937760"/>
-            <a:ext cx="4754880" cy="1005840"/>
+              <a:t>sqli</a:t>
+            </a:r>
+            <a:endParaRPr lang="en-US" sz="1300" dirty="0"/>
+          </a:p>
+        </p:txBody>
+      </p:sp>
+      <p:sp>
+        <p:nvSpPr>
+          <p:cNvPr id="12" name="Text 10"/>
+          <p:cNvSpPr txBox="1"/>
+          <p:nvPr/>
+        </p:nvSpPr>
+        <p:spPr>
+          <a:xfrm>
+            <a:off x="3474720" y="3246120"/>
+            <a:ext cx="2377440" cy="502920"/>
           </a:xfrm>
           <a:prstGeom prst="rect">
             <a:avLst/>
@@ -5595,12 +7983,119 @@
           <a:p>
             <a:pPr indent="0" marL="0">
               <a:lnSpc>
-                <a:spcPct val="110000"/>
+                <a:spcPct val="100000"/>
               </a:lnSpc>
               <a:buNone/>
             </a:pPr>
             <a:r>
-              <a:rPr lang="en-US" sz="1250" dirty="0">
+              <a:rPr lang="en-US" sz="1050" dirty="0">
+                <a:solidFill>
+                  <a:srgbClr val="6A6594"/>
+                </a:solidFill>
+                <a:latin typeface="Calibri" pitchFamily="34" charset="0"/>
+                <a:ea typeface="Calibri" pitchFamily="34" charset="-122"/>
+                <a:cs typeface="Calibri" pitchFamily="34" charset="-120"/>
+              </a:rPr>
+              <a:t>injection SQL → WAF</a:t>
+            </a:r>
+            <a:endParaRPr lang="en-US" sz="1050" dirty="0"/>
+          </a:p>
+        </p:txBody>
+      </p:sp>
+      <p:sp>
+        <p:nvSpPr>
+          <p:cNvPr id="13" name="Shape 11"/>
+          <p:cNvSpPr/>
+          <p:nvPr/>
+        </p:nvSpPr>
+        <p:spPr>
+          <a:xfrm>
+            <a:off x="6126480" y="2331720"/>
+            <a:ext cx="2651760" cy="1463040"/>
+          </a:xfrm>
+          <a:prstGeom prst="roundRect">
+            <a:avLst>
+              <a:gd name="adj" fmla="val 5000"/>
+            </a:avLst>
+          </a:prstGeom>
+          <a:solidFill>
+            <a:srgbClr val="EEF0F8"/>
+          </a:solidFill>
+          <a:ln/>
+          <a:effectLst>
+            <a:outerShdw sx="100000" sy="100000" kx="0" ky="0" algn="bl" rotWithShape="0" blurRad="76200" dist="25400" dir="5400000">
+              <a:srgbClr val="888888">
+                <a:alpha val="25000"/>
+              </a:srgbClr>
+            </a:outerShdw>
+          </a:effectLst>
+        </p:spPr>
+      </p:sp>
+      <p:sp>
+        <p:nvSpPr>
+          <p:cNvPr id="14" name="Text 12"/>
+          <p:cNvSpPr txBox="1"/>
+          <p:nvPr/>
+        </p:nvSpPr>
+        <p:spPr>
+          <a:xfrm>
+            <a:off x="6263640" y="2441448"/>
+            <a:ext cx="914400" cy="457200"/>
+          </a:xfrm>
+          <a:prstGeom prst="rect">
+            <a:avLst/>
+          </a:prstGeom>
+          <a:noFill/>
+          <a:ln/>
+        </p:spPr>
+        <p:txBody>
+          <a:bodyPr wrap="square" lIns="0" tIns="0" rIns="0" bIns="0" rtlCol="0" anchor="ctr"/>
+          <a:lstStyle/>
+          <a:p>
+            <a:pPr indent="0" marL="0">
+              <a:buNone/>
+            </a:pPr>
+            <a:r>
+              <a:rPr lang="en-US" sz="2200" dirty="0">
+                <a:solidFill>
+                  <a:srgbClr val="000000"/>
+                </a:solidFill>
+                <a:latin typeface="Calibri" pitchFamily="34" charset="0"/>
+                <a:ea typeface="Calibri" pitchFamily="34" charset="-122"/>
+                <a:cs typeface="Calibri" pitchFamily="34" charset="-120"/>
+              </a:rPr>
+              <a:t>🌊</a:t>
+            </a:r>
+            <a:endParaRPr lang="en-US" sz="2200" dirty="0"/>
+          </a:p>
+        </p:txBody>
+      </p:sp>
+      <p:sp>
+        <p:nvSpPr>
+          <p:cNvPr id="15" name="Text 13"/>
+          <p:cNvSpPr txBox="1"/>
+          <p:nvPr/>
+        </p:nvSpPr>
+        <p:spPr>
+          <a:xfrm>
+            <a:off x="6263640" y="2935224"/>
+            <a:ext cx="2377440" cy="320040"/>
+          </a:xfrm>
+          <a:prstGeom prst="rect">
+            <a:avLst/>
+          </a:prstGeom>
+          <a:noFill/>
+          <a:ln/>
+        </p:spPr>
+        <p:txBody>
+          <a:bodyPr wrap="square" lIns="0" tIns="0" rIns="0" bIns="0" rtlCol="0" anchor="ctr"/>
+          <a:lstStyle/>
+          <a:p>
+            <a:pPr indent="0" marL="0">
+              <a:buNone/>
+            </a:pPr>
+            <a:r>
+              <a:rPr lang="en-US" sz="1300" b="1" dirty="0">
                 <a:solidFill>
                   <a:srgbClr val="261E48"/>
                 </a:solidFill>
@@ -5608,7 +8103,684 @@
                 <a:ea typeface="Calibri" pitchFamily="34" charset="-122"/>
                 <a:cs typeface="Calibri" pitchFamily="34" charset="-120"/>
               </a:rPr>
-              <a:t>Modèle persisté (pas de ré-apprentissage au redémarrage). Assistant RAG local (Ollama + LangChain) pour aider l'opérateur.</a:t>
+              <a:t>api_flood</a:t>
+            </a:r>
+            <a:endParaRPr lang="en-US" sz="1300" dirty="0"/>
+          </a:p>
+        </p:txBody>
+      </p:sp>
+      <p:sp>
+        <p:nvSpPr>
+          <p:cNvPr id="16" name="Text 14"/>
+          <p:cNvSpPr txBox="1"/>
+          <p:nvPr/>
+        </p:nvSpPr>
+        <p:spPr>
+          <a:xfrm>
+            <a:off x="6263640" y="3246120"/>
+            <a:ext cx="2377440" cy="502920"/>
+          </a:xfrm>
+          <a:prstGeom prst="rect">
+            <a:avLst/>
+          </a:prstGeom>
+          <a:noFill/>
+          <a:ln/>
+        </p:spPr>
+        <p:txBody>
+          <a:bodyPr wrap="square" lIns="0" tIns="0" rIns="0" bIns="0" rtlCol="0" anchor="ctr"/>
+          <a:lstStyle/>
+          <a:p>
+            <a:pPr indent="0" marL="0">
+              <a:lnSpc>
+                <a:spcPct val="100000"/>
+              </a:lnSpc>
+              <a:buNone/>
+            </a:pPr>
+            <a:r>
+              <a:rPr lang="en-US" sz="1050" dirty="0">
+                <a:solidFill>
+                  <a:srgbClr val="6A6594"/>
+                </a:solidFill>
+                <a:latin typeface="Calibri" pitchFamily="34" charset="0"/>
+                <a:ea typeface="Calibri" pitchFamily="34" charset="-122"/>
+                <a:cs typeface="Calibri" pitchFamily="34" charset="-120"/>
+              </a:rPr>
+              <a:t>charge l'API + la base</a:t>
+            </a:r>
+            <a:endParaRPr lang="en-US" sz="1050" dirty="0"/>
+          </a:p>
+        </p:txBody>
+      </p:sp>
+      <p:sp>
+        <p:nvSpPr>
+          <p:cNvPr id="17" name="Shape 15"/>
+          <p:cNvSpPr/>
+          <p:nvPr/>
+        </p:nvSpPr>
+        <p:spPr>
+          <a:xfrm>
+            <a:off x="8915400" y="2331720"/>
+            <a:ext cx="2651760" cy="1463040"/>
+          </a:xfrm>
+          <a:prstGeom prst="roundRect">
+            <a:avLst>
+              <a:gd name="adj" fmla="val 5000"/>
+            </a:avLst>
+          </a:prstGeom>
+          <a:solidFill>
+            <a:srgbClr val="EEF0F8"/>
+          </a:solidFill>
+          <a:ln/>
+          <a:effectLst>
+            <a:outerShdw sx="100000" sy="100000" kx="0" ky="0" algn="bl" rotWithShape="0" blurRad="76200" dist="25400" dir="5400000">
+              <a:srgbClr val="888888">
+                <a:alpha val="25000"/>
+              </a:srgbClr>
+            </a:outerShdw>
+          </a:effectLst>
+        </p:spPr>
+      </p:sp>
+      <p:sp>
+        <p:nvSpPr>
+          <p:cNvPr id="18" name="Text 16"/>
+          <p:cNvSpPr txBox="1"/>
+          <p:nvPr/>
+        </p:nvSpPr>
+        <p:spPr>
+          <a:xfrm>
+            <a:off x="9052560" y="2441448"/>
+            <a:ext cx="914400" cy="457200"/>
+          </a:xfrm>
+          <a:prstGeom prst="rect">
+            <a:avLst/>
+          </a:prstGeom>
+          <a:noFill/>
+          <a:ln/>
+        </p:spPr>
+        <p:txBody>
+          <a:bodyPr wrap="square" lIns="0" tIns="0" rIns="0" bIns="0" rtlCol="0" anchor="ctr"/>
+          <a:lstStyle/>
+          <a:p>
+            <a:pPr indent="0" marL="0">
+              <a:buNone/>
+            </a:pPr>
+            <a:r>
+              <a:rPr lang="en-US" sz="2200" dirty="0">
+                <a:solidFill>
+                  <a:srgbClr val="000000"/>
+                </a:solidFill>
+                <a:latin typeface="Calibri" pitchFamily="34" charset="0"/>
+                <a:ea typeface="Calibri" pitchFamily="34" charset="-122"/>
+                <a:cs typeface="Calibri" pitchFamily="34" charset="-120"/>
+              </a:rPr>
+              <a:t>📝</a:t>
+            </a:r>
+            <a:endParaRPr lang="en-US" sz="2200" dirty="0"/>
+          </a:p>
+        </p:txBody>
+      </p:sp>
+      <p:sp>
+        <p:nvSpPr>
+          <p:cNvPr id="19" name="Text 17"/>
+          <p:cNvSpPr txBox="1"/>
+          <p:nvPr/>
+        </p:nvSpPr>
+        <p:spPr>
+          <a:xfrm>
+            <a:off x="9052560" y="2935224"/>
+            <a:ext cx="2377440" cy="320040"/>
+          </a:xfrm>
+          <a:prstGeom prst="rect">
+            <a:avLst/>
+          </a:prstGeom>
+          <a:noFill/>
+          <a:ln/>
+        </p:spPr>
+        <p:txBody>
+          <a:bodyPr wrap="square" lIns="0" tIns="0" rIns="0" bIns="0" rtlCol="0" anchor="ctr"/>
+          <a:lstStyle/>
+          <a:p>
+            <a:pPr indent="0" marL="0">
+              <a:buNone/>
+            </a:pPr>
+            <a:r>
+              <a:rPr lang="en-US" sz="1300" b="1" dirty="0">
+                <a:solidFill>
+                  <a:srgbClr val="261E48"/>
+                </a:solidFill>
+                <a:latin typeface="Calibri" pitchFamily="34" charset="0"/>
+                <a:ea typeface="Calibri" pitchFamily="34" charset="-122"/>
+                <a:cs typeface="Calibri" pitchFamily="34" charset="-120"/>
+              </a:rPr>
+              <a:t>xss</a:t>
+            </a:r>
+            <a:endParaRPr lang="en-US" sz="1300" dirty="0"/>
+          </a:p>
+        </p:txBody>
+      </p:sp>
+      <p:sp>
+        <p:nvSpPr>
+          <p:cNvPr id="20" name="Text 18"/>
+          <p:cNvSpPr txBox="1"/>
+          <p:nvPr/>
+        </p:nvSpPr>
+        <p:spPr>
+          <a:xfrm>
+            <a:off x="9052560" y="3246120"/>
+            <a:ext cx="2377440" cy="502920"/>
+          </a:xfrm>
+          <a:prstGeom prst="rect">
+            <a:avLst/>
+          </a:prstGeom>
+          <a:noFill/>
+          <a:ln/>
+        </p:spPr>
+        <p:txBody>
+          <a:bodyPr wrap="square" lIns="0" tIns="0" rIns="0" bIns="0" rtlCol="0" anchor="ctr"/>
+          <a:lstStyle/>
+          <a:p>
+            <a:pPr indent="0" marL="0">
+              <a:lnSpc>
+                <a:spcPct val="100000"/>
+              </a:lnSpc>
+              <a:buNone/>
+            </a:pPr>
+            <a:r>
+              <a:rPr lang="en-US" sz="1050" dirty="0">
+                <a:solidFill>
+                  <a:srgbClr val="6A6594"/>
+                </a:solidFill>
+                <a:latin typeface="Calibri" pitchFamily="34" charset="0"/>
+                <a:ea typeface="Calibri" pitchFamily="34" charset="-122"/>
+                <a:cs typeface="Calibri" pitchFamily="34" charset="-120"/>
+              </a:rPr>
+              <a:t>injection → WAF</a:t>
+            </a:r>
+            <a:endParaRPr lang="en-US" sz="1050" dirty="0"/>
+          </a:p>
+        </p:txBody>
+      </p:sp>
+      <p:sp>
+        <p:nvSpPr>
+          <p:cNvPr id="21" name="Shape 19"/>
+          <p:cNvSpPr/>
+          <p:nvPr/>
+        </p:nvSpPr>
+        <p:spPr>
+          <a:xfrm>
+            <a:off x="548640" y="3959352"/>
+            <a:ext cx="2651760" cy="1463040"/>
+          </a:xfrm>
+          <a:prstGeom prst="roundRect">
+            <a:avLst>
+              <a:gd name="adj" fmla="val 5000"/>
+            </a:avLst>
+          </a:prstGeom>
+          <a:solidFill>
+            <a:srgbClr val="EEF0F8"/>
+          </a:solidFill>
+          <a:ln/>
+          <a:effectLst>
+            <a:outerShdw sx="100000" sy="100000" kx="0" ky="0" algn="bl" rotWithShape="0" blurRad="76200" dist="25400" dir="5400000">
+              <a:srgbClr val="888888">
+                <a:alpha val="25000"/>
+              </a:srgbClr>
+            </a:outerShdw>
+          </a:effectLst>
+        </p:spPr>
+      </p:sp>
+      <p:sp>
+        <p:nvSpPr>
+          <p:cNvPr id="22" name="Text 20"/>
+          <p:cNvSpPr txBox="1"/>
+          <p:nvPr/>
+        </p:nvSpPr>
+        <p:spPr>
+          <a:xfrm>
+            <a:off x="685800" y="4069080"/>
+            <a:ext cx="914400" cy="457200"/>
+          </a:xfrm>
+          <a:prstGeom prst="rect">
+            <a:avLst/>
+          </a:prstGeom>
+          <a:noFill/>
+          <a:ln/>
+        </p:spPr>
+        <p:txBody>
+          <a:bodyPr wrap="square" lIns="0" tIns="0" rIns="0" bIns="0" rtlCol="0" anchor="ctr"/>
+          <a:lstStyle/>
+          <a:p>
+            <a:pPr indent="0" marL="0">
+              <a:buNone/>
+            </a:pPr>
+            <a:r>
+              <a:rPr lang="en-US" sz="2200" dirty="0">
+                <a:solidFill>
+                  <a:srgbClr val="000000"/>
+                </a:solidFill>
+                <a:latin typeface="Calibri" pitchFamily="34" charset="0"/>
+                <a:ea typeface="Calibri" pitchFamily="34" charset="-122"/>
+                <a:cs typeface="Calibri" pitchFamily="34" charset="-120"/>
+              </a:rPr>
+              <a:t>🔓</a:t>
+            </a:r>
+            <a:endParaRPr lang="en-US" sz="2200" dirty="0"/>
+          </a:p>
+        </p:txBody>
+      </p:sp>
+      <p:sp>
+        <p:nvSpPr>
+          <p:cNvPr id="23" name="Text 21"/>
+          <p:cNvSpPr txBox="1"/>
+          <p:nvPr/>
+        </p:nvSpPr>
+        <p:spPr>
+          <a:xfrm>
+            <a:off x="685800" y="4562856"/>
+            <a:ext cx="2377440" cy="320040"/>
+          </a:xfrm>
+          <a:prstGeom prst="rect">
+            <a:avLst/>
+          </a:prstGeom>
+          <a:noFill/>
+          <a:ln/>
+        </p:spPr>
+        <p:txBody>
+          <a:bodyPr wrap="square" lIns="0" tIns="0" rIns="0" bIns="0" rtlCol="0" anchor="ctr"/>
+          <a:lstStyle/>
+          <a:p>
+            <a:pPr indent="0" marL="0">
+              <a:buNone/>
+            </a:pPr>
+            <a:r>
+              <a:rPr lang="en-US" sz="1300" b="1" dirty="0">
+                <a:solidFill>
+                  <a:srgbClr val="261E48"/>
+                </a:solidFill>
+                <a:latin typeface="Calibri" pitchFamily="34" charset="0"/>
+                <a:ea typeface="Calibri" pitchFamily="34" charset="-122"/>
+                <a:cs typeface="Calibri" pitchFamily="34" charset="-120"/>
+              </a:rPr>
+              <a:t>cred_stuffing</a:t>
+            </a:r>
+            <a:endParaRPr lang="en-US" sz="1300" dirty="0"/>
+          </a:p>
+        </p:txBody>
+      </p:sp>
+      <p:sp>
+        <p:nvSpPr>
+          <p:cNvPr id="24" name="Text 22"/>
+          <p:cNvSpPr txBox="1"/>
+          <p:nvPr/>
+        </p:nvSpPr>
+        <p:spPr>
+          <a:xfrm>
+            <a:off x="685800" y="4873752"/>
+            <a:ext cx="2377440" cy="502920"/>
+          </a:xfrm>
+          <a:prstGeom prst="rect">
+            <a:avLst/>
+          </a:prstGeom>
+          <a:noFill/>
+          <a:ln/>
+        </p:spPr>
+        <p:txBody>
+          <a:bodyPr wrap="square" lIns="0" tIns="0" rIns="0" bIns="0" rtlCol="0" anchor="ctr"/>
+          <a:lstStyle/>
+          <a:p>
+            <a:pPr indent="0" marL="0">
+              <a:lnSpc>
+                <a:spcPct val="100000"/>
+              </a:lnSpc>
+              <a:buNone/>
+            </a:pPr>
+            <a:r>
+              <a:rPr lang="en-US" sz="1050" dirty="0">
+                <a:solidFill>
+                  <a:srgbClr val="6A6594"/>
+                </a:solidFill>
+                <a:latin typeface="Calibri" pitchFamily="34" charset="0"/>
+                <a:ea typeface="Calibri" pitchFamily="34" charset="-122"/>
+                <a:cs typeface="Calibri" pitchFamily="34" charset="-120"/>
+              </a:rPr>
+              <a:t>bourrage d'identifiants</a:t>
+            </a:r>
+            <a:endParaRPr lang="en-US" sz="1050" dirty="0"/>
+          </a:p>
+        </p:txBody>
+      </p:sp>
+      <p:sp>
+        <p:nvSpPr>
+          <p:cNvPr id="25" name="Shape 23"/>
+          <p:cNvSpPr/>
+          <p:nvPr/>
+        </p:nvSpPr>
+        <p:spPr>
+          <a:xfrm>
+            <a:off x="3337560" y="3959352"/>
+            <a:ext cx="2651760" cy="1463040"/>
+          </a:xfrm>
+          <a:prstGeom prst="roundRect">
+            <a:avLst>
+              <a:gd name="adj" fmla="val 5000"/>
+            </a:avLst>
+          </a:prstGeom>
+          <a:solidFill>
+            <a:srgbClr val="EEF0F8"/>
+          </a:solidFill>
+          <a:ln/>
+          <a:effectLst>
+            <a:outerShdw sx="100000" sy="100000" kx="0" ky="0" algn="bl" rotWithShape="0" blurRad="76200" dist="25400" dir="5400000">
+              <a:srgbClr val="888888">
+                <a:alpha val="25000"/>
+              </a:srgbClr>
+            </a:outerShdw>
+          </a:effectLst>
+        </p:spPr>
+      </p:sp>
+      <p:sp>
+        <p:nvSpPr>
+          <p:cNvPr id="26" name="Text 24"/>
+          <p:cNvSpPr txBox="1"/>
+          <p:nvPr/>
+        </p:nvSpPr>
+        <p:spPr>
+          <a:xfrm>
+            <a:off x="3474720" y="4069080"/>
+            <a:ext cx="914400" cy="457200"/>
+          </a:xfrm>
+          <a:prstGeom prst="rect">
+            <a:avLst/>
+          </a:prstGeom>
+          <a:noFill/>
+          <a:ln/>
+        </p:spPr>
+        <p:txBody>
+          <a:bodyPr wrap="square" lIns="0" tIns="0" rIns="0" bIns="0" rtlCol="0" anchor="ctr"/>
+          <a:lstStyle/>
+          <a:p>
+            <a:pPr indent="0" marL="0">
+              <a:buNone/>
+            </a:pPr>
+            <a:r>
+              <a:rPr lang="en-US" sz="2200" dirty="0">
+                <a:solidFill>
+                  <a:srgbClr val="000000"/>
+                </a:solidFill>
+                <a:latin typeface="Calibri" pitchFamily="34" charset="0"/>
+                <a:ea typeface="Calibri" pitchFamily="34" charset="-122"/>
+                <a:cs typeface="Calibri" pitchFamily="34" charset="-120"/>
+              </a:rPr>
+              <a:t>🚫</a:t>
+            </a:r>
+            <a:endParaRPr lang="en-US" sz="2200" dirty="0"/>
+          </a:p>
+        </p:txBody>
+      </p:sp>
+      <p:sp>
+        <p:nvSpPr>
+          <p:cNvPr id="27" name="Text 25"/>
+          <p:cNvSpPr txBox="1"/>
+          <p:nvPr/>
+        </p:nvSpPr>
+        <p:spPr>
+          <a:xfrm>
+            <a:off x="3474720" y="4562856"/>
+            <a:ext cx="2377440" cy="320040"/>
+          </a:xfrm>
+          <a:prstGeom prst="rect">
+            <a:avLst/>
+          </a:prstGeom>
+          <a:noFill/>
+          <a:ln/>
+        </p:spPr>
+        <p:txBody>
+          <a:bodyPr wrap="square" lIns="0" tIns="0" rIns="0" bIns="0" rtlCol="0" anchor="ctr"/>
+          <a:lstStyle/>
+          <a:p>
+            <a:pPr indent="0" marL="0">
+              <a:buNone/>
+            </a:pPr>
+            <a:r>
+              <a:rPr lang="en-US" sz="1300" b="1" dirty="0">
+                <a:solidFill>
+                  <a:srgbClr val="261E48"/>
+                </a:solidFill>
+                <a:latin typeface="Calibri" pitchFamily="34" charset="0"/>
+                <a:ea typeface="Calibri" pitchFamily="34" charset="-122"/>
+                <a:cs typeface="Calibri" pitchFamily="34" charset="-120"/>
+              </a:rPr>
+              <a:t>notfound_flood</a:t>
+            </a:r>
+            <a:endParaRPr lang="en-US" sz="1300" dirty="0"/>
+          </a:p>
+        </p:txBody>
+      </p:sp>
+      <p:sp>
+        <p:nvSpPr>
+          <p:cNvPr id="28" name="Text 26"/>
+          <p:cNvSpPr txBox="1"/>
+          <p:nvPr/>
+        </p:nvSpPr>
+        <p:spPr>
+          <a:xfrm>
+            <a:off x="3474720" y="4873752"/>
+            <a:ext cx="2377440" cy="502920"/>
+          </a:xfrm>
+          <a:prstGeom prst="rect">
+            <a:avLst/>
+          </a:prstGeom>
+          <a:noFill/>
+          <a:ln/>
+        </p:spPr>
+        <p:txBody>
+          <a:bodyPr wrap="square" lIns="0" tIns="0" rIns="0" bIns="0" rtlCol="0" anchor="ctr"/>
+          <a:lstStyle/>
+          <a:p>
+            <a:pPr indent="0" marL="0">
+              <a:lnSpc>
+                <a:spcPct val="100000"/>
+              </a:lnSpc>
+              <a:buNone/>
+            </a:pPr>
+            <a:r>
+              <a:rPr lang="en-US" sz="1050" dirty="0">
+                <a:solidFill>
+                  <a:srgbClr val="6A6594"/>
+                </a:solidFill>
+                <a:latin typeface="Calibri" pitchFamily="34" charset="0"/>
+                <a:ea typeface="Calibri" pitchFamily="34" charset="-122"/>
+                <a:cs typeface="Calibri" pitchFamily="34" charset="-120"/>
+              </a:rPr>
+              <a:t>bruit de 404</a:t>
+            </a:r>
+            <a:endParaRPr lang="en-US" sz="1050" dirty="0"/>
+          </a:p>
+        </p:txBody>
+      </p:sp>
+      <p:sp>
+        <p:nvSpPr>
+          <p:cNvPr id="29" name="Shape 27"/>
+          <p:cNvSpPr/>
+          <p:nvPr/>
+        </p:nvSpPr>
+        <p:spPr>
+          <a:xfrm>
+            <a:off x="6126480" y="3959352"/>
+            <a:ext cx="2651760" cy="1463040"/>
+          </a:xfrm>
+          <a:prstGeom prst="roundRect">
+            <a:avLst>
+              <a:gd name="adj" fmla="val 5000"/>
+            </a:avLst>
+          </a:prstGeom>
+          <a:solidFill>
+            <a:srgbClr val="EEF0F8"/>
+          </a:solidFill>
+          <a:ln/>
+          <a:effectLst>
+            <a:outerShdw sx="100000" sy="100000" kx="0" ky="0" algn="bl" rotWithShape="0" blurRad="76200" dist="25400" dir="5400000">
+              <a:srgbClr val="888888">
+                <a:alpha val="25000"/>
+              </a:srgbClr>
+            </a:outerShdw>
+          </a:effectLst>
+        </p:spPr>
+      </p:sp>
+      <p:sp>
+        <p:nvSpPr>
+          <p:cNvPr id="30" name="Text 28"/>
+          <p:cNvSpPr txBox="1"/>
+          <p:nvPr/>
+        </p:nvSpPr>
+        <p:spPr>
+          <a:xfrm>
+            <a:off x="6263640" y="4069080"/>
+            <a:ext cx="914400" cy="457200"/>
+          </a:xfrm>
+          <a:prstGeom prst="rect">
+            <a:avLst/>
+          </a:prstGeom>
+          <a:noFill/>
+          <a:ln/>
+        </p:spPr>
+        <p:txBody>
+          <a:bodyPr wrap="square" lIns="0" tIns="0" rIns="0" bIns="0" rtlCol="0" anchor="ctr"/>
+          <a:lstStyle/>
+          <a:p>
+            <a:pPr indent="0" marL="0">
+              <a:buNone/>
+            </a:pPr>
+            <a:r>
+              <a:rPr lang="en-US" sz="2200" dirty="0">
+                <a:solidFill>
+                  <a:srgbClr val="000000"/>
+                </a:solidFill>
+                <a:latin typeface="Calibri" pitchFamily="34" charset="0"/>
+                <a:ea typeface="Calibri" pitchFamily="34" charset="-122"/>
+                <a:cs typeface="Calibri" pitchFamily="34" charset="-120"/>
+              </a:rPr>
+              <a:t>🐌</a:t>
+            </a:r>
+            <a:endParaRPr lang="en-US" sz="2200" dirty="0"/>
+          </a:p>
+        </p:txBody>
+      </p:sp>
+      <p:sp>
+        <p:nvSpPr>
+          <p:cNvPr id="31" name="Text 29"/>
+          <p:cNvSpPr txBox="1"/>
+          <p:nvPr/>
+        </p:nvSpPr>
+        <p:spPr>
+          <a:xfrm>
+            <a:off x="6263640" y="4562856"/>
+            <a:ext cx="2377440" cy="320040"/>
+          </a:xfrm>
+          <a:prstGeom prst="rect">
+            <a:avLst/>
+          </a:prstGeom>
+          <a:noFill/>
+          <a:ln/>
+        </p:spPr>
+        <p:txBody>
+          <a:bodyPr wrap="square" lIns="0" tIns="0" rIns="0" bIns="0" rtlCol="0" anchor="ctr"/>
+          <a:lstStyle/>
+          <a:p>
+            <a:pPr indent="0" marL="0">
+              <a:buNone/>
+            </a:pPr>
+            <a:r>
+              <a:rPr lang="en-US" sz="1300" b="1" dirty="0">
+                <a:solidFill>
+                  <a:srgbClr val="261E48"/>
+                </a:solidFill>
+                <a:latin typeface="Calibri" pitchFamily="34" charset="0"/>
+                <a:ea typeface="Calibri" pitchFamily="34" charset="-122"/>
+                <a:cs typeface="Calibri" pitchFamily="34" charset="-120"/>
+              </a:rPr>
+              <a:t>slowloris</a:t>
+            </a:r>
+            <a:endParaRPr lang="en-US" sz="1300" dirty="0"/>
+          </a:p>
+        </p:txBody>
+      </p:sp>
+      <p:sp>
+        <p:nvSpPr>
+          <p:cNvPr id="32" name="Text 30"/>
+          <p:cNvSpPr txBox="1"/>
+          <p:nvPr/>
+        </p:nvSpPr>
+        <p:spPr>
+          <a:xfrm>
+            <a:off x="6263640" y="4873752"/>
+            <a:ext cx="2377440" cy="502920"/>
+          </a:xfrm>
+          <a:prstGeom prst="rect">
+            <a:avLst/>
+          </a:prstGeom>
+          <a:noFill/>
+          <a:ln/>
+        </p:spPr>
+        <p:txBody>
+          <a:bodyPr wrap="square" lIns="0" tIns="0" rIns="0" bIns="0" rtlCol="0" anchor="ctr"/>
+          <a:lstStyle/>
+          <a:p>
+            <a:pPr indent="0" marL="0">
+              <a:lnSpc>
+                <a:spcPct val="100000"/>
+              </a:lnSpc>
+              <a:buNone/>
+            </a:pPr>
+            <a:r>
+              <a:rPr lang="en-US" sz="1050" dirty="0">
+                <a:solidFill>
+                  <a:srgbClr val="6A6594"/>
+                </a:solidFill>
+                <a:latin typeface="Calibri" pitchFamily="34" charset="0"/>
+                <a:ea typeface="Calibri" pitchFamily="34" charset="-122"/>
+                <a:cs typeface="Calibri" pitchFamily="34" charset="-120"/>
+              </a:rPr>
+              <a:t>connexions lentes maintenues ouvertes</a:t>
+            </a:r>
+            <a:endParaRPr lang="en-US" sz="1050" dirty="0"/>
+          </a:p>
+        </p:txBody>
+      </p:sp>
+      <p:sp>
+        <p:nvSpPr>
+          <p:cNvPr id="33" name="Text 31"/>
+          <p:cNvSpPr txBox="1"/>
+          <p:nvPr/>
+        </p:nvSpPr>
+        <p:spPr>
+          <a:xfrm>
+            <a:off x="548640" y="5943600"/>
+            <a:ext cx="10972800" cy="365760"/>
+          </a:xfrm>
+          <a:prstGeom prst="rect">
+            <a:avLst/>
+          </a:prstGeom>
+          <a:noFill/>
+          <a:ln/>
+        </p:spPr>
+        <p:txBody>
+          <a:bodyPr wrap="square" lIns="0" tIns="0" rIns="0" bIns="0" rtlCol="0" anchor="ctr"/>
+          <a:lstStyle/>
+          <a:p>
+            <a:pPr indent="0" marL="0">
+              <a:buNone/>
+            </a:pPr>
+            <a:r>
+              <a:rPr lang="en-US" sz="1250" b="1" dirty="0">
+                <a:solidFill>
+                  <a:srgbClr val="4B3FA6"/>
+                </a:solidFill>
+                <a:latin typeface="Calibri" pitchFamily="34" charset="0"/>
+                <a:ea typeface="Calibri" pitchFamily="34" charset="-122"/>
+                <a:cs typeface="Calibri" pitchFamily="34" charset="-120"/>
+              </a:rPr>
+              <a:t>Statistiques par vecteur + agrégées · métriques Prometheus par vecteur.</a:t>
             </a:r>
             <a:endParaRPr lang="en-US" sz="1250" dirty="0"/>
           </a:p>
@@ -5679,7 +8851,7 @@
                 <a:ea typeface="Calibri" pitchFamily="34" charset="-122"/>
                 <a:cs typeface="Calibri" pitchFamily="34" charset="-120"/>
               </a:rPr>
-              <a:t>REMÉDIATION AUTONOME</a:t>
+              <a:t>LE CŒUR DU SUJET</a:t>
             </a:r>
             <a:endParaRPr lang="en-US" sz="1200" dirty="0"/>
           </a:p>
@@ -5718,7 +8890,7 @@
                 <a:ea typeface="Calibri" pitchFamily="34" charset="-122"/>
                 <a:cs typeface="Calibri" pitchFamily="34" charset="-120"/>
               </a:rPr>
-              <a:t>Deux incidents, deux réponses</a:t>
+              <a:t>La boucle autonome (zéro intervention)</a:t>
             </a:r>
             <a:endParaRPr lang="en-US" sz="3000" dirty="0"/>
           </a:p>
@@ -5732,16 +8904,16 @@
         </p:nvSpPr>
         <p:spPr>
           <a:xfrm>
-            <a:off x="548640" y="1645920"/>
-            <a:ext cx="5486400" cy="4206240"/>
+            <a:off x="548640" y="2103120"/>
+            <a:ext cx="2011680" cy="2011680"/>
           </a:xfrm>
           <a:prstGeom prst="roundRect">
             <a:avLst>
-              <a:gd name="adj" fmla="val 1739"/>
+              <a:gd name="adj" fmla="val 3636"/>
             </a:avLst>
           </a:prstGeom>
           <a:solidFill>
-            <a:srgbClr val="E3F3EC"/>
+            <a:srgbClr val="EEF0F8"/>
           </a:solidFill>
           <a:ln/>
           <a:effectLst>
@@ -5755,38 +8927,97 @@
       </p:sp>
       <p:sp>
         <p:nvSpPr>
-          <p:cNvPr id="5" name="Text 3"/>
-          <p:cNvSpPr txBox="1"/>
-          <p:nvPr/>
-        </p:nvSpPr>
-        <p:spPr>
-          <a:xfrm>
-            <a:off x="777240" y="1828800"/>
-            <a:ext cx="5029200" cy="457200"/>
-          </a:xfrm>
-          <a:prstGeom prst="rect">
-            <a:avLst/>
-          </a:prstGeom>
-          <a:noFill/>
-          <a:ln/>
-        </p:spPr>
-        <p:txBody>
-          <a:bodyPr wrap="square" lIns="0" tIns="0" rIns="0" bIns="0" rtlCol="0" anchor="ctr"/>
-          <a:lstStyle/>
-          <a:p>
-            <a:pPr indent="0" marL="0">
+          <p:cNvPr id="5" name="Shape 3"/>
+          <p:cNvSpPr/>
+          <p:nvPr/>
+        </p:nvSpPr>
+        <p:spPr>
+          <a:xfrm>
+            <a:off x="1280160" y="2286000"/>
+            <a:ext cx="548640" cy="548640"/>
+          </a:xfrm>
+          <a:prstGeom prst="ellipse">
+            <a:avLst/>
+          </a:prstGeom>
+          <a:solidFill>
+            <a:srgbClr val="4B3FA6"/>
+          </a:solidFill>
+          <a:ln/>
+        </p:spPr>
+      </p:sp>
+      <p:sp>
+        <p:nvSpPr>
+          <p:cNvPr id="6" name="Text 4"/>
+          <p:cNvSpPr txBox="1"/>
+          <p:nvPr/>
+        </p:nvSpPr>
+        <p:spPr>
+          <a:xfrm>
+            <a:off x="1280160" y="2304288"/>
+            <a:ext cx="548640" cy="512064"/>
+          </a:xfrm>
+          <a:prstGeom prst="rect">
+            <a:avLst/>
+          </a:prstGeom>
+          <a:noFill/>
+          <a:ln/>
+        </p:spPr>
+        <p:txBody>
+          <a:bodyPr wrap="square" lIns="0" tIns="0" rIns="0" bIns="0" rtlCol="0" anchor="ctr"/>
+          <a:lstStyle/>
+          <a:p>
+            <a:pPr algn="ctr" indent="0" marL="0">
+              <a:buNone/>
+            </a:pPr>
+            <a:r>
+              <a:rPr lang="en-US" sz="2000" b="1" dirty="0">
+                <a:solidFill>
+                  <a:srgbClr val="FFFFFF"/>
+                </a:solidFill>
+                <a:latin typeface="Calibri" pitchFamily="34" charset="0"/>
+                <a:ea typeface="Calibri" pitchFamily="34" charset="-122"/>
+                <a:cs typeface="Calibri" pitchFamily="34" charset="-120"/>
+              </a:rPr>
+              <a:t>1</a:t>
+            </a:r>
+            <a:endParaRPr lang="en-US" sz="2000" dirty="0"/>
+          </a:p>
+        </p:txBody>
+      </p:sp>
+      <p:sp>
+        <p:nvSpPr>
+          <p:cNvPr id="7" name="Text 5"/>
+          <p:cNvSpPr txBox="1"/>
+          <p:nvPr/>
+        </p:nvSpPr>
+        <p:spPr>
+          <a:xfrm>
+            <a:off x="640080" y="2971800"/>
+            <a:ext cx="1828800" cy="365760"/>
+          </a:xfrm>
+          <a:prstGeom prst="rect">
+            <a:avLst/>
+          </a:prstGeom>
+          <a:noFill/>
+          <a:ln/>
+        </p:spPr>
+        <p:txBody>
+          <a:bodyPr wrap="square" lIns="0" tIns="0" rIns="0" bIns="0" rtlCol="0" anchor="ctr"/>
+          <a:lstStyle/>
+          <a:p>
+            <a:pPr algn="ctr" indent="0" marL="0">
               <a:buNone/>
             </a:pPr>
             <a:r>
               <a:rPr lang="en-US" sz="1500" b="1" dirty="0">
                 <a:solidFill>
-                  <a:srgbClr val="1E8E6A"/>
-                </a:solidFill>
-                <a:latin typeface="Calibri" pitchFamily="34" charset="0"/>
-                <a:ea typeface="Calibri" pitchFamily="34" charset="-122"/>
-                <a:cs typeface="Calibri" pitchFamily="34" charset="-120"/>
-              </a:rPr>
-              <a:t>🌊 Déni de service → DISPONIBILITÉ</a:t>
+                  <a:srgbClr val="261E48"/>
+                </a:solidFill>
+                <a:latin typeface="Calibri" pitchFamily="34" charset="0"/>
+                <a:ea typeface="Calibri" pitchFamily="34" charset="-122"/>
+                <a:cs typeface="Calibri" pitchFamily="34" charset="-120"/>
+              </a:rPr>
+              <a:t>Attaque</a:t>
             </a:r>
             <a:endParaRPr lang="en-US" sz="1500" dirty="0"/>
           </a:p>
@@ -5794,124 +9025,61 @@
       </p:sp>
       <p:sp>
         <p:nvSpPr>
-          <p:cNvPr id="6" name="Text 4"/>
-          <p:cNvSpPr txBox="1"/>
-          <p:nvPr/>
-        </p:nvSpPr>
-        <p:spPr>
-          <a:xfrm>
-            <a:off x="777240" y="2377440"/>
-            <a:ext cx="5029200" cy="3200400"/>
-          </a:xfrm>
-          <a:prstGeom prst="rect">
-            <a:avLst/>
-          </a:prstGeom>
-          <a:noFill/>
-          <a:ln/>
-        </p:spPr>
-        <p:txBody>
-          <a:bodyPr wrap="square" lIns="0" tIns="0" rIns="0" bIns="0" rtlCol="0" anchor="ctr"/>
-          <a:lstStyle/>
-          <a:p>
-            <a:pPr indent="0" marL="0">
-              <a:lnSpc>
-                <a:spcPct val="130000"/>
-              </a:lnSpc>
-              <a:buNone/>
-            </a:pPr>
-            <a:r>
-              <a:rPr lang="en-US" sz="1400" dirty="0">
-                <a:solidFill>
-                  <a:srgbClr val="261E48"/>
-                </a:solidFill>
-                <a:latin typeface="Calibri" pitchFamily="34" charset="0"/>
-                <a:ea typeface="Calibri" pitchFamily="34" charset="-122"/>
-                <a:cs typeface="Calibri" pitchFamily="34" charset="-120"/>
-              </a:rPr>
-              <a:t>• Détection ML (débit, latence, erreurs)</a:t>
-            </a:r>
-            <a:endParaRPr lang="en-US" sz="1400" dirty="0"/>
-          </a:p>
-          <a:p>
-            <a:pPr indent="0" marL="0">
-              <a:lnSpc>
-                <a:spcPct val="130000"/>
-              </a:lnSpc>
-              <a:buNone/>
-            </a:pPr>
-            <a:r>
-              <a:rPr lang="en-US" sz="1400" dirty="0">
-                <a:solidFill>
-                  <a:srgbClr val="261E48"/>
-                </a:solidFill>
-                <a:latin typeface="Calibri" pitchFamily="34" charset="0"/>
-                <a:ea typeface="Calibri" pitchFamily="34" charset="-122"/>
-                <a:cs typeface="Calibri" pitchFamily="34" charset="-120"/>
-              </a:rPr>
-              <a:t>• Bouclier anti-DoS (load-shedding) sur l'auth</a:t>
-            </a:r>
-            <a:endParaRPr lang="en-US" sz="1400" dirty="0"/>
-          </a:p>
-          <a:p>
-            <a:pPr indent="0" marL="0">
-              <a:lnSpc>
-                <a:spcPct val="130000"/>
-              </a:lnSpc>
-              <a:buNone/>
-            </a:pPr>
-            <a:r>
-              <a:rPr lang="en-US" sz="1400" dirty="0">
-                <a:solidFill>
-                  <a:srgbClr val="261E48"/>
-                </a:solidFill>
-                <a:latin typeface="Calibri" pitchFamily="34" charset="0"/>
-                <a:ea typeface="Calibri" pitchFamily="34" charset="-122"/>
-                <a:cs typeface="Calibri" pitchFamily="34" charset="-120"/>
-              </a:rPr>
-              <a:t>• Vérification par transaction canari</a:t>
-            </a:r>
-            <a:endParaRPr lang="en-US" sz="1400" dirty="0"/>
-          </a:p>
-          <a:p>
-            <a:pPr indent="0" marL="0">
-              <a:lnSpc>
-                <a:spcPct val="130000"/>
-              </a:lnSpc>
-              <a:buNone/>
-            </a:pPr>
-            <a:r>
-              <a:rPr lang="en-US" sz="1400" dirty="0">
-                <a:solidFill>
-                  <a:srgbClr val="261E48"/>
-                </a:solidFill>
-                <a:latin typeface="Calibri" pitchFamily="34" charset="0"/>
-                <a:ea typeface="Calibri" pitchFamily="34" charset="-122"/>
-                <a:cs typeface="Calibri" pitchFamily="34" charset="-120"/>
-              </a:rPr>
-              <a:t>• Relâche automatique en fin d'attaque</a:t>
-            </a:r>
-            <a:endParaRPr lang="en-US" sz="1400" dirty="0"/>
-          </a:p>
-        </p:txBody>
-      </p:sp>
-      <p:sp>
-        <p:nvSpPr>
-          <p:cNvPr id="7" name="Shape 5"/>
+          <p:cNvPr id="8" name="Text 6"/>
+          <p:cNvSpPr txBox="1"/>
+          <p:nvPr/>
+        </p:nvSpPr>
+        <p:spPr>
+          <a:xfrm>
+            <a:off x="640080" y="3383280"/>
+            <a:ext cx="1828800" cy="548640"/>
+          </a:xfrm>
+          <a:prstGeom prst="rect">
+            <a:avLst/>
+          </a:prstGeom>
+          <a:noFill/>
+          <a:ln/>
+        </p:spPr>
+        <p:txBody>
+          <a:bodyPr wrap="square" lIns="0" tIns="0" rIns="0" bIns="0" rtlCol="0" anchor="ctr"/>
+          <a:lstStyle/>
+          <a:p>
+            <a:pPr algn="ctr" indent="0" marL="0">
+              <a:buNone/>
+            </a:pPr>
+            <a:r>
+              <a:rPr lang="en-US" sz="1150" dirty="0">
+                <a:solidFill>
+                  <a:srgbClr val="6A6594"/>
+                </a:solidFill>
+                <a:latin typeface="Calibri" pitchFamily="34" charset="0"/>
+                <a:ea typeface="Calibri" pitchFamily="34" charset="-122"/>
+                <a:cs typeface="Calibri" pitchFamily="34" charset="-120"/>
+              </a:rPr>
+              <a:t>depuis le PC attaquant</a:t>
+            </a:r>
+            <a:endParaRPr lang="en-US" sz="1150" dirty="0"/>
+          </a:p>
+        </p:txBody>
+      </p:sp>
+      <p:sp>
+        <p:nvSpPr>
+          <p:cNvPr id="9" name="Shape 7"/>
           <p:cNvSpPr/>
           <p:nvPr/>
         </p:nvSpPr>
         <p:spPr>
           <a:xfrm>
-            <a:off x="6217920" y="1645920"/>
-            <a:ext cx="5394960" cy="4206240"/>
+            <a:off x="2834640" y="2103120"/>
+            <a:ext cx="2011680" cy="2011680"/>
           </a:xfrm>
           <a:prstGeom prst="roundRect">
             <a:avLst>
-              <a:gd name="adj" fmla="val 1739"/>
+              <a:gd name="adj" fmla="val 3636"/>
             </a:avLst>
           </a:prstGeom>
           <a:solidFill>
-            <a:srgbClr val="FBE8E6"/>
+            <a:srgbClr val="EEF0F8"/>
           </a:solidFill>
           <a:ln/>
           <a:effectLst>
@@ -5925,38 +9093,97 @@
       </p:sp>
       <p:sp>
         <p:nvSpPr>
-          <p:cNvPr id="8" name="Text 6"/>
-          <p:cNvSpPr txBox="1"/>
-          <p:nvPr/>
-        </p:nvSpPr>
-        <p:spPr>
-          <a:xfrm>
-            <a:off x="6446520" y="1828800"/>
-            <a:ext cx="4937760" cy="457200"/>
-          </a:xfrm>
-          <a:prstGeom prst="rect">
-            <a:avLst/>
-          </a:prstGeom>
-          <a:noFill/>
-          <a:ln/>
-        </p:spPr>
-        <p:txBody>
-          <a:bodyPr wrap="square" lIns="0" tIns="0" rIns="0" bIns="0" rtlCol="0" anchor="ctr"/>
-          <a:lstStyle/>
-          <a:p>
-            <a:pPr indent="0" marL="0">
+          <p:cNvPr id="10" name="Shape 8"/>
+          <p:cNvSpPr/>
+          <p:nvPr/>
+        </p:nvSpPr>
+        <p:spPr>
+          <a:xfrm>
+            <a:off x="3566160" y="2286000"/>
+            <a:ext cx="548640" cy="548640"/>
+          </a:xfrm>
+          <a:prstGeom prst="ellipse">
+            <a:avLst/>
+          </a:prstGeom>
+          <a:solidFill>
+            <a:srgbClr val="4B3FA6"/>
+          </a:solidFill>
+          <a:ln/>
+        </p:spPr>
+      </p:sp>
+      <p:sp>
+        <p:nvSpPr>
+          <p:cNvPr id="11" name="Text 9"/>
+          <p:cNvSpPr txBox="1"/>
+          <p:nvPr/>
+        </p:nvSpPr>
+        <p:spPr>
+          <a:xfrm>
+            <a:off x="3566160" y="2304288"/>
+            <a:ext cx="548640" cy="512064"/>
+          </a:xfrm>
+          <a:prstGeom prst="rect">
+            <a:avLst/>
+          </a:prstGeom>
+          <a:noFill/>
+          <a:ln/>
+        </p:spPr>
+        <p:txBody>
+          <a:bodyPr wrap="square" lIns="0" tIns="0" rIns="0" bIns="0" rtlCol="0" anchor="ctr"/>
+          <a:lstStyle/>
+          <a:p>
+            <a:pPr algn="ctr" indent="0" marL="0">
+              <a:buNone/>
+            </a:pPr>
+            <a:r>
+              <a:rPr lang="en-US" sz="2000" b="1" dirty="0">
+                <a:solidFill>
+                  <a:srgbClr val="FFFFFF"/>
+                </a:solidFill>
+                <a:latin typeface="Calibri" pitchFamily="34" charset="0"/>
+                <a:ea typeface="Calibri" pitchFamily="34" charset="-122"/>
+                <a:cs typeface="Calibri" pitchFamily="34" charset="-120"/>
+              </a:rPr>
+              <a:t>2</a:t>
+            </a:r>
+            <a:endParaRPr lang="en-US" sz="2000" dirty="0"/>
+          </a:p>
+        </p:txBody>
+      </p:sp>
+      <p:sp>
+        <p:nvSpPr>
+          <p:cNvPr id="12" name="Text 10"/>
+          <p:cNvSpPr txBox="1"/>
+          <p:nvPr/>
+        </p:nvSpPr>
+        <p:spPr>
+          <a:xfrm>
+            <a:off x="2926080" y="2971800"/>
+            <a:ext cx="1828800" cy="365760"/>
+          </a:xfrm>
+          <a:prstGeom prst="rect">
+            <a:avLst/>
+          </a:prstGeom>
+          <a:noFill/>
+          <a:ln/>
+        </p:spPr>
+        <p:txBody>
+          <a:bodyPr wrap="square" lIns="0" tIns="0" rIns="0" bIns="0" rtlCol="0" anchor="ctr"/>
+          <a:lstStyle/>
+          <a:p>
+            <a:pPr algn="ctr" indent="0" marL="0">
               <a:buNone/>
             </a:pPr>
             <a:r>
               <a:rPr lang="en-US" sz="1500" b="1" dirty="0">
                 <a:solidFill>
-                  <a:srgbClr val="C2413C"/>
-                </a:solidFill>
-                <a:latin typeface="Calibri" pitchFamily="34" charset="0"/>
-                <a:ea typeface="Calibri" pitchFamily="34" charset="-122"/>
-                <a:cs typeface="Calibri" pitchFamily="34" charset="-120"/>
-              </a:rPr>
-              <a:t>💉 Injection SQL → COMPROMISSION</a:t>
+                  <a:srgbClr val="261E48"/>
+                </a:solidFill>
+                <a:latin typeface="Calibri" pitchFamily="34" charset="0"/>
+                <a:ea typeface="Calibri" pitchFamily="34" charset="-122"/>
+                <a:cs typeface="Calibri" pitchFamily="34" charset="-120"/>
+              </a:rPr>
+              <a:t>Détection</a:t>
             </a:r>
             <a:endParaRPr lang="en-US" sz="1500" dirty="0"/>
           </a:p>
@@ -5964,33 +9191,157 @@
       </p:sp>
       <p:sp>
         <p:nvSpPr>
-          <p:cNvPr id="9" name="Text 7"/>
-          <p:cNvSpPr txBox="1"/>
-          <p:nvPr/>
-        </p:nvSpPr>
-        <p:spPr>
-          <a:xfrm>
-            <a:off x="6446520" y="2377440"/>
-            <a:ext cx="4937760" cy="3200400"/>
-          </a:xfrm>
-          <a:prstGeom prst="rect">
-            <a:avLst/>
-          </a:prstGeom>
-          <a:noFill/>
-          <a:ln/>
-        </p:spPr>
-        <p:txBody>
-          <a:bodyPr wrap="square" lIns="0" tIns="0" rIns="0" bIns="0" rtlCol="0" anchor="ctr"/>
-          <a:lstStyle/>
-          <a:p>
-            <a:pPr indent="0" marL="0">
-              <a:lnSpc>
-                <a:spcPct val="130000"/>
-              </a:lnSpc>
-              <a:buNone/>
-            </a:pPr>
-            <a:r>
-              <a:rPr lang="en-US" sz="1400" dirty="0">
+          <p:cNvPr id="13" name="Text 11"/>
+          <p:cNvSpPr txBox="1"/>
+          <p:nvPr/>
+        </p:nvSpPr>
+        <p:spPr>
+          <a:xfrm>
+            <a:off x="2926080" y="3383280"/>
+            <a:ext cx="1828800" cy="548640"/>
+          </a:xfrm>
+          <a:prstGeom prst="rect">
+            <a:avLst/>
+          </a:prstGeom>
+          <a:noFill/>
+          <a:ln/>
+        </p:spPr>
+        <p:txBody>
+          <a:bodyPr wrap="square" lIns="0" tIns="0" rIns="0" bIns="0" rtlCol="0" anchor="ctr"/>
+          <a:lstStyle/>
+          <a:p>
+            <a:pPr algn="ctr" indent="0" marL="0">
+              <a:buNone/>
+            </a:pPr>
+            <a:r>
+              <a:rPr lang="en-US" sz="1150" dirty="0">
+                <a:solidFill>
+                  <a:srgbClr val="6A6594"/>
+                </a:solidFill>
+                <a:latin typeface="Calibri" pitchFamily="34" charset="0"/>
+                <a:ea typeface="Calibri" pitchFamily="34" charset="-122"/>
+                <a:cs typeface="Calibri" pitchFamily="34" charset="-120"/>
+              </a:rPr>
+              <a:t>machine learning</a:t>
+            </a:r>
+            <a:endParaRPr lang="en-US" sz="1150" dirty="0"/>
+          </a:p>
+        </p:txBody>
+      </p:sp>
+      <p:sp>
+        <p:nvSpPr>
+          <p:cNvPr id="14" name="Shape 12"/>
+          <p:cNvSpPr/>
+          <p:nvPr/>
+        </p:nvSpPr>
+        <p:spPr>
+          <a:xfrm>
+            <a:off x="5120640" y="2103120"/>
+            <a:ext cx="2011680" cy="2011680"/>
+          </a:xfrm>
+          <a:prstGeom prst="roundRect">
+            <a:avLst>
+              <a:gd name="adj" fmla="val 3636"/>
+            </a:avLst>
+          </a:prstGeom>
+          <a:solidFill>
+            <a:srgbClr val="EEF0F8"/>
+          </a:solidFill>
+          <a:ln/>
+          <a:effectLst>
+            <a:outerShdw sx="100000" sy="100000" kx="0" ky="0" algn="bl" rotWithShape="0" blurRad="76200" dist="25400" dir="5400000">
+              <a:srgbClr val="888888">
+                <a:alpha val="25000"/>
+              </a:srgbClr>
+            </a:outerShdw>
+          </a:effectLst>
+        </p:spPr>
+      </p:sp>
+      <p:sp>
+        <p:nvSpPr>
+          <p:cNvPr id="15" name="Shape 13"/>
+          <p:cNvSpPr/>
+          <p:nvPr/>
+        </p:nvSpPr>
+        <p:spPr>
+          <a:xfrm>
+            <a:off x="5852160" y="2286000"/>
+            <a:ext cx="548640" cy="548640"/>
+          </a:xfrm>
+          <a:prstGeom prst="ellipse">
+            <a:avLst/>
+          </a:prstGeom>
+          <a:solidFill>
+            <a:srgbClr val="4B3FA6"/>
+          </a:solidFill>
+          <a:ln/>
+        </p:spPr>
+      </p:sp>
+      <p:sp>
+        <p:nvSpPr>
+          <p:cNvPr id="16" name="Text 14"/>
+          <p:cNvSpPr txBox="1"/>
+          <p:nvPr/>
+        </p:nvSpPr>
+        <p:spPr>
+          <a:xfrm>
+            <a:off x="5852160" y="2304288"/>
+            <a:ext cx="548640" cy="512064"/>
+          </a:xfrm>
+          <a:prstGeom prst="rect">
+            <a:avLst/>
+          </a:prstGeom>
+          <a:noFill/>
+          <a:ln/>
+        </p:spPr>
+        <p:txBody>
+          <a:bodyPr wrap="square" lIns="0" tIns="0" rIns="0" bIns="0" rtlCol="0" anchor="ctr"/>
+          <a:lstStyle/>
+          <a:p>
+            <a:pPr algn="ctr" indent="0" marL="0">
+              <a:buNone/>
+            </a:pPr>
+            <a:r>
+              <a:rPr lang="en-US" sz="2000" b="1" dirty="0">
+                <a:solidFill>
+                  <a:srgbClr val="FFFFFF"/>
+                </a:solidFill>
+                <a:latin typeface="Calibri" pitchFamily="34" charset="0"/>
+                <a:ea typeface="Calibri" pitchFamily="34" charset="-122"/>
+                <a:cs typeface="Calibri" pitchFamily="34" charset="-120"/>
+              </a:rPr>
+              <a:t>3</a:t>
+            </a:r>
+            <a:endParaRPr lang="en-US" sz="2000" dirty="0"/>
+          </a:p>
+        </p:txBody>
+      </p:sp>
+      <p:sp>
+        <p:nvSpPr>
+          <p:cNvPr id="17" name="Text 15"/>
+          <p:cNvSpPr txBox="1"/>
+          <p:nvPr/>
+        </p:nvSpPr>
+        <p:spPr>
+          <a:xfrm>
+            <a:off x="5212080" y="2971800"/>
+            <a:ext cx="1828800" cy="365760"/>
+          </a:xfrm>
+          <a:prstGeom prst="rect">
+            <a:avLst/>
+          </a:prstGeom>
+          <a:noFill/>
+          <a:ln/>
+        </p:spPr>
+        <p:txBody>
+          <a:bodyPr wrap="square" lIns="0" tIns="0" rIns="0" bIns="0" rtlCol="0" anchor="ctr"/>
+          <a:lstStyle/>
+          <a:p>
+            <a:pPr algn="ctr" indent="0" marL="0">
+              <a:buNone/>
+            </a:pPr>
+            <a:r>
+              <a:rPr lang="en-US" sz="1500" b="1" dirty="0">
                 <a:solidFill>
                   <a:srgbClr val="261E48"/>
                 </a:solidFill>
@@ -5998,19 +9349,165 @@
                 <a:ea typeface="Calibri" pitchFamily="34" charset="-122"/>
                 <a:cs typeface="Calibri" pitchFamily="34" charset="-120"/>
               </a:rPr>
-              <a:t>• Blocage par le WAF applicatif (403)</a:t>
-            </a:r>
-            <a:endParaRPr lang="en-US" sz="1400" dirty="0"/>
-          </a:p>
-          <a:p>
-            <a:pPr indent="0" marL="0">
-              <a:lnSpc>
-                <a:spcPct val="130000"/>
-              </a:lnSpc>
-              <a:buNone/>
-            </a:pPr>
-            <a:r>
-              <a:rPr lang="en-US" sz="1400" dirty="0">
+              <a:t>Décision</a:t>
+            </a:r>
+            <a:endParaRPr lang="en-US" sz="1500" dirty="0"/>
+          </a:p>
+        </p:txBody>
+      </p:sp>
+      <p:sp>
+        <p:nvSpPr>
+          <p:cNvPr id="18" name="Text 16"/>
+          <p:cNvSpPr txBox="1"/>
+          <p:nvPr/>
+        </p:nvSpPr>
+        <p:spPr>
+          <a:xfrm>
+            <a:off x="5212080" y="3383280"/>
+            <a:ext cx="1828800" cy="548640"/>
+          </a:xfrm>
+          <a:prstGeom prst="rect">
+            <a:avLst/>
+          </a:prstGeom>
+          <a:noFill/>
+          <a:ln/>
+        </p:spPr>
+        <p:txBody>
+          <a:bodyPr wrap="square" lIns="0" tIns="0" rIns="0" bIns="0" rtlCol="0" anchor="ctr"/>
+          <a:lstStyle/>
+          <a:p>
+            <a:pPr algn="ctr" indent="0" marL="0">
+              <a:buNone/>
+            </a:pPr>
+            <a:r>
+              <a:rPr lang="en-US" sz="1150" dirty="0">
+                <a:solidFill>
+                  <a:srgbClr val="6A6594"/>
+                </a:solidFill>
+                <a:latin typeface="Calibri" pitchFamily="34" charset="0"/>
+                <a:ea typeface="Calibri" pitchFamily="34" charset="-122"/>
+                <a:cs typeface="Calibri" pitchFamily="34" charset="-120"/>
+              </a:rPr>
+              <a:t>le bon playbook</a:t>
+            </a:r>
+            <a:endParaRPr lang="en-US" sz="1150" dirty="0"/>
+          </a:p>
+        </p:txBody>
+      </p:sp>
+      <p:sp>
+        <p:nvSpPr>
+          <p:cNvPr id="19" name="Shape 17"/>
+          <p:cNvSpPr/>
+          <p:nvPr/>
+        </p:nvSpPr>
+        <p:spPr>
+          <a:xfrm>
+            <a:off x="7406640" y="2103120"/>
+            <a:ext cx="2011680" cy="2011680"/>
+          </a:xfrm>
+          <a:prstGeom prst="roundRect">
+            <a:avLst>
+              <a:gd name="adj" fmla="val 3636"/>
+            </a:avLst>
+          </a:prstGeom>
+          <a:solidFill>
+            <a:srgbClr val="EEF0F8"/>
+          </a:solidFill>
+          <a:ln/>
+          <a:effectLst>
+            <a:outerShdw sx="100000" sy="100000" kx="0" ky="0" algn="bl" rotWithShape="0" blurRad="76200" dist="25400" dir="5400000">
+              <a:srgbClr val="888888">
+                <a:alpha val="25000"/>
+              </a:srgbClr>
+            </a:outerShdw>
+          </a:effectLst>
+        </p:spPr>
+      </p:sp>
+      <p:sp>
+        <p:nvSpPr>
+          <p:cNvPr id="20" name="Shape 18"/>
+          <p:cNvSpPr/>
+          <p:nvPr/>
+        </p:nvSpPr>
+        <p:spPr>
+          <a:xfrm>
+            <a:off x="8138160" y="2286000"/>
+            <a:ext cx="548640" cy="548640"/>
+          </a:xfrm>
+          <a:prstGeom prst="ellipse">
+            <a:avLst/>
+          </a:prstGeom>
+          <a:solidFill>
+            <a:srgbClr val="4B3FA6"/>
+          </a:solidFill>
+          <a:ln/>
+        </p:spPr>
+      </p:sp>
+      <p:sp>
+        <p:nvSpPr>
+          <p:cNvPr id="21" name="Text 19"/>
+          <p:cNvSpPr txBox="1"/>
+          <p:nvPr/>
+        </p:nvSpPr>
+        <p:spPr>
+          <a:xfrm>
+            <a:off x="8138160" y="2304288"/>
+            <a:ext cx="548640" cy="512064"/>
+          </a:xfrm>
+          <a:prstGeom prst="rect">
+            <a:avLst/>
+          </a:prstGeom>
+          <a:noFill/>
+          <a:ln/>
+        </p:spPr>
+        <p:txBody>
+          <a:bodyPr wrap="square" lIns="0" tIns="0" rIns="0" bIns="0" rtlCol="0" anchor="ctr"/>
+          <a:lstStyle/>
+          <a:p>
+            <a:pPr algn="ctr" indent="0" marL="0">
+              <a:buNone/>
+            </a:pPr>
+            <a:r>
+              <a:rPr lang="en-US" sz="2000" b="1" dirty="0">
+                <a:solidFill>
+                  <a:srgbClr val="FFFFFF"/>
+                </a:solidFill>
+                <a:latin typeface="Calibri" pitchFamily="34" charset="0"/>
+                <a:ea typeface="Calibri" pitchFamily="34" charset="-122"/>
+                <a:cs typeface="Calibri" pitchFamily="34" charset="-120"/>
+              </a:rPr>
+              <a:t>4</a:t>
+            </a:r>
+            <a:endParaRPr lang="en-US" sz="2000" dirty="0"/>
+          </a:p>
+        </p:txBody>
+      </p:sp>
+      <p:sp>
+        <p:nvSpPr>
+          <p:cNvPr id="22" name="Text 20"/>
+          <p:cNvSpPr txBox="1"/>
+          <p:nvPr/>
+        </p:nvSpPr>
+        <p:spPr>
+          <a:xfrm>
+            <a:off x="7498080" y="2971800"/>
+            <a:ext cx="1828800" cy="365760"/>
+          </a:xfrm>
+          <a:prstGeom prst="rect">
+            <a:avLst/>
+          </a:prstGeom>
+          <a:noFill/>
+          <a:ln/>
+        </p:spPr>
+        <p:txBody>
+          <a:bodyPr wrap="square" lIns="0" tIns="0" rIns="0" bIns="0" rtlCol="0" anchor="ctr"/>
+          <a:lstStyle/>
+          <a:p>
+            <a:pPr algn="ctr" indent="0" marL="0">
+              <a:buNone/>
+            </a:pPr>
+            <a:r>
+              <a:rPr lang="en-US" sz="1500" b="1" dirty="0">
                 <a:solidFill>
                   <a:srgbClr val="261E48"/>
                 </a:solidFill>
@@ -6018,19 +9515,165 @@
                 <a:ea typeface="Calibri" pitchFamily="34" charset="-122"/>
                 <a:cs typeface="Calibri" pitchFamily="34" charset="-120"/>
               </a:rPr>
-              <a:t>• Contrôle d'intégrité des données</a:t>
-            </a:r>
-            <a:endParaRPr lang="en-US" sz="1400" dirty="0"/>
-          </a:p>
-          <a:p>
-            <a:pPr indent="0" marL="0">
-              <a:lnSpc>
-                <a:spcPct val="130000"/>
-              </a:lnSpc>
-              <a:buNone/>
-            </a:pPr>
-            <a:r>
-              <a:rPr lang="en-US" sz="1400" dirty="0">
+              <a:t>Action</a:t>
+            </a:r>
+            <a:endParaRPr lang="en-US" sz="1500" dirty="0"/>
+          </a:p>
+        </p:txBody>
+      </p:sp>
+      <p:sp>
+        <p:nvSpPr>
+          <p:cNvPr id="23" name="Text 21"/>
+          <p:cNvSpPr txBox="1"/>
+          <p:nvPr/>
+        </p:nvSpPr>
+        <p:spPr>
+          <a:xfrm>
+            <a:off x="7498080" y="3383280"/>
+            <a:ext cx="1828800" cy="548640"/>
+          </a:xfrm>
+          <a:prstGeom prst="rect">
+            <a:avLst/>
+          </a:prstGeom>
+          <a:noFill/>
+          <a:ln/>
+        </p:spPr>
+        <p:txBody>
+          <a:bodyPr wrap="square" lIns="0" tIns="0" rIns="0" bIns="0" rtlCol="0" anchor="ctr"/>
+          <a:lstStyle/>
+          <a:p>
+            <a:pPr algn="ctr" indent="0" marL="0">
+              <a:buNone/>
+            </a:pPr>
+            <a:r>
+              <a:rPr lang="en-US" sz="1150" dirty="0">
+                <a:solidFill>
+                  <a:srgbClr val="6A6594"/>
+                </a:solidFill>
+                <a:latin typeface="Calibri" pitchFamily="34" charset="0"/>
+                <a:ea typeface="Calibri" pitchFamily="34" charset="-122"/>
+                <a:cs typeface="Calibri" pitchFamily="34" charset="-120"/>
+              </a:rPr>
+              <a:t>bouclier / WAF</a:t>
+            </a:r>
+            <a:endParaRPr lang="en-US" sz="1150" dirty="0"/>
+          </a:p>
+        </p:txBody>
+      </p:sp>
+      <p:sp>
+        <p:nvSpPr>
+          <p:cNvPr id="24" name="Shape 22"/>
+          <p:cNvSpPr/>
+          <p:nvPr/>
+        </p:nvSpPr>
+        <p:spPr>
+          <a:xfrm>
+            <a:off x="9692640" y="2103120"/>
+            <a:ext cx="2011680" cy="2011680"/>
+          </a:xfrm>
+          <a:prstGeom prst="roundRect">
+            <a:avLst>
+              <a:gd name="adj" fmla="val 3636"/>
+            </a:avLst>
+          </a:prstGeom>
+          <a:solidFill>
+            <a:srgbClr val="E3F3EC"/>
+          </a:solidFill>
+          <a:ln/>
+          <a:effectLst>
+            <a:outerShdw sx="100000" sy="100000" kx="0" ky="0" algn="bl" rotWithShape="0" blurRad="76200" dist="25400" dir="5400000">
+              <a:srgbClr val="888888">
+                <a:alpha val="25000"/>
+              </a:srgbClr>
+            </a:outerShdw>
+          </a:effectLst>
+        </p:spPr>
+      </p:sp>
+      <p:sp>
+        <p:nvSpPr>
+          <p:cNvPr id="25" name="Shape 23"/>
+          <p:cNvSpPr/>
+          <p:nvPr/>
+        </p:nvSpPr>
+        <p:spPr>
+          <a:xfrm>
+            <a:off x="10424160" y="2286000"/>
+            <a:ext cx="548640" cy="548640"/>
+          </a:xfrm>
+          <a:prstGeom prst="ellipse">
+            <a:avLst/>
+          </a:prstGeom>
+          <a:solidFill>
+            <a:srgbClr val="4B3FA6"/>
+          </a:solidFill>
+          <a:ln/>
+        </p:spPr>
+      </p:sp>
+      <p:sp>
+        <p:nvSpPr>
+          <p:cNvPr id="26" name="Text 24"/>
+          <p:cNvSpPr txBox="1"/>
+          <p:nvPr/>
+        </p:nvSpPr>
+        <p:spPr>
+          <a:xfrm>
+            <a:off x="10424160" y="2304288"/>
+            <a:ext cx="548640" cy="512064"/>
+          </a:xfrm>
+          <a:prstGeom prst="rect">
+            <a:avLst/>
+          </a:prstGeom>
+          <a:noFill/>
+          <a:ln/>
+        </p:spPr>
+        <p:txBody>
+          <a:bodyPr wrap="square" lIns="0" tIns="0" rIns="0" bIns="0" rtlCol="0" anchor="ctr"/>
+          <a:lstStyle/>
+          <a:p>
+            <a:pPr algn="ctr" indent="0" marL="0">
+              <a:buNone/>
+            </a:pPr>
+            <a:r>
+              <a:rPr lang="en-US" sz="2000" b="1" dirty="0">
+                <a:solidFill>
+                  <a:srgbClr val="FFFFFF"/>
+                </a:solidFill>
+                <a:latin typeface="Calibri" pitchFamily="34" charset="0"/>
+                <a:ea typeface="Calibri" pitchFamily="34" charset="-122"/>
+                <a:cs typeface="Calibri" pitchFamily="34" charset="-120"/>
+              </a:rPr>
+              <a:t>5</a:t>
+            </a:r>
+            <a:endParaRPr lang="en-US" sz="2000" dirty="0"/>
+          </a:p>
+        </p:txBody>
+      </p:sp>
+      <p:sp>
+        <p:nvSpPr>
+          <p:cNvPr id="27" name="Text 25"/>
+          <p:cNvSpPr txBox="1"/>
+          <p:nvPr/>
+        </p:nvSpPr>
+        <p:spPr>
+          <a:xfrm>
+            <a:off x="9784080" y="2971800"/>
+            <a:ext cx="1828800" cy="365760"/>
+          </a:xfrm>
+          <a:prstGeom prst="rect">
+            <a:avLst/>
+          </a:prstGeom>
+          <a:noFill/>
+          <a:ln/>
+        </p:spPr>
+        <p:txBody>
+          <a:bodyPr wrap="square" lIns="0" tIns="0" rIns="0" bIns="0" rtlCol="0" anchor="ctr"/>
+          <a:lstStyle/>
+          <a:p>
+            <a:pPr algn="ctr" indent="0" marL="0">
+              <a:buNone/>
+            </a:pPr>
+            <a:r>
+              <a:rPr lang="en-US" sz="1500" b="1" dirty="0">
                 <a:solidFill>
                   <a:srgbClr val="261E48"/>
                 </a:solidFill>
@@ -6038,41 +9681,60 @@
                 <a:ea typeface="Calibri" pitchFamily="34" charset="-122"/>
                 <a:cs typeface="Calibri" pitchFamily="34" charset="-120"/>
               </a:rPr>
-              <a:t>• Restauration d'un état sain si altération</a:t>
-            </a:r>
-            <a:endParaRPr lang="en-US" sz="1400" dirty="0"/>
-          </a:p>
-          <a:p>
-            <a:pPr indent="0" marL="0">
-              <a:lnSpc>
-                <a:spcPct val="130000"/>
-              </a:lnSpc>
-              <a:buNone/>
-            </a:pPr>
-            <a:r>
-              <a:rPr lang="en-US" sz="1400" dirty="0">
-                <a:solidFill>
-                  <a:srgbClr val="261E48"/>
-                </a:solidFill>
-                <a:latin typeface="Calibri" pitchFamily="34" charset="0"/>
-                <a:ea typeface="Calibri" pitchFamily="34" charset="-122"/>
-                <a:cs typeface="Calibri" pitchFamily="34" charset="-120"/>
-              </a:rPr>
-              <a:t>• Vérification : aucune donnée altérée</a:t>
-            </a:r>
-            <a:endParaRPr lang="en-US" sz="1400" dirty="0"/>
-          </a:p>
-        </p:txBody>
-      </p:sp>
-      <p:sp>
-        <p:nvSpPr>
-          <p:cNvPr id="10" name="Text 8"/>
-          <p:cNvSpPr txBox="1"/>
-          <p:nvPr/>
-        </p:nvSpPr>
-        <p:spPr>
-          <a:xfrm>
-            <a:off x="548640" y="6035040"/>
+              <a:t>Vérification</a:t>
+            </a:r>
+            <a:endParaRPr lang="en-US" sz="1500" dirty="0"/>
+          </a:p>
+        </p:txBody>
+      </p:sp>
+      <p:sp>
+        <p:nvSpPr>
+          <p:cNvPr id="28" name="Text 26"/>
+          <p:cNvSpPr txBox="1"/>
+          <p:nvPr/>
+        </p:nvSpPr>
+        <p:spPr>
+          <a:xfrm>
+            <a:off x="9784080" y="3383280"/>
+            <a:ext cx="1828800" cy="548640"/>
+          </a:xfrm>
+          <a:prstGeom prst="rect">
+            <a:avLst/>
+          </a:prstGeom>
+          <a:noFill/>
+          <a:ln/>
+        </p:spPr>
+        <p:txBody>
+          <a:bodyPr wrap="square" lIns="0" tIns="0" rIns="0" bIns="0" rtlCol="0" anchor="ctr"/>
+          <a:lstStyle/>
+          <a:p>
+            <a:pPr algn="ctr" indent="0" marL="0">
+              <a:buNone/>
+            </a:pPr>
+            <a:r>
+              <a:rPr lang="en-US" sz="1150" dirty="0">
+                <a:solidFill>
+                  <a:srgbClr val="6A6594"/>
+                </a:solidFill>
+                <a:latin typeface="Calibri" pitchFamily="34" charset="0"/>
+                <a:ea typeface="Calibri" pitchFamily="34" charset="-122"/>
+                <a:cs typeface="Calibri" pitchFamily="34" charset="-120"/>
+              </a:rPr>
+              <a:t>transaction canari</a:t>
+            </a:r>
+            <a:endParaRPr lang="en-US" sz="1150" dirty="0"/>
+          </a:p>
+        </p:txBody>
+      </p:sp>
+      <p:sp>
+        <p:nvSpPr>
+          <p:cNvPr id="29" name="Text 27"/>
+          <p:cNvSpPr txBox="1"/>
+          <p:nvPr/>
+        </p:nvSpPr>
+        <p:spPr>
+          <a:xfrm>
+            <a:off x="548640" y="4754880"/>
             <a:ext cx="10972800" cy="457200"/>
           </a:xfrm>
           <a:prstGeom prst="rect">
@@ -6085,21 +9747,21 @@
           <a:bodyPr wrap="square" lIns="0" tIns="0" rIns="0" bIns="0" rtlCol="0" anchor="ctr"/>
           <a:lstStyle/>
           <a:p>
-            <a:pPr indent="0" marL="0">
-              <a:buNone/>
-            </a:pPr>
-            <a:r>
-              <a:rPr lang="en-US" sz="1250" b="1" dirty="0">
-                <a:solidFill>
-                  <a:srgbClr val="4B3FA6"/>
-                </a:solidFill>
-                <a:latin typeface="Calibri" pitchFamily="34" charset="0"/>
-                <a:ea typeface="Calibri" pitchFamily="34" charset="-122"/>
-                <a:cs typeface="Calibri" pitchFamily="34" charset="-120"/>
-              </a:rPr>
-              <a:t>Accès maîtrisés : l'orchestrateur agit via une API d'administration scoped (pas d'accès god-mode aux conteneurs).</a:t>
-            </a:r>
-            <a:endParaRPr lang="en-US" sz="1250" dirty="0"/>
+            <a:pPr algn="ctr" indent="0" marL="0">
+              <a:buNone/>
+            </a:pPr>
+            <a:r>
+              <a:rPr lang="en-US" sz="1600" b="1" dirty="0">
+                <a:solidFill>
+                  <a:srgbClr val="1E8E6A"/>
+                </a:solidFill>
+                <a:latin typeface="Calibri" pitchFamily="34" charset="0"/>
+                <a:ea typeface="Calibri" pitchFamily="34" charset="-122"/>
+                <a:cs typeface="Calibri" pitchFamily="34" charset="-120"/>
+              </a:rPr>
+              <a:t>RTO mesuré : ~15 s entre la détection et le service rétabli.</a:t>
+            </a:r>
+            <a:endParaRPr lang="en-US" sz="1600" dirty="0"/>
           </a:p>
         </p:txBody>
       </p:sp>
@@ -6168,7 +9830,7 @@
                 <a:ea typeface="Calibri" pitchFamily="34" charset="-122"/>
                 <a:cs typeface="Calibri" pitchFamily="34" charset="-120"/>
               </a:rPr>
-              <a:t>MONTAGE 5 PC</a:t>
+              <a:t>IA / DATA</a:t>
             </a:r>
             <a:endParaRPr lang="en-US" sz="1200" dirty="0"/>
           </a:p>
@@ -6207,7 +9869,7 @@
                 <a:ea typeface="Calibri" pitchFamily="34" charset="-122"/>
                 <a:cs typeface="Calibri" pitchFamily="34" charset="-120"/>
               </a:rPr>
-              <a:t>Haute disponibilité : le service ne tombe pas</a:t>
+              <a:t>Détection par machine learning</a:t>
             </a:r>
             <a:endParaRPr lang="en-US" sz="3000" dirty="0"/>
           </a:p>
@@ -6215,18 +9877,73 @@
       </p:sp>
       <p:sp>
         <p:nvSpPr>
-          <p:cNvPr id="4" name="Shape 2"/>
+          <p:cNvPr id="4" name="Text 2"/>
+          <p:cNvSpPr txBox="1"/>
+          <p:nvPr/>
+        </p:nvSpPr>
+        <p:spPr>
+          <a:xfrm>
+            <a:off x="548640" y="1508760"/>
+            <a:ext cx="10972800" cy="640080"/>
+          </a:xfrm>
+          <a:prstGeom prst="rect">
+            <a:avLst/>
+          </a:prstGeom>
+          <a:noFill/>
+          <a:ln/>
+        </p:spPr>
+        <p:txBody>
+          <a:bodyPr wrap="square" lIns="0" tIns="0" rIns="0" bIns="0" rtlCol="0" anchor="ctr"/>
+          <a:lstStyle/>
+          <a:p>
+            <a:pPr indent="0" marL="0">
+              <a:buNone/>
+            </a:pPr>
+            <a:r>
+              <a:rPr lang="en-US" sz="1400" dirty="0">
+                <a:solidFill>
+                  <a:srgbClr val="261E48"/>
+                </a:solidFill>
+                <a:latin typeface="Calibri" pitchFamily="34" charset="0"/>
+                <a:ea typeface="Calibri" pitchFamily="34" charset="-122"/>
+                <a:cs typeface="Calibri" pitchFamily="34" charset="-120"/>
+              </a:rPr>
+              <a:t>Un Isolation Forest apprend la « vie normale » (débit, erreurs) ; une distance standardisée à la normale déclenche l'alerte. Aucun seuil codé en dur.</a:t>
+            </a:r>
+            <a:endParaRPr lang="en-US" sz="1400" dirty="0"/>
+          </a:p>
+        </p:txBody>
+      </p:sp>
+      <p:graphicFrame>
+        <p:nvGraphicFramePr>
+          <p:cNvPr id="5" name="Chart 0" descr=""/>
+          <p:cNvGraphicFramePr/>
+          <p:nvPr/>
+        </p:nvGraphicFramePr>
+        <p:xfrm>
+          <a:off x="548640" y="2377440"/>
+          <a:ext cx="5669280" cy="3657600"/>
+        </p:xfrm>
+        <a:graphic xmlns:a="http://schemas.openxmlformats.org/drawingml/2006/main">
+          <a:graphicData uri="http://schemas.openxmlformats.org/drawingml/2006/chart">
+            <c:chart xmlns:c="http://schemas.openxmlformats.org/drawingml/2006/chart" r:id="rId1"/>
+          </a:graphicData>
+        </a:graphic>
+      </p:graphicFrame>
+      <p:sp>
+        <p:nvSpPr>
+          <p:cNvPr id="6" name="Shape 3"/>
           <p:cNvSpPr/>
           <p:nvPr/>
         </p:nvSpPr>
         <p:spPr>
           <a:xfrm>
-            <a:off x="548640" y="1645920"/>
-            <a:ext cx="5486400" cy="4114800"/>
+            <a:off x="6492240" y="2377440"/>
+            <a:ext cx="5120640" cy="1691640"/>
           </a:xfrm>
           <a:prstGeom prst="roundRect">
             <a:avLst>
-              <a:gd name="adj" fmla="val 1778"/>
+              <a:gd name="adj" fmla="val 4324"/>
             </a:avLst>
           </a:prstGeom>
           <a:solidFill>
@@ -6244,30 +9961,30 @@
       </p:sp>
       <p:sp>
         <p:nvSpPr>
-          <p:cNvPr id="5" name="Text 3"/>
-          <p:cNvSpPr txBox="1"/>
-          <p:nvPr/>
-        </p:nvSpPr>
-        <p:spPr>
-          <a:xfrm>
-            <a:off x="777240" y="1810512"/>
-            <a:ext cx="5029200" cy="411480"/>
-          </a:xfrm>
-          <a:prstGeom prst="rect">
-            <a:avLst/>
-          </a:prstGeom>
-          <a:noFill/>
-          <a:ln/>
-        </p:spPr>
-        <p:txBody>
-          <a:bodyPr wrap="square" lIns="0" tIns="0" rIns="0" bIns="0" rtlCol="0" anchor="ctr"/>
-          <a:lstStyle/>
-          <a:p>
-            <a:pPr indent="0" marL="0">
-              <a:buNone/>
-            </a:pPr>
-            <a:r>
-              <a:rPr lang="en-US" sz="1500" b="1" dirty="0">
+          <p:cNvPr id="7" name="Text 4"/>
+          <p:cNvSpPr txBox="1"/>
+          <p:nvPr/>
+        </p:nvSpPr>
+        <p:spPr>
+          <a:xfrm>
+            <a:off x="6675120" y="2514600"/>
+            <a:ext cx="4754880" cy="365760"/>
+          </a:xfrm>
+          <a:prstGeom prst="rect">
+            <a:avLst/>
+          </a:prstGeom>
+          <a:noFill/>
+          <a:ln/>
+        </p:spPr>
+        <p:txBody>
+          <a:bodyPr wrap="square" lIns="0" tIns="0" rIns="0" bIns="0" rtlCol="0" anchor="ctr"/>
+          <a:lstStyle/>
+          <a:p>
+            <a:pPr indent="0" marL="0">
+              <a:buNone/>
+            </a:pPr>
+            <a:r>
+              <a:rPr lang="en-US" sz="1300" b="1" dirty="0">
                 <a:solidFill>
                   <a:srgbClr val="261E48"/>
                 </a:solidFill>
@@ -6275,172 +9992,136 @@
                 <a:ea typeface="Calibri" pitchFamily="34" charset="-122"/>
                 <a:cs typeface="Calibri" pitchFamily="34" charset="-120"/>
               </a:rPr>
-              <a:t>🖥️ Topologie</a:t>
-            </a:r>
-            <a:endParaRPr lang="en-US" sz="1500" dirty="0"/>
-          </a:p>
-        </p:txBody>
-      </p:sp>
-      <p:sp>
-        <p:nvSpPr>
-          <p:cNvPr id="6" name="Text 4"/>
-          <p:cNvSpPr txBox="1"/>
-          <p:nvPr/>
-        </p:nvSpPr>
-        <p:spPr>
-          <a:xfrm>
-            <a:off x="777240" y="2286000"/>
-            <a:ext cx="5074920" cy="3291840"/>
-          </a:xfrm>
-          <a:prstGeom prst="rect">
-            <a:avLst/>
-          </a:prstGeom>
-          <a:noFill/>
-          <a:ln/>
-        </p:spPr>
-        <p:txBody>
-          <a:bodyPr wrap="square" lIns="0" tIns="0" rIns="0" bIns="0" rtlCol="0" anchor="ctr"/>
-          <a:lstStyle/>
-          <a:p>
-            <a:pPr indent="0" marL="0">
-              <a:lnSpc>
-                <a:spcPct val="125000"/>
-              </a:lnSpc>
-              <a:buNone/>
-            </a:pPr>
-            <a:r>
-              <a:rPr lang="en-US" sz="1350" dirty="0">
-                <a:solidFill>
-                  <a:srgbClr val="261E48"/>
-                </a:solidFill>
-                <a:latin typeface="Calibri" pitchFamily="34" charset="0"/>
-                <a:ea typeface="Calibri" pitchFamily="34" charset="-122"/>
-                <a:cs typeface="Calibri" pitchFamily="34" charset="-120"/>
-              </a:rPr>
-              <a:t>• HOST-PRINCIPAL : serveur + cockpit</a:t>
-            </a:r>
-            <a:endParaRPr lang="en-US" sz="1350" dirty="0"/>
-          </a:p>
-          <a:p>
-            <a:pPr indent="0" marL="0">
-              <a:lnSpc>
-                <a:spcPct val="125000"/>
-              </a:lnSpc>
-              <a:buNone/>
-            </a:pPr>
-            <a:r>
-              <a:rPr lang="en-US" sz="1350" dirty="0">
-                <a:solidFill>
-                  <a:srgbClr val="261E48"/>
-                </a:solidFill>
-                <a:latin typeface="Calibri" pitchFamily="34" charset="0"/>
-                <a:ea typeface="Calibri" pitchFamily="34" charset="-122"/>
-                <a:cs typeface="Calibri" pitchFamily="34" charset="-120"/>
-              </a:rPr>
-              <a:t>• HOST-BACKUP : réplique le principal</a:t>
-            </a:r>
-            <a:endParaRPr lang="en-US" sz="1350" dirty="0"/>
-          </a:p>
-          <a:p>
-            <a:pPr indent="0" marL="0">
-              <a:lnSpc>
-                <a:spcPct val="125000"/>
-              </a:lnSpc>
-              <a:buNone/>
-            </a:pPr>
-            <a:r>
-              <a:rPr lang="en-US" sz="1350" dirty="0">
-                <a:solidFill>
-                  <a:srgbClr val="261E48"/>
-                </a:solidFill>
-                <a:latin typeface="Calibri" pitchFamily="34" charset="0"/>
-                <a:ea typeface="Calibri" pitchFamily="34" charset="-122"/>
-                <a:cs typeface="Calibri" pitchFamily="34" charset="-120"/>
-              </a:rPr>
-              <a:t>  (comptes + clés d'idempotence)</a:t>
-            </a:r>
-            <a:endParaRPr lang="en-US" sz="1350" dirty="0"/>
-          </a:p>
-          <a:p>
-            <a:pPr indent="0" marL="0">
-              <a:lnSpc>
-                <a:spcPct val="125000"/>
-              </a:lnSpc>
-              <a:buNone/>
-            </a:pPr>
-            <a:r>
-              <a:rPr lang="en-US" sz="1350" dirty="0">
-                <a:solidFill>
-                  <a:srgbClr val="261E48"/>
-                </a:solidFill>
-                <a:latin typeface="Calibri" pitchFamily="34" charset="0"/>
-                <a:ea typeface="Calibri" pitchFamily="34" charset="-122"/>
-                <a:cs typeface="Calibri" pitchFamily="34" charset="-120"/>
-              </a:rPr>
-              <a:t>• CLIENT-A / CLIENT-B : app de paiement</a:t>
-            </a:r>
-            <a:endParaRPr lang="en-US" sz="1350" dirty="0"/>
-          </a:p>
-          <a:p>
-            <a:pPr indent="0" marL="0">
-              <a:lnSpc>
-                <a:spcPct val="125000"/>
-              </a:lnSpc>
-              <a:buNone/>
-            </a:pPr>
-            <a:r>
-              <a:rPr lang="en-US" sz="1350" dirty="0">
-                <a:solidFill>
-                  <a:srgbClr val="261E48"/>
-                </a:solidFill>
-                <a:latin typeface="Calibri" pitchFamily="34" charset="0"/>
-                <a:ea typeface="Calibri" pitchFamily="34" charset="-122"/>
-                <a:cs typeface="Calibri" pitchFamily="34" charset="-120"/>
-              </a:rPr>
-              <a:t>  (login + recherche + transfert)</a:t>
-            </a:r>
-            <a:endParaRPr lang="en-US" sz="1350" dirty="0"/>
-          </a:p>
-          <a:p>
-            <a:pPr indent="0" marL="0">
-              <a:lnSpc>
-                <a:spcPct val="125000"/>
-              </a:lnSpc>
-              <a:buNone/>
-            </a:pPr>
-            <a:r>
-              <a:rPr lang="en-US" sz="1350" dirty="0">
-                <a:solidFill>
-                  <a:srgbClr val="261E48"/>
-                </a:solidFill>
-                <a:latin typeface="Calibri" pitchFamily="34" charset="0"/>
-                <a:ea typeface="Calibri" pitchFamily="34" charset="-122"/>
-                <a:cs typeface="Calibri" pitchFamily="34" charset="-120"/>
-              </a:rPr>
-              <a:t>• ATTAQUANT : vise le principal</a:t>
-            </a:r>
-            <a:endParaRPr lang="en-US" sz="1350" dirty="0"/>
-          </a:p>
-        </p:txBody>
-      </p:sp>
-      <p:sp>
-        <p:nvSpPr>
-          <p:cNvPr id="7" name="Shape 5"/>
+              <a:t>Score d'anomalie</a:t>
+            </a:r>
+            <a:endParaRPr lang="en-US" sz="1300" dirty="0"/>
+          </a:p>
+        </p:txBody>
+      </p:sp>
+      <p:sp>
+        <p:nvSpPr>
+          <p:cNvPr id="8" name="Text 5"/>
+          <p:cNvSpPr txBox="1"/>
+          <p:nvPr/>
+        </p:nvSpPr>
+        <p:spPr>
+          <a:xfrm>
+            <a:off x="6675120" y="2926080"/>
+            <a:ext cx="4754880" cy="822960"/>
+          </a:xfrm>
+          <a:prstGeom prst="rect">
+            <a:avLst/>
+          </a:prstGeom>
+          <a:noFill/>
+          <a:ln/>
+        </p:spPr>
+        <p:txBody>
+          <a:bodyPr wrap="square" lIns="0" tIns="0" rIns="0" bIns="0" rtlCol="0" anchor="ctr"/>
+          <a:lstStyle/>
+          <a:p>
+            <a:pPr algn="ctr" indent="0" marL="0">
+              <a:buNone/>
+            </a:pPr>
+            <a:r>
+              <a:rPr lang="en-US" sz="4400" b="1" dirty="0">
+                <a:solidFill>
+                  <a:srgbClr val="1E8E6A"/>
+                </a:solidFill>
+                <a:latin typeface="Calibri" pitchFamily="34" charset="0"/>
+                <a:ea typeface="Calibri" pitchFamily="34" charset="-122"/>
+                <a:cs typeface="Calibri" pitchFamily="34" charset="-120"/>
+              </a:rPr>
+              <a:t>0</a:t>
+            </a:r>
+            <a:pPr algn="ctr" indent="0" marL="0">
+              <a:buNone/>
+            </a:pPr>
+            <a:r>
+              <a:rPr lang="en-US" sz="4400" dirty="0">
+                <a:solidFill>
+                  <a:srgbClr val="6A6594"/>
+                </a:solidFill>
+                <a:latin typeface="Calibri" pitchFamily="34" charset="0"/>
+                <a:ea typeface="Calibri" pitchFamily="34" charset="-122"/>
+                <a:cs typeface="Calibri" pitchFamily="34" charset="-120"/>
+              </a:rPr>
+              <a:t>  →  </a:t>
+            </a:r>
+            <a:pPr algn="ctr" indent="0" marL="0">
+              <a:buNone/>
+            </a:pPr>
+            <a:r>
+              <a:rPr lang="en-US" sz="4400" b="1" dirty="0">
+                <a:solidFill>
+                  <a:srgbClr val="C2413C"/>
+                </a:solidFill>
+                <a:latin typeface="Calibri" pitchFamily="34" charset="0"/>
+                <a:ea typeface="Calibri" pitchFamily="34" charset="-122"/>
+                <a:cs typeface="Calibri" pitchFamily="34" charset="-120"/>
+              </a:rPr>
+              <a:t>100</a:t>
+            </a:r>
+            <a:endParaRPr lang="en-US" sz="4400" dirty="0"/>
+          </a:p>
+        </p:txBody>
+      </p:sp>
+      <p:sp>
+        <p:nvSpPr>
+          <p:cNvPr id="9" name="Text 6"/>
+          <p:cNvSpPr txBox="1"/>
+          <p:nvPr/>
+        </p:nvSpPr>
+        <p:spPr>
+          <a:xfrm>
+            <a:off x="6675120" y="3703320"/>
+            <a:ext cx="4754880" cy="274320"/>
+          </a:xfrm>
+          <a:prstGeom prst="rect">
+            <a:avLst/>
+          </a:prstGeom>
+          <a:noFill/>
+          <a:ln/>
+        </p:spPr>
+        <p:txBody>
+          <a:bodyPr wrap="square" lIns="0" tIns="0" rIns="0" bIns="0" rtlCol="0" anchor="ctr"/>
+          <a:lstStyle/>
+          <a:p>
+            <a:pPr algn="ctr" indent="0" marL="0">
+              <a:buNone/>
+            </a:pPr>
+            <a:r>
+              <a:rPr lang="en-US" sz="1200" dirty="0">
+                <a:solidFill>
+                  <a:srgbClr val="6A6594"/>
+                </a:solidFill>
+                <a:latin typeface="Calibri" pitchFamily="34" charset="0"/>
+                <a:ea typeface="Calibri" pitchFamily="34" charset="-122"/>
+                <a:cs typeface="Calibri" pitchFamily="34" charset="-120"/>
+              </a:rPr>
+              <a:t>normal → anomalie détectée</a:t>
+            </a:r>
+            <a:endParaRPr lang="en-US" sz="1200" dirty="0"/>
+          </a:p>
+        </p:txBody>
+      </p:sp>
+      <p:sp>
+        <p:nvSpPr>
+          <p:cNvPr id="10" name="Shape 7"/>
           <p:cNvSpPr/>
           <p:nvPr/>
         </p:nvSpPr>
         <p:spPr>
           <a:xfrm>
-            <a:off x="6217920" y="1645920"/>
-            <a:ext cx="5394960" cy="4114800"/>
+            <a:off x="6492240" y="4297680"/>
+            <a:ext cx="5120640" cy="1737360"/>
           </a:xfrm>
           <a:prstGeom prst="roundRect">
             <a:avLst>
-              <a:gd name="adj" fmla="val 1778"/>
+              <a:gd name="adj" fmla="val 4211"/>
             </a:avLst>
           </a:prstGeom>
           <a:solidFill>
-            <a:srgbClr val="E3F3EC"/>
+            <a:srgbClr val="EEF0F8"/>
           </a:solidFill>
           <a:ln/>
           <a:effectLst>
@@ -6454,53 +10135,53 @@
       </p:sp>
       <p:sp>
         <p:nvSpPr>
-          <p:cNvPr id="8" name="Text 6"/>
-          <p:cNvSpPr txBox="1"/>
-          <p:nvPr/>
-        </p:nvSpPr>
-        <p:spPr>
-          <a:xfrm>
-            <a:off x="6446520" y="1810512"/>
-            <a:ext cx="4937760" cy="411480"/>
-          </a:xfrm>
-          <a:prstGeom prst="rect">
-            <a:avLst/>
-          </a:prstGeom>
-          <a:noFill/>
-          <a:ln/>
-        </p:spPr>
-        <p:txBody>
-          <a:bodyPr wrap="square" lIns="0" tIns="0" rIns="0" bIns="0" rtlCol="0" anchor="ctr"/>
-          <a:lstStyle/>
-          <a:p>
-            <a:pPr indent="0" marL="0">
-              <a:buNone/>
-            </a:pPr>
-            <a:r>
-              <a:rPr lang="en-US" sz="1500" b="1" dirty="0">
-                <a:solidFill>
-                  <a:srgbClr val="1E8E6A"/>
-                </a:solidFill>
-                <a:latin typeface="Calibri" pitchFamily="34" charset="0"/>
-                <a:ea typeface="Calibri" pitchFamily="34" charset="-122"/>
-                <a:cs typeface="Calibri" pitchFamily="34" charset="-120"/>
-              </a:rPr>
-              <a:t>🔁 Bascule &amp; reprise</a:t>
-            </a:r>
-            <a:endParaRPr lang="en-US" sz="1500" dirty="0"/>
-          </a:p>
-        </p:txBody>
-      </p:sp>
-      <p:sp>
-        <p:nvSpPr>
-          <p:cNvPr id="9" name="Text 7"/>
-          <p:cNvSpPr txBox="1"/>
-          <p:nvPr/>
-        </p:nvSpPr>
-        <p:spPr>
-          <a:xfrm>
-            <a:off x="6446520" y="2286000"/>
-            <a:ext cx="4983480" cy="2743200"/>
+          <p:cNvPr id="11" name="Text 8"/>
+          <p:cNvSpPr txBox="1"/>
+          <p:nvPr/>
+        </p:nvSpPr>
+        <p:spPr>
+          <a:xfrm>
+            <a:off x="6675120" y="4480560"/>
+            <a:ext cx="4754880" cy="457200"/>
+          </a:xfrm>
+          <a:prstGeom prst="rect">
+            <a:avLst/>
+          </a:prstGeom>
+          <a:noFill/>
+          <a:ln/>
+        </p:spPr>
+        <p:txBody>
+          <a:bodyPr wrap="square" lIns="0" tIns="0" rIns="0" bIns="0" rtlCol="0" anchor="ctr"/>
+          <a:lstStyle/>
+          <a:p>
+            <a:pPr indent="0" marL="0">
+              <a:buNone/>
+            </a:pPr>
+            <a:r>
+              <a:rPr lang="en-US" sz="1400" b="1" dirty="0">
+                <a:solidFill>
+                  <a:srgbClr val="261E48"/>
+                </a:solidFill>
+                <a:latin typeface="Calibri" pitchFamily="34" charset="0"/>
+                <a:ea typeface="Calibri" pitchFamily="34" charset="-122"/>
+                <a:cs typeface="Calibri" pitchFamily="34" charset="-120"/>
+              </a:rPr>
+              <a:t>Débit auth sous attaque : ×30   ·   Latence : ×5</a:t>
+            </a:r>
+            <a:endParaRPr lang="en-US" sz="1400" dirty="0"/>
+          </a:p>
+        </p:txBody>
+      </p:sp>
+      <p:sp>
+        <p:nvSpPr>
+          <p:cNvPr id="12" name="Text 9"/>
+          <p:cNvSpPr txBox="1"/>
+          <p:nvPr/>
+        </p:nvSpPr>
+        <p:spPr>
+          <a:xfrm>
+            <a:off x="6675120" y="4937760"/>
+            <a:ext cx="4754880" cy="1005840"/>
           </a:xfrm>
           <a:prstGeom prst="rect">
             <a:avLst/>
@@ -6514,12 +10195,12 @@
           <a:p>
             <a:pPr indent="0" marL="0">
               <a:lnSpc>
-                <a:spcPct val="130000"/>
+                <a:spcPct val="110000"/>
               </a:lnSpc>
               <a:buNone/>
             </a:pPr>
             <a:r>
-              <a:rPr lang="en-US" sz="1350" dirty="0">
+              <a:rPr lang="en-US" sz="1250" dirty="0">
                 <a:solidFill>
                   <a:srgbClr val="261E48"/>
                 </a:solidFill>
@@ -6527,128 +10208,9 @@
                 <a:ea typeface="Calibri" pitchFamily="34" charset="-122"/>
                 <a:cs typeface="Calibri" pitchFamily="34" charset="-120"/>
               </a:rPr>
-              <a:t>1. Le serveur principal tombe</a:t>
-            </a:r>
-            <a:endParaRPr lang="en-US" sz="1350" dirty="0"/>
-          </a:p>
-          <a:p>
-            <a:pPr indent="0" marL="0">
-              <a:lnSpc>
-                <a:spcPct val="130000"/>
-              </a:lnSpc>
-              <a:buNone/>
-            </a:pPr>
-            <a:r>
-              <a:rPr lang="en-US" sz="1350" dirty="0">
-                <a:solidFill>
-                  <a:srgbClr val="261E48"/>
-                </a:solidFill>
-                <a:latin typeface="Calibri" pitchFamily="34" charset="0"/>
-                <a:ea typeface="Calibri" pitchFamily="34" charset="-122"/>
-                <a:cs typeface="Calibri" pitchFamily="34" charset="-120"/>
-              </a:rPr>
-              <a:t>2. Le client bascule AUTOMATIQUEMENT sur le backup</a:t>
-            </a:r>
-            <a:endParaRPr lang="en-US" sz="1350" dirty="0"/>
-          </a:p>
-          <a:p>
-            <a:pPr indent="0" marL="0">
-              <a:lnSpc>
-                <a:spcPct val="130000"/>
-              </a:lnSpc>
-              <a:buNone/>
-            </a:pPr>
-            <a:r>
-              <a:rPr lang="en-US" sz="1350" dirty="0">
-                <a:solidFill>
-                  <a:srgbClr val="261E48"/>
-                </a:solidFill>
-                <a:latin typeface="Calibri" pitchFamily="34" charset="0"/>
-                <a:ea typeface="Calibri" pitchFamily="34" charset="-122"/>
-                <a:cs typeface="Calibri" pitchFamily="34" charset="-120"/>
-              </a:rPr>
-              <a:t>3. La transaction en cours est REPRISE</a:t>
-            </a:r>
-            <a:endParaRPr lang="en-US" sz="1350" dirty="0"/>
-          </a:p>
-          <a:p>
-            <a:pPr indent="0" marL="0">
-              <a:lnSpc>
-                <a:spcPct val="130000"/>
-              </a:lnSpc>
-              <a:buNone/>
-            </a:pPr>
-            <a:r>
-              <a:rPr lang="en-US" sz="1350" dirty="0">
-                <a:solidFill>
-                  <a:srgbClr val="261E48"/>
-                </a:solidFill>
-                <a:latin typeface="Calibri" pitchFamily="34" charset="0"/>
-                <a:ea typeface="Calibri" pitchFamily="34" charset="-122"/>
-                <a:cs typeface="Calibri" pitchFamily="34" charset="-120"/>
-              </a:rPr>
-              <a:t>   (clé d'idempotence) — sans double débit</a:t>
-            </a:r>
-            <a:endParaRPr lang="en-US" sz="1350" dirty="0"/>
-          </a:p>
-          <a:p>
-            <a:pPr indent="0" marL="0">
-              <a:lnSpc>
-                <a:spcPct val="130000"/>
-              </a:lnSpc>
-              <a:buNone/>
-            </a:pPr>
-            <a:r>
-              <a:rPr lang="en-US" sz="1350" dirty="0">
-                <a:solidFill>
-                  <a:srgbClr val="261E48"/>
-                </a:solidFill>
-                <a:latin typeface="Calibri" pitchFamily="34" charset="0"/>
-                <a:ea typeface="Calibri" pitchFamily="34" charset="-122"/>
-                <a:cs typeface="Calibri" pitchFamily="34" charset="-120"/>
-              </a:rPr>
-              <a:t>4. Service maintenu, zéro intervention</a:t>
-            </a:r>
-            <a:endParaRPr lang="en-US" sz="1350" dirty="0"/>
-          </a:p>
-        </p:txBody>
-      </p:sp>
-      <p:sp>
-        <p:nvSpPr>
-          <p:cNvPr id="10" name="Text 8"/>
-          <p:cNvSpPr txBox="1"/>
-          <p:nvPr/>
-        </p:nvSpPr>
-        <p:spPr>
-          <a:xfrm>
-            <a:off x="6446520" y="5212080"/>
-            <a:ext cx="4937760" cy="457200"/>
-          </a:xfrm>
-          <a:prstGeom prst="rect">
-            <a:avLst/>
-          </a:prstGeom>
-          <a:noFill/>
-          <a:ln/>
-        </p:spPr>
-        <p:txBody>
-          <a:bodyPr wrap="square" lIns="0" tIns="0" rIns="0" bIns="0" rtlCol="0" anchor="ctr"/>
-          <a:lstStyle/>
-          <a:p>
-            <a:pPr indent="0" marL="0">
-              <a:buNone/>
-            </a:pPr>
-            <a:r>
-              <a:rPr lang="en-US" sz="1500" b="1" dirty="0">
-                <a:solidFill>
-                  <a:srgbClr val="1E8E6A"/>
-                </a:solidFill>
-                <a:latin typeface="Calibri" pitchFamily="34" charset="0"/>
-                <a:ea typeface="Calibri" pitchFamily="34" charset="-122"/>
-                <a:cs typeface="Calibri" pitchFamily="34" charset="-120"/>
-              </a:rPr>
-              <a:t>Recette failover : 13 / 13 ✓</a:t>
-            </a:r>
-            <a:endParaRPr lang="en-US" sz="1500" dirty="0"/>
+              <a:t>Modèle persisté (pas de ré-apprentissage au redémarrage). Assistant RAG local (Ollama + LangChain) pour aider l'opérateur.</a:t>
+            </a:r>
+            <a:endParaRPr lang="en-US" sz="1250" dirty="0"/>
           </a:p>
         </p:txBody>
       </p:sp>
@@ -6717,7 +10279,7 @@
                 <a:ea typeface="Calibri" pitchFamily="34" charset="-122"/>
                 <a:cs typeface="Calibri" pitchFamily="34" charset="-120"/>
               </a:rPr>
-              <a:t>CYBERSÉCURITÉ</a:t>
+              <a:t>REMÉDIATION AUTONOME</a:t>
             </a:r>
             <a:endParaRPr lang="en-US" sz="1200" dirty="0"/>
           </a:p>
@@ -6756,7 +10318,7 @@
                 <a:ea typeface="Calibri" pitchFamily="34" charset="-122"/>
                 <a:cs typeface="Calibri" pitchFamily="34" charset="-120"/>
               </a:rPr>
-              <a:t>Défense &amp; sécurité</a:t>
+              <a:t>Deux incidents, deux réponses</a:t>
             </a:r>
             <a:endParaRPr lang="en-US" sz="3000" dirty="0"/>
           </a:p>
@@ -6770,16 +10332,16 @@
         </p:nvSpPr>
         <p:spPr>
           <a:xfrm>
-            <a:off x="548640" y="1737360"/>
-            <a:ext cx="3566160" cy="1828800"/>
+            <a:off x="548640" y="1645920"/>
+            <a:ext cx="5486400" cy="4206240"/>
           </a:xfrm>
           <a:prstGeom prst="roundRect">
             <a:avLst>
-              <a:gd name="adj" fmla="val 4000"/>
+              <a:gd name="adj" fmla="val 1739"/>
             </a:avLst>
           </a:prstGeom>
           <a:solidFill>
-            <a:srgbClr val="EEF0F8"/>
+            <a:srgbClr val="E3F3EC"/>
           </a:solidFill>
           <a:ln/>
           <a:effectLst>
@@ -6799,34 +10361,34 @@
         </p:nvSpPr>
         <p:spPr>
           <a:xfrm>
-            <a:off x="731520" y="1920240"/>
-            <a:ext cx="914400" cy="548640"/>
-          </a:xfrm>
-          <a:prstGeom prst="rect">
-            <a:avLst/>
-          </a:prstGeom>
-          <a:noFill/>
-          <a:ln/>
-        </p:spPr>
-        <p:txBody>
-          <a:bodyPr wrap="square" lIns="0" tIns="0" rIns="0" bIns="0" rtlCol="0" anchor="ctr"/>
-          <a:lstStyle/>
-          <a:p>
-            <a:pPr indent="0" marL="0">
-              <a:buNone/>
-            </a:pPr>
-            <a:r>
-              <a:rPr lang="en-US" sz="2600" dirty="0">
-                <a:solidFill>
-                  <a:srgbClr val="000000"/>
-                </a:solidFill>
-                <a:latin typeface="Calibri" pitchFamily="34" charset="0"/>
-                <a:ea typeface="Calibri" pitchFamily="34" charset="-122"/>
-                <a:cs typeface="Calibri" pitchFamily="34" charset="-120"/>
-              </a:rPr>
-              <a:t>🛡️</a:t>
-            </a:r>
-            <a:endParaRPr lang="en-US" sz="2600" dirty="0"/>
+            <a:off x="777240" y="1828800"/>
+            <a:ext cx="5029200" cy="457200"/>
+          </a:xfrm>
+          <a:prstGeom prst="rect">
+            <a:avLst/>
+          </a:prstGeom>
+          <a:noFill/>
+          <a:ln/>
+        </p:spPr>
+        <p:txBody>
+          <a:bodyPr wrap="square" lIns="0" tIns="0" rIns="0" bIns="0" rtlCol="0" anchor="ctr"/>
+          <a:lstStyle/>
+          <a:p>
+            <a:pPr indent="0" marL="0">
+              <a:buNone/>
+            </a:pPr>
+            <a:r>
+              <a:rPr lang="en-US" sz="1500" b="1" dirty="0">
+                <a:solidFill>
+                  <a:srgbClr val="1E8E6A"/>
+                </a:solidFill>
+                <a:latin typeface="Calibri" pitchFamily="34" charset="0"/>
+                <a:ea typeface="Calibri" pitchFamily="34" charset="-122"/>
+                <a:cs typeface="Calibri" pitchFamily="34" charset="-120"/>
+              </a:rPr>
+              <a:t>🌊 Déni de service → DISPONIBILITÉ</a:t>
+            </a:r>
+            <a:endParaRPr lang="en-US" sz="1500" dirty="0"/>
           </a:p>
         </p:txBody>
       </p:sp>
@@ -6838,24 +10400,27 @@
         </p:nvSpPr>
         <p:spPr>
           <a:xfrm>
-            <a:off x="731520" y="2514600"/>
-            <a:ext cx="3200400" cy="365760"/>
-          </a:xfrm>
-          <a:prstGeom prst="rect">
-            <a:avLst/>
-          </a:prstGeom>
-          <a:noFill/>
-          <a:ln/>
-        </p:spPr>
-        <p:txBody>
-          <a:bodyPr wrap="square" lIns="0" tIns="0" rIns="0" bIns="0" rtlCol="0" anchor="ctr"/>
-          <a:lstStyle/>
-          <a:p>
-            <a:pPr indent="0" marL="0">
-              <a:buNone/>
-            </a:pPr>
-            <a:r>
-              <a:rPr lang="en-US" sz="1500" b="1" dirty="0">
+            <a:off x="777240" y="2377440"/>
+            <a:ext cx="5029200" cy="3200400"/>
+          </a:xfrm>
+          <a:prstGeom prst="rect">
+            <a:avLst/>
+          </a:prstGeom>
+          <a:noFill/>
+          <a:ln/>
+        </p:spPr>
+        <p:txBody>
+          <a:bodyPr wrap="square" lIns="0" tIns="0" rIns="0" bIns="0" rtlCol="0" anchor="ctr"/>
+          <a:lstStyle/>
+          <a:p>
+            <a:pPr indent="0" marL="0">
+              <a:lnSpc>
+                <a:spcPct val="130000"/>
+              </a:lnSpc>
+              <a:buNone/>
+            </a:pPr>
+            <a:r>
+              <a:rPr lang="en-US" sz="1400" dirty="0">
                 <a:solidFill>
                   <a:srgbClr val="261E48"/>
                 </a:solidFill>
@@ -6863,69 +10428,90 @@
                 <a:ea typeface="Calibri" pitchFamily="34" charset="-122"/>
                 <a:cs typeface="Calibri" pitchFamily="34" charset="-120"/>
               </a:rPr>
-              <a:t>WAF applicatif</a:t>
-            </a:r>
-            <a:endParaRPr lang="en-US" sz="1500" dirty="0"/>
-          </a:p>
-        </p:txBody>
-      </p:sp>
-      <p:sp>
-        <p:nvSpPr>
-          <p:cNvPr id="7" name="Text 5"/>
-          <p:cNvSpPr txBox="1"/>
-          <p:nvPr/>
-        </p:nvSpPr>
-        <p:spPr>
-          <a:xfrm>
-            <a:off x="731520" y="2880360"/>
-            <a:ext cx="3200400" cy="594360"/>
-          </a:xfrm>
-          <a:prstGeom prst="rect">
-            <a:avLst/>
-          </a:prstGeom>
-          <a:noFill/>
-          <a:ln/>
-        </p:spPr>
-        <p:txBody>
-          <a:bodyPr wrap="square" lIns="0" tIns="0" rIns="0" bIns="0" rtlCol="0" anchor="ctr"/>
-          <a:lstStyle/>
-          <a:p>
-            <a:pPr indent="0" marL="0">
-              <a:buNone/>
-            </a:pPr>
-            <a:r>
-              <a:rPr lang="en-US" sz="1200" dirty="0">
-                <a:solidFill>
-                  <a:srgbClr val="6A6594"/>
-                </a:solidFill>
-                <a:latin typeface="Calibri" pitchFamily="34" charset="0"/>
-                <a:ea typeface="Calibri" pitchFamily="34" charset="-122"/>
-                <a:cs typeface="Calibri" pitchFamily="34" charset="-120"/>
-              </a:rPr>
-              <a:t>SQLi/XSS bloqués (403) + métrique + log</a:t>
-            </a:r>
-            <a:endParaRPr lang="en-US" sz="1200" dirty="0"/>
-          </a:p>
-        </p:txBody>
-      </p:sp>
-      <p:sp>
-        <p:nvSpPr>
-          <p:cNvPr id="8" name="Shape 6"/>
+              <a:t>• Détection ML (débit, latence, erreurs)</a:t>
+            </a:r>
+            <a:endParaRPr lang="en-US" sz="1400" dirty="0"/>
+          </a:p>
+          <a:p>
+            <a:pPr indent="0" marL="0">
+              <a:lnSpc>
+                <a:spcPct val="130000"/>
+              </a:lnSpc>
+              <a:buNone/>
+            </a:pPr>
+            <a:r>
+              <a:rPr lang="en-US" sz="1400" dirty="0">
+                <a:solidFill>
+                  <a:srgbClr val="261E48"/>
+                </a:solidFill>
+                <a:latin typeface="Calibri" pitchFamily="34" charset="0"/>
+                <a:ea typeface="Calibri" pitchFamily="34" charset="-122"/>
+                <a:cs typeface="Calibri" pitchFamily="34" charset="-120"/>
+              </a:rPr>
+              <a:t>• Bouclier anti-DoS (load-shedding) sur l'auth</a:t>
+            </a:r>
+            <a:endParaRPr lang="en-US" sz="1400" dirty="0"/>
+          </a:p>
+          <a:p>
+            <a:pPr indent="0" marL="0">
+              <a:lnSpc>
+                <a:spcPct val="130000"/>
+              </a:lnSpc>
+              <a:buNone/>
+            </a:pPr>
+            <a:r>
+              <a:rPr lang="en-US" sz="1400" dirty="0">
+                <a:solidFill>
+                  <a:srgbClr val="261E48"/>
+                </a:solidFill>
+                <a:latin typeface="Calibri" pitchFamily="34" charset="0"/>
+                <a:ea typeface="Calibri" pitchFamily="34" charset="-122"/>
+                <a:cs typeface="Calibri" pitchFamily="34" charset="-120"/>
+              </a:rPr>
+              <a:t>• Vérification par transaction canari</a:t>
+            </a:r>
+            <a:endParaRPr lang="en-US" sz="1400" dirty="0"/>
+          </a:p>
+          <a:p>
+            <a:pPr indent="0" marL="0">
+              <a:lnSpc>
+                <a:spcPct val="130000"/>
+              </a:lnSpc>
+              <a:buNone/>
+            </a:pPr>
+            <a:r>
+              <a:rPr lang="en-US" sz="1400" dirty="0">
+                <a:solidFill>
+                  <a:srgbClr val="261E48"/>
+                </a:solidFill>
+                <a:latin typeface="Calibri" pitchFamily="34" charset="0"/>
+                <a:ea typeface="Calibri" pitchFamily="34" charset="-122"/>
+                <a:cs typeface="Calibri" pitchFamily="34" charset="-120"/>
+              </a:rPr>
+              <a:t>• Relâche automatique en fin d'attaque</a:t>
+            </a:r>
+            <a:endParaRPr lang="en-US" sz="1400" dirty="0"/>
+          </a:p>
+        </p:txBody>
+      </p:sp>
+      <p:sp>
+        <p:nvSpPr>
+          <p:cNvPr id="7" name="Shape 5"/>
           <p:cNvSpPr/>
           <p:nvPr/>
         </p:nvSpPr>
         <p:spPr>
           <a:xfrm>
-            <a:off x="4297680" y="1737360"/>
-            <a:ext cx="3566160" cy="1828800"/>
+            <a:off x="6217920" y="1645920"/>
+            <a:ext cx="5394960" cy="4206240"/>
           </a:xfrm>
           <a:prstGeom prst="roundRect">
             <a:avLst>
-              <a:gd name="adj" fmla="val 4000"/>
+              <a:gd name="adj" fmla="val 1739"/>
             </a:avLst>
           </a:prstGeom>
           <a:solidFill>
-            <a:srgbClr val="EEF0F8"/>
+            <a:srgbClr val="FBE8E6"/>
           </a:solidFill>
           <a:ln/>
           <a:effectLst>
@@ -6939,40 +10525,142 @@
       </p:sp>
       <p:sp>
         <p:nvSpPr>
+          <p:cNvPr id="8" name="Text 6"/>
+          <p:cNvSpPr txBox="1"/>
+          <p:nvPr/>
+        </p:nvSpPr>
+        <p:spPr>
+          <a:xfrm>
+            <a:off x="6446520" y="1828800"/>
+            <a:ext cx="4937760" cy="457200"/>
+          </a:xfrm>
+          <a:prstGeom prst="rect">
+            <a:avLst/>
+          </a:prstGeom>
+          <a:noFill/>
+          <a:ln/>
+        </p:spPr>
+        <p:txBody>
+          <a:bodyPr wrap="square" lIns="0" tIns="0" rIns="0" bIns="0" rtlCol="0" anchor="ctr"/>
+          <a:lstStyle/>
+          <a:p>
+            <a:pPr indent="0" marL="0">
+              <a:buNone/>
+            </a:pPr>
+            <a:r>
+              <a:rPr lang="en-US" sz="1500" b="1" dirty="0">
+                <a:solidFill>
+                  <a:srgbClr val="C2413C"/>
+                </a:solidFill>
+                <a:latin typeface="Calibri" pitchFamily="34" charset="0"/>
+                <a:ea typeface="Calibri" pitchFamily="34" charset="-122"/>
+                <a:cs typeface="Calibri" pitchFamily="34" charset="-120"/>
+              </a:rPr>
+              <a:t>💉 Injection SQL → COMPROMISSION</a:t>
+            </a:r>
+            <a:endParaRPr lang="en-US" sz="1500" dirty="0"/>
+          </a:p>
+        </p:txBody>
+      </p:sp>
+      <p:sp>
+        <p:nvSpPr>
           <p:cNvPr id="9" name="Text 7"/>
           <p:cNvSpPr txBox="1"/>
           <p:nvPr/>
         </p:nvSpPr>
         <p:spPr>
           <a:xfrm>
-            <a:off x="4480560" y="1920240"/>
-            <a:ext cx="914400" cy="548640"/>
-          </a:xfrm>
-          <a:prstGeom prst="rect">
-            <a:avLst/>
-          </a:prstGeom>
-          <a:noFill/>
-          <a:ln/>
-        </p:spPr>
-        <p:txBody>
-          <a:bodyPr wrap="square" lIns="0" tIns="0" rIns="0" bIns="0" rtlCol="0" anchor="ctr"/>
-          <a:lstStyle/>
-          <a:p>
-            <a:pPr indent="0" marL="0">
-              <a:buNone/>
-            </a:pPr>
-            <a:r>
-              <a:rPr lang="en-US" sz="2600" dirty="0">
-                <a:solidFill>
-                  <a:srgbClr val="000000"/>
-                </a:solidFill>
-                <a:latin typeface="Calibri" pitchFamily="34" charset="0"/>
-                <a:ea typeface="Calibri" pitchFamily="34" charset="-122"/>
-                <a:cs typeface="Calibri" pitchFamily="34" charset="-120"/>
-              </a:rPr>
-              <a:t>📊</a:t>
-            </a:r>
-            <a:endParaRPr lang="en-US" sz="2600" dirty="0"/>
+            <a:off x="6446520" y="2377440"/>
+            <a:ext cx="4937760" cy="3200400"/>
+          </a:xfrm>
+          <a:prstGeom prst="rect">
+            <a:avLst/>
+          </a:prstGeom>
+          <a:noFill/>
+          <a:ln/>
+        </p:spPr>
+        <p:txBody>
+          <a:bodyPr wrap="square" lIns="0" tIns="0" rIns="0" bIns="0" rtlCol="0" anchor="ctr"/>
+          <a:lstStyle/>
+          <a:p>
+            <a:pPr indent="0" marL="0">
+              <a:lnSpc>
+                <a:spcPct val="130000"/>
+              </a:lnSpc>
+              <a:buNone/>
+            </a:pPr>
+            <a:r>
+              <a:rPr lang="en-US" sz="1400" dirty="0">
+                <a:solidFill>
+                  <a:srgbClr val="261E48"/>
+                </a:solidFill>
+                <a:latin typeface="Calibri" pitchFamily="34" charset="0"/>
+                <a:ea typeface="Calibri" pitchFamily="34" charset="-122"/>
+                <a:cs typeface="Calibri" pitchFamily="34" charset="-120"/>
+              </a:rPr>
+              <a:t>• Blocage par le WAF applicatif (403)</a:t>
+            </a:r>
+            <a:endParaRPr lang="en-US" sz="1400" dirty="0"/>
+          </a:p>
+          <a:p>
+            <a:pPr indent="0" marL="0">
+              <a:lnSpc>
+                <a:spcPct val="130000"/>
+              </a:lnSpc>
+              <a:buNone/>
+            </a:pPr>
+            <a:r>
+              <a:rPr lang="en-US" sz="1400" dirty="0">
+                <a:solidFill>
+                  <a:srgbClr val="261E48"/>
+                </a:solidFill>
+                <a:latin typeface="Calibri" pitchFamily="34" charset="0"/>
+                <a:ea typeface="Calibri" pitchFamily="34" charset="-122"/>
+                <a:cs typeface="Calibri" pitchFamily="34" charset="-120"/>
+              </a:rPr>
+              <a:t>• Contrôle d'intégrité des données</a:t>
+            </a:r>
+            <a:endParaRPr lang="en-US" sz="1400" dirty="0"/>
+          </a:p>
+          <a:p>
+            <a:pPr indent="0" marL="0">
+              <a:lnSpc>
+                <a:spcPct val="130000"/>
+              </a:lnSpc>
+              <a:buNone/>
+            </a:pPr>
+            <a:r>
+              <a:rPr lang="en-US" sz="1400" dirty="0">
+                <a:solidFill>
+                  <a:srgbClr val="261E48"/>
+                </a:solidFill>
+                <a:latin typeface="Calibri" pitchFamily="34" charset="0"/>
+                <a:ea typeface="Calibri" pitchFamily="34" charset="-122"/>
+                <a:cs typeface="Calibri" pitchFamily="34" charset="-120"/>
+              </a:rPr>
+              <a:t>• Restauration d'un état sain si altération</a:t>
+            </a:r>
+            <a:endParaRPr lang="en-US" sz="1400" dirty="0"/>
+          </a:p>
+          <a:p>
+            <a:pPr indent="0" marL="0">
+              <a:lnSpc>
+                <a:spcPct val="130000"/>
+              </a:lnSpc>
+              <a:buNone/>
+            </a:pPr>
+            <a:r>
+              <a:rPr lang="en-US" sz="1400" dirty="0">
+                <a:solidFill>
+                  <a:srgbClr val="261E48"/>
+                </a:solidFill>
+                <a:latin typeface="Calibri" pitchFamily="34" charset="0"/>
+                <a:ea typeface="Calibri" pitchFamily="34" charset="-122"/>
+                <a:cs typeface="Calibri" pitchFamily="34" charset="-120"/>
+              </a:rPr>
+              <a:t>• Vérification : aucune donnée altérée</a:t>
+            </a:r>
+            <a:endParaRPr lang="en-US" sz="1400" dirty="0"/>
           </a:p>
         </p:txBody>
       </p:sp>
@@ -6984,657 +10672,34 @@
         </p:nvSpPr>
         <p:spPr>
           <a:xfrm>
-            <a:off x="4480560" y="2514600"/>
-            <a:ext cx="3200400" cy="365760"/>
-          </a:xfrm>
-          <a:prstGeom prst="rect">
-            <a:avLst/>
-          </a:prstGeom>
-          <a:noFill/>
-          <a:ln/>
-        </p:spPr>
-        <p:txBody>
-          <a:bodyPr wrap="square" lIns="0" tIns="0" rIns="0" bIns="0" rtlCol="0" anchor="ctr"/>
-          <a:lstStyle/>
-          <a:p>
-            <a:pPr indent="0" marL="0">
-              <a:buNone/>
-            </a:pPr>
-            <a:r>
-              <a:rPr lang="en-US" sz="1500" b="1" dirty="0">
-                <a:solidFill>
-                  <a:srgbClr val="261E48"/>
-                </a:solidFill>
-                <a:latin typeface="Calibri" pitchFamily="34" charset="0"/>
-                <a:ea typeface="Calibri" pitchFamily="34" charset="-122"/>
-                <a:cs typeface="Calibri" pitchFamily="34" charset="-120"/>
-              </a:rPr>
-              <a:t>Fonction SOC</a:t>
-            </a:r>
-            <a:endParaRPr lang="en-US" sz="1500" dirty="0"/>
-          </a:p>
-        </p:txBody>
-      </p:sp>
-      <p:sp>
-        <p:nvSpPr>
-          <p:cNvPr id="11" name="Text 9"/>
-          <p:cNvSpPr txBox="1"/>
-          <p:nvPr/>
-        </p:nvSpPr>
-        <p:spPr>
-          <a:xfrm>
-            <a:off x="4480560" y="2880360"/>
-            <a:ext cx="3200400" cy="594360"/>
-          </a:xfrm>
-          <a:prstGeom prst="rect">
-            <a:avLst/>
-          </a:prstGeom>
-          <a:noFill/>
-          <a:ln/>
-        </p:spPr>
-        <p:txBody>
-          <a:bodyPr wrap="square" lIns="0" tIns="0" rIns="0" bIns="0" rtlCol="0" anchor="ctr"/>
-          <a:lstStyle/>
-          <a:p>
-            <a:pPr indent="0" marL="0">
-              <a:buNone/>
-            </a:pPr>
-            <a:r>
-              <a:rPr lang="en-US" sz="1200" dirty="0">
-                <a:solidFill>
-                  <a:srgbClr val="6A6594"/>
-                </a:solidFill>
-                <a:latin typeface="Calibri" pitchFamily="34" charset="0"/>
-                <a:ea typeface="Calibri" pitchFamily="34" charset="-122"/>
-                <a:cs typeface="Calibri" pitchFamily="34" charset="-120"/>
-              </a:rPr>
-              <a:t>Loki + Prometheus + vue SOC du cockpit</a:t>
-            </a:r>
-            <a:endParaRPr lang="en-US" sz="1200" dirty="0"/>
-          </a:p>
-        </p:txBody>
-      </p:sp>
-      <p:sp>
-        <p:nvSpPr>
-          <p:cNvPr id="12" name="Shape 10"/>
-          <p:cNvSpPr/>
-          <p:nvPr/>
-        </p:nvSpPr>
-        <p:spPr>
-          <a:xfrm>
-            <a:off x="8046720" y="1737360"/>
-            <a:ext cx="3566160" cy="1828800"/>
-          </a:xfrm>
-          <a:prstGeom prst="roundRect">
-            <a:avLst>
-              <a:gd name="adj" fmla="val 4000"/>
-            </a:avLst>
-          </a:prstGeom>
-          <a:solidFill>
-            <a:srgbClr val="EEF0F8"/>
-          </a:solidFill>
-          <a:ln/>
-          <a:effectLst>
-            <a:outerShdw sx="100000" sy="100000" kx="0" ky="0" algn="bl" rotWithShape="0" blurRad="76200" dist="25400" dir="5400000">
-              <a:srgbClr val="888888">
-                <a:alpha val="25000"/>
-              </a:srgbClr>
-            </a:outerShdw>
-          </a:effectLst>
-        </p:spPr>
-      </p:sp>
-      <p:sp>
-        <p:nvSpPr>
-          <p:cNvPr id="13" name="Text 11"/>
-          <p:cNvSpPr txBox="1"/>
-          <p:nvPr/>
-        </p:nvSpPr>
-        <p:spPr>
-          <a:xfrm>
-            <a:off x="8229600" y="1920240"/>
-            <a:ext cx="914400" cy="548640"/>
-          </a:xfrm>
-          <a:prstGeom prst="rect">
-            <a:avLst/>
-          </a:prstGeom>
-          <a:noFill/>
-          <a:ln/>
-        </p:spPr>
-        <p:txBody>
-          <a:bodyPr wrap="square" lIns="0" tIns="0" rIns="0" bIns="0" rtlCol="0" anchor="ctr"/>
-          <a:lstStyle/>
-          <a:p>
-            <a:pPr indent="0" marL="0">
-              <a:buNone/>
-            </a:pPr>
-            <a:r>
-              <a:rPr lang="en-US" sz="2600" dirty="0">
-                <a:solidFill>
-                  <a:srgbClr val="000000"/>
-                </a:solidFill>
-                <a:latin typeface="Calibri" pitchFamily="34" charset="0"/>
-                <a:ea typeface="Calibri" pitchFamily="34" charset="-122"/>
-                <a:cs typeface="Calibri" pitchFamily="34" charset="-120"/>
-              </a:rPr>
-              <a:t>🔑</a:t>
-            </a:r>
-            <a:endParaRPr lang="en-US" sz="2600" dirty="0"/>
-          </a:p>
-        </p:txBody>
-      </p:sp>
-      <p:sp>
-        <p:nvSpPr>
-          <p:cNvPr id="14" name="Text 12"/>
-          <p:cNvSpPr txBox="1"/>
-          <p:nvPr/>
-        </p:nvSpPr>
-        <p:spPr>
-          <a:xfrm>
-            <a:off x="8229600" y="2514600"/>
-            <a:ext cx="3200400" cy="365760"/>
-          </a:xfrm>
-          <a:prstGeom prst="rect">
-            <a:avLst/>
-          </a:prstGeom>
-          <a:noFill/>
-          <a:ln/>
-        </p:spPr>
-        <p:txBody>
-          <a:bodyPr wrap="square" lIns="0" tIns="0" rIns="0" bIns="0" rtlCol="0" anchor="ctr"/>
-          <a:lstStyle/>
-          <a:p>
-            <a:pPr indent="0" marL="0">
-              <a:buNone/>
-            </a:pPr>
-            <a:r>
-              <a:rPr lang="en-US" sz="1500" b="1" dirty="0">
-                <a:solidFill>
-                  <a:srgbClr val="261E48"/>
-                </a:solidFill>
-                <a:latin typeface="Calibri" pitchFamily="34" charset="0"/>
-                <a:ea typeface="Calibri" pitchFamily="34" charset="-122"/>
-                <a:cs typeface="Calibri" pitchFamily="34" charset="-120"/>
-              </a:rPr>
-              <a:t>Secrets</a:t>
-            </a:r>
-            <a:endParaRPr lang="en-US" sz="1500" dirty="0"/>
-          </a:p>
-        </p:txBody>
-      </p:sp>
-      <p:sp>
-        <p:nvSpPr>
-          <p:cNvPr id="15" name="Text 13"/>
-          <p:cNvSpPr txBox="1"/>
-          <p:nvPr/>
-        </p:nvSpPr>
-        <p:spPr>
-          <a:xfrm>
-            <a:off x="8229600" y="2880360"/>
-            <a:ext cx="3200400" cy="594360"/>
-          </a:xfrm>
-          <a:prstGeom prst="rect">
-            <a:avLst/>
-          </a:prstGeom>
-          <a:noFill/>
-          <a:ln/>
-        </p:spPr>
-        <p:txBody>
-          <a:bodyPr wrap="square" lIns="0" tIns="0" rIns="0" bIns="0" rtlCol="0" anchor="ctr"/>
-          <a:lstStyle/>
-          <a:p>
-            <a:pPr indent="0" marL="0">
-              <a:buNone/>
-            </a:pPr>
-            <a:r>
-              <a:rPr lang="en-US" sz="1200" dirty="0">
-                <a:solidFill>
-                  <a:srgbClr val="6A6594"/>
-                </a:solidFill>
-                <a:latin typeface="Calibri" pitchFamily="34" charset="0"/>
-                <a:ea typeface="Calibri" pitchFamily="34" charset="-122"/>
-                <a:cs typeface="Calibri" pitchFamily="34" charset="-120"/>
-              </a:rPr>
-              <a:t>chiffrés (SOPS + age), rien en clair</a:t>
-            </a:r>
-            <a:endParaRPr lang="en-US" sz="1200" dirty="0"/>
-          </a:p>
-        </p:txBody>
-      </p:sp>
-      <p:sp>
-        <p:nvSpPr>
-          <p:cNvPr id="16" name="Shape 14"/>
-          <p:cNvSpPr/>
-          <p:nvPr/>
-        </p:nvSpPr>
-        <p:spPr>
-          <a:xfrm>
-            <a:off x="548640" y="3840480"/>
-            <a:ext cx="3566160" cy="1828800"/>
-          </a:xfrm>
-          <a:prstGeom prst="roundRect">
-            <a:avLst>
-              <a:gd name="adj" fmla="val 4000"/>
-            </a:avLst>
-          </a:prstGeom>
-          <a:solidFill>
-            <a:srgbClr val="EEF0F8"/>
-          </a:solidFill>
-          <a:ln/>
-          <a:effectLst>
-            <a:outerShdw sx="100000" sy="100000" kx="0" ky="0" algn="bl" rotWithShape="0" blurRad="76200" dist="25400" dir="5400000">
-              <a:srgbClr val="888888">
-                <a:alpha val="25000"/>
-              </a:srgbClr>
-            </a:outerShdw>
-          </a:effectLst>
-        </p:spPr>
-      </p:sp>
-      <p:sp>
-        <p:nvSpPr>
-          <p:cNvPr id="17" name="Text 15"/>
-          <p:cNvSpPr txBox="1"/>
-          <p:nvPr/>
-        </p:nvSpPr>
-        <p:spPr>
-          <a:xfrm>
-            <a:off x="731520" y="4023360"/>
-            <a:ext cx="914400" cy="548640"/>
-          </a:xfrm>
-          <a:prstGeom prst="rect">
-            <a:avLst/>
-          </a:prstGeom>
-          <a:noFill/>
-          <a:ln/>
-        </p:spPr>
-        <p:txBody>
-          <a:bodyPr wrap="square" lIns="0" tIns="0" rIns="0" bIns="0" rtlCol="0" anchor="ctr"/>
-          <a:lstStyle/>
-          <a:p>
-            <a:pPr indent="0" marL="0">
-              <a:buNone/>
-            </a:pPr>
-            <a:r>
-              <a:rPr lang="en-US" sz="2600" dirty="0">
-                <a:solidFill>
-                  <a:srgbClr val="000000"/>
-                </a:solidFill>
-                <a:latin typeface="Calibri" pitchFamily="34" charset="0"/>
-                <a:ea typeface="Calibri" pitchFamily="34" charset="-122"/>
-                <a:cs typeface="Calibri" pitchFamily="34" charset="-120"/>
-              </a:rPr>
-              <a:t>🔒</a:t>
-            </a:r>
-            <a:endParaRPr lang="en-US" sz="2600" dirty="0"/>
-          </a:p>
-        </p:txBody>
-      </p:sp>
-      <p:sp>
-        <p:nvSpPr>
-          <p:cNvPr id="18" name="Text 16"/>
-          <p:cNvSpPr txBox="1"/>
-          <p:nvPr/>
-        </p:nvSpPr>
-        <p:spPr>
-          <a:xfrm>
-            <a:off x="731520" y="4617720"/>
-            <a:ext cx="3200400" cy="365760"/>
-          </a:xfrm>
-          <a:prstGeom prst="rect">
-            <a:avLst/>
-          </a:prstGeom>
-          <a:noFill/>
-          <a:ln/>
-        </p:spPr>
-        <p:txBody>
-          <a:bodyPr wrap="square" lIns="0" tIns="0" rIns="0" bIns="0" rtlCol="0" anchor="ctr"/>
-          <a:lstStyle/>
-          <a:p>
-            <a:pPr indent="0" marL="0">
-              <a:buNone/>
-            </a:pPr>
-            <a:r>
-              <a:rPr lang="en-US" sz="1500" b="1" dirty="0">
-                <a:solidFill>
-                  <a:srgbClr val="261E48"/>
-                </a:solidFill>
-                <a:latin typeface="Calibri" pitchFamily="34" charset="0"/>
-                <a:ea typeface="Calibri" pitchFamily="34" charset="-122"/>
-                <a:cs typeface="Calibri" pitchFamily="34" charset="-120"/>
-              </a:rPr>
-              <a:t>Durcissement</a:t>
-            </a:r>
-            <a:endParaRPr lang="en-US" sz="1500" dirty="0"/>
-          </a:p>
-        </p:txBody>
-      </p:sp>
-      <p:sp>
-        <p:nvSpPr>
-          <p:cNvPr id="19" name="Text 17"/>
-          <p:cNvSpPr txBox="1"/>
-          <p:nvPr/>
-        </p:nvSpPr>
-        <p:spPr>
-          <a:xfrm>
-            <a:off x="731520" y="4983480"/>
-            <a:ext cx="3200400" cy="594360"/>
-          </a:xfrm>
-          <a:prstGeom prst="rect">
-            <a:avLst/>
-          </a:prstGeom>
-          <a:noFill/>
-          <a:ln/>
-        </p:spPr>
-        <p:txBody>
-          <a:bodyPr wrap="square" lIns="0" tIns="0" rIns="0" bIns="0" rtlCol="0" anchor="ctr"/>
-          <a:lstStyle/>
-          <a:p>
-            <a:pPr indent="0" marL="0">
-              <a:buNone/>
-            </a:pPr>
-            <a:r>
-              <a:rPr lang="en-US" sz="1200" dirty="0">
-                <a:solidFill>
-                  <a:srgbClr val="6A6594"/>
-                </a:solidFill>
-                <a:latin typeface="Calibri" pitchFamily="34" charset="0"/>
-                <a:ea typeface="Calibri" pitchFamily="34" charset="-122"/>
-                <a:cs typeface="Calibri" pitchFamily="34" charset="-120"/>
-              </a:rPr>
-              <a:t>no-new-privileges, base non exposée</a:t>
-            </a:r>
-            <a:endParaRPr lang="en-US" sz="1200" dirty="0"/>
-          </a:p>
-        </p:txBody>
-      </p:sp>
-      <p:sp>
-        <p:nvSpPr>
-          <p:cNvPr id="20" name="Shape 18"/>
-          <p:cNvSpPr/>
-          <p:nvPr/>
-        </p:nvSpPr>
-        <p:spPr>
-          <a:xfrm>
-            <a:off x="4297680" y="3840480"/>
-            <a:ext cx="3566160" cy="1828800"/>
-          </a:xfrm>
-          <a:prstGeom prst="roundRect">
-            <a:avLst>
-              <a:gd name="adj" fmla="val 4000"/>
-            </a:avLst>
-          </a:prstGeom>
-          <a:solidFill>
-            <a:srgbClr val="EEF0F8"/>
-          </a:solidFill>
-          <a:ln/>
-          <a:effectLst>
-            <a:outerShdw sx="100000" sy="100000" kx="0" ky="0" algn="bl" rotWithShape="0" blurRad="76200" dist="25400" dir="5400000">
-              <a:srgbClr val="888888">
-                <a:alpha val="25000"/>
-              </a:srgbClr>
-            </a:outerShdw>
-          </a:effectLst>
-        </p:spPr>
-      </p:sp>
-      <p:sp>
-        <p:nvSpPr>
-          <p:cNvPr id="21" name="Text 19"/>
-          <p:cNvSpPr txBox="1"/>
-          <p:nvPr/>
-        </p:nvSpPr>
-        <p:spPr>
-          <a:xfrm>
-            <a:off x="4480560" y="4023360"/>
-            <a:ext cx="914400" cy="548640"/>
-          </a:xfrm>
-          <a:prstGeom prst="rect">
-            <a:avLst/>
-          </a:prstGeom>
-          <a:noFill/>
-          <a:ln/>
-        </p:spPr>
-        <p:txBody>
-          <a:bodyPr wrap="square" lIns="0" tIns="0" rIns="0" bIns="0" rtlCol="0" anchor="ctr"/>
-          <a:lstStyle/>
-          <a:p>
-            <a:pPr indent="0" marL="0">
-              <a:buNone/>
-            </a:pPr>
-            <a:r>
-              <a:rPr lang="en-US" sz="2600" dirty="0">
-                <a:solidFill>
-                  <a:srgbClr val="000000"/>
-                </a:solidFill>
-                <a:latin typeface="Calibri" pitchFamily="34" charset="0"/>
-                <a:ea typeface="Calibri" pitchFamily="34" charset="-122"/>
-                <a:cs typeface="Calibri" pitchFamily="34" charset="-120"/>
-              </a:rPr>
-              <a:t>🧩</a:t>
-            </a:r>
-            <a:endParaRPr lang="en-US" sz="2600" dirty="0"/>
-          </a:p>
-        </p:txBody>
-      </p:sp>
-      <p:sp>
-        <p:nvSpPr>
-          <p:cNvPr id="22" name="Text 20"/>
-          <p:cNvSpPr txBox="1"/>
-          <p:nvPr/>
-        </p:nvSpPr>
-        <p:spPr>
-          <a:xfrm>
-            <a:off x="4480560" y="4617720"/>
-            <a:ext cx="3200400" cy="365760"/>
-          </a:xfrm>
-          <a:prstGeom prst="rect">
-            <a:avLst/>
-          </a:prstGeom>
-          <a:noFill/>
-          <a:ln/>
-        </p:spPr>
-        <p:txBody>
-          <a:bodyPr wrap="square" lIns="0" tIns="0" rIns="0" bIns="0" rtlCol="0" anchor="ctr"/>
-          <a:lstStyle/>
-          <a:p>
-            <a:pPr indent="0" marL="0">
-              <a:buNone/>
-            </a:pPr>
-            <a:r>
-              <a:rPr lang="en-US" sz="1500" b="1" dirty="0">
-                <a:solidFill>
-                  <a:srgbClr val="261E48"/>
-                </a:solidFill>
-                <a:latin typeface="Calibri" pitchFamily="34" charset="0"/>
-                <a:ea typeface="Calibri" pitchFamily="34" charset="-122"/>
-                <a:cs typeface="Calibri" pitchFamily="34" charset="-120"/>
-              </a:rPr>
-              <a:t>Moindre privilège</a:t>
-            </a:r>
-            <a:endParaRPr lang="en-US" sz="1500" dirty="0"/>
-          </a:p>
-        </p:txBody>
-      </p:sp>
-      <p:sp>
-        <p:nvSpPr>
-          <p:cNvPr id="23" name="Text 21"/>
-          <p:cNvSpPr txBox="1"/>
-          <p:nvPr/>
-        </p:nvSpPr>
-        <p:spPr>
-          <a:xfrm>
-            <a:off x="4480560" y="4983480"/>
-            <a:ext cx="3200400" cy="594360"/>
-          </a:xfrm>
-          <a:prstGeom prst="rect">
-            <a:avLst/>
-          </a:prstGeom>
-          <a:noFill/>
-          <a:ln/>
-        </p:spPr>
-        <p:txBody>
-          <a:bodyPr wrap="square" lIns="0" tIns="0" rIns="0" bIns="0" rtlCol="0" anchor="ctr"/>
-          <a:lstStyle/>
-          <a:p>
-            <a:pPr indent="0" marL="0">
-              <a:buNone/>
-            </a:pPr>
-            <a:r>
-              <a:rPr lang="en-US" sz="1200" dirty="0">
-                <a:solidFill>
-                  <a:srgbClr val="6A6594"/>
-                </a:solidFill>
-                <a:latin typeface="Calibri" pitchFamily="34" charset="0"/>
-                <a:ea typeface="Calibri" pitchFamily="34" charset="-122"/>
-                <a:cs typeface="Calibri" pitchFamily="34" charset="-120"/>
-              </a:rPr>
-              <a:t>token d'admin dédié à l'orchestrateur</a:t>
-            </a:r>
-            <a:endParaRPr lang="en-US" sz="1200" dirty="0"/>
-          </a:p>
-        </p:txBody>
-      </p:sp>
-      <p:sp>
-        <p:nvSpPr>
-          <p:cNvPr id="24" name="Shape 22"/>
-          <p:cNvSpPr/>
-          <p:nvPr/>
-        </p:nvSpPr>
-        <p:spPr>
-          <a:xfrm>
-            <a:off x="8046720" y="3840480"/>
-            <a:ext cx="3566160" cy="1828800"/>
-          </a:xfrm>
-          <a:prstGeom prst="roundRect">
-            <a:avLst>
-              <a:gd name="adj" fmla="val 4000"/>
-            </a:avLst>
-          </a:prstGeom>
-          <a:solidFill>
-            <a:srgbClr val="EEF0F8"/>
-          </a:solidFill>
-          <a:ln/>
-          <a:effectLst>
-            <a:outerShdw sx="100000" sy="100000" kx="0" ky="0" algn="bl" rotWithShape="0" blurRad="76200" dist="25400" dir="5400000">
-              <a:srgbClr val="888888">
-                <a:alpha val="25000"/>
-              </a:srgbClr>
-            </a:outerShdw>
-          </a:effectLst>
-        </p:spPr>
-      </p:sp>
-      <p:sp>
-        <p:nvSpPr>
-          <p:cNvPr id="25" name="Text 23"/>
-          <p:cNvSpPr txBox="1"/>
-          <p:nvPr/>
-        </p:nvSpPr>
-        <p:spPr>
-          <a:xfrm>
-            <a:off x="8229600" y="4023360"/>
-            <a:ext cx="914400" cy="548640"/>
-          </a:xfrm>
-          <a:prstGeom prst="rect">
-            <a:avLst/>
-          </a:prstGeom>
-          <a:noFill/>
-          <a:ln/>
-        </p:spPr>
-        <p:txBody>
-          <a:bodyPr wrap="square" lIns="0" tIns="0" rIns="0" bIns="0" rtlCol="0" anchor="ctr"/>
-          <a:lstStyle/>
-          <a:p>
-            <a:pPr indent="0" marL="0">
-              <a:buNone/>
-            </a:pPr>
-            <a:r>
-              <a:rPr lang="en-US" sz="2600" dirty="0">
-                <a:solidFill>
-                  <a:srgbClr val="000000"/>
-                </a:solidFill>
-                <a:latin typeface="Calibri" pitchFamily="34" charset="0"/>
-                <a:ea typeface="Calibri" pitchFamily="34" charset="-122"/>
-                <a:cs typeface="Calibri" pitchFamily="34" charset="-120"/>
-              </a:rPr>
-              <a:t>📈</a:t>
-            </a:r>
-            <a:endParaRPr lang="en-US" sz="2600" dirty="0"/>
-          </a:p>
-        </p:txBody>
-      </p:sp>
-      <p:sp>
-        <p:nvSpPr>
-          <p:cNvPr id="26" name="Text 24"/>
-          <p:cNvSpPr txBox="1"/>
-          <p:nvPr/>
-        </p:nvSpPr>
-        <p:spPr>
-          <a:xfrm>
-            <a:off x="8229600" y="4617720"/>
-            <a:ext cx="3200400" cy="365760"/>
-          </a:xfrm>
-          <a:prstGeom prst="rect">
-            <a:avLst/>
-          </a:prstGeom>
-          <a:noFill/>
-          <a:ln/>
-        </p:spPr>
-        <p:txBody>
-          <a:bodyPr wrap="square" lIns="0" tIns="0" rIns="0" bIns="0" rtlCol="0" anchor="ctr"/>
-          <a:lstStyle/>
-          <a:p>
-            <a:pPr indent="0" marL="0">
-              <a:buNone/>
-            </a:pPr>
-            <a:r>
-              <a:rPr lang="en-US" sz="1500" b="1" dirty="0">
-                <a:solidFill>
-                  <a:srgbClr val="261E48"/>
-                </a:solidFill>
-                <a:latin typeface="Calibri" pitchFamily="34" charset="0"/>
-                <a:ea typeface="Calibri" pitchFamily="34" charset="-122"/>
-                <a:cs typeface="Calibri" pitchFamily="34" charset="-120"/>
-              </a:rPr>
-              <a:t>Observabilité</a:t>
-            </a:r>
-            <a:endParaRPr lang="en-US" sz="1500" dirty="0"/>
-          </a:p>
-        </p:txBody>
-      </p:sp>
-      <p:sp>
-        <p:nvSpPr>
-          <p:cNvPr id="27" name="Text 25"/>
-          <p:cNvSpPr txBox="1"/>
-          <p:nvPr/>
-        </p:nvSpPr>
-        <p:spPr>
-          <a:xfrm>
-            <a:off x="8229600" y="4983480"/>
-            <a:ext cx="3200400" cy="594360"/>
-          </a:xfrm>
-          <a:prstGeom prst="rect">
-            <a:avLst/>
-          </a:prstGeom>
-          <a:noFill/>
-          <a:ln/>
-        </p:spPr>
-        <p:txBody>
-          <a:bodyPr wrap="square" lIns="0" tIns="0" rIns="0" bIns="0" rtlCol="0" anchor="ctr"/>
-          <a:lstStyle/>
-          <a:p>
-            <a:pPr indent="0" marL="0">
-              <a:buNone/>
-            </a:pPr>
-            <a:r>
-              <a:rPr lang="en-US" sz="1200" dirty="0">
-                <a:solidFill>
-                  <a:srgbClr val="6A6594"/>
-                </a:solidFill>
-                <a:latin typeface="Calibri" pitchFamily="34" charset="0"/>
-                <a:ea typeface="Calibri" pitchFamily="34" charset="-122"/>
-                <a:cs typeface="Calibri" pitchFamily="34" charset="-120"/>
-              </a:rPr>
-              <a:t>métriques &amp; logs exploitables</a:t>
-            </a:r>
-            <a:endParaRPr lang="en-US" sz="1200" dirty="0"/>
+            <a:off x="548640" y="6035040"/>
+            <a:ext cx="10972800" cy="457200"/>
+          </a:xfrm>
+          <a:prstGeom prst="rect">
+            <a:avLst/>
+          </a:prstGeom>
+          <a:noFill/>
+          <a:ln/>
+        </p:spPr>
+        <p:txBody>
+          <a:bodyPr wrap="square" lIns="0" tIns="0" rIns="0" bIns="0" rtlCol="0" anchor="ctr"/>
+          <a:lstStyle/>
+          <a:p>
+            <a:pPr indent="0" marL="0">
+              <a:buNone/>
+            </a:pPr>
+            <a:r>
+              <a:rPr lang="en-US" sz="1250" b="1" dirty="0">
+                <a:solidFill>
+                  <a:srgbClr val="4B3FA6"/>
+                </a:solidFill>
+                <a:latin typeface="Calibri" pitchFamily="34" charset="0"/>
+                <a:ea typeface="Calibri" pitchFamily="34" charset="-122"/>
+                <a:cs typeface="Calibri" pitchFamily="34" charset="-120"/>
+              </a:rPr>
+              <a:t>Accès maîtrisés : l'orchestrateur agit via une API d'administration scoped (pas d'accès god-mode aux conteneurs).</a:t>
+            </a:r>
+            <a:endParaRPr lang="en-US" sz="1250" dirty="0"/>
           </a:p>
         </p:txBody>
       </p:sp>
@@ -7703,7 +10768,7 @@
                 <a:ea typeface="Calibri" pitchFamily="34" charset="-122"/>
                 <a:cs typeface="Calibri" pitchFamily="34" charset="-120"/>
               </a:rPr>
-              <a:t>RECETTE &amp; ESSAIS</a:t>
+              <a:t>MONTAGE 5 PC</a:t>
             </a:r>
             <a:endParaRPr lang="en-US" sz="1200" dirty="0"/>
           </a:p>
@@ -7742,7 +10807,7 @@
                 <a:ea typeface="Calibri" pitchFamily="34" charset="-122"/>
                 <a:cs typeface="Calibri" pitchFamily="34" charset="-120"/>
               </a:rPr>
-              <a:t>Preuves de fonctionnement</a:t>
+              <a:t>Haute disponibilité : le service ne tombe pas</a:t>
             </a:r>
             <a:endParaRPr lang="en-US" sz="3000" dirty="0"/>
           </a:p>
@@ -7757,15 +10822,15 @@
         <p:spPr>
           <a:xfrm>
             <a:off x="548640" y="1645920"/>
-            <a:ext cx="2651760" cy="1737360"/>
+            <a:ext cx="5486400" cy="4114800"/>
           </a:xfrm>
           <a:prstGeom prst="roundRect">
             <a:avLst>
-              <a:gd name="adj" fmla="val 4211"/>
+              <a:gd name="adj" fmla="val 1778"/>
             </a:avLst>
           </a:prstGeom>
           <a:solidFill>
-            <a:srgbClr val="261E48"/>
+            <a:srgbClr val="EEF0F8"/>
           </a:solidFill>
           <a:ln/>
           <a:effectLst>
@@ -7785,34 +10850,34 @@
         </p:nvSpPr>
         <p:spPr>
           <a:xfrm>
-            <a:off x="548640" y="1874520"/>
-            <a:ext cx="2651760" cy="822960"/>
-          </a:xfrm>
-          <a:prstGeom prst="rect">
-            <a:avLst/>
-          </a:prstGeom>
-          <a:noFill/>
-          <a:ln/>
-        </p:spPr>
-        <p:txBody>
-          <a:bodyPr wrap="square" lIns="0" tIns="0" rIns="0" bIns="0" rtlCol="0" anchor="ctr"/>
-          <a:lstStyle/>
-          <a:p>
-            <a:pPr algn="ctr" indent="0" marL="0">
-              <a:buNone/>
-            </a:pPr>
-            <a:r>
-              <a:rPr lang="en-US" sz="3600" b="1" dirty="0">
-                <a:solidFill>
-                  <a:srgbClr val="FFFFFF"/>
-                </a:solidFill>
-                <a:latin typeface="Calibri" pitchFamily="34" charset="0"/>
-                <a:ea typeface="Calibri" pitchFamily="34" charset="-122"/>
-                <a:cs typeface="Calibri" pitchFamily="34" charset="-120"/>
-              </a:rPr>
-              <a:t>15/15</a:t>
-            </a:r>
-            <a:endParaRPr lang="en-US" sz="3600" dirty="0"/>
+            <a:off x="777240" y="1810512"/>
+            <a:ext cx="5029200" cy="411480"/>
+          </a:xfrm>
+          <a:prstGeom prst="rect">
+            <a:avLst/>
+          </a:prstGeom>
+          <a:noFill/>
+          <a:ln/>
+        </p:spPr>
+        <p:txBody>
+          <a:bodyPr wrap="square" lIns="0" tIns="0" rIns="0" bIns="0" rtlCol="0" anchor="ctr"/>
+          <a:lstStyle/>
+          <a:p>
+            <a:pPr indent="0" marL="0">
+              <a:buNone/>
+            </a:pPr>
+            <a:r>
+              <a:rPr lang="en-US" sz="1500" b="1" dirty="0">
+                <a:solidFill>
+                  <a:srgbClr val="261E48"/>
+                </a:solidFill>
+                <a:latin typeface="Calibri" pitchFamily="34" charset="0"/>
+                <a:ea typeface="Calibri" pitchFamily="34" charset="-122"/>
+                <a:cs typeface="Calibri" pitchFamily="34" charset="-120"/>
+              </a:rPr>
+              <a:t>🖥️ Topologie</a:t>
+            </a:r>
+            <a:endParaRPr lang="en-US" sz="1500" dirty="0"/>
           </a:p>
         </p:txBody>
       </p:sp>
@@ -7824,34 +10889,137 @@
         </p:nvSpPr>
         <p:spPr>
           <a:xfrm>
-            <a:off x="640080" y="2697480"/>
-            <a:ext cx="2468880" cy="548640"/>
-          </a:xfrm>
-          <a:prstGeom prst="rect">
-            <a:avLst/>
-          </a:prstGeom>
-          <a:noFill/>
-          <a:ln/>
-        </p:spPr>
-        <p:txBody>
-          <a:bodyPr wrap="square" lIns="0" tIns="0" rIns="0" bIns="0" rtlCol="0" anchor="ctr"/>
-          <a:lstStyle/>
-          <a:p>
-            <a:pPr algn="ctr" indent="0" marL="0">
-              <a:buNone/>
-            </a:pPr>
-            <a:r>
-              <a:rPr lang="en-US" sz="1200" dirty="0">
-                <a:solidFill>
-                  <a:srgbClr val="A1A6D4"/>
-                </a:solidFill>
-                <a:latin typeface="Calibri" pitchFamily="34" charset="0"/>
-                <a:ea typeface="Calibri" pitchFamily="34" charset="-122"/>
-                <a:cs typeface="Calibri" pitchFamily="34" charset="-120"/>
-              </a:rPr>
-              <a:t>vérifications de recette</a:t>
-            </a:r>
-            <a:endParaRPr lang="en-US" sz="1200" dirty="0"/>
+            <a:off x="777240" y="2286000"/>
+            <a:ext cx="5074920" cy="3291840"/>
+          </a:xfrm>
+          <a:prstGeom prst="rect">
+            <a:avLst/>
+          </a:prstGeom>
+          <a:noFill/>
+          <a:ln/>
+        </p:spPr>
+        <p:txBody>
+          <a:bodyPr wrap="square" lIns="0" tIns="0" rIns="0" bIns="0" rtlCol="0" anchor="ctr"/>
+          <a:lstStyle/>
+          <a:p>
+            <a:pPr indent="0" marL="0">
+              <a:lnSpc>
+                <a:spcPct val="125000"/>
+              </a:lnSpc>
+              <a:buNone/>
+            </a:pPr>
+            <a:r>
+              <a:rPr lang="en-US" sz="1350" dirty="0">
+                <a:solidFill>
+                  <a:srgbClr val="261E48"/>
+                </a:solidFill>
+                <a:latin typeface="Calibri" pitchFamily="34" charset="0"/>
+                <a:ea typeface="Calibri" pitchFamily="34" charset="-122"/>
+                <a:cs typeface="Calibri" pitchFamily="34" charset="-120"/>
+              </a:rPr>
+              <a:t>• HOST-PRINCIPAL : serveur + cockpit</a:t>
+            </a:r>
+            <a:endParaRPr lang="en-US" sz="1350" dirty="0"/>
+          </a:p>
+          <a:p>
+            <a:pPr indent="0" marL="0">
+              <a:lnSpc>
+                <a:spcPct val="125000"/>
+              </a:lnSpc>
+              <a:buNone/>
+            </a:pPr>
+            <a:r>
+              <a:rPr lang="en-US" sz="1350" dirty="0">
+                <a:solidFill>
+                  <a:srgbClr val="261E48"/>
+                </a:solidFill>
+                <a:latin typeface="Calibri" pitchFamily="34" charset="0"/>
+                <a:ea typeface="Calibri" pitchFamily="34" charset="-122"/>
+                <a:cs typeface="Calibri" pitchFamily="34" charset="-120"/>
+              </a:rPr>
+              <a:t>• HOST-BACKUP : réplique le principal</a:t>
+            </a:r>
+            <a:endParaRPr lang="en-US" sz="1350" dirty="0"/>
+          </a:p>
+          <a:p>
+            <a:pPr indent="0" marL="0">
+              <a:lnSpc>
+                <a:spcPct val="125000"/>
+              </a:lnSpc>
+              <a:buNone/>
+            </a:pPr>
+            <a:r>
+              <a:rPr lang="en-US" sz="1350" dirty="0">
+                <a:solidFill>
+                  <a:srgbClr val="261E48"/>
+                </a:solidFill>
+                <a:latin typeface="Calibri" pitchFamily="34" charset="0"/>
+                <a:ea typeface="Calibri" pitchFamily="34" charset="-122"/>
+                <a:cs typeface="Calibri" pitchFamily="34" charset="-120"/>
+              </a:rPr>
+              <a:t>  (comptes + clés d'idempotence)</a:t>
+            </a:r>
+            <a:endParaRPr lang="en-US" sz="1350" dirty="0"/>
+          </a:p>
+          <a:p>
+            <a:pPr indent="0" marL="0">
+              <a:lnSpc>
+                <a:spcPct val="125000"/>
+              </a:lnSpc>
+              <a:buNone/>
+            </a:pPr>
+            <a:r>
+              <a:rPr lang="en-US" sz="1350" dirty="0">
+                <a:solidFill>
+                  <a:srgbClr val="261E48"/>
+                </a:solidFill>
+                <a:latin typeface="Calibri" pitchFamily="34" charset="0"/>
+                <a:ea typeface="Calibri" pitchFamily="34" charset="-122"/>
+                <a:cs typeface="Calibri" pitchFamily="34" charset="-120"/>
+              </a:rPr>
+              <a:t>• CLIENT-A / CLIENT-B : app de paiement</a:t>
+            </a:r>
+            <a:endParaRPr lang="en-US" sz="1350" dirty="0"/>
+          </a:p>
+          <a:p>
+            <a:pPr indent="0" marL="0">
+              <a:lnSpc>
+                <a:spcPct val="125000"/>
+              </a:lnSpc>
+              <a:buNone/>
+            </a:pPr>
+            <a:r>
+              <a:rPr lang="en-US" sz="1350" dirty="0">
+                <a:solidFill>
+                  <a:srgbClr val="261E48"/>
+                </a:solidFill>
+                <a:latin typeface="Calibri" pitchFamily="34" charset="0"/>
+                <a:ea typeface="Calibri" pitchFamily="34" charset="-122"/>
+                <a:cs typeface="Calibri" pitchFamily="34" charset="-120"/>
+              </a:rPr>
+              <a:t>  (login + recherche + transfert)</a:t>
+            </a:r>
+            <a:endParaRPr lang="en-US" sz="1350" dirty="0"/>
+          </a:p>
+          <a:p>
+            <a:pPr indent="0" marL="0">
+              <a:lnSpc>
+                <a:spcPct val="125000"/>
+              </a:lnSpc>
+              <a:buNone/>
+            </a:pPr>
+            <a:r>
+              <a:rPr lang="en-US" sz="1350" dirty="0">
+                <a:solidFill>
+                  <a:srgbClr val="261E48"/>
+                </a:solidFill>
+                <a:latin typeface="Calibri" pitchFamily="34" charset="0"/>
+                <a:ea typeface="Calibri" pitchFamily="34" charset="-122"/>
+                <a:cs typeface="Calibri" pitchFamily="34" charset="-120"/>
+              </a:rPr>
+              <a:t>• ATTAQUANT : vise le principal</a:t>
+            </a:r>
+            <a:endParaRPr lang="en-US" sz="1350" dirty="0"/>
           </a:p>
         </p:txBody>
       </p:sp>
@@ -7863,16 +11031,16 @@
         </p:nvSpPr>
         <p:spPr>
           <a:xfrm>
-            <a:off x="3383280" y="1645920"/>
-            <a:ext cx="2651760" cy="1737360"/>
+            <a:off x="6217920" y="1645920"/>
+            <a:ext cx="5394960" cy="4114800"/>
           </a:xfrm>
           <a:prstGeom prst="roundRect">
             <a:avLst>
-              <a:gd name="adj" fmla="val 4211"/>
+              <a:gd name="adj" fmla="val 1778"/>
             </a:avLst>
           </a:prstGeom>
           <a:solidFill>
-            <a:srgbClr val="261E48"/>
+            <a:srgbClr val="E3F3EC"/>
           </a:solidFill>
           <a:ln/>
           <a:effectLst>
@@ -7892,34 +11060,34 @@
         </p:nvSpPr>
         <p:spPr>
           <a:xfrm>
-            <a:off x="3383280" y="1874520"/>
-            <a:ext cx="2651760" cy="822960"/>
-          </a:xfrm>
-          <a:prstGeom prst="rect">
-            <a:avLst/>
-          </a:prstGeom>
-          <a:noFill/>
-          <a:ln/>
-        </p:spPr>
-        <p:txBody>
-          <a:bodyPr wrap="square" lIns="0" tIns="0" rIns="0" bIns="0" rtlCol="0" anchor="ctr"/>
-          <a:lstStyle/>
-          <a:p>
-            <a:pPr algn="ctr" indent="0" marL="0">
-              <a:buNone/>
-            </a:pPr>
-            <a:r>
-              <a:rPr lang="en-US" sz="3600" b="1" dirty="0">
-                <a:solidFill>
-                  <a:srgbClr val="FFFFFF"/>
-                </a:solidFill>
-                <a:latin typeface="Calibri" pitchFamily="34" charset="0"/>
-                <a:ea typeface="Calibri" pitchFamily="34" charset="-122"/>
-                <a:cs typeface="Calibri" pitchFamily="34" charset="-120"/>
-              </a:rPr>
-              <a:t>~15 s</a:t>
-            </a:r>
-            <a:endParaRPr lang="en-US" sz="3600" dirty="0"/>
+            <a:off x="6446520" y="1810512"/>
+            <a:ext cx="4937760" cy="411480"/>
+          </a:xfrm>
+          <a:prstGeom prst="rect">
+            <a:avLst/>
+          </a:prstGeom>
+          <a:noFill/>
+          <a:ln/>
+        </p:spPr>
+        <p:txBody>
+          <a:bodyPr wrap="square" lIns="0" tIns="0" rIns="0" bIns="0" rtlCol="0" anchor="ctr"/>
+          <a:lstStyle/>
+          <a:p>
+            <a:pPr indent="0" marL="0">
+              <a:buNone/>
+            </a:pPr>
+            <a:r>
+              <a:rPr lang="en-US" sz="1500" b="1" dirty="0">
+                <a:solidFill>
+                  <a:srgbClr val="1E8E6A"/>
+                </a:solidFill>
+                <a:latin typeface="Calibri" pitchFamily="34" charset="0"/>
+                <a:ea typeface="Calibri" pitchFamily="34" charset="-122"/>
+                <a:cs typeface="Calibri" pitchFamily="34" charset="-120"/>
+              </a:rPr>
+              <a:t>🔁 Bascule &amp; reprise</a:t>
+            </a:r>
+            <a:endParaRPr lang="en-US" sz="1500" dirty="0"/>
           </a:p>
         </p:txBody>
       </p:sp>
@@ -7931,277 +11099,146 @@
         </p:nvSpPr>
         <p:spPr>
           <a:xfrm>
-            <a:off x="3474720" y="2697480"/>
-            <a:ext cx="2468880" cy="548640"/>
-          </a:xfrm>
-          <a:prstGeom prst="rect">
-            <a:avLst/>
-          </a:prstGeom>
-          <a:noFill/>
-          <a:ln/>
-        </p:spPr>
-        <p:txBody>
-          <a:bodyPr wrap="square" lIns="0" tIns="0" rIns="0" bIns="0" rtlCol="0" anchor="ctr"/>
-          <a:lstStyle/>
-          <a:p>
-            <a:pPr algn="ctr" indent="0" marL="0">
-              <a:buNone/>
-            </a:pPr>
-            <a:r>
-              <a:rPr lang="en-US" sz="1200" dirty="0">
-                <a:solidFill>
-                  <a:srgbClr val="A1A6D4"/>
-                </a:solidFill>
-                <a:latin typeface="Calibri" pitchFamily="34" charset="0"/>
-                <a:ea typeface="Calibri" pitchFamily="34" charset="-122"/>
-                <a:cs typeface="Calibri" pitchFamily="34" charset="-120"/>
-              </a:rPr>
-              <a:t>RTO détection → reprise</a:t>
-            </a:r>
-            <a:endParaRPr lang="en-US" sz="1200" dirty="0"/>
-          </a:p>
-        </p:txBody>
-      </p:sp>
-      <p:sp>
-        <p:nvSpPr>
-          <p:cNvPr id="10" name="Shape 8"/>
-          <p:cNvSpPr/>
-          <p:nvPr/>
-        </p:nvSpPr>
-        <p:spPr>
-          <a:xfrm>
-            <a:off x="6217920" y="1645920"/>
-            <a:ext cx="2651760" cy="1737360"/>
-          </a:xfrm>
-          <a:prstGeom prst="roundRect">
-            <a:avLst>
-              <a:gd name="adj" fmla="val 4211"/>
-            </a:avLst>
-          </a:prstGeom>
-          <a:solidFill>
-            <a:srgbClr val="261E48"/>
-          </a:solidFill>
-          <a:ln/>
-          <a:effectLst>
-            <a:outerShdw sx="100000" sy="100000" kx="0" ky="0" algn="bl" rotWithShape="0" blurRad="76200" dist="25400" dir="5400000">
-              <a:srgbClr val="888888">
-                <a:alpha val="25000"/>
-              </a:srgbClr>
-            </a:outerShdw>
-          </a:effectLst>
-        </p:spPr>
-      </p:sp>
-      <p:sp>
-        <p:nvSpPr>
-          <p:cNvPr id="11" name="Text 9"/>
-          <p:cNvSpPr txBox="1"/>
-          <p:nvPr/>
-        </p:nvSpPr>
-        <p:spPr>
-          <a:xfrm>
-            <a:off x="6217920" y="1874520"/>
-            <a:ext cx="2651760" cy="822960"/>
-          </a:xfrm>
-          <a:prstGeom prst="rect">
-            <a:avLst/>
-          </a:prstGeom>
-          <a:noFill/>
-          <a:ln/>
-        </p:spPr>
-        <p:txBody>
-          <a:bodyPr wrap="square" lIns="0" tIns="0" rIns="0" bIns="0" rtlCol="0" anchor="ctr"/>
-          <a:lstStyle/>
-          <a:p>
-            <a:pPr algn="ctr" indent="0" marL="0">
-              <a:buNone/>
-            </a:pPr>
-            <a:r>
-              <a:rPr lang="en-US" sz="3600" b="1" dirty="0">
-                <a:solidFill>
-                  <a:srgbClr val="FFFFFF"/>
-                </a:solidFill>
-                <a:latin typeface="Calibri" pitchFamily="34" charset="0"/>
-                <a:ea typeface="Calibri" pitchFamily="34" charset="-122"/>
-                <a:cs typeface="Calibri" pitchFamily="34" charset="-120"/>
-              </a:rPr>
-              <a:t>100 %</a:t>
-            </a:r>
-            <a:endParaRPr lang="en-US" sz="3600" dirty="0"/>
-          </a:p>
-        </p:txBody>
-      </p:sp>
-      <p:sp>
-        <p:nvSpPr>
-          <p:cNvPr id="12" name="Text 10"/>
-          <p:cNvSpPr txBox="1"/>
-          <p:nvPr/>
-        </p:nvSpPr>
-        <p:spPr>
-          <a:xfrm>
-            <a:off x="6309360" y="2697480"/>
-            <a:ext cx="2468880" cy="548640"/>
-          </a:xfrm>
-          <a:prstGeom prst="rect">
-            <a:avLst/>
-          </a:prstGeom>
-          <a:noFill/>
-          <a:ln/>
-        </p:spPr>
-        <p:txBody>
-          <a:bodyPr wrap="square" lIns="0" tIns="0" rIns="0" bIns="0" rtlCol="0" anchor="ctr"/>
-          <a:lstStyle/>
-          <a:p>
-            <a:pPr algn="ctr" indent="0" marL="0">
-              <a:buNone/>
-            </a:pPr>
-            <a:r>
-              <a:rPr lang="en-US" sz="1200" dirty="0">
-                <a:solidFill>
-                  <a:srgbClr val="A1A6D4"/>
-                </a:solidFill>
-                <a:latin typeface="Calibri" pitchFamily="34" charset="0"/>
-                <a:ea typeface="Calibri" pitchFamily="34" charset="-122"/>
-                <a:cs typeface="Calibri" pitchFamily="34" charset="-120"/>
-              </a:rPr>
-              <a:t>reprise sans humain</a:t>
-            </a:r>
-            <a:endParaRPr lang="en-US" sz="1200" dirty="0"/>
-          </a:p>
-        </p:txBody>
-      </p:sp>
-      <p:sp>
-        <p:nvSpPr>
-          <p:cNvPr id="13" name="Shape 11"/>
-          <p:cNvSpPr/>
-          <p:nvPr/>
-        </p:nvSpPr>
-        <p:spPr>
-          <a:xfrm>
-            <a:off x="9052560" y="1645920"/>
-            <a:ext cx="2651760" cy="1737360"/>
-          </a:xfrm>
-          <a:prstGeom prst="roundRect">
-            <a:avLst>
-              <a:gd name="adj" fmla="val 4211"/>
-            </a:avLst>
-          </a:prstGeom>
-          <a:solidFill>
-            <a:srgbClr val="261E48"/>
-          </a:solidFill>
-          <a:ln/>
-          <a:effectLst>
-            <a:outerShdw sx="100000" sy="100000" kx="0" ky="0" algn="bl" rotWithShape="0" blurRad="76200" dist="25400" dir="5400000">
-              <a:srgbClr val="888888">
-                <a:alpha val="25000"/>
-              </a:srgbClr>
-            </a:outerShdw>
-          </a:effectLst>
-        </p:spPr>
-      </p:sp>
-      <p:sp>
-        <p:nvSpPr>
-          <p:cNvPr id="14" name="Text 12"/>
-          <p:cNvSpPr txBox="1"/>
-          <p:nvPr/>
-        </p:nvSpPr>
-        <p:spPr>
-          <a:xfrm>
-            <a:off x="9052560" y="1874520"/>
-            <a:ext cx="2651760" cy="822960"/>
-          </a:xfrm>
-          <a:prstGeom prst="rect">
-            <a:avLst/>
-          </a:prstGeom>
-          <a:noFill/>
-          <a:ln/>
-        </p:spPr>
-        <p:txBody>
-          <a:bodyPr wrap="square" lIns="0" tIns="0" rIns="0" bIns="0" rtlCol="0" anchor="ctr"/>
-          <a:lstStyle/>
-          <a:p>
-            <a:pPr algn="ctr" indent="0" marL="0">
-              <a:buNone/>
-            </a:pPr>
-            <a:r>
-              <a:rPr lang="en-US" sz="3600" b="1" dirty="0">
-                <a:solidFill>
-                  <a:srgbClr val="FFFFFF"/>
-                </a:solidFill>
-                <a:latin typeface="Calibri" pitchFamily="34" charset="0"/>
-                <a:ea typeface="Calibri" pitchFamily="34" charset="-122"/>
-                <a:cs typeface="Calibri" pitchFamily="34" charset="-120"/>
-              </a:rPr>
-              <a:t>748</a:t>
-            </a:r>
-            <a:endParaRPr lang="en-US" sz="3600" dirty="0"/>
-          </a:p>
-        </p:txBody>
-      </p:sp>
-      <p:sp>
-        <p:nvSpPr>
-          <p:cNvPr id="15" name="Text 13"/>
-          <p:cNvSpPr txBox="1"/>
-          <p:nvPr/>
-        </p:nvSpPr>
-        <p:spPr>
-          <a:xfrm>
-            <a:off x="9144000" y="2697480"/>
-            <a:ext cx="2468880" cy="548640"/>
-          </a:xfrm>
-          <a:prstGeom prst="rect">
-            <a:avLst/>
-          </a:prstGeom>
-          <a:noFill/>
-          <a:ln/>
-        </p:spPr>
-        <p:txBody>
-          <a:bodyPr wrap="square" lIns="0" tIns="0" rIns="0" bIns="0" rtlCol="0" anchor="ctr"/>
-          <a:lstStyle/>
-          <a:p>
-            <a:pPr algn="ctr" indent="0" marL="0">
-              <a:buNone/>
-            </a:pPr>
-            <a:r>
-              <a:rPr lang="en-US" sz="1200" dirty="0">
-                <a:solidFill>
-                  <a:srgbClr val="A1A6D4"/>
-                </a:solidFill>
-                <a:latin typeface="Calibri" pitchFamily="34" charset="0"/>
-                <a:ea typeface="Calibri" pitchFamily="34" charset="-122"/>
-                <a:cs typeface="Calibri" pitchFamily="34" charset="-120"/>
-              </a:rPr>
-              <a:t>requêtes bloquées (WAF)</a:t>
-            </a:r>
-            <a:endParaRPr lang="en-US" sz="1200" dirty="0"/>
-          </a:p>
-        </p:txBody>
-      </p:sp>
-      <p:sp>
-        <p:nvSpPr>
-          <p:cNvPr id="16" name="Text 14"/>
-          <p:cNvSpPr txBox="1"/>
-          <p:nvPr/>
-        </p:nvSpPr>
-        <p:spPr>
-          <a:xfrm>
-            <a:off x="731520" y="3749040"/>
-            <a:ext cx="10972800" cy="411480"/>
-          </a:xfrm>
-          <a:prstGeom prst="rect">
-            <a:avLst/>
-          </a:prstGeom>
-          <a:noFill/>
-          <a:ln/>
-        </p:spPr>
-        <p:txBody>
-          <a:bodyPr wrap="square" lIns="0" tIns="0" rIns="0" bIns="0" rtlCol="0" anchor="ctr"/>
-          <a:lstStyle/>
-          <a:p>
-            <a:pPr indent="0" marL="0">
-              <a:buNone/>
-            </a:pPr>
-            <a:r>
-              <a:rPr lang="en-US" sz="1400" b="1" dirty="0">
+            <a:off x="6446520" y="2286000"/>
+            <a:ext cx="4983480" cy="2743200"/>
+          </a:xfrm>
+          <a:prstGeom prst="rect">
+            <a:avLst/>
+          </a:prstGeom>
+          <a:noFill/>
+          <a:ln/>
+        </p:spPr>
+        <p:txBody>
+          <a:bodyPr wrap="square" lIns="0" tIns="0" rIns="0" bIns="0" rtlCol="0" anchor="ctr"/>
+          <a:lstStyle/>
+          <a:p>
+            <a:pPr indent="0" marL="0">
+              <a:lnSpc>
+                <a:spcPct val="130000"/>
+              </a:lnSpc>
+              <a:buNone/>
+            </a:pPr>
+            <a:r>
+              <a:rPr lang="en-US" sz="1350" dirty="0">
+                <a:solidFill>
+                  <a:srgbClr val="261E48"/>
+                </a:solidFill>
+                <a:latin typeface="Calibri" pitchFamily="34" charset="0"/>
+                <a:ea typeface="Calibri" pitchFamily="34" charset="-122"/>
+                <a:cs typeface="Calibri" pitchFamily="34" charset="-120"/>
+              </a:rPr>
+              <a:t>1. Le serveur principal tombe</a:t>
+            </a:r>
+            <a:endParaRPr lang="en-US" sz="1350" dirty="0"/>
+          </a:p>
+          <a:p>
+            <a:pPr indent="0" marL="0">
+              <a:lnSpc>
+                <a:spcPct val="130000"/>
+              </a:lnSpc>
+              <a:buNone/>
+            </a:pPr>
+            <a:r>
+              <a:rPr lang="en-US" sz="1350" dirty="0">
+                <a:solidFill>
+                  <a:srgbClr val="261E48"/>
+                </a:solidFill>
+                <a:latin typeface="Calibri" pitchFamily="34" charset="0"/>
+                <a:ea typeface="Calibri" pitchFamily="34" charset="-122"/>
+                <a:cs typeface="Calibri" pitchFamily="34" charset="-120"/>
+              </a:rPr>
+              <a:t>2. Le client bascule AUTOMATIQUEMENT sur le backup</a:t>
+            </a:r>
+            <a:endParaRPr lang="en-US" sz="1350" dirty="0"/>
+          </a:p>
+          <a:p>
+            <a:pPr indent="0" marL="0">
+              <a:lnSpc>
+                <a:spcPct val="130000"/>
+              </a:lnSpc>
+              <a:buNone/>
+            </a:pPr>
+            <a:r>
+              <a:rPr lang="en-US" sz="1350" dirty="0">
+                <a:solidFill>
+                  <a:srgbClr val="261E48"/>
+                </a:solidFill>
+                <a:latin typeface="Calibri" pitchFamily="34" charset="0"/>
+                <a:ea typeface="Calibri" pitchFamily="34" charset="-122"/>
+                <a:cs typeface="Calibri" pitchFamily="34" charset="-120"/>
+              </a:rPr>
+              <a:t>3. La transaction en cours est REPRISE</a:t>
+            </a:r>
+            <a:endParaRPr lang="en-US" sz="1350" dirty="0"/>
+          </a:p>
+          <a:p>
+            <a:pPr indent="0" marL="0">
+              <a:lnSpc>
+                <a:spcPct val="130000"/>
+              </a:lnSpc>
+              <a:buNone/>
+            </a:pPr>
+            <a:r>
+              <a:rPr lang="en-US" sz="1350" dirty="0">
+                <a:solidFill>
+                  <a:srgbClr val="261E48"/>
+                </a:solidFill>
+                <a:latin typeface="Calibri" pitchFamily="34" charset="0"/>
+                <a:ea typeface="Calibri" pitchFamily="34" charset="-122"/>
+                <a:cs typeface="Calibri" pitchFamily="34" charset="-120"/>
+              </a:rPr>
+              <a:t>   (clé d'idempotence) — sans double débit</a:t>
+            </a:r>
+            <a:endParaRPr lang="en-US" sz="1350" dirty="0"/>
+          </a:p>
+          <a:p>
+            <a:pPr indent="0" marL="0">
+              <a:lnSpc>
+                <a:spcPct val="130000"/>
+              </a:lnSpc>
+              <a:buNone/>
+            </a:pPr>
+            <a:r>
+              <a:rPr lang="en-US" sz="1350" dirty="0">
+                <a:solidFill>
+                  <a:srgbClr val="261E48"/>
+                </a:solidFill>
+                <a:latin typeface="Calibri" pitchFamily="34" charset="0"/>
+                <a:ea typeface="Calibri" pitchFamily="34" charset="-122"/>
+                <a:cs typeface="Calibri" pitchFamily="34" charset="-120"/>
+              </a:rPr>
+              <a:t>4. Service maintenu, zéro intervention</a:t>
+            </a:r>
+            <a:endParaRPr lang="en-US" sz="1350" dirty="0"/>
+          </a:p>
+        </p:txBody>
+      </p:sp>
+      <p:sp>
+        <p:nvSpPr>
+          <p:cNvPr id="10" name="Text 8"/>
+          <p:cNvSpPr txBox="1"/>
+          <p:nvPr/>
+        </p:nvSpPr>
+        <p:spPr>
+          <a:xfrm>
+            <a:off x="6446520" y="5212080"/>
+            <a:ext cx="4937760" cy="457200"/>
+          </a:xfrm>
+          <a:prstGeom prst="rect">
+            <a:avLst/>
+          </a:prstGeom>
+          <a:noFill/>
+          <a:ln/>
+        </p:spPr>
+        <p:txBody>
+          <a:bodyPr wrap="square" lIns="0" tIns="0" rIns="0" bIns="0" rtlCol="0" anchor="ctr"/>
+          <a:lstStyle/>
+          <a:p>
+            <a:pPr indent="0" marL="0">
+              <a:buNone/>
+            </a:pPr>
+            <a:r>
+              <a:rPr lang="en-US" sz="1500" b="1" dirty="0">
                 <a:solidFill>
                   <a:srgbClr val="1E8E6A"/>
                 </a:solidFill>
@@ -8209,288 +11246,9 @@
                 <a:ea typeface="Calibri" pitchFamily="34" charset="-122"/>
                 <a:cs typeface="Calibri" pitchFamily="34" charset="-120"/>
               </a:rPr>
-              <a:t>✓  </a:t>
-            </a:r>
-            <a:pPr indent="0" marL="0">
-              <a:buNone/>
-            </a:pPr>
-            <a:r>
-              <a:rPr lang="en-US" sz="1400" dirty="0">
-                <a:solidFill>
-                  <a:srgbClr val="261E48"/>
-                </a:solidFill>
-                <a:latin typeface="Calibri" pitchFamily="34" charset="0"/>
-                <a:ea typeface="Calibri" pitchFamily="34" charset="-122"/>
-                <a:cs typeface="Calibri" pitchFamily="34" charset="-120"/>
-              </a:rPr>
-              <a:t>Services opérationnels + modèle ML entraîné</a:t>
-            </a:r>
-            <a:endParaRPr lang="en-US" sz="1400" dirty="0"/>
-          </a:p>
-        </p:txBody>
-      </p:sp>
-      <p:sp>
-        <p:nvSpPr>
-          <p:cNvPr id="17" name="Text 15"/>
-          <p:cNvSpPr txBox="1"/>
-          <p:nvPr/>
-        </p:nvSpPr>
-        <p:spPr>
-          <a:xfrm>
-            <a:off x="731520" y="4224528"/>
-            <a:ext cx="10972800" cy="411480"/>
-          </a:xfrm>
-          <a:prstGeom prst="rect">
-            <a:avLst/>
-          </a:prstGeom>
-          <a:noFill/>
-          <a:ln/>
-        </p:spPr>
-        <p:txBody>
-          <a:bodyPr wrap="square" lIns="0" tIns="0" rIns="0" bIns="0" rtlCol="0" anchor="ctr"/>
-          <a:lstStyle/>
-          <a:p>
-            <a:pPr indent="0" marL="0">
-              <a:buNone/>
-            </a:pPr>
-            <a:r>
-              <a:rPr lang="en-US" sz="1400" b="1" dirty="0">
-                <a:solidFill>
-                  <a:srgbClr val="1E8E6A"/>
-                </a:solidFill>
-                <a:latin typeface="Calibri" pitchFamily="34" charset="0"/>
-                <a:ea typeface="Calibri" pitchFamily="34" charset="-122"/>
-                <a:cs typeface="Calibri" pitchFamily="34" charset="-120"/>
-              </a:rPr>
-              <a:t>✓  </a:t>
-            </a:r>
-            <a:pPr indent="0" marL="0">
-              <a:buNone/>
-            </a:pPr>
-            <a:r>
-              <a:rPr lang="en-US" sz="1400" dirty="0">
-                <a:solidFill>
-                  <a:srgbClr val="261E48"/>
-                </a:solidFill>
-                <a:latin typeface="Calibri" pitchFamily="34" charset="0"/>
-                <a:ea typeface="Calibri" pitchFamily="34" charset="-122"/>
-                <a:cs typeface="Calibri" pitchFamily="34" charset="-120"/>
-              </a:rPr>
-              <a:t>DoS → reprise autonome + bouclier actif</a:t>
-            </a:r>
-            <a:endParaRPr lang="en-US" sz="1400" dirty="0"/>
-          </a:p>
-        </p:txBody>
-      </p:sp>
-      <p:sp>
-        <p:nvSpPr>
-          <p:cNvPr id="18" name="Text 16"/>
-          <p:cNvSpPr txBox="1"/>
-          <p:nvPr/>
-        </p:nvSpPr>
-        <p:spPr>
-          <a:xfrm>
-            <a:off x="731520" y="4700016"/>
-            <a:ext cx="10972800" cy="411480"/>
-          </a:xfrm>
-          <a:prstGeom prst="rect">
-            <a:avLst/>
-          </a:prstGeom>
-          <a:noFill/>
-          <a:ln/>
-        </p:spPr>
-        <p:txBody>
-          <a:bodyPr wrap="square" lIns="0" tIns="0" rIns="0" bIns="0" rtlCol="0" anchor="ctr"/>
-          <a:lstStyle/>
-          <a:p>
-            <a:pPr indent="0" marL="0">
-              <a:buNone/>
-            </a:pPr>
-            <a:r>
-              <a:rPr lang="en-US" sz="1400" b="1" dirty="0">
-                <a:solidFill>
-                  <a:srgbClr val="1E8E6A"/>
-                </a:solidFill>
-                <a:latin typeface="Calibri" pitchFamily="34" charset="0"/>
-                <a:ea typeface="Calibri" pitchFamily="34" charset="-122"/>
-                <a:cs typeface="Calibri" pitchFamily="34" charset="-120"/>
-              </a:rPr>
-              <a:t>✓  </a:t>
-            </a:r>
-            <a:pPr indent="0" marL="0">
-              <a:buNone/>
-            </a:pPr>
-            <a:r>
-              <a:rPr lang="en-US" sz="1400" dirty="0">
-                <a:solidFill>
-                  <a:srgbClr val="261E48"/>
-                </a:solidFill>
-                <a:latin typeface="Calibri" pitchFamily="34" charset="0"/>
-                <a:ea typeface="Calibri" pitchFamily="34" charset="-122"/>
-                <a:cs typeface="Calibri" pitchFamily="34" charset="-120"/>
-              </a:rPr>
-              <a:t>Transaction réussie PENDANT l'attaque</a:t>
-            </a:r>
-            <a:endParaRPr lang="en-US" sz="1400" dirty="0"/>
-          </a:p>
-        </p:txBody>
-      </p:sp>
-      <p:sp>
-        <p:nvSpPr>
-          <p:cNvPr id="19" name="Text 17"/>
-          <p:cNvSpPr txBox="1"/>
-          <p:nvPr/>
-        </p:nvSpPr>
-        <p:spPr>
-          <a:xfrm>
-            <a:off x="731520" y="5175504"/>
-            <a:ext cx="10972800" cy="411480"/>
-          </a:xfrm>
-          <a:prstGeom prst="rect">
-            <a:avLst/>
-          </a:prstGeom>
-          <a:noFill/>
-          <a:ln/>
-        </p:spPr>
-        <p:txBody>
-          <a:bodyPr wrap="square" lIns="0" tIns="0" rIns="0" bIns="0" rtlCol="0" anchor="ctr"/>
-          <a:lstStyle/>
-          <a:p>
-            <a:pPr indent="0" marL="0">
-              <a:buNone/>
-            </a:pPr>
-            <a:r>
-              <a:rPr lang="en-US" sz="1400" b="1" dirty="0">
-                <a:solidFill>
-                  <a:srgbClr val="1E8E6A"/>
-                </a:solidFill>
-                <a:latin typeface="Calibri" pitchFamily="34" charset="0"/>
-                <a:ea typeface="Calibri" pitchFamily="34" charset="-122"/>
-                <a:cs typeface="Calibri" pitchFamily="34" charset="-120"/>
-              </a:rPr>
-              <a:t>✓  </a:t>
-            </a:r>
-            <a:pPr indent="0" marL="0">
-              <a:buNone/>
-            </a:pPr>
-            <a:r>
-              <a:rPr lang="en-US" sz="1400" dirty="0">
-                <a:solidFill>
-                  <a:srgbClr val="261E48"/>
-                </a:solidFill>
-                <a:latin typeface="Calibri" pitchFamily="34" charset="0"/>
-                <a:ea typeface="Calibri" pitchFamily="34" charset="-122"/>
-                <a:cs typeface="Calibri" pitchFamily="34" charset="-120"/>
-              </a:rPr>
-              <a:t>Injection SQL contenue par le WAF</a:t>
-            </a:r>
-            <a:endParaRPr lang="en-US" sz="1400" dirty="0"/>
-          </a:p>
-        </p:txBody>
-      </p:sp>
-      <p:sp>
-        <p:nvSpPr>
-          <p:cNvPr id="20" name="Text 18"/>
-          <p:cNvSpPr txBox="1"/>
-          <p:nvPr/>
-        </p:nvSpPr>
-        <p:spPr>
-          <a:xfrm>
-            <a:off x="731520" y="5650992"/>
-            <a:ext cx="10972800" cy="411480"/>
-          </a:xfrm>
-          <a:prstGeom prst="rect">
-            <a:avLst/>
-          </a:prstGeom>
-          <a:noFill/>
-          <a:ln/>
-        </p:spPr>
-        <p:txBody>
-          <a:bodyPr wrap="square" lIns="0" tIns="0" rIns="0" bIns="0" rtlCol="0" anchor="ctr"/>
-          <a:lstStyle/>
-          <a:p>
-            <a:pPr indent="0" marL="0">
-              <a:buNone/>
-            </a:pPr>
-            <a:r>
-              <a:rPr lang="en-US" sz="1400" b="1" dirty="0">
-                <a:solidFill>
-                  <a:srgbClr val="1E8E6A"/>
-                </a:solidFill>
-                <a:latin typeface="Calibri" pitchFamily="34" charset="0"/>
-                <a:ea typeface="Calibri" pitchFamily="34" charset="-122"/>
-                <a:cs typeface="Calibri" pitchFamily="34" charset="-120"/>
-              </a:rPr>
-              <a:t>✓  </a:t>
-            </a:r>
-            <a:pPr indent="0" marL="0">
-              <a:buNone/>
-            </a:pPr>
-            <a:r>
-              <a:rPr lang="en-US" sz="1400" dirty="0">
-                <a:solidFill>
-                  <a:srgbClr val="261E48"/>
-                </a:solidFill>
-                <a:latin typeface="Calibri" pitchFamily="34" charset="0"/>
-                <a:ea typeface="Calibri" pitchFamily="34" charset="-122"/>
-                <a:cs typeface="Calibri" pitchFamily="34" charset="-120"/>
-              </a:rPr>
-              <a:t>Intégrité des données confirmée</a:t>
-            </a:r>
-            <a:endParaRPr lang="en-US" sz="1400" dirty="0"/>
-          </a:p>
-        </p:txBody>
-      </p:sp>
-      <p:sp>
-        <p:nvSpPr>
-          <p:cNvPr id="21" name="Text 19"/>
-          <p:cNvSpPr txBox="1"/>
-          <p:nvPr/>
-        </p:nvSpPr>
-        <p:spPr>
-          <a:xfrm>
-            <a:off x="731520" y="6126480"/>
-            <a:ext cx="10972800" cy="411480"/>
-          </a:xfrm>
-          <a:prstGeom prst="rect">
-            <a:avLst/>
-          </a:prstGeom>
-          <a:noFill/>
-          <a:ln/>
-        </p:spPr>
-        <p:txBody>
-          <a:bodyPr wrap="square" lIns="0" tIns="0" rIns="0" bIns="0" rtlCol="0" anchor="ctr"/>
-          <a:lstStyle/>
-          <a:p>
-            <a:pPr indent="0" marL="0">
-              <a:buNone/>
-            </a:pPr>
-            <a:r>
-              <a:rPr lang="en-US" sz="1400" b="1" dirty="0">
-                <a:solidFill>
-                  <a:srgbClr val="1E8E6A"/>
-                </a:solidFill>
-                <a:latin typeface="Calibri" pitchFamily="34" charset="0"/>
-                <a:ea typeface="Calibri" pitchFamily="34" charset="-122"/>
-                <a:cs typeface="Calibri" pitchFamily="34" charset="-120"/>
-              </a:rPr>
-              <a:t>✓  </a:t>
-            </a:r>
-            <a:pPr indent="0" marL="0">
-              <a:buNone/>
-            </a:pPr>
-            <a:r>
-              <a:rPr lang="en-US" sz="1400" dirty="0">
-                <a:solidFill>
-                  <a:srgbClr val="261E48"/>
-                </a:solidFill>
-                <a:latin typeface="Calibri" pitchFamily="34" charset="0"/>
-                <a:ea typeface="Calibri" pitchFamily="34" charset="-122"/>
-                <a:cs typeface="Calibri" pitchFamily="34" charset="-120"/>
-              </a:rPr>
-              <a:t>Transaction finale réussie après incidents</a:t>
-            </a:r>
-            <a:endParaRPr lang="en-US" sz="1400" dirty="0"/>
+              <a:t>Recette failover : 13 / 13 ✓</a:t>
+            </a:r>
+            <a:endParaRPr lang="en-US" sz="1500" dirty="0"/>
           </a:p>
         </p:txBody>
       </p:sp>

--- a/livrables/Presentation-RESILIENCE-ALPHA.pptx
+++ b/livrables/Presentation-RESILIENCE-ALPHA.pptx
@@ -19,9 +19,10 @@
     <p:sldId id="267" r:id="rId13"/>
     <p:sldId id="268" r:id="rId14"/>
     <p:sldId id="269" r:id="rId15"/>
+    <p:sldId id="270" r:id="rId16"/>
   </p:sldIdLst>
   <p:notesMasterIdLst>
-    <p:notesMasterId r:id="rId16"/>
+    <p:notesMasterId r:id="rId17"/>
   </p:notesMasterIdLst>
   <p:sldSz cx="12192000" cy="6858000"/>
   <p:notesSz cx="6858000" cy="12192000"/>
@@ -1231,6 +1232,94 @@
             <a:fld id="{F7021451-1387-4CA6-816F-3879F97B5CBC}" type="slidenum">
               <a:rPr lang="en-US"/>
               <a:t>14</a:t>
+            </a:fld>
+            <a:endParaRPr lang="en-US"/>
+          </a:p>
+        </p:txBody>
+      </p:sp>
+    </p:spTree>
+    <p:extLst>
+      <p:ext uri="{BB962C8B-B14F-4D97-AF65-F5344CB8AC3E}">
+        <p14:creationId xmlns:p14="http://schemas.microsoft.com/office/powerpoint/2010/main" val="1024086991"/>
+      </p:ext>
+    </p:extLst>
+  </p:cSld>
+  <p:clrMapOvr>
+    <a:masterClrMapping/>
+  </p:clrMapOvr>
+</p:notes>
+</file>
+
+<file path=ppt/notesSlides/notesSlide15.xml><?xml version="1.0" encoding="utf-8"?>
+<p:notes xmlns:a="http://schemas.openxmlformats.org/drawingml/2006/main" xmlns:r="http://schemas.openxmlformats.org/officeDocument/2006/relationships" xmlns:p="http://schemas.openxmlformats.org/presentationml/2006/main">
+  <p:cSld>
+    <p:spTree>
+      <p:nvGrpSpPr>
+        <p:cNvPr id="1" name=""/>
+        <p:cNvGrpSpPr/>
+        <p:nvPr/>
+      </p:nvGrpSpPr>
+      <p:grpSpPr>
+        <a:xfrm>
+          <a:off x="0" y="0"/>
+          <a:ext cx="0" cy="0"/>
+          <a:chOff x="0" y="0"/>
+          <a:chExt cx="0" cy="0"/>
+        </a:xfrm>
+      </p:grpSpPr>
+      <p:sp>
+        <p:nvSpPr>
+          <p:cNvPr id="2" name="Slide Image Placeholder 1"/>
+          <p:cNvSpPr>
+            <a:spLocks noGrp="1" noRot="1" noChangeAspect="1"/>
+          </p:cNvSpPr>
+          <p:nvPr>
+            <p:ph type="sldImg"/>
+          </p:nvPr>
+        </p:nvSpPr>
+        <p:spPr/>
+      </p:sp>
+      <p:sp>
+        <p:nvSpPr>
+          <p:cNvPr id="3" name="Notes Placeholder 2"/>
+          <p:cNvSpPr>
+            <a:spLocks noGrp="1"/>
+          </p:cNvSpPr>
+          <p:nvPr>
+            <p:ph type="body" idx="1"/>
+          </p:nvPr>
+        </p:nvSpPr>
+        <p:spPr/>
+        <p:txBody>
+          <a:bodyPr/>
+          <a:lstStyle/>
+          <a:p>
+            <a:r>
+              <a:rPr lang="en-US" dirty="0"/>
+              <a:t/>
+            </a:r>
+            <a:endParaRPr lang="en-US" dirty="0"/>
+          </a:p>
+        </p:txBody>
+      </p:sp>
+      <p:sp>
+        <p:nvSpPr>
+          <p:cNvPr id="4" name="Slide Number Placeholder 3"/>
+          <p:cNvSpPr>
+            <a:spLocks noGrp="1"/>
+          </p:cNvSpPr>
+          <p:nvPr>
+            <p:ph type="sldNum" sz="quarter" idx="10"/>
+          </p:nvPr>
+        </p:nvSpPr>
+        <p:spPr/>
+        <p:txBody>
+          <a:bodyPr/>
+          <a:lstStyle/>
+          <a:p>
+            <a:fld id="{F7021451-1387-4CA6-816F-3879F97B5CBC}" type="slidenum">
+              <a:rPr lang="en-US"/>
+              <a:t>15</a:t>
             </a:fld>
             <a:endParaRPr lang="en-US"/>
           </a:p>
@@ -5577,6 +5666,924 @@
     <p:bg>
       <p:bgPr>
         <a:solidFill>
+          <a:srgbClr val="FFFFFF"/>
+        </a:solidFill>
+      </p:bgPr>
+    </p:bg>
+    <p:spTree>
+      <p:nvGrpSpPr>
+        <p:cNvPr id="1" name=""/>
+        <p:cNvGrpSpPr/>
+        <p:nvPr/>
+      </p:nvGrpSpPr>
+      <p:grpSpPr>
+        <a:xfrm>
+          <a:off x="0" y="0"/>
+          <a:ext cx="0" cy="0"/>
+          <a:chOff x="0" y="0"/>
+          <a:chExt cx="0" cy="0"/>
+        </a:xfrm>
+      </p:grpSpPr>
+      <p:sp>
+        <p:nvSpPr>
+          <p:cNvPr id="2" name="Text 0"/>
+          <p:cNvSpPr txBox="1"/>
+          <p:nvPr/>
+        </p:nvSpPr>
+        <p:spPr>
+          <a:xfrm>
+            <a:off x="548640" y="411480"/>
+            <a:ext cx="10972800" cy="274320"/>
+          </a:xfrm>
+          <a:prstGeom prst="rect">
+            <a:avLst/>
+          </a:prstGeom>
+          <a:noFill/>
+          <a:ln/>
+        </p:spPr>
+        <p:txBody>
+          <a:bodyPr wrap="square" lIns="0" tIns="0" rIns="0" bIns="0" rtlCol="0" anchor="ctr"/>
+          <a:lstStyle/>
+          <a:p>
+            <a:pPr indent="0" marL="0">
+              <a:buNone/>
+            </a:pPr>
+            <a:r>
+              <a:rPr lang="en-US" sz="1200" b="1" spc="200" kern="0" dirty="0">
+                <a:solidFill>
+                  <a:srgbClr val="4B3FA6"/>
+                </a:solidFill>
+                <a:latin typeface="Calibri" pitchFamily="34" charset="0"/>
+                <a:ea typeface="Calibri" pitchFamily="34" charset="-122"/>
+                <a:cs typeface="Calibri" pitchFamily="34" charset="-120"/>
+              </a:rPr>
+              <a:t>DÉMONSTRATION INTERACTIVE</a:t>
+            </a:r>
+            <a:endParaRPr lang="en-US" sz="1200" dirty="0"/>
+          </a:p>
+        </p:txBody>
+      </p:sp>
+      <p:sp>
+        <p:nvSpPr>
+          <p:cNvPr id="3" name="Text 1"/>
+          <p:cNvSpPr txBox="1"/>
+          <p:nvPr/>
+        </p:nvSpPr>
+        <p:spPr>
+          <a:xfrm>
+            <a:off x="548640" y="658368"/>
+            <a:ext cx="11064240" cy="640080"/>
+          </a:xfrm>
+          <a:prstGeom prst="rect">
+            <a:avLst/>
+          </a:prstGeom>
+          <a:noFill/>
+          <a:ln/>
+        </p:spPr>
+        <p:txBody>
+          <a:bodyPr wrap="square" lIns="0" tIns="0" rIns="0" bIns="0" rtlCol="0" anchor="ctr"/>
+          <a:lstStyle/>
+          <a:p>
+            <a:pPr indent="0" marL="0">
+              <a:buNone/>
+            </a:pPr>
+            <a:r>
+              <a:rPr lang="en-US" sz="3000" b="1" dirty="0">
+                <a:solidFill>
+                  <a:srgbClr val="261E48"/>
+                </a:solidFill>
+                <a:latin typeface="Calibri" pitchFamily="34" charset="0"/>
+                <a:ea typeface="Calibri" pitchFamily="34" charset="-122"/>
+                <a:cs typeface="Calibri" pitchFamily="34" charset="-120"/>
+              </a:rPr>
+              <a:t>Jeu de hacker : voler… ou se faire bloquer</a:t>
+            </a:r>
+            <a:endParaRPr lang="en-US" sz="3000" dirty="0"/>
+          </a:p>
+        </p:txBody>
+      </p:sp>
+      <p:sp>
+        <p:nvSpPr>
+          <p:cNvPr id="4" name="Text 2"/>
+          <p:cNvSpPr txBox="1"/>
+          <p:nvPr/>
+        </p:nvSpPr>
+        <p:spPr>
+          <a:xfrm>
+            <a:off x="548640" y="1371600"/>
+            <a:ext cx="11064240" cy="365760"/>
+          </a:xfrm>
+          <a:prstGeom prst="rect">
+            <a:avLst/>
+          </a:prstGeom>
+          <a:noFill/>
+          <a:ln/>
+        </p:spPr>
+        <p:txBody>
+          <a:bodyPr wrap="square" lIns="0" tIns="0" rIns="0" bIns="0" rtlCol="0" anchor="ctr"/>
+          <a:lstStyle/>
+          <a:p>
+            <a:pPr indent="0" marL="0">
+              <a:buNone/>
+            </a:pPr>
+            <a:r>
+              <a:rPr lang="en-US" sz="1350" dirty="0">
+                <a:solidFill>
+                  <a:srgbClr val="6A6594"/>
+                </a:solidFill>
+                <a:latin typeface="Calibri" pitchFamily="34" charset="0"/>
+                <a:ea typeface="Calibri" pitchFamily="34" charset="-122"/>
+                <a:cs typeface="Calibri" pitchFamily="34" charset="-120"/>
+              </a:rPr>
+              <a:t>Zone « Reconnaissance / Opération » ajoutée à la console attaquant : un jeu d'équilibre.</a:t>
+            </a:r>
+            <a:endParaRPr lang="en-US" sz="1350" dirty="0"/>
+          </a:p>
+        </p:txBody>
+      </p:sp>
+      <p:sp>
+        <p:nvSpPr>
+          <p:cNvPr id="5" name="Shape 3"/>
+          <p:cNvSpPr/>
+          <p:nvPr/>
+        </p:nvSpPr>
+        <p:spPr>
+          <a:xfrm>
+            <a:off x="548640" y="1828800"/>
+            <a:ext cx="11064240" cy="749808"/>
+          </a:xfrm>
+          <a:prstGeom prst="roundRect">
+            <a:avLst>
+              <a:gd name="adj" fmla="val 9756"/>
+            </a:avLst>
+          </a:prstGeom>
+          <a:solidFill>
+            <a:srgbClr val="EEF0F8"/>
+          </a:solidFill>
+          <a:ln/>
+          <a:effectLst>
+            <a:outerShdw sx="100000" sy="100000" kx="0" ky="0" algn="bl" rotWithShape="0" blurRad="76200" dist="25400" dir="5400000">
+              <a:srgbClr val="888888">
+                <a:alpha val="25000"/>
+              </a:srgbClr>
+            </a:outerShdw>
+          </a:effectLst>
+        </p:spPr>
+      </p:sp>
+      <p:sp>
+        <p:nvSpPr>
+          <p:cNvPr id="6" name="Text 4"/>
+          <p:cNvSpPr txBox="1"/>
+          <p:nvPr/>
+        </p:nvSpPr>
+        <p:spPr>
+          <a:xfrm>
+            <a:off x="731520" y="1938528"/>
+            <a:ext cx="731520" cy="548640"/>
+          </a:xfrm>
+          <a:prstGeom prst="rect">
+            <a:avLst/>
+          </a:prstGeom>
+          <a:noFill/>
+          <a:ln/>
+        </p:spPr>
+        <p:txBody>
+          <a:bodyPr wrap="square" lIns="0" tIns="0" rIns="0" bIns="0" rtlCol="0" anchor="ctr"/>
+          <a:lstStyle/>
+          <a:p>
+            <a:pPr algn="ctr" indent="0" marL="0">
+              <a:buNone/>
+            </a:pPr>
+            <a:r>
+              <a:rPr lang="en-US" sz="2400" dirty="0">
+                <a:solidFill>
+                  <a:srgbClr val="000000"/>
+                </a:solidFill>
+                <a:latin typeface="Calibri" pitchFamily="34" charset="0"/>
+                <a:ea typeface="Calibri" pitchFamily="34" charset="-122"/>
+                <a:cs typeface="Calibri" pitchFamily="34" charset="-120"/>
+              </a:rPr>
+              <a:t>🔍</a:t>
+            </a:r>
+            <a:endParaRPr lang="en-US" sz="2400" dirty="0"/>
+          </a:p>
+        </p:txBody>
+      </p:sp>
+      <p:sp>
+        <p:nvSpPr>
+          <p:cNvPr id="7" name="Text 5"/>
+          <p:cNvSpPr txBox="1"/>
+          <p:nvPr/>
+        </p:nvSpPr>
+        <p:spPr>
+          <a:xfrm>
+            <a:off x="1554480" y="1929384"/>
+            <a:ext cx="9784080" cy="320040"/>
+          </a:xfrm>
+          <a:prstGeom prst="rect">
+            <a:avLst/>
+          </a:prstGeom>
+          <a:noFill/>
+          <a:ln/>
+        </p:spPr>
+        <p:txBody>
+          <a:bodyPr wrap="square" lIns="0" tIns="0" rIns="0" bIns="0" rtlCol="0" anchor="ctr"/>
+          <a:lstStyle/>
+          <a:p>
+            <a:pPr indent="0" marL="0">
+              <a:buNone/>
+            </a:pPr>
+            <a:r>
+              <a:rPr lang="en-US" sz="1450" b="1" dirty="0">
+                <a:solidFill>
+                  <a:srgbClr val="261E48"/>
+                </a:solidFill>
+                <a:latin typeface="Calibri" pitchFamily="34" charset="0"/>
+                <a:ea typeface="Calibri" pitchFamily="34" charset="-122"/>
+                <a:cs typeface="Calibri" pitchFamily="34" charset="-120"/>
+              </a:rPr>
+              <a:t>Reconnaissance discrète</a:t>
+            </a:r>
+            <a:endParaRPr lang="en-US" sz="1450" dirty="0"/>
+          </a:p>
+        </p:txBody>
+      </p:sp>
+      <p:sp>
+        <p:nvSpPr>
+          <p:cNvPr id="8" name="Text 6"/>
+          <p:cNvSpPr txBox="1"/>
+          <p:nvPr/>
+        </p:nvSpPr>
+        <p:spPr>
+          <a:xfrm>
+            <a:off x="1554480" y="2249424"/>
+            <a:ext cx="9784080" cy="274320"/>
+          </a:xfrm>
+          <a:prstGeom prst="rect">
+            <a:avLst/>
+          </a:prstGeom>
+          <a:noFill/>
+          <a:ln/>
+        </p:spPr>
+        <p:txBody>
+          <a:bodyPr wrap="square" lIns="0" tIns="0" rIns="0" bIns="0" rtlCol="0" anchor="ctr"/>
+          <a:lstStyle/>
+          <a:p>
+            <a:pPr indent="0" marL="0">
+              <a:buNone/>
+            </a:pPr>
+            <a:r>
+              <a:rPr lang="en-US" sz="1150" dirty="0">
+                <a:solidFill>
+                  <a:srgbClr val="6A6594"/>
+                </a:solidFill>
+                <a:latin typeface="Calibri" pitchFamily="34" charset="0"/>
+                <a:ea typeface="Calibri" pitchFamily="34" charset="-122"/>
+                <a:cs typeface="Calibri" pitchFamily="34" charset="-120"/>
+              </a:rPr>
+              <a:t>fuite progressive : comptes, soldes approximatifs, livret d'épargne</a:t>
+            </a:r>
+            <a:endParaRPr lang="en-US" sz="1150" dirty="0"/>
+          </a:p>
+        </p:txBody>
+      </p:sp>
+      <p:sp>
+        <p:nvSpPr>
+          <p:cNvPr id="9" name="Shape 7"/>
+          <p:cNvSpPr/>
+          <p:nvPr/>
+        </p:nvSpPr>
+        <p:spPr>
+          <a:xfrm>
+            <a:off x="548640" y="2715768"/>
+            <a:ext cx="11064240" cy="749808"/>
+          </a:xfrm>
+          <a:prstGeom prst="roundRect">
+            <a:avLst>
+              <a:gd name="adj" fmla="val 9756"/>
+            </a:avLst>
+          </a:prstGeom>
+          <a:solidFill>
+            <a:srgbClr val="EEF0F8"/>
+          </a:solidFill>
+          <a:ln/>
+          <a:effectLst>
+            <a:outerShdw sx="100000" sy="100000" kx="0" ky="0" algn="bl" rotWithShape="0" blurRad="76200" dist="25400" dir="5400000">
+              <a:srgbClr val="888888">
+                <a:alpha val="25000"/>
+              </a:srgbClr>
+            </a:outerShdw>
+          </a:effectLst>
+        </p:spPr>
+      </p:sp>
+      <p:sp>
+        <p:nvSpPr>
+          <p:cNvPr id="10" name="Text 8"/>
+          <p:cNvSpPr txBox="1"/>
+          <p:nvPr/>
+        </p:nvSpPr>
+        <p:spPr>
+          <a:xfrm>
+            <a:off x="731520" y="2825496"/>
+            <a:ext cx="731520" cy="548640"/>
+          </a:xfrm>
+          <a:prstGeom prst="rect">
+            <a:avLst/>
+          </a:prstGeom>
+          <a:noFill/>
+          <a:ln/>
+        </p:spPr>
+        <p:txBody>
+          <a:bodyPr wrap="square" lIns="0" tIns="0" rIns="0" bIns="0" rtlCol="0" anchor="ctr"/>
+          <a:lstStyle/>
+          <a:p>
+            <a:pPr algn="ctr" indent="0" marL="0">
+              <a:buNone/>
+            </a:pPr>
+            <a:r>
+              <a:rPr lang="en-US" sz="2400" dirty="0">
+                <a:solidFill>
+                  <a:srgbClr val="000000"/>
+                </a:solidFill>
+                <a:latin typeface="Calibri" pitchFamily="34" charset="0"/>
+                <a:ea typeface="Calibri" pitchFamily="34" charset="-122"/>
+                <a:cs typeface="Calibri" pitchFamily="34" charset="-120"/>
+              </a:rPr>
+              <a:t>💡</a:t>
+            </a:r>
+            <a:endParaRPr lang="en-US" sz="2400" dirty="0"/>
+          </a:p>
+        </p:txBody>
+      </p:sp>
+      <p:sp>
+        <p:nvSpPr>
+          <p:cNvPr id="11" name="Text 9"/>
+          <p:cNvSpPr txBox="1"/>
+          <p:nvPr/>
+        </p:nvSpPr>
+        <p:spPr>
+          <a:xfrm>
+            <a:off x="1554480" y="2816352"/>
+            <a:ext cx="9784080" cy="320040"/>
+          </a:xfrm>
+          <a:prstGeom prst="rect">
+            <a:avLst/>
+          </a:prstGeom>
+          <a:noFill/>
+          <a:ln/>
+        </p:spPr>
+        <p:txBody>
+          <a:bodyPr wrap="square" lIns="0" tIns="0" rIns="0" bIns="0" rtlCol="0" anchor="ctr"/>
+          <a:lstStyle/>
+          <a:p>
+            <a:pPr indent="0" marL="0">
+              <a:buNone/>
+            </a:pPr>
+            <a:r>
+              <a:rPr lang="en-US" sz="1450" b="1" dirty="0">
+                <a:solidFill>
+                  <a:srgbClr val="261E48"/>
+                </a:solidFill>
+                <a:latin typeface="Calibri" pitchFamily="34" charset="0"/>
+                <a:ea typeface="Calibri" pitchFamily="34" charset="-122"/>
+                <a:cs typeface="Calibri" pitchFamily="34" charset="-120"/>
+              </a:rPr>
+              <a:t>Astuces débloquées</a:t>
+            </a:r>
+            <a:endParaRPr lang="en-US" sz="1450" dirty="0"/>
+          </a:p>
+        </p:txBody>
+      </p:sp>
+      <p:sp>
+        <p:nvSpPr>
+          <p:cNvPr id="12" name="Text 10"/>
+          <p:cNvSpPr txBox="1"/>
+          <p:nvPr/>
+        </p:nvSpPr>
+        <p:spPr>
+          <a:xfrm>
+            <a:off x="1554480" y="3136392"/>
+            <a:ext cx="9784080" cy="274320"/>
+          </a:xfrm>
+          <a:prstGeom prst="rect">
+            <a:avLst/>
+          </a:prstGeom>
+          <a:noFill/>
+          <a:ln/>
+        </p:spPr>
+        <p:txBody>
+          <a:bodyPr wrap="square" lIns="0" tIns="0" rIns="0" bIns="0" rtlCol="0" anchor="ctr"/>
+          <a:lstStyle/>
+          <a:p>
+            <a:pPr indent="0" marL="0">
+              <a:buNone/>
+            </a:pPr>
+            <a:r>
+              <a:rPr lang="en-US" sz="1150" dirty="0">
+                <a:solidFill>
+                  <a:srgbClr val="6A6594"/>
+                </a:solidFill>
+                <a:latin typeface="Calibri" pitchFamily="34" charset="0"/>
+                <a:ea typeface="Calibri" pitchFamily="34" charset="-122"/>
+                <a:cs typeface="Calibri" pitchFamily="34" charset="-120"/>
+              </a:rPr>
+              <a:t>au minuteur (compte à rebours) ET à chaque attaque réussie</a:t>
+            </a:r>
+            <a:endParaRPr lang="en-US" sz="1150" dirty="0"/>
+          </a:p>
+        </p:txBody>
+      </p:sp>
+      <p:sp>
+        <p:nvSpPr>
+          <p:cNvPr id="13" name="Shape 11"/>
+          <p:cNvSpPr/>
+          <p:nvPr/>
+        </p:nvSpPr>
+        <p:spPr>
+          <a:xfrm>
+            <a:off x="548640" y="3602736"/>
+            <a:ext cx="11064240" cy="749808"/>
+          </a:xfrm>
+          <a:prstGeom prst="roundRect">
+            <a:avLst>
+              <a:gd name="adj" fmla="val 9756"/>
+            </a:avLst>
+          </a:prstGeom>
+          <a:solidFill>
+            <a:srgbClr val="EEF0F8"/>
+          </a:solidFill>
+          <a:ln/>
+          <a:effectLst>
+            <a:outerShdw sx="100000" sy="100000" kx="0" ky="0" algn="bl" rotWithShape="0" blurRad="76200" dist="25400" dir="5400000">
+              <a:srgbClr val="888888">
+                <a:alpha val="25000"/>
+              </a:srgbClr>
+            </a:outerShdw>
+          </a:effectLst>
+        </p:spPr>
+      </p:sp>
+      <p:sp>
+        <p:nvSpPr>
+          <p:cNvPr id="14" name="Text 12"/>
+          <p:cNvSpPr txBox="1"/>
+          <p:nvPr/>
+        </p:nvSpPr>
+        <p:spPr>
+          <a:xfrm>
+            <a:off x="731520" y="3712464"/>
+            <a:ext cx="731520" cy="548640"/>
+          </a:xfrm>
+          <a:prstGeom prst="rect">
+            <a:avLst/>
+          </a:prstGeom>
+          <a:noFill/>
+          <a:ln/>
+        </p:spPr>
+        <p:txBody>
+          <a:bodyPr wrap="square" lIns="0" tIns="0" rIns="0" bIns="0" rtlCol="0" anchor="ctr"/>
+          <a:lstStyle/>
+          <a:p>
+            <a:pPr algn="ctr" indent="0" marL="0">
+              <a:buNone/>
+            </a:pPr>
+            <a:r>
+              <a:rPr lang="en-US" sz="2400" dirty="0">
+                <a:solidFill>
+                  <a:srgbClr val="000000"/>
+                </a:solidFill>
+                <a:latin typeface="Calibri" pitchFamily="34" charset="0"/>
+                <a:ea typeface="Calibri" pitchFamily="34" charset="-122"/>
+                <a:cs typeface="Calibri" pitchFamily="34" charset="-120"/>
+              </a:rPr>
+              <a:t>💰</a:t>
+            </a:r>
+            <a:endParaRPr lang="en-US" sz="2400" dirty="0"/>
+          </a:p>
+        </p:txBody>
+      </p:sp>
+      <p:sp>
+        <p:nvSpPr>
+          <p:cNvPr id="15" name="Text 13"/>
+          <p:cNvSpPr txBox="1"/>
+          <p:nvPr/>
+        </p:nvSpPr>
+        <p:spPr>
+          <a:xfrm>
+            <a:off x="1554480" y="3703320"/>
+            <a:ext cx="9784080" cy="320040"/>
+          </a:xfrm>
+          <a:prstGeom prst="rect">
+            <a:avLst/>
+          </a:prstGeom>
+          <a:noFill/>
+          <a:ln/>
+        </p:spPr>
+        <p:txBody>
+          <a:bodyPr wrap="square" lIns="0" tIns="0" rIns="0" bIns="0" rtlCol="0" anchor="ctr"/>
+          <a:lstStyle/>
+          <a:p>
+            <a:pPr indent="0" marL="0">
+              <a:buNone/>
+            </a:pPr>
+            <a:r>
+              <a:rPr lang="en-US" sz="1450" b="1" dirty="0">
+                <a:solidFill>
+                  <a:srgbClr val="261E48"/>
+                </a:solidFill>
+                <a:latin typeface="Calibri" pitchFamily="34" charset="0"/>
+                <a:ea typeface="Calibri" pitchFamily="34" charset="-122"/>
+                <a:cs typeface="Calibri" pitchFamily="34" charset="-120"/>
+              </a:rPr>
+              <a:t>Vol plafonné</a:t>
+            </a:r>
+            <a:endParaRPr lang="en-US" sz="1450" dirty="0"/>
+          </a:p>
+        </p:txBody>
+      </p:sp>
+      <p:sp>
+        <p:nvSpPr>
+          <p:cNvPr id="16" name="Text 14"/>
+          <p:cNvSpPr txBox="1"/>
+          <p:nvPr/>
+        </p:nvSpPr>
+        <p:spPr>
+          <a:xfrm>
+            <a:off x="1554480" y="4023360"/>
+            <a:ext cx="9784080" cy="274320"/>
+          </a:xfrm>
+          <a:prstGeom prst="rect">
+            <a:avLst/>
+          </a:prstGeom>
+          <a:noFill/>
+          <a:ln/>
+        </p:spPr>
+        <p:txBody>
+          <a:bodyPr wrap="square" lIns="0" tIns="0" rIns="0" bIns="0" rtlCol="0" anchor="ctr"/>
+          <a:lstStyle/>
+          <a:p>
+            <a:pPr indent="0" marL="0">
+              <a:buNone/>
+            </a:pPr>
+            <a:r>
+              <a:rPr lang="en-US" sz="1150" dirty="0">
+                <a:solidFill>
+                  <a:srgbClr val="6A6594"/>
+                </a:solidFill>
+                <a:latin typeface="Calibri" pitchFamily="34" charset="0"/>
+                <a:ea typeface="Calibri" pitchFamily="34" charset="-122"/>
+                <a:cs typeface="Calibri" pitchFamily="34" charset="-120"/>
+              </a:rPr>
+              <a:t>retrait atomique, jamais négatif, plafonné par coup et en cumulé</a:t>
+            </a:r>
+            <a:endParaRPr lang="en-US" sz="1150" dirty="0"/>
+          </a:p>
+        </p:txBody>
+      </p:sp>
+      <p:sp>
+        <p:nvSpPr>
+          <p:cNvPr id="17" name="Shape 15"/>
+          <p:cNvSpPr/>
+          <p:nvPr/>
+        </p:nvSpPr>
+        <p:spPr>
+          <a:xfrm>
+            <a:off x="548640" y="4489704"/>
+            <a:ext cx="11064240" cy="749808"/>
+          </a:xfrm>
+          <a:prstGeom prst="roundRect">
+            <a:avLst>
+              <a:gd name="adj" fmla="val 9756"/>
+            </a:avLst>
+          </a:prstGeom>
+          <a:solidFill>
+            <a:srgbClr val="EEF0F8"/>
+          </a:solidFill>
+          <a:ln/>
+          <a:effectLst>
+            <a:outerShdw sx="100000" sy="100000" kx="0" ky="0" algn="bl" rotWithShape="0" blurRad="76200" dist="25400" dir="5400000">
+              <a:srgbClr val="888888">
+                <a:alpha val="25000"/>
+              </a:srgbClr>
+            </a:outerShdw>
+          </a:effectLst>
+        </p:spPr>
+      </p:sp>
+      <p:sp>
+        <p:nvSpPr>
+          <p:cNvPr id="18" name="Text 16"/>
+          <p:cNvSpPr txBox="1"/>
+          <p:nvPr/>
+        </p:nvSpPr>
+        <p:spPr>
+          <a:xfrm>
+            <a:off x="731520" y="4599432"/>
+            <a:ext cx="731520" cy="548640"/>
+          </a:xfrm>
+          <a:prstGeom prst="rect">
+            <a:avLst/>
+          </a:prstGeom>
+          <a:noFill/>
+          <a:ln/>
+        </p:spPr>
+        <p:txBody>
+          <a:bodyPr wrap="square" lIns="0" tIns="0" rIns="0" bIns="0" rtlCol="0" anchor="ctr"/>
+          <a:lstStyle/>
+          <a:p>
+            <a:pPr algn="ctr" indent="0" marL="0">
+              <a:buNone/>
+            </a:pPr>
+            <a:r>
+              <a:rPr lang="en-US" sz="2400" dirty="0">
+                <a:solidFill>
+                  <a:srgbClr val="000000"/>
+                </a:solidFill>
+                <a:latin typeface="Calibri" pitchFamily="34" charset="0"/>
+                <a:ea typeface="Calibri" pitchFamily="34" charset="-122"/>
+                <a:cs typeface="Calibri" pitchFamily="34" charset="-120"/>
+              </a:rPr>
+              <a:t>🧠</a:t>
+            </a:r>
+            <a:endParaRPr lang="en-US" sz="2400" dirty="0"/>
+          </a:p>
+        </p:txBody>
+      </p:sp>
+      <p:sp>
+        <p:nvSpPr>
+          <p:cNvPr id="19" name="Text 17"/>
+          <p:cNvSpPr txBox="1"/>
+          <p:nvPr/>
+        </p:nvSpPr>
+        <p:spPr>
+          <a:xfrm>
+            <a:off x="1554480" y="4590288"/>
+            <a:ext cx="9784080" cy="320040"/>
+          </a:xfrm>
+          <a:prstGeom prst="rect">
+            <a:avLst/>
+          </a:prstGeom>
+          <a:noFill/>
+          <a:ln/>
+        </p:spPr>
+        <p:txBody>
+          <a:bodyPr wrap="square" lIns="0" tIns="0" rIns="0" bIns="0" rtlCol="0" anchor="ctr"/>
+          <a:lstStyle/>
+          <a:p>
+            <a:pPr indent="0" marL="0">
+              <a:buNone/>
+            </a:pPr>
+            <a:r>
+              <a:rPr lang="en-US" sz="1450" b="1" dirty="0">
+                <a:solidFill>
+                  <a:srgbClr val="261E48"/>
+                </a:solidFill>
+                <a:latin typeface="Calibri" pitchFamily="34" charset="0"/>
+                <a:ea typeface="Calibri" pitchFamily="34" charset="-122"/>
+                <a:cs typeface="Calibri" pitchFamily="34" charset="-120"/>
+              </a:rPr>
+              <a:t>Détection IA + réponse</a:t>
+            </a:r>
+            <a:endParaRPr lang="en-US" sz="1450" dirty="0"/>
+          </a:p>
+        </p:txBody>
+      </p:sp>
+      <p:sp>
+        <p:nvSpPr>
+          <p:cNvPr id="20" name="Text 18"/>
+          <p:cNvSpPr txBox="1"/>
+          <p:nvPr/>
+        </p:nvSpPr>
+        <p:spPr>
+          <a:xfrm>
+            <a:off x="1554480" y="4910328"/>
+            <a:ext cx="9784080" cy="274320"/>
+          </a:xfrm>
+          <a:prstGeom prst="rect">
+            <a:avLst/>
+          </a:prstGeom>
+          <a:noFill/>
+          <a:ln/>
+        </p:spPr>
+        <p:txBody>
+          <a:bodyPr wrap="square" lIns="0" tIns="0" rIns="0" bIns="0" rtlCol="0" anchor="ctr"/>
+          <a:lstStyle/>
+          <a:p>
+            <a:pPr indent="0" marL="0">
+              <a:buNone/>
+            </a:pPr>
+            <a:r>
+              <a:rPr lang="en-US" sz="1150" dirty="0">
+                <a:solidFill>
+                  <a:srgbClr val="6A6594"/>
+                </a:solidFill>
+                <a:latin typeface="Calibri" pitchFamily="34" charset="0"/>
+                <a:ea typeface="Calibri" pitchFamily="34" charset="-122"/>
+                <a:cs typeface="Calibri" pitchFamily="34" charset="-120"/>
+              </a:rPr>
+              <a:t>butin anormal ou attaque trop forte → blocage (cooldown)</a:t>
+            </a:r>
+            <a:endParaRPr lang="en-US" sz="1150" dirty="0"/>
+          </a:p>
+        </p:txBody>
+      </p:sp>
+      <p:sp>
+        <p:nvSpPr>
+          <p:cNvPr id="21" name="Shape 19"/>
+          <p:cNvSpPr/>
+          <p:nvPr/>
+        </p:nvSpPr>
+        <p:spPr>
+          <a:xfrm>
+            <a:off x="548640" y="5376672"/>
+            <a:ext cx="11064240" cy="749808"/>
+          </a:xfrm>
+          <a:prstGeom prst="roundRect">
+            <a:avLst>
+              <a:gd name="adj" fmla="val 9756"/>
+            </a:avLst>
+          </a:prstGeom>
+          <a:solidFill>
+            <a:srgbClr val="EEF0F8"/>
+          </a:solidFill>
+          <a:ln/>
+          <a:effectLst>
+            <a:outerShdw sx="100000" sy="100000" kx="0" ky="0" algn="bl" rotWithShape="0" blurRad="76200" dist="25400" dir="5400000">
+              <a:srgbClr val="888888">
+                <a:alpha val="25000"/>
+              </a:srgbClr>
+            </a:outerShdw>
+          </a:effectLst>
+        </p:spPr>
+      </p:sp>
+      <p:sp>
+        <p:nvSpPr>
+          <p:cNvPr id="22" name="Text 20"/>
+          <p:cNvSpPr txBox="1"/>
+          <p:nvPr/>
+        </p:nvSpPr>
+        <p:spPr>
+          <a:xfrm>
+            <a:off x="731520" y="5486400"/>
+            <a:ext cx="731520" cy="548640"/>
+          </a:xfrm>
+          <a:prstGeom prst="rect">
+            <a:avLst/>
+          </a:prstGeom>
+          <a:noFill/>
+          <a:ln/>
+        </p:spPr>
+        <p:txBody>
+          <a:bodyPr wrap="square" lIns="0" tIns="0" rIns="0" bIns="0" rtlCol="0" anchor="ctr"/>
+          <a:lstStyle/>
+          <a:p>
+            <a:pPr algn="ctr" indent="0" marL="0">
+              <a:buNone/>
+            </a:pPr>
+            <a:r>
+              <a:rPr lang="en-US" sz="2400" dirty="0">
+                <a:solidFill>
+                  <a:srgbClr val="000000"/>
+                </a:solidFill>
+                <a:latin typeface="Calibri" pitchFamily="34" charset="0"/>
+                <a:ea typeface="Calibri" pitchFamily="34" charset="-122"/>
+                <a:cs typeface="Calibri" pitchFamily="34" charset="-120"/>
+              </a:rPr>
+              <a:t>🛡️</a:t>
+            </a:r>
+            <a:endParaRPr lang="en-US" sz="2400" dirty="0"/>
+          </a:p>
+        </p:txBody>
+      </p:sp>
+      <p:sp>
+        <p:nvSpPr>
+          <p:cNvPr id="23" name="Text 21"/>
+          <p:cNvSpPr txBox="1"/>
+          <p:nvPr/>
+        </p:nvSpPr>
+        <p:spPr>
+          <a:xfrm>
+            <a:off x="1554480" y="5477256"/>
+            <a:ext cx="9784080" cy="320040"/>
+          </a:xfrm>
+          <a:prstGeom prst="rect">
+            <a:avLst/>
+          </a:prstGeom>
+          <a:noFill/>
+          <a:ln/>
+        </p:spPr>
+        <p:txBody>
+          <a:bodyPr wrap="square" lIns="0" tIns="0" rIns="0" bIns="0" rtlCol="0" anchor="ctr"/>
+          <a:lstStyle/>
+          <a:p>
+            <a:pPr indent="0" marL="0">
+              <a:buNone/>
+            </a:pPr>
+            <a:r>
+              <a:rPr lang="en-US" sz="1450" b="1" dirty="0">
+                <a:solidFill>
+                  <a:srgbClr val="261E48"/>
+                </a:solidFill>
+                <a:latin typeface="Calibri" pitchFamily="34" charset="0"/>
+                <a:ea typeface="Calibri" pitchFamily="34" charset="-122"/>
+                <a:cs typeface="Calibri" pitchFamily="34" charset="-120"/>
+              </a:rPr>
+              <a:t>Bascule secours + butin annulé</a:t>
+            </a:r>
+            <a:endParaRPr lang="en-US" sz="1450" dirty="0"/>
+          </a:p>
+        </p:txBody>
+      </p:sp>
+      <p:sp>
+        <p:nvSpPr>
+          <p:cNvPr id="24" name="Text 22"/>
+          <p:cNvSpPr txBox="1"/>
+          <p:nvPr/>
+        </p:nvSpPr>
+        <p:spPr>
+          <a:xfrm>
+            <a:off x="1554480" y="5797296"/>
+            <a:ext cx="9784080" cy="274320"/>
+          </a:xfrm>
+          <a:prstGeom prst="rect">
+            <a:avLst/>
+          </a:prstGeom>
+          <a:noFill/>
+          <a:ln/>
+        </p:spPr>
+        <p:txBody>
+          <a:bodyPr wrap="square" lIns="0" tIns="0" rIns="0" bIns="0" rtlCol="0" anchor="ctr"/>
+          <a:lstStyle/>
+          <a:p>
+            <a:pPr indent="0" marL="0">
+              <a:buNone/>
+            </a:pPr>
+            <a:r>
+              <a:rPr lang="en-US" sz="1150" dirty="0">
+                <a:solidFill>
+                  <a:srgbClr val="6A6594"/>
+                </a:solidFill>
+                <a:latin typeface="Calibri" pitchFamily="34" charset="0"/>
+                <a:ea typeface="Calibri" pitchFamily="34" charset="-122"/>
+                <a:cs typeface="Calibri" pitchFamily="34" charset="-120"/>
+              </a:rPr>
+              <a:t>l'argent volé ne « gagne » pas si l'IA bascule à temps</a:t>
+            </a:r>
+            <a:endParaRPr lang="en-US" sz="1150" dirty="0"/>
+          </a:p>
+        </p:txBody>
+      </p:sp>
+      <p:sp>
+        <p:nvSpPr>
+          <p:cNvPr id="25" name="Text 23"/>
+          <p:cNvSpPr txBox="1"/>
+          <p:nvPr/>
+        </p:nvSpPr>
+        <p:spPr>
+          <a:xfrm>
+            <a:off x="548640" y="6355080"/>
+            <a:ext cx="11064240" cy="365760"/>
+          </a:xfrm>
+          <a:prstGeom prst="rect">
+            <a:avLst/>
+          </a:prstGeom>
+          <a:noFill/>
+          <a:ln/>
+        </p:spPr>
+        <p:txBody>
+          <a:bodyPr wrap="square" lIns="0" tIns="0" rIns="0" bIns="0" rtlCol="0" anchor="ctr"/>
+          <a:lstStyle/>
+          <a:p>
+            <a:pPr indent="0" marL="0">
+              <a:buNone/>
+            </a:pPr>
+            <a:r>
+              <a:rPr lang="en-US" sz="1200" b="1" dirty="0">
+                <a:solidFill>
+                  <a:srgbClr val="4B3FA6"/>
+                </a:solidFill>
+                <a:latin typeface="Calibri" pitchFamily="34" charset="0"/>
+                <a:ea typeface="Calibri" pitchFamily="34" charset="-122"/>
+                <a:cs typeface="Calibri" pitchFamily="34" charset="-120"/>
+              </a:rPr>
+              <a:t>Doser : jouer discret rapporte un petit butin ; forcer déclenche le blocage, la bascule et la restauration.</a:t>
+            </a:r>
+            <a:endParaRPr lang="en-US" sz="1200" dirty="0"/>
+          </a:p>
+        </p:txBody>
+      </p:sp>
+    </p:spTree>
+  </p:cSld>
+  <p:clrMapOvr>
+    <a:masterClrMapping/>
+  </p:clrMapOvr>
+</p:sld>
+</file>
+
+<file path=ppt/slides/slide15.xml><?xml version="1.0" encoding="utf-8"?>
+<p:sld xmlns:a="http://schemas.openxmlformats.org/drawingml/2006/main" xmlns:r="http://schemas.openxmlformats.org/officeDocument/2006/relationships" xmlns:p="http://schemas.openxmlformats.org/presentationml/2006/main">
+  <p:cSld name="Slide 15">
+    <p:bg>
+      <p:bgPr>
+        <a:solidFill>
           <a:srgbClr val="261E48"/>
         </a:solidFill>
       </p:bgPr>
